--- a/Arquitectura de Sistemas Computacionales/Clases/Clase 4 - Microservicios y arquitecturas distribuidas/Presentacion.pptx
+++ b/Arquitectura de Sistemas Computacionales/Clases/Clase 4 - Microservicios y arquitecturas distribuidas/Presentacion.pptx
@@ -3378,7 +3378,7 @@
                 </a:solidFill>
                 <a:latin typeface="Calibri"/>
               </a:rPr>
-              <a:t> · Teoría breve · Taller PI · Quiz/cierre.</a:t>
+              <a:t> · Teoría breve · Taller PI · cierre.</a:t>
             </a:r>
           </a:p>
           <a:p>
@@ -4908,7 +4908,7 @@
                 </a:solidFill>
                 <a:latin typeface="Calibri"/>
               </a:rPr>
-              <a:t> Quiz corto / revisión de evidencias.</a:t>
+              <a:t> Revisión de evidencias del PI.</a:t>
             </a:r>
           </a:p>
           <a:p>

--- a/Arquitectura de Sistemas Computacionales/Clases/Clase 4 - Microservicios y arquitecturas distribuidas/Presentacion.pptx
+++ b/Arquitectura de Sistemas Computacionales/Clases/Clase 4 - Microservicios y arquitecturas distribuidas/Presentacion.pptx
@@ -4216,7 +4216,7 @@
                 </a:solidFill>
                 <a:latin typeface="Calibri"/>
               </a:rPr>
-              <a:t>Subir evidencias al paquete CloudLite (Drive/repo) y a ExamLab domingo 23:59.</a:t>
+              <a:t>Subir evidencias al paquete CloudLite (Drive/repo) y a ExamLab (https://examlab.lovable.app/) domingo 23:59.</a:t>
             </a:r>
           </a:p>
         </p:txBody>
@@ -6070,7 +6070,7 @@
                 </a:solidFill>
                 <a:latin typeface="Calibri"/>
               </a:rPr>
-              <a:t>–   📸 [CAP: drawio-c4] Lienzo C4 de CloudLite.</a:t>
+              <a:t>–   Lienzo C4 de CloudLite.</a:t>
             </a:r>
           </a:p>
         </p:txBody>

--- a/Arquitectura de Sistemas Computacionales/Clases/Clase 4 - Microservicios y arquitecturas distribuidas/Presentacion.pptx
+++ b/Arquitectura de Sistemas Computacionales/Clases/Clase 4 - Microservicios y arquitecturas distribuidas/Presentacion.pptx
@@ -3623,7 +3623,7 @@
                 </a:solidFill>
                 <a:latin typeface="Calibri"/>
               </a:rPr>
-              <a:t> Abran draw.io y creen diagrama Containers/Componentes de CloudLite.</a:t>
+              <a:t> Paso 1: abran el C4 Context de la Clase 1 y escriban la lista canonica de nombres de CloudLite: exactamente 5 contenedores con nombre, responsabilidad en una frase y tecnologia tentativa (por ejemplo SPA Web, API CloudLite, Worker Notificaciones, Base de datos Citas, Cola Notificaciones), verificando que ninguno de los 5 sea un modulo interno de otro y que ningun nombre se repita; esa lista se congela y la reutilizan las clases 7, 11 y 15.</a:t>
             </a:r>
           </a:p>
           <a:p>
@@ -3657,7 +3657,7 @@
                 </a:solidFill>
                 <a:latin typeface="Calibri"/>
               </a:rPr>
-              <a:t> Limiten a 2–5 servicios/contenedores lógicos justificados.</a:t>
+              <a:t> Paso 2: escriban en ExamLab el diagrama C4Container en Mermaid con los 5 contenedores dentro de un Container_Boundary, los 2 Person y los 2 System_Ext de la Clase 1, y 8 relaciones etiquetadas con protocolo y puerto, verificando al renderizar que la base de datos usa ContainerDb, la cola usa ContainerQueue y que ningun actor habla directamente con la base de datos.</a:t>
             </a:r>
           </a:p>
           <a:p>
@@ -3691,7 +3691,7 @@
                 </a:solidFill>
                 <a:latin typeface="Calibri"/>
               </a:rPr>
-              <a:t> Listen 3 contratos (quién llama a quién, verbo HTTP o evento).</a:t>
+              <a:t> Paso 3: definan los 3 contratos entre partes en una tabla de 6 columnas (ID, consumidor a proveedor, verbo y ruta, request, respuesta 2xx, error de negocio), verificando que al menos un contrato sea asincrono por evento y que cada fila declare un codigo de error de negocio real como 409 CUPO_OCUPADO o 401 TOKEN_INVALIDO, no solo 500.</a:t>
             </a:r>
           </a:p>
           <a:p>
@@ -3725,7 +3725,7 @@
                 </a:solidFill>
                 <a:latin typeface="Calibri"/>
               </a:rPr>
-              <a:t> Exporten PNG + archivo .drawio al Drive/repo del PI.</a:t>
+              <a:t> Paso 4: escriban el sequenceDiagram del contrato principal con 5 participantes y un bloque alt que cubra el camino feliz y el camino de error 409, verificando que los nombres de los participantes sean identicos a los 5 contenedores del paso 1 y que el mensaje de error muestre el mismo codigo declarado en la tabla de contratos.</a:t>
             </a:r>
           </a:p>
           <a:p>
@@ -3759,7 +3759,7 @@
                 </a:solidFill>
                 <a:latin typeface="Calibri"/>
               </a:rPr>
-              <a:t> En el informe: sección «Arquitectura lógica» + riesgos de distribución.</a:t>
+              <a:t> Paso 5: redacten los 3 riesgos de distribucion con su mitigacion, actualicen la seccion Arquitectura logica del informe con el diagrama y la tabla de contratos, y suban las 5 preguntas a ExamLab (modulo Talleres) antes del domingo 23:59, verificando que la lista canonica de 5 nombres aparezca identica en el diagrama, en los contratos y en el informe.</a:t>
             </a:r>
           </a:p>
         </p:txBody>

--- a/Arquitectura de Sistemas Computacionales/Clases/Clase 4 - Microservicios y arquitecturas distribuidas/Presentacion.pptx
+++ b/Arquitectura de Sistemas Computacionales/Clases/Clase 4 - Microservicios y arquitecturas distribuidas/Presentacion.pptx
@@ -4883,7 +4883,7 @@
                 </a:solidFill>
                 <a:latin typeface="Calibri"/>
               </a:rPr>
-              <a:t> Taller guiado PI (demo en vivo + trabajo de equipo).</a:t>
+              <a:t> Taller guiado PI (demo en vivo + avance individual).</a:t>
             </a:r>
           </a:p>
           <a:p>
@@ -5516,7 +5516,7 @@
                 </a:solidFill>
                 <a:latin typeface="Calibri"/>
               </a:rPr>
-              <a:t>–   Equipos 2–3 · todos deben poder explicar el artefacto.</a:t>
+              <a:t>–   Individual por defecto · el docente puede autorizar equipos de 2–3; la entrega en ExamLab siempre es individual.</a:t>
             </a:r>
           </a:p>
         </p:txBody>
@@ -7619,7 +7619,7 @@
                 </a:solidFill>
                 <a:latin typeface="Calibri"/>
               </a:rPr>
-              <a:t>–   Cualquiera del equipo lo explica en 60 s</a:t>
+              <a:t>–   Se explica en 60 s sin leer notas</a:t>
             </a:r>
           </a:p>
         </p:txBody>

--- a/Arquitectura de Sistemas Computacionales/Clases/Clase 4 - Microservicios y arquitecturas distribuidas/Presentacion.pptx
+++ b/Arquitectura de Sistemas Computacionales/Clases/Clase 4 - Microservicios y arquitecturas distribuidas/Presentacion.pptx
@@ -4216,7 +4216,7 @@
                 </a:solidFill>
                 <a:latin typeface="Calibri"/>
               </a:rPr>
-              <a:t>Subir evidencias al paquete CloudLite (Drive/repo) y a ExamLab (https://examlab.lovable.app/) domingo 23:59.</a:t>
+              <a:t>Subir evidencias al paquete CloudLite (Drive/repo) y a ExamLab (https://uniaj.examlab.workers.dev/) domingo 23:59.</a:t>
             </a:r>
           </a:p>
         </p:txBody>

--- a/Arquitectura de Sistemas Computacionales/Clases/Clase 4 - Microservicios y arquitecturas distribuidas/Presentacion.pptx
+++ b/Arquitectura de Sistemas Computacionales/Clases/Clase 4 - Microservicios y arquitecturas distribuidas/Presentacion.pptx
@@ -17,6 +17,8 @@
     <p:sldId id="265" r:id="rId16"/>
     <p:sldId id="266" r:id="rId17"/>
     <p:sldId id="267" r:id="rId18"/>
+    <p:sldId id="268" r:id="rId19"/>
+    <p:sldId id="269" r:id="rId20"/>
   </p:sldIdLst>
   <p:sldSz cx="12191695" cy="6858000" type="screen4x3"/>
   <p:notesSz cx="6858000" cy="9144000"/>
@@ -3469,7 +3471,7 @@
         <p:spPr>
           <a:xfrm>
             <a:off x="0" y="0"/>
-            <a:ext cx="12191695" cy="960120"/>
+            <a:ext cx="12191695" cy="1170432"/>
           </a:xfrm>
           <a:prstGeom prst="rect">
             <a:avLst/>
@@ -3511,7 +3513,7 @@
         </p:nvSpPr>
         <p:spPr>
           <a:xfrm>
-            <a:off x="0" y="960120"/>
+            <a:off x="0" y="1170432"/>
             <a:ext cx="12191695" cy="41148"/>
           </a:xfrm>
           <a:prstGeom prst="rect">
@@ -3555,7 +3557,7 @@
         <p:spPr>
           <a:xfrm>
             <a:off x="457200" y="164592"/>
-            <a:ext cx="11277295" cy="502920"/>
+            <a:ext cx="11277295" cy="384048"/>
           </a:xfrm>
           <a:prstGeom prst="rect">
             <a:avLst/>
@@ -3575,7 +3577,7 @@
                 </a:solidFill>
                 <a:latin typeface="Calibri"/>
               </a:rPr>
-              <a:t>Taller PI (paso a paso)</a:t>
+              <a:t>Herramientas de hoy</a:t>
             </a:r>
           </a:p>
         </p:txBody>
@@ -3588,8 +3590,8 @@
         </p:nvSpPr>
         <p:spPr>
           <a:xfrm>
-            <a:off x="457200" y="1170432"/>
-            <a:ext cx="11277295" cy="5230368"/>
+            <a:off x="457200" y="566928"/>
+            <a:ext cx="11277295" cy="411480"/>
           </a:xfrm>
           <a:prstGeom prst="rect">
             <a:avLst/>
@@ -3602,171 +3604,837 @@
           </a:bodyPr>
           <a:lstStyle/>
           <a:p>
-            <a:pPr>
-              <a:spcAft>
-                <a:spcPts val="800"/>
-              </a:spcAft>
+            <a:r>
+              <a:rPr sz="1400" b="0" i="0">
+                <a:solidFill>
+                  <a:srgbClr val="B8D8EE"/>
+                </a:solidFill>
+                <a:latin typeface="Calibri"/>
+              </a:rPr>
+              <a:t>Gratis · navegador o free tier · sin cuenta de pago</a:t>
+            </a:r>
+          </a:p>
+        </p:txBody>
+      </p:sp>
+      <p:sp>
+        <p:nvSpPr>
+          <p:cNvPr id="6" name="Rounded Rectangle 5"/>
+          <p:cNvSpPr/>
+          <p:nvPr/>
+        </p:nvSpPr>
+        <p:spPr>
+          <a:xfrm>
+            <a:off x="457200" y="1591056"/>
+            <a:ext cx="3624986" cy="2299716"/>
+          </a:xfrm>
+          <a:prstGeom prst="roundRect">
+            <a:avLst>
+              <a:gd name="adj" fmla="val 12000"/>
+            </a:avLst>
+          </a:prstGeom>
+          <a:solidFill>
+            <a:srgbClr val="F2F2F2"/>
+          </a:solidFill>
+          <a:ln>
+            <a:noFill/>
+          </a:ln>
+        </p:spPr>
+        <p:style>
+          <a:lnRef idx="1">
+            <a:schemeClr val="accent1"/>
+          </a:lnRef>
+          <a:fillRef idx="3">
+            <a:schemeClr val="accent1"/>
+          </a:fillRef>
+          <a:effectRef idx="2">
+            <a:schemeClr val="accent1"/>
+          </a:effectRef>
+          <a:fontRef idx="minor">
+            <a:schemeClr val="lt1"/>
+          </a:fontRef>
+        </p:style>
+        <p:txBody>
+          <a:bodyPr rtlCol="0" anchor="ctr"/>
+          <a:lstStyle/>
+          <a:p>
+            <a:pPr algn="ctr"/>
+          </a:p>
+        </p:txBody>
+      </p:sp>
+      <p:sp>
+        <p:nvSpPr>
+          <p:cNvPr id="7" name="Rectangle 6"/>
+          <p:cNvSpPr/>
+          <p:nvPr/>
+        </p:nvSpPr>
+        <p:spPr>
+          <a:xfrm>
+            <a:off x="457200" y="1591056"/>
+            <a:ext cx="3624986" cy="64008"/>
+          </a:xfrm>
+          <a:prstGeom prst="rect">
+            <a:avLst/>
+          </a:prstGeom>
+          <a:solidFill>
+            <a:srgbClr val="095292"/>
+          </a:solidFill>
+          <a:ln>
+            <a:noFill/>
+          </a:ln>
+        </p:spPr>
+        <p:style>
+          <a:lnRef idx="1">
+            <a:schemeClr val="accent1"/>
+          </a:lnRef>
+          <a:fillRef idx="3">
+            <a:schemeClr val="accent1"/>
+          </a:fillRef>
+          <a:effectRef idx="2">
+            <a:schemeClr val="accent1"/>
+          </a:effectRef>
+          <a:fontRef idx="minor">
+            <a:schemeClr val="lt1"/>
+          </a:fontRef>
+        </p:style>
+        <p:txBody>
+          <a:bodyPr rtlCol="0" anchor="ctr"/>
+          <a:lstStyle/>
+          <a:p>
+            <a:pPr algn="ctr"/>
+          </a:p>
+        </p:txBody>
+      </p:sp>
+      <p:sp>
+        <p:nvSpPr>
+          <p:cNvPr id="8" name="Rectangle 7"/>
+          <p:cNvSpPr/>
+          <p:nvPr/>
+        </p:nvSpPr>
+        <p:spPr>
+          <a:xfrm>
+            <a:off x="457200" y="1655064"/>
+            <a:ext cx="3624986" cy="27432"/>
+          </a:xfrm>
+          <a:prstGeom prst="rect">
+            <a:avLst/>
+          </a:prstGeom>
+          <a:solidFill>
+            <a:srgbClr val="FFD000"/>
+          </a:solidFill>
+          <a:ln>
+            <a:noFill/>
+          </a:ln>
+        </p:spPr>
+        <p:style>
+          <a:lnRef idx="1">
+            <a:schemeClr val="accent1"/>
+          </a:lnRef>
+          <a:fillRef idx="3">
+            <a:schemeClr val="accent1"/>
+          </a:fillRef>
+          <a:effectRef idx="2">
+            <a:schemeClr val="accent1"/>
+          </a:effectRef>
+          <a:fontRef idx="minor">
+            <a:schemeClr val="lt1"/>
+          </a:fontRef>
+        </p:style>
+        <p:txBody>
+          <a:bodyPr rtlCol="0" anchor="ctr"/>
+          <a:lstStyle/>
+          <a:p>
+            <a:pPr algn="ctr"/>
+          </a:p>
+        </p:txBody>
+      </p:sp>
+      <p:pic>
+        <p:nvPicPr>
+          <p:cNvPr id="9" name="Picture 8" descr="drawio.png"/>
+          <p:cNvPicPr>
+            <a:picLocks noChangeAspect="1"/>
+          </p:cNvPicPr>
+          <p:nvPr/>
+        </p:nvPicPr>
+        <p:blipFill>
+          <a:blip r:embed="rId2"/>
+          <a:stretch>
+            <a:fillRect/>
+          </a:stretch>
+        </p:blipFill>
+        <p:spPr>
+          <a:xfrm>
+            <a:off x="1659331" y="1847087"/>
+            <a:ext cx="1220724" cy="1220724"/>
+          </a:xfrm>
+          <a:prstGeom prst="rect">
+            <a:avLst/>
+          </a:prstGeom>
+        </p:spPr>
+      </p:pic>
+      <p:sp>
+        <p:nvSpPr>
+          <p:cNvPr id="10" name="TextBox 9"/>
+          <p:cNvSpPr txBox="1"/>
+          <p:nvPr/>
+        </p:nvSpPr>
+        <p:spPr>
+          <a:xfrm>
+            <a:off x="530352" y="3159251"/>
+            <a:ext cx="3478682" cy="621792"/>
+          </a:xfrm>
+          <a:prstGeom prst="rect">
+            <a:avLst/>
+          </a:prstGeom>
+          <a:noFill/>
+        </p:spPr>
+        <p:txBody>
+          <a:bodyPr wrap="square" anchor="t"/>
+          <a:lstStyle/>
+          <a:p>
+            <a:pPr algn="ctr"/>
+            <a:r>
+              <a:rPr sz="1300" b="1" i="0">
+                <a:solidFill>
+                  <a:srgbClr val="095292"/>
+                </a:solidFill>
+                <a:latin typeface="Calibri"/>
+              </a:rPr>
+              <a:t>draw.io</a:t>
+            </a:r>
+          </a:p>
+          <a:p>
+            <a:pPr algn="ctr">
+              <a:spcBef>
+                <a:spcPts val="200"/>
+              </a:spcBef>
             </a:pPr>
             <a:r>
-              <a:rPr sz="1600" b="1" i="0">
-                <a:solidFill>
-                  <a:srgbClr val="333333"/>
-                </a:solidFill>
-                <a:latin typeface="Calibri"/>
-              </a:rPr>
-              <a:t>1.</a:t>
-            </a:r>
-            <a:r>
-              <a:rPr sz="1600" b="0" i="0">
-                <a:solidFill>
-                  <a:srgbClr val="333333"/>
-                </a:solidFill>
-                <a:latin typeface="Calibri"/>
-              </a:rPr>
-              <a:t> Paso 1: abran el C4 Context de la Clase 1 y escriban la lista canonica de nombres de CloudLite: exactamente 5 contenedores con nombre, responsabilidad en una frase y tecnologia tentativa (por ejemplo SPA Web, API CloudLite, Worker Notificaciones, Base de datos Citas, Cola Notificaciones), verificando que ninguno de los 5 sea un modulo interno de otro y que ningun nombre se repita; esa lista se congela y la reutilizan las clases 7, 11 y 15.</a:t>
-            </a:r>
-          </a:p>
-          <a:p>
-            <a:pPr>
-              <a:spcAft>
-                <a:spcPts val="800"/>
-              </a:spcAft>
+              <a:rPr sz="1000" b="0" i="0">
+                <a:solidFill>
+                  <a:srgbClr val="666666"/>
+                </a:solidFill>
+                <a:latin typeface="Calibri"/>
+              </a:rPr>
+              <a:t>C4 Containers</a:t>
+            </a:r>
+          </a:p>
+        </p:txBody>
+      </p:sp>
+      <p:sp>
+        <p:nvSpPr>
+          <p:cNvPr id="11" name="Rounded Rectangle 10"/>
+          <p:cNvSpPr/>
+          <p:nvPr/>
+        </p:nvSpPr>
+        <p:spPr>
+          <a:xfrm>
+            <a:off x="4283354" y="1591056"/>
+            <a:ext cx="3624986" cy="2299716"/>
+          </a:xfrm>
+          <a:prstGeom prst="roundRect">
+            <a:avLst>
+              <a:gd name="adj" fmla="val 12000"/>
+            </a:avLst>
+          </a:prstGeom>
+          <a:solidFill>
+            <a:srgbClr val="F2F2F2"/>
+          </a:solidFill>
+          <a:ln>
+            <a:noFill/>
+          </a:ln>
+        </p:spPr>
+        <p:style>
+          <a:lnRef idx="1">
+            <a:schemeClr val="accent1"/>
+          </a:lnRef>
+          <a:fillRef idx="3">
+            <a:schemeClr val="accent1"/>
+          </a:fillRef>
+          <a:effectRef idx="2">
+            <a:schemeClr val="accent1"/>
+          </a:effectRef>
+          <a:fontRef idx="minor">
+            <a:schemeClr val="lt1"/>
+          </a:fontRef>
+        </p:style>
+        <p:txBody>
+          <a:bodyPr rtlCol="0" anchor="ctr"/>
+          <a:lstStyle/>
+          <a:p>
+            <a:pPr algn="ctr"/>
+          </a:p>
+        </p:txBody>
+      </p:sp>
+      <p:sp>
+        <p:nvSpPr>
+          <p:cNvPr id="12" name="Rectangle 11"/>
+          <p:cNvSpPr/>
+          <p:nvPr/>
+        </p:nvSpPr>
+        <p:spPr>
+          <a:xfrm>
+            <a:off x="4283354" y="1591056"/>
+            <a:ext cx="3624986" cy="64008"/>
+          </a:xfrm>
+          <a:prstGeom prst="rect">
+            <a:avLst/>
+          </a:prstGeom>
+          <a:solidFill>
+            <a:srgbClr val="095292"/>
+          </a:solidFill>
+          <a:ln>
+            <a:noFill/>
+          </a:ln>
+        </p:spPr>
+        <p:style>
+          <a:lnRef idx="1">
+            <a:schemeClr val="accent1"/>
+          </a:lnRef>
+          <a:fillRef idx="3">
+            <a:schemeClr val="accent1"/>
+          </a:fillRef>
+          <a:effectRef idx="2">
+            <a:schemeClr val="accent1"/>
+          </a:effectRef>
+          <a:fontRef idx="minor">
+            <a:schemeClr val="lt1"/>
+          </a:fontRef>
+        </p:style>
+        <p:txBody>
+          <a:bodyPr rtlCol="0" anchor="ctr"/>
+          <a:lstStyle/>
+          <a:p>
+            <a:pPr algn="ctr"/>
+          </a:p>
+        </p:txBody>
+      </p:sp>
+      <p:sp>
+        <p:nvSpPr>
+          <p:cNvPr id="13" name="Rectangle 12"/>
+          <p:cNvSpPr/>
+          <p:nvPr/>
+        </p:nvSpPr>
+        <p:spPr>
+          <a:xfrm>
+            <a:off x="4283354" y="1655064"/>
+            <a:ext cx="3624986" cy="27432"/>
+          </a:xfrm>
+          <a:prstGeom prst="rect">
+            <a:avLst/>
+          </a:prstGeom>
+          <a:solidFill>
+            <a:srgbClr val="FFD000"/>
+          </a:solidFill>
+          <a:ln>
+            <a:noFill/>
+          </a:ln>
+        </p:spPr>
+        <p:style>
+          <a:lnRef idx="1">
+            <a:schemeClr val="accent1"/>
+          </a:lnRef>
+          <a:fillRef idx="3">
+            <a:schemeClr val="accent1"/>
+          </a:fillRef>
+          <a:effectRef idx="2">
+            <a:schemeClr val="accent1"/>
+          </a:effectRef>
+          <a:fontRef idx="minor">
+            <a:schemeClr val="lt1"/>
+          </a:fontRef>
+        </p:style>
+        <p:txBody>
+          <a:bodyPr rtlCol="0" anchor="ctr"/>
+          <a:lstStyle/>
+          <a:p>
+            <a:pPr algn="ctr"/>
+          </a:p>
+        </p:txBody>
+      </p:sp>
+      <p:pic>
+        <p:nvPicPr>
+          <p:cNvPr id="14" name="Picture 13" descr="excalidraw.png"/>
+          <p:cNvPicPr>
+            <a:picLocks noChangeAspect="1"/>
+          </p:cNvPicPr>
+          <p:nvPr/>
+        </p:nvPicPr>
+        <p:blipFill>
+          <a:blip r:embed="rId3"/>
+          <a:stretch>
+            <a:fillRect/>
+          </a:stretch>
+        </p:blipFill>
+        <p:spPr>
+          <a:xfrm>
+            <a:off x="5485485" y="1847087"/>
+            <a:ext cx="1220724" cy="1220724"/>
+          </a:xfrm>
+          <a:prstGeom prst="rect">
+            <a:avLst/>
+          </a:prstGeom>
+        </p:spPr>
+      </p:pic>
+      <p:sp>
+        <p:nvSpPr>
+          <p:cNvPr id="15" name="TextBox 14"/>
+          <p:cNvSpPr txBox="1"/>
+          <p:nvPr/>
+        </p:nvSpPr>
+        <p:spPr>
+          <a:xfrm>
+            <a:off x="4356506" y="3159251"/>
+            <a:ext cx="3478682" cy="621792"/>
+          </a:xfrm>
+          <a:prstGeom prst="rect">
+            <a:avLst/>
+          </a:prstGeom>
+          <a:noFill/>
+        </p:spPr>
+        <p:txBody>
+          <a:bodyPr wrap="square" anchor="t"/>
+          <a:lstStyle/>
+          <a:p>
+            <a:pPr algn="ctr"/>
+            <a:r>
+              <a:rPr sz="1300" b="1" i="0">
+                <a:solidFill>
+                  <a:srgbClr val="095292"/>
+                </a:solidFill>
+                <a:latin typeface="Calibri"/>
+              </a:rPr>
+              <a:t>Excalidraw</a:t>
+            </a:r>
+          </a:p>
+          <a:p>
+            <a:pPr algn="ctr">
+              <a:spcBef>
+                <a:spcPts val="200"/>
+              </a:spcBef>
             </a:pPr>
             <a:r>
-              <a:rPr sz="1600" b="0" i="0">
-                <a:solidFill>
-                  <a:srgbClr val="333333"/>
-                </a:solidFill>
-                <a:latin typeface="Calibri"/>
-              </a:rPr>
-              <a:t>–   </a:t>
-            </a:r>
-            <a:r>
-              <a:rPr sz="1600" b="1" i="0">
-                <a:solidFill>
-                  <a:srgbClr val="333333"/>
-                </a:solidFill>
-                <a:latin typeface="Calibri"/>
-              </a:rPr>
-              <a:t>2.</a:t>
-            </a:r>
-            <a:r>
-              <a:rPr sz="1600" b="0" i="0">
-                <a:solidFill>
-                  <a:srgbClr val="333333"/>
-                </a:solidFill>
-                <a:latin typeface="Calibri"/>
-              </a:rPr>
-              <a:t> Paso 2: escriban en ExamLab el diagrama C4Container en Mermaid con los 5 contenedores dentro de un Container_Boundary, los 2 Person y los 2 System_Ext de la Clase 1, y 8 relaciones etiquetadas con protocolo y puerto, verificando al renderizar que la base de datos usa ContainerDb, la cola usa ContainerQueue y que ningun actor habla directamente con la base de datos.</a:t>
-            </a:r>
-          </a:p>
-          <a:p>
-            <a:pPr>
-              <a:spcAft>
-                <a:spcPts val="800"/>
-              </a:spcAft>
+              <a:rPr sz="1000" b="0" i="0">
+                <a:solidFill>
+                  <a:srgbClr val="666666"/>
+                </a:solidFill>
+                <a:latin typeface="Calibri"/>
+              </a:rPr>
+              <a:t>Boceto rapido</a:t>
+            </a:r>
+          </a:p>
+        </p:txBody>
+      </p:sp>
+      <p:sp>
+        <p:nvSpPr>
+          <p:cNvPr id="16" name="Rounded Rectangle 15"/>
+          <p:cNvSpPr/>
+          <p:nvPr/>
+        </p:nvSpPr>
+        <p:spPr>
+          <a:xfrm>
+            <a:off x="8109508" y="1591056"/>
+            <a:ext cx="3624986" cy="2299716"/>
+          </a:xfrm>
+          <a:prstGeom prst="roundRect">
+            <a:avLst>
+              <a:gd name="adj" fmla="val 12000"/>
+            </a:avLst>
+          </a:prstGeom>
+          <a:solidFill>
+            <a:srgbClr val="F2F2F2"/>
+          </a:solidFill>
+          <a:ln>
+            <a:noFill/>
+          </a:ln>
+        </p:spPr>
+        <p:style>
+          <a:lnRef idx="1">
+            <a:schemeClr val="accent1"/>
+          </a:lnRef>
+          <a:fillRef idx="3">
+            <a:schemeClr val="accent1"/>
+          </a:fillRef>
+          <a:effectRef idx="2">
+            <a:schemeClr val="accent1"/>
+          </a:effectRef>
+          <a:fontRef idx="minor">
+            <a:schemeClr val="lt1"/>
+          </a:fontRef>
+        </p:style>
+        <p:txBody>
+          <a:bodyPr rtlCol="0" anchor="ctr"/>
+          <a:lstStyle/>
+          <a:p>
+            <a:pPr algn="ctr"/>
+          </a:p>
+        </p:txBody>
+      </p:sp>
+      <p:sp>
+        <p:nvSpPr>
+          <p:cNvPr id="17" name="Rectangle 16"/>
+          <p:cNvSpPr/>
+          <p:nvPr/>
+        </p:nvSpPr>
+        <p:spPr>
+          <a:xfrm>
+            <a:off x="8109508" y="1591056"/>
+            <a:ext cx="3624986" cy="64008"/>
+          </a:xfrm>
+          <a:prstGeom prst="rect">
+            <a:avLst/>
+          </a:prstGeom>
+          <a:solidFill>
+            <a:srgbClr val="095292"/>
+          </a:solidFill>
+          <a:ln>
+            <a:noFill/>
+          </a:ln>
+        </p:spPr>
+        <p:style>
+          <a:lnRef idx="1">
+            <a:schemeClr val="accent1"/>
+          </a:lnRef>
+          <a:fillRef idx="3">
+            <a:schemeClr val="accent1"/>
+          </a:fillRef>
+          <a:effectRef idx="2">
+            <a:schemeClr val="accent1"/>
+          </a:effectRef>
+          <a:fontRef idx="minor">
+            <a:schemeClr val="lt1"/>
+          </a:fontRef>
+        </p:style>
+        <p:txBody>
+          <a:bodyPr rtlCol="0" anchor="ctr"/>
+          <a:lstStyle/>
+          <a:p>
+            <a:pPr algn="ctr"/>
+          </a:p>
+        </p:txBody>
+      </p:sp>
+      <p:sp>
+        <p:nvSpPr>
+          <p:cNvPr id="18" name="Rectangle 17"/>
+          <p:cNvSpPr/>
+          <p:nvPr/>
+        </p:nvSpPr>
+        <p:spPr>
+          <a:xfrm>
+            <a:off x="8109508" y="1655064"/>
+            <a:ext cx="3624986" cy="27432"/>
+          </a:xfrm>
+          <a:prstGeom prst="rect">
+            <a:avLst/>
+          </a:prstGeom>
+          <a:solidFill>
+            <a:srgbClr val="FFD000"/>
+          </a:solidFill>
+          <a:ln>
+            <a:noFill/>
+          </a:ln>
+        </p:spPr>
+        <p:style>
+          <a:lnRef idx="1">
+            <a:schemeClr val="accent1"/>
+          </a:lnRef>
+          <a:fillRef idx="3">
+            <a:schemeClr val="accent1"/>
+          </a:fillRef>
+          <a:effectRef idx="2">
+            <a:schemeClr val="accent1"/>
+          </a:effectRef>
+          <a:fontRef idx="minor">
+            <a:schemeClr val="lt1"/>
+          </a:fontRef>
+        </p:style>
+        <p:txBody>
+          <a:bodyPr rtlCol="0" anchor="ctr"/>
+          <a:lstStyle/>
+          <a:p>
+            <a:pPr algn="ctr"/>
+          </a:p>
+        </p:txBody>
+      </p:sp>
+      <p:pic>
+        <p:nvPicPr>
+          <p:cNvPr id="19" name="Picture 18" descr="mermaid.png"/>
+          <p:cNvPicPr>
+            <a:picLocks noChangeAspect="1"/>
+          </p:cNvPicPr>
+          <p:nvPr/>
+        </p:nvPicPr>
+        <p:blipFill>
+          <a:blip r:embed="rId4"/>
+          <a:stretch>
+            <a:fillRect/>
+          </a:stretch>
+        </p:blipFill>
+        <p:spPr>
+          <a:xfrm>
+            <a:off x="9311640" y="1847087"/>
+            <a:ext cx="1220724" cy="1220724"/>
+          </a:xfrm>
+          <a:prstGeom prst="rect">
+            <a:avLst/>
+          </a:prstGeom>
+        </p:spPr>
+      </p:pic>
+      <p:sp>
+        <p:nvSpPr>
+          <p:cNvPr id="20" name="TextBox 19"/>
+          <p:cNvSpPr txBox="1"/>
+          <p:nvPr/>
+        </p:nvSpPr>
+        <p:spPr>
+          <a:xfrm>
+            <a:off x="8182660" y="3159251"/>
+            <a:ext cx="3478682" cy="621792"/>
+          </a:xfrm>
+          <a:prstGeom prst="rect">
+            <a:avLst/>
+          </a:prstGeom>
+          <a:noFill/>
+        </p:spPr>
+        <p:txBody>
+          <a:bodyPr wrap="square" anchor="t"/>
+          <a:lstStyle/>
+          <a:p>
+            <a:pPr algn="ctr"/>
+            <a:r>
+              <a:rPr sz="1300" b="1" i="0">
+                <a:solidFill>
+                  <a:srgbClr val="095292"/>
+                </a:solidFill>
+                <a:latin typeface="Calibri"/>
+              </a:rPr>
+              <a:t>Mermaid</a:t>
+            </a:r>
+          </a:p>
+          <a:p>
+            <a:pPr algn="ctr">
+              <a:spcBef>
+                <a:spcPts val="200"/>
+              </a:spcBef>
             </a:pPr>
             <a:r>
-              <a:rPr sz="1600" b="0" i="0">
-                <a:solidFill>
-                  <a:srgbClr val="333333"/>
-                </a:solidFill>
-                <a:latin typeface="Calibri"/>
-              </a:rPr>
-              <a:t>–   </a:t>
-            </a:r>
-            <a:r>
-              <a:rPr sz="1600" b="1" i="0">
-                <a:solidFill>
-                  <a:srgbClr val="333333"/>
-                </a:solidFill>
-                <a:latin typeface="Calibri"/>
-              </a:rPr>
-              <a:t>3.</a:t>
-            </a:r>
-            <a:r>
-              <a:rPr sz="1600" b="0" i="0">
-                <a:solidFill>
-                  <a:srgbClr val="333333"/>
-                </a:solidFill>
-                <a:latin typeface="Calibri"/>
-              </a:rPr>
-              <a:t> Paso 3: definan los 3 contratos entre partes en una tabla de 6 columnas (ID, consumidor a proveedor, verbo y ruta, request, respuesta 2xx, error de negocio), verificando que al menos un contrato sea asincrono por evento y que cada fila declare un codigo de error de negocio real como 409 CUPO_OCUPADO o 401 TOKEN_INVALIDO, no solo 500.</a:t>
-            </a:r>
-          </a:p>
-          <a:p>
-            <a:pPr>
-              <a:spcAft>
-                <a:spcPts val="800"/>
-              </a:spcAft>
+              <a:rPr sz="1000" b="0" i="0">
+                <a:solidFill>
+                  <a:srgbClr val="666666"/>
+                </a:solidFill>
+                <a:latin typeface="Calibri"/>
+              </a:rPr>
+              <a:t>Codigo del diagrama</a:t>
+            </a:r>
+          </a:p>
+        </p:txBody>
+      </p:sp>
+      <p:sp>
+        <p:nvSpPr>
+          <p:cNvPr id="21" name="Rounded Rectangle 20"/>
+          <p:cNvSpPr/>
+          <p:nvPr/>
+        </p:nvSpPr>
+        <p:spPr>
+          <a:xfrm>
+            <a:off x="4283354" y="4055364"/>
+            <a:ext cx="3624986" cy="2299716"/>
+          </a:xfrm>
+          <a:prstGeom prst="roundRect">
+            <a:avLst>
+              <a:gd name="adj" fmla="val 12000"/>
+            </a:avLst>
+          </a:prstGeom>
+          <a:solidFill>
+            <a:srgbClr val="F2F2F2"/>
+          </a:solidFill>
+          <a:ln>
+            <a:noFill/>
+          </a:ln>
+        </p:spPr>
+        <p:style>
+          <a:lnRef idx="1">
+            <a:schemeClr val="accent1"/>
+          </a:lnRef>
+          <a:fillRef idx="3">
+            <a:schemeClr val="accent1"/>
+          </a:fillRef>
+          <a:effectRef idx="2">
+            <a:schemeClr val="accent1"/>
+          </a:effectRef>
+          <a:fontRef idx="minor">
+            <a:schemeClr val="lt1"/>
+          </a:fontRef>
+        </p:style>
+        <p:txBody>
+          <a:bodyPr rtlCol="0" anchor="ctr"/>
+          <a:lstStyle/>
+          <a:p>
+            <a:pPr algn="ctr"/>
+          </a:p>
+        </p:txBody>
+      </p:sp>
+      <p:sp>
+        <p:nvSpPr>
+          <p:cNvPr id="22" name="Rectangle 21"/>
+          <p:cNvSpPr/>
+          <p:nvPr/>
+        </p:nvSpPr>
+        <p:spPr>
+          <a:xfrm>
+            <a:off x="4283354" y="4055364"/>
+            <a:ext cx="3624986" cy="64008"/>
+          </a:xfrm>
+          <a:prstGeom prst="rect">
+            <a:avLst/>
+          </a:prstGeom>
+          <a:solidFill>
+            <a:srgbClr val="095292"/>
+          </a:solidFill>
+          <a:ln>
+            <a:noFill/>
+          </a:ln>
+        </p:spPr>
+        <p:style>
+          <a:lnRef idx="1">
+            <a:schemeClr val="accent1"/>
+          </a:lnRef>
+          <a:fillRef idx="3">
+            <a:schemeClr val="accent1"/>
+          </a:fillRef>
+          <a:effectRef idx="2">
+            <a:schemeClr val="accent1"/>
+          </a:effectRef>
+          <a:fontRef idx="minor">
+            <a:schemeClr val="lt1"/>
+          </a:fontRef>
+        </p:style>
+        <p:txBody>
+          <a:bodyPr rtlCol="0" anchor="ctr"/>
+          <a:lstStyle/>
+          <a:p>
+            <a:pPr algn="ctr"/>
+          </a:p>
+        </p:txBody>
+      </p:sp>
+      <p:sp>
+        <p:nvSpPr>
+          <p:cNvPr id="23" name="Rectangle 22"/>
+          <p:cNvSpPr/>
+          <p:nvPr/>
+        </p:nvSpPr>
+        <p:spPr>
+          <a:xfrm>
+            <a:off x="4283354" y="4119372"/>
+            <a:ext cx="3624986" cy="27432"/>
+          </a:xfrm>
+          <a:prstGeom prst="rect">
+            <a:avLst/>
+          </a:prstGeom>
+          <a:solidFill>
+            <a:srgbClr val="FFD000"/>
+          </a:solidFill>
+          <a:ln>
+            <a:noFill/>
+          </a:ln>
+        </p:spPr>
+        <p:style>
+          <a:lnRef idx="1">
+            <a:schemeClr val="accent1"/>
+          </a:lnRef>
+          <a:fillRef idx="3">
+            <a:schemeClr val="accent1"/>
+          </a:fillRef>
+          <a:effectRef idx="2">
+            <a:schemeClr val="accent1"/>
+          </a:effectRef>
+          <a:fontRef idx="minor">
+            <a:schemeClr val="lt1"/>
+          </a:fontRef>
+        </p:style>
+        <p:txBody>
+          <a:bodyPr rtlCol="0" anchor="ctr"/>
+          <a:lstStyle/>
+          <a:p>
+            <a:pPr algn="ctr"/>
+          </a:p>
+        </p:txBody>
+      </p:sp>
+      <p:pic>
+        <p:nvPicPr>
+          <p:cNvPr id="24" name="Picture 23" descr="examlab.png"/>
+          <p:cNvPicPr>
+            <a:picLocks noChangeAspect="1"/>
+          </p:cNvPicPr>
+          <p:nvPr/>
+        </p:nvPicPr>
+        <p:blipFill>
+          <a:blip r:embed="rId5"/>
+          <a:stretch>
+            <a:fillRect/>
+          </a:stretch>
+        </p:blipFill>
+        <p:spPr>
+          <a:xfrm>
+            <a:off x="5485485" y="4311396"/>
+            <a:ext cx="1220724" cy="1220724"/>
+          </a:xfrm>
+          <a:prstGeom prst="rect">
+            <a:avLst/>
+          </a:prstGeom>
+        </p:spPr>
+      </p:pic>
+      <p:sp>
+        <p:nvSpPr>
+          <p:cNvPr id="25" name="TextBox 24"/>
+          <p:cNvSpPr txBox="1"/>
+          <p:nvPr/>
+        </p:nvSpPr>
+        <p:spPr>
+          <a:xfrm>
+            <a:off x="4356506" y="5623560"/>
+            <a:ext cx="3478682" cy="621792"/>
+          </a:xfrm>
+          <a:prstGeom prst="rect">
+            <a:avLst/>
+          </a:prstGeom>
+          <a:noFill/>
+        </p:spPr>
+        <p:txBody>
+          <a:bodyPr wrap="square" anchor="t"/>
+          <a:lstStyle/>
+          <a:p>
+            <a:pPr algn="ctr"/>
+            <a:r>
+              <a:rPr sz="1300" b="1" i="0">
+                <a:solidFill>
+                  <a:srgbClr val="095292"/>
+                </a:solidFill>
+                <a:latin typeface="Calibri"/>
+              </a:rPr>
+              <a:t>ExamLab</a:t>
+            </a:r>
+          </a:p>
+          <a:p>
+            <a:pPr algn="ctr">
+              <a:spcBef>
+                <a:spcPts val="200"/>
+              </a:spcBef>
             </a:pPr>
             <a:r>
-              <a:rPr sz="1600" b="0" i="0">
-                <a:solidFill>
-                  <a:srgbClr val="333333"/>
-                </a:solidFill>
-                <a:latin typeface="Calibri"/>
-              </a:rPr>
-              <a:t>–   </a:t>
-            </a:r>
-            <a:r>
-              <a:rPr sz="1600" b="1" i="0">
-                <a:solidFill>
-                  <a:srgbClr val="333333"/>
-                </a:solidFill>
-                <a:latin typeface="Calibri"/>
-              </a:rPr>
-              <a:t>4.</a:t>
-            </a:r>
-            <a:r>
-              <a:rPr sz="1600" b="0" i="0">
-                <a:solidFill>
-                  <a:srgbClr val="333333"/>
-                </a:solidFill>
-                <a:latin typeface="Calibri"/>
-              </a:rPr>
-              <a:t> Paso 4: escriban el sequenceDiagram del contrato principal con 5 participantes y un bloque alt que cubra el camino feliz y el camino de error 409, verificando que los nombres de los participantes sean identicos a los 5 contenedores del paso 1 y que el mensaje de error muestre el mismo codigo declarado en la tabla de contratos.</a:t>
-            </a:r>
-          </a:p>
-          <a:p>
-            <a:pPr>
-              <a:spcAft>
-                <a:spcPts val="800"/>
-              </a:spcAft>
-            </a:pPr>
-            <a:r>
-              <a:rPr sz="1600" b="0" i="0">
-                <a:solidFill>
-                  <a:srgbClr val="333333"/>
-                </a:solidFill>
-                <a:latin typeface="Calibri"/>
-              </a:rPr>
-              <a:t>–   </a:t>
-            </a:r>
-            <a:r>
-              <a:rPr sz="1600" b="1" i="0">
-                <a:solidFill>
-                  <a:srgbClr val="333333"/>
-                </a:solidFill>
-                <a:latin typeface="Calibri"/>
-              </a:rPr>
-              <a:t>5.</a:t>
-            </a:r>
-            <a:r>
-              <a:rPr sz="1600" b="0" i="0">
-                <a:solidFill>
-                  <a:srgbClr val="333333"/>
-                </a:solidFill>
-                <a:latin typeface="Calibri"/>
-              </a:rPr>
-              <a:t> Paso 5: redacten los 3 riesgos de distribucion con su mitigacion, actualicen la seccion Arquitectura logica del informe con el diagrama y la tabla de contratos, y suban las 5 preguntas a ExamLab (modulo Talleres) antes del domingo 23:59, verificando que la lista canonica de 5 nombres aparezca identica en el diagrama, en los contratos y en el informe.</a:t>
-            </a:r>
-          </a:p>
-        </p:txBody>
-      </p:sp>
-      <p:sp>
-        <p:nvSpPr>
-          <p:cNvPr id="6" name="TextBox 5"/>
+              <a:rPr sz="1000" b="0" i="0">
+                <a:solidFill>
+                  <a:srgbClr val="666666"/>
+                </a:solidFill>
+                <a:latin typeface="Calibri"/>
+              </a:rPr>
+              <a:t>Donde se entrega</a:t>
+            </a:r>
+          </a:p>
+        </p:txBody>
+      </p:sp>
+      <p:sp>
+        <p:nvSpPr>
+          <p:cNvPr id="26" name="TextBox 25"/>
           <p:cNvSpPr txBox="1"/>
           <p:nvPr/>
         </p:nvSpPr>
@@ -3834,7 +4502,7 @@
         <p:spPr>
           <a:xfrm>
             <a:off x="0" y="0"/>
-            <a:ext cx="12191695" cy="960120"/>
+            <a:ext cx="12191695" cy="1170432"/>
           </a:xfrm>
           <a:prstGeom prst="rect">
             <a:avLst/>
@@ -3876,7 +4544,7 @@
         </p:nvSpPr>
         <p:spPr>
           <a:xfrm>
-            <a:off x="0" y="960120"/>
+            <a:off x="0" y="1170432"/>
             <a:ext cx="12191695" cy="41148"/>
           </a:xfrm>
           <a:prstGeom prst="rect">
@@ -3920,7 +4588,7 @@
         <p:spPr>
           <a:xfrm>
             <a:off x="457200" y="164592"/>
-            <a:ext cx="11277295" cy="502920"/>
+            <a:ext cx="11277295" cy="384048"/>
           </a:xfrm>
           <a:prstGeom prst="rect">
             <a:avLst/>
@@ -3940,20 +4608,225 @@
                 </a:solidFill>
                 <a:latin typeface="Calibri"/>
               </a:rPr>
-              <a:t>Para continuar (PI)</a:t>
-            </a:r>
-          </a:p>
-        </p:txBody>
-      </p:sp>
-      <p:sp>
-        <p:nvSpPr>
-          <p:cNvPr id="5" name="Rounded Rectangle 4"/>
+              <a:t>Del boceto a ExamLab (diagrama)</a:t>
+            </a:r>
+          </a:p>
+        </p:txBody>
+      </p:sp>
+      <p:sp>
+        <p:nvSpPr>
+          <p:cNvPr id="5" name="TextBox 4"/>
+          <p:cNvSpPr txBox="1"/>
+          <p:nvPr/>
+        </p:nvSpPr>
+        <p:spPr>
+          <a:xfrm>
+            <a:off x="457200" y="566928"/>
+            <a:ext cx="11277295" cy="411480"/>
+          </a:xfrm>
+          <a:prstGeom prst="rect">
+            <a:avLst/>
+          </a:prstGeom>
+          <a:noFill/>
+        </p:spPr>
+        <p:txBody>
+          <a:bodyPr wrap="square">
+            <a:spAutoFit/>
+          </a:bodyPr>
+          <a:lstStyle/>
+          <a:p>
+            <a:r>
+              <a:rPr sz="1400" b="0" i="0">
+                <a:solidFill>
+                  <a:srgbClr val="B8D8EE"/>
+                </a:solidFill>
+                <a:latin typeface="Calibri"/>
+              </a:rPr>
+              <a:t>El diagrama se entrega como código Mermaid dentro de ExamLab, no como imagen</a:t>
+            </a:r>
+          </a:p>
+        </p:txBody>
+      </p:sp>
+      <p:sp>
+        <p:nvSpPr>
+          <p:cNvPr id="6" name="Rounded Rectangle 5"/>
           <p:cNvSpPr/>
           <p:nvPr/>
         </p:nvSpPr>
         <p:spPr>
           <a:xfrm>
-            <a:off x="457200" y="1261872"/>
+            <a:off x="457200" y="1659636"/>
+            <a:ext cx="11277295" cy="1051560"/>
+          </a:xfrm>
+          <a:prstGeom prst="roundRect">
+            <a:avLst>
+              <a:gd name="adj" fmla="val 12000"/>
+            </a:avLst>
+          </a:prstGeom>
+          <a:solidFill>
+            <a:srgbClr val="F2F2F2"/>
+          </a:solidFill>
+          <a:ln>
+            <a:noFill/>
+          </a:ln>
+        </p:spPr>
+        <p:style>
+          <a:lnRef idx="1">
+            <a:schemeClr val="accent1"/>
+          </a:lnRef>
+          <a:fillRef idx="3">
+            <a:schemeClr val="accent1"/>
+          </a:fillRef>
+          <a:effectRef idx="2">
+            <a:schemeClr val="accent1"/>
+          </a:effectRef>
+          <a:fontRef idx="minor">
+            <a:schemeClr val="lt1"/>
+          </a:fontRef>
+        </p:style>
+        <p:txBody>
+          <a:bodyPr rtlCol="0" anchor="ctr"/>
+          <a:lstStyle/>
+          <a:p>
+            <a:pPr algn="ctr"/>
+          </a:p>
+        </p:txBody>
+      </p:sp>
+      <p:sp>
+        <p:nvSpPr>
+          <p:cNvPr id="7" name="Rounded Rectangle 6"/>
+          <p:cNvSpPr/>
+          <p:nvPr/>
+        </p:nvSpPr>
+        <p:spPr>
+          <a:xfrm>
+            <a:off x="594360" y="1965960"/>
+            <a:ext cx="438912" cy="438912"/>
+          </a:xfrm>
+          <a:prstGeom prst="roundRect">
+            <a:avLst>
+              <a:gd name="adj" fmla="val 12000"/>
+            </a:avLst>
+          </a:prstGeom>
+          <a:solidFill>
+            <a:srgbClr val="095292"/>
+          </a:solidFill>
+          <a:ln>
+            <a:noFill/>
+          </a:ln>
+        </p:spPr>
+        <p:style>
+          <a:lnRef idx="1">
+            <a:schemeClr val="accent1"/>
+          </a:lnRef>
+          <a:fillRef idx="3">
+            <a:schemeClr val="accent1"/>
+          </a:fillRef>
+          <a:effectRef idx="2">
+            <a:schemeClr val="accent1"/>
+          </a:effectRef>
+          <a:fontRef idx="minor">
+            <a:schemeClr val="lt1"/>
+          </a:fontRef>
+        </p:style>
+        <p:txBody>
+          <a:bodyPr rtlCol="0" anchor="ctr"/>
+          <a:lstStyle/>
+          <a:p>
+            <a:pPr algn="ctr"/>
+          </a:p>
+        </p:txBody>
+      </p:sp>
+      <p:sp>
+        <p:nvSpPr>
+          <p:cNvPr id="8" name="TextBox 7"/>
+          <p:cNvSpPr txBox="1"/>
+          <p:nvPr/>
+        </p:nvSpPr>
+        <p:spPr>
+          <a:xfrm>
+            <a:off x="594360" y="1965960"/>
+            <a:ext cx="438912" cy="438912"/>
+          </a:xfrm>
+          <a:prstGeom prst="rect">
+            <a:avLst/>
+          </a:prstGeom>
+          <a:noFill/>
+        </p:spPr>
+        <p:txBody>
+          <a:bodyPr wrap="square" anchor="ctr"/>
+          <a:lstStyle/>
+          <a:p>
+            <a:pPr algn="ctr"/>
+            <a:r>
+              <a:rPr sz="1600" b="1" i="0">
+                <a:solidFill>
+                  <a:srgbClr val="FFFFFF"/>
+                </a:solidFill>
+                <a:latin typeface="Calibri"/>
+              </a:rPr>
+              <a:t>1</a:t>
+            </a:r>
+          </a:p>
+        </p:txBody>
+      </p:sp>
+      <p:sp>
+        <p:nvSpPr>
+          <p:cNvPr id="9" name="TextBox 8"/>
+          <p:cNvSpPr txBox="1"/>
+          <p:nvPr/>
+        </p:nvSpPr>
+        <p:spPr>
+          <a:xfrm>
+            <a:off x="1188720" y="1751076"/>
+            <a:ext cx="10271455" cy="886968"/>
+          </a:xfrm>
+          <a:prstGeom prst="rect">
+            <a:avLst/>
+          </a:prstGeom>
+          <a:noFill/>
+        </p:spPr>
+        <p:txBody>
+          <a:bodyPr wrap="square" anchor="ctr"/>
+          <a:lstStyle/>
+          <a:p>
+            <a:r>
+              <a:rPr sz="1500" b="1" i="0">
+                <a:solidFill>
+                  <a:srgbClr val="095292"/>
+                </a:solidFill>
+                <a:latin typeface="Calibri"/>
+              </a:rPr>
+              <a:t>Disena visual</a:t>
+            </a:r>
+          </a:p>
+          <a:p>
+            <a:pPr>
+              <a:spcBef>
+                <a:spcPts val="200"/>
+              </a:spcBef>
+            </a:pPr>
+            <a:r>
+              <a:rPr sz="1300" b="0" i="0">
+                <a:solidFill>
+                  <a:srgbClr val="333333"/>
+                </a:solidFill>
+                <a:latin typeface="Calibri"/>
+              </a:rPr>
+              <a:t>Dibuja el diagrama como quieras en Excalidraw o draw.io: es mas rapido arrastrar cajas que escribir codigo, y ahi es donde piensas el modelo.</a:t>
+            </a:r>
+          </a:p>
+        </p:txBody>
+      </p:sp>
+      <p:sp>
+        <p:nvSpPr>
+          <p:cNvPr id="10" name="Rounded Rectangle 9"/>
+          <p:cNvSpPr/>
+          <p:nvPr/>
+        </p:nvSpPr>
+        <p:spPr>
+          <a:xfrm>
+            <a:off x="457200" y="2802636"/>
             <a:ext cx="11277295" cy="1051560"/>
           </a:xfrm>
           <a:prstGeom prst="roundRect">
@@ -3992,20 +4865,22 @@
       </p:sp>
       <p:sp>
         <p:nvSpPr>
-          <p:cNvPr id="6" name="Rectangle 5"/>
+          <p:cNvPr id="11" name="Rounded Rectangle 10"/>
           <p:cNvSpPr/>
           <p:nvPr/>
         </p:nvSpPr>
         <p:spPr>
           <a:xfrm>
-            <a:off x="457200" y="1261872"/>
-            <a:ext cx="128016" cy="1051560"/>
-          </a:xfrm>
-          <a:prstGeom prst="rect">
-            <a:avLst/>
+            <a:off x="594360" y="3108960"/>
+            <a:ext cx="438912" cy="438912"/>
+          </a:xfrm>
+          <a:prstGeom prst="roundRect">
+            <a:avLst>
+              <a:gd name="adj" fmla="val 12000"/>
+            </a:avLst>
           </a:prstGeom>
           <a:solidFill>
-            <a:srgbClr val="269CCB"/>
+            <a:srgbClr val="095292"/>
           </a:solidFill>
           <a:ln>
             <a:noFill/>
@@ -4035,14 +4910,14 @@
       </p:sp>
       <p:sp>
         <p:nvSpPr>
-          <p:cNvPr id="7" name="TextBox 6"/>
+          <p:cNvPr id="12" name="TextBox 11"/>
           <p:cNvSpPr txBox="1"/>
           <p:nvPr/>
         </p:nvSpPr>
         <p:spPr>
           <a:xfrm>
-            <a:off x="777240" y="1399031"/>
-            <a:ext cx="10774375" cy="822959"/>
+            <a:off x="594360" y="3108960"/>
+            <a:ext cx="438912" cy="438912"/>
           </a:xfrm>
           <a:prstGeom prst="rect">
             <a:avLst/>
@@ -4050,48 +4925,79 @@
           <a:noFill/>
         </p:spPr>
         <p:txBody>
-          <a:bodyPr wrap="square">
-            <a:spAutoFit/>
-          </a:bodyPr>
-          <a:lstStyle/>
-          <a:p>
-            <a:r>
-              <a:rPr sz="1200" b="1" i="0">
-                <a:solidFill>
-                  <a:srgbClr val="269CCB"/>
-                </a:solidFill>
-                <a:latin typeface="Calibri"/>
-              </a:rPr>
-              <a:t>Info</a:t>
+          <a:bodyPr wrap="square" anchor="ctr"/>
+          <a:lstStyle/>
+          <a:p>
+            <a:pPr algn="ctr"/>
+            <a:r>
+              <a:rPr sz="1600" b="1" i="0">
+                <a:solidFill>
+                  <a:srgbClr val="FFFFFF"/>
+                </a:solidFill>
+                <a:latin typeface="Calibri"/>
+              </a:rPr>
+              <a:t>2</a:t>
+            </a:r>
+          </a:p>
+        </p:txBody>
+      </p:sp>
+      <p:sp>
+        <p:nvSpPr>
+          <p:cNvPr id="13" name="TextBox 12"/>
+          <p:cNvSpPr txBox="1"/>
+          <p:nvPr/>
+        </p:nvSpPr>
+        <p:spPr>
+          <a:xfrm>
+            <a:off x="1188720" y="2894076"/>
+            <a:ext cx="10271455" cy="886968"/>
+          </a:xfrm>
+          <a:prstGeom prst="rect">
+            <a:avLst/>
+          </a:prstGeom>
+          <a:noFill/>
+        </p:spPr>
+        <p:txBody>
+          <a:bodyPr wrap="square" anchor="ctr"/>
+          <a:lstStyle/>
+          <a:p>
+            <a:r>
+              <a:rPr sz="1500" b="1" i="0">
+                <a:solidFill>
+                  <a:srgbClr val="095292"/>
+                </a:solidFill>
+                <a:latin typeface="Calibri"/>
+              </a:rPr>
+              <a:t>Traduce con IA</a:t>
             </a:r>
           </a:p>
           <a:p>
             <a:pPr>
               <a:spcBef>
-                <a:spcPts val="400"/>
+                <a:spcPts val="200"/>
               </a:spcBef>
             </a:pPr>
             <a:r>
-              <a:rPr sz="1400" b="0" i="0">
+              <a:rPr sz="1300" b="0" i="0">
                 <a:solidFill>
                   <a:srgbClr val="333333"/>
                 </a:solidFill>
                 <a:latin typeface="Calibri"/>
               </a:rPr>
-              <a:t>Entregable: Diagrama C4 Container/Componentes v0.9 + lista de APIs entre servicios</a:t>
-            </a:r>
-          </a:p>
-        </p:txBody>
-      </p:sp>
-      <p:sp>
-        <p:nvSpPr>
-          <p:cNvPr id="8" name="Rounded Rectangle 7"/>
+              <a:t>Copia o describe tu boceto a una IA y pidele el codigo Mermaid: «convierte este diagrama a Mermaid usando el tipo que pide el enunciado». Revisa el resultado: la IA acierta la sintaxis, no tu modelo.</a:t>
+            </a:r>
+          </a:p>
+        </p:txBody>
+      </p:sp>
+      <p:sp>
+        <p:nvSpPr>
+          <p:cNvPr id="14" name="Rounded Rectangle 13"/>
           <p:cNvSpPr/>
           <p:nvPr/>
         </p:nvSpPr>
         <p:spPr>
           <a:xfrm>
-            <a:off x="457200" y="2478024"/>
+            <a:off x="457200" y="3945636"/>
             <a:ext cx="11277295" cy="1051560"/>
           </a:xfrm>
           <a:prstGeom prst="roundRect">
@@ -4100,7 +5006,7 @@
             </a:avLst>
           </a:prstGeom>
           <a:solidFill>
-            <a:srgbClr val="FFF8E1"/>
+            <a:srgbClr val="F2F2F2"/>
           </a:solidFill>
           <a:ln>
             <a:noFill/>
@@ -4130,20 +5036,22 @@
       </p:sp>
       <p:sp>
         <p:nvSpPr>
-          <p:cNvPr id="9" name="Rectangle 8"/>
+          <p:cNvPr id="15" name="Rounded Rectangle 14"/>
           <p:cNvSpPr/>
           <p:nvPr/>
         </p:nvSpPr>
         <p:spPr>
           <a:xfrm>
-            <a:off x="457200" y="2478024"/>
-            <a:ext cx="128016" cy="1051560"/>
-          </a:xfrm>
-          <a:prstGeom prst="rect">
-            <a:avLst/>
+            <a:off x="594360" y="4251960"/>
+            <a:ext cx="438912" cy="438912"/>
+          </a:xfrm>
+          <a:prstGeom prst="roundRect">
+            <a:avLst>
+              <a:gd name="adj" fmla="val 12000"/>
+            </a:avLst>
           </a:prstGeom>
           <a:solidFill>
-            <a:srgbClr val="FFD000"/>
+            <a:srgbClr val="095292"/>
           </a:solidFill>
           <a:ln>
             <a:noFill/>
@@ -4173,14 +5081,14 @@
       </p:sp>
       <p:sp>
         <p:nvSpPr>
-          <p:cNvPr id="10" name="TextBox 9"/>
+          <p:cNvPr id="16" name="TextBox 15"/>
           <p:cNvSpPr txBox="1"/>
           <p:nvPr/>
         </p:nvSpPr>
         <p:spPr>
           <a:xfrm>
-            <a:off x="777240" y="2615184"/>
-            <a:ext cx="10774375" cy="822959"/>
+            <a:off x="594360" y="4251960"/>
+            <a:ext cx="438912" cy="438912"/>
           </a:xfrm>
           <a:prstGeom prst="rect">
             <a:avLst/>
@@ -4188,48 +5096,79 @@
           <a:noFill/>
         </p:spPr>
         <p:txBody>
-          <a:bodyPr wrap="square">
-            <a:spAutoFit/>
-          </a:bodyPr>
-          <a:lstStyle/>
-          <a:p>
-            <a:r>
-              <a:rPr sz="1200" b="1" i="0">
-                <a:solidFill>
-                  <a:srgbClr val="FFD000"/>
-                </a:solidFill>
-                <a:latin typeface="Calibri"/>
-              </a:rPr>
-              <a:t>Aclaración</a:t>
+          <a:bodyPr wrap="square" anchor="ctr"/>
+          <a:lstStyle/>
+          <a:p>
+            <a:pPr algn="ctr"/>
+            <a:r>
+              <a:rPr sz="1600" b="1" i="0">
+                <a:solidFill>
+                  <a:srgbClr val="FFFFFF"/>
+                </a:solidFill>
+                <a:latin typeface="Calibri"/>
+              </a:rPr>
+              <a:t>3</a:t>
+            </a:r>
+          </a:p>
+        </p:txBody>
+      </p:sp>
+      <p:sp>
+        <p:nvSpPr>
+          <p:cNvPr id="17" name="TextBox 16"/>
+          <p:cNvSpPr txBox="1"/>
+          <p:nvPr/>
+        </p:nvSpPr>
+        <p:spPr>
+          <a:xfrm>
+            <a:off x="1188720" y="4037076"/>
+            <a:ext cx="10271455" cy="886968"/>
+          </a:xfrm>
+          <a:prstGeom prst="rect">
+            <a:avLst/>
+          </a:prstGeom>
+          <a:noFill/>
+        </p:spPr>
+        <p:txBody>
+          <a:bodyPr wrap="square" anchor="ctr"/>
+          <a:lstStyle/>
+          <a:p>
+            <a:r>
+              <a:rPr sz="1500" b="1" i="0">
+                <a:solidFill>
+                  <a:srgbClr val="095292"/>
+                </a:solidFill>
+                <a:latin typeface="Calibri"/>
+              </a:rPr>
+              <a:t>Pega y renderiza en ExamLab</a:t>
             </a:r>
           </a:p>
           <a:p>
             <a:pPr>
               <a:spcBef>
-                <a:spcPts val="400"/>
+                <a:spcPts val="200"/>
               </a:spcBef>
             </a:pPr>
             <a:r>
-              <a:rPr sz="1400" b="0" i="0">
+              <a:rPr sz="1300" b="0" i="0">
                 <a:solidFill>
                   <a:srgbClr val="333333"/>
                 </a:solidFill>
                 <a:latin typeface="Calibri"/>
               </a:rPr>
-              <a:t>Subir evidencias al paquete CloudLite (Drive/repo) y a ExamLab (https://uniaj.examlab.workers.dev/) domingo 23:59.</a:t>
-            </a:r>
-          </a:p>
-        </p:txBody>
-      </p:sp>
-      <p:sp>
-        <p:nvSpPr>
-          <p:cNvPr id="11" name="Rounded Rectangle 10"/>
+              <a:t>Pega ese codigo en la caja de texto de la pregunta y mira como lo dibuja la plataforma. Si no renderiza, corrige ahi mismo: lo que se califica es el diagrama renderizado dentro de ExamLab.</a:t>
+            </a:r>
+          </a:p>
+        </p:txBody>
+      </p:sp>
+      <p:sp>
+        <p:nvSpPr>
+          <p:cNvPr id="18" name="Rounded Rectangle 17"/>
           <p:cNvSpPr/>
           <p:nvPr/>
         </p:nvSpPr>
         <p:spPr>
           <a:xfrm>
-            <a:off x="457200" y="3694176"/>
+            <a:off x="457200" y="5088636"/>
             <a:ext cx="11277295" cy="1051560"/>
           </a:xfrm>
           <a:prstGeom prst="roundRect">
@@ -4238,7 +5177,7 @@
             </a:avLst>
           </a:prstGeom>
           <a:solidFill>
-            <a:srgbClr val="FBE4E4"/>
+            <a:srgbClr val="E8F4FA"/>
           </a:solidFill>
           <a:ln>
             <a:noFill/>
@@ -4268,20 +5207,22 @@
       </p:sp>
       <p:sp>
         <p:nvSpPr>
-          <p:cNvPr id="12" name="Rectangle 11"/>
+          <p:cNvPr id="19" name="Rounded Rectangle 18"/>
           <p:cNvSpPr/>
           <p:nvPr/>
         </p:nvSpPr>
         <p:spPr>
           <a:xfrm>
-            <a:off x="457200" y="3694176"/>
-            <a:ext cx="128016" cy="1051560"/>
-          </a:xfrm>
-          <a:prstGeom prst="rect">
-            <a:avLst/>
+            <a:off x="594360" y="5394960"/>
+            <a:ext cx="438912" cy="438912"/>
+          </a:xfrm>
+          <a:prstGeom prst="roundRect">
+            <a:avLst>
+              <a:gd name="adj" fmla="val 12000"/>
+            </a:avLst>
           </a:prstGeom>
           <a:solidFill>
-            <a:srgbClr val="A02030"/>
+            <a:srgbClr val="095292"/>
           </a:solidFill>
           <a:ln>
             <a:noFill/>
@@ -4311,14 +5252,14 @@
       </p:sp>
       <p:sp>
         <p:nvSpPr>
-          <p:cNvPr id="13" name="TextBox 12"/>
+          <p:cNvPr id="20" name="TextBox 19"/>
           <p:cNvSpPr txBox="1"/>
           <p:nvPr/>
         </p:nvSpPr>
         <p:spPr>
           <a:xfrm>
-            <a:off x="777240" y="3831336"/>
-            <a:ext cx="10774375" cy="822959"/>
+            <a:off x="594360" y="5394960"/>
+            <a:ext cx="438912" cy="438912"/>
           </a:xfrm>
           <a:prstGeom prst="rect">
             <a:avLst/>
@@ -4326,42 +5267,73 @@
           <a:noFill/>
         </p:spPr>
         <p:txBody>
-          <a:bodyPr wrap="square">
-            <a:spAutoFit/>
-          </a:bodyPr>
-          <a:lstStyle/>
-          <a:p>
-            <a:r>
-              <a:rPr sz="1200" b="1" i="0">
-                <a:solidFill>
-                  <a:srgbClr val="A02030"/>
-                </a:solidFill>
-                <a:latin typeface="Calibri"/>
-              </a:rPr>
-              <a:t>Atención</a:t>
+          <a:bodyPr wrap="square" anchor="ctr"/>
+          <a:lstStyle/>
+          <a:p>
+            <a:pPr algn="ctr"/>
+            <a:r>
+              <a:rPr sz="1600" b="1" i="0">
+                <a:solidFill>
+                  <a:srgbClr val="FFFFFF"/>
+                </a:solidFill>
+                <a:latin typeface="Calibri"/>
+              </a:rPr>
+              <a:t>4</a:t>
+            </a:r>
+          </a:p>
+        </p:txBody>
+      </p:sp>
+      <p:sp>
+        <p:nvSpPr>
+          <p:cNvPr id="21" name="TextBox 20"/>
+          <p:cNvSpPr txBox="1"/>
+          <p:nvPr/>
+        </p:nvSpPr>
+        <p:spPr>
+          <a:xfrm>
+            <a:off x="1188720" y="5180076"/>
+            <a:ext cx="10271455" cy="886968"/>
+          </a:xfrm>
+          <a:prstGeom prst="rect">
+            <a:avLst/>
+          </a:prstGeom>
+          <a:noFill/>
+        </p:spPr>
+        <p:txBody>
+          <a:bodyPr wrap="square" anchor="ctr"/>
+          <a:lstStyle/>
+          <a:p>
+            <a:r>
+              <a:rPr sz="1500" b="1" i="0">
+                <a:solidFill>
+                  <a:srgbClr val="095292"/>
+                </a:solidFill>
+                <a:latin typeface="Calibri"/>
+              </a:rPr>
+              <a:t>Guarda el PNG para tu PI</a:t>
             </a:r>
           </a:p>
           <a:p>
             <a:pPr>
               <a:spcBef>
-                <a:spcPts val="400"/>
+                <a:spcPts val="200"/>
               </a:spcBef>
             </a:pPr>
             <a:r>
-              <a:rPr sz="1400" b="0" i="0">
+              <a:rPr sz="1300" b="0" i="0">
                 <a:solidFill>
                   <a:srgbClr val="333333"/>
                 </a:solidFill>
                 <a:latin typeface="Calibri"/>
               </a:rPr>
-              <a:t>Sin cloud de pago ni instalaciones obligatorias de hipervisores/Docker Desktop.</a:t>
-            </a:r>
-          </a:p>
-        </p:txBody>
-      </p:sp>
-      <p:sp>
-        <p:nvSpPr>
-          <p:cNvPr id="14" name="TextBox 13"/>
+              <a:t>Exporta tambien la imagen a la carpeta de tu Proyecto Integrador. Esa copia es para tu informe; no reemplaza la respuesta en la plataforma.</a:t>
+            </a:r>
+          </a:p>
+        </p:txBody>
+      </p:sp>
+      <p:sp>
+        <p:nvSpPr>
+          <p:cNvPr id="22" name="TextBox 21"/>
           <p:cNvSpPr txBox="1"/>
           <p:nvPr/>
         </p:nvSpPr>
@@ -4403,6 +5375,966 @@
 </file>
 
 <file path=ppt/slides/slide12.xml><?xml version="1.0" encoding="utf-8"?>
+<p:sld xmlns:a="http://schemas.openxmlformats.org/drawingml/2006/main" xmlns:p="http://schemas.openxmlformats.org/presentationml/2006/main" xmlns:r="http://schemas.openxmlformats.org/officeDocument/2006/relationships">
+  <p:cSld>
+    <p:bg>
+      <p:bgPr>
+        <a:solidFill>
+          <a:srgbClr val="FFFFFF"/>
+        </a:solidFill>
+        <a:effectLst/>
+      </p:bgPr>
+    </p:bg>
+    <p:spTree>
+      <p:nvGrpSpPr>
+        <p:cNvPr id="1" name=""/>
+        <p:cNvGrpSpPr/>
+        <p:nvPr/>
+      </p:nvGrpSpPr>
+      <p:grpSpPr/>
+      <p:sp>
+        <p:nvSpPr>
+          <p:cNvPr id="2" name="Rectangle 1"/>
+          <p:cNvSpPr/>
+          <p:nvPr/>
+        </p:nvSpPr>
+        <p:spPr>
+          <a:xfrm>
+            <a:off x="0" y="0"/>
+            <a:ext cx="12191695" cy="960120"/>
+          </a:xfrm>
+          <a:prstGeom prst="rect">
+            <a:avLst/>
+          </a:prstGeom>
+          <a:solidFill>
+            <a:srgbClr val="095292"/>
+          </a:solidFill>
+          <a:ln>
+            <a:noFill/>
+          </a:ln>
+        </p:spPr>
+        <p:style>
+          <a:lnRef idx="1">
+            <a:schemeClr val="accent1"/>
+          </a:lnRef>
+          <a:fillRef idx="3">
+            <a:schemeClr val="accent1"/>
+          </a:fillRef>
+          <a:effectRef idx="2">
+            <a:schemeClr val="accent1"/>
+          </a:effectRef>
+          <a:fontRef idx="minor">
+            <a:schemeClr val="lt1"/>
+          </a:fontRef>
+        </p:style>
+        <p:txBody>
+          <a:bodyPr rtlCol="0" anchor="ctr"/>
+          <a:lstStyle/>
+          <a:p>
+            <a:pPr algn="ctr"/>
+          </a:p>
+        </p:txBody>
+      </p:sp>
+      <p:sp>
+        <p:nvSpPr>
+          <p:cNvPr id="3" name="Rectangle 2"/>
+          <p:cNvSpPr/>
+          <p:nvPr/>
+        </p:nvSpPr>
+        <p:spPr>
+          <a:xfrm>
+            <a:off x="0" y="960120"/>
+            <a:ext cx="12191695" cy="41148"/>
+          </a:xfrm>
+          <a:prstGeom prst="rect">
+            <a:avLst/>
+          </a:prstGeom>
+          <a:solidFill>
+            <a:srgbClr val="FFD000"/>
+          </a:solidFill>
+          <a:ln>
+            <a:noFill/>
+          </a:ln>
+        </p:spPr>
+        <p:style>
+          <a:lnRef idx="1">
+            <a:schemeClr val="accent1"/>
+          </a:lnRef>
+          <a:fillRef idx="3">
+            <a:schemeClr val="accent1"/>
+          </a:fillRef>
+          <a:effectRef idx="2">
+            <a:schemeClr val="accent1"/>
+          </a:effectRef>
+          <a:fontRef idx="minor">
+            <a:schemeClr val="lt1"/>
+          </a:fontRef>
+        </p:style>
+        <p:txBody>
+          <a:bodyPr rtlCol="0" anchor="ctr"/>
+          <a:lstStyle/>
+          <a:p>
+            <a:pPr algn="ctr"/>
+          </a:p>
+        </p:txBody>
+      </p:sp>
+      <p:sp>
+        <p:nvSpPr>
+          <p:cNvPr id="4" name="TextBox 3"/>
+          <p:cNvSpPr txBox="1"/>
+          <p:nvPr/>
+        </p:nvSpPr>
+        <p:spPr>
+          <a:xfrm>
+            <a:off x="457200" y="164592"/>
+            <a:ext cx="11277295" cy="502920"/>
+          </a:xfrm>
+          <a:prstGeom prst="rect">
+            <a:avLst/>
+          </a:prstGeom>
+          <a:noFill/>
+        </p:spPr>
+        <p:txBody>
+          <a:bodyPr wrap="square">
+            <a:spAutoFit/>
+          </a:bodyPr>
+          <a:lstStyle/>
+          <a:p>
+            <a:r>
+              <a:rPr sz="2600" b="1" i="0">
+                <a:solidFill>
+                  <a:srgbClr val="FFFFFF"/>
+                </a:solidFill>
+                <a:latin typeface="Calibri"/>
+              </a:rPr>
+              <a:t>Taller PI (paso a paso)</a:t>
+            </a:r>
+          </a:p>
+        </p:txBody>
+      </p:sp>
+      <p:sp>
+        <p:nvSpPr>
+          <p:cNvPr id="5" name="TextBox 4"/>
+          <p:cNvSpPr txBox="1"/>
+          <p:nvPr/>
+        </p:nvSpPr>
+        <p:spPr>
+          <a:xfrm>
+            <a:off x="457200" y="1170432"/>
+            <a:ext cx="11277295" cy="5230368"/>
+          </a:xfrm>
+          <a:prstGeom prst="rect">
+            <a:avLst/>
+          </a:prstGeom>
+          <a:noFill/>
+        </p:spPr>
+        <p:txBody>
+          <a:bodyPr wrap="square">
+            <a:spAutoFit/>
+          </a:bodyPr>
+          <a:lstStyle/>
+          <a:p>
+            <a:pPr>
+              <a:spcAft>
+                <a:spcPts val="800"/>
+              </a:spcAft>
+            </a:pPr>
+            <a:r>
+              <a:rPr sz="1600" b="1" i="0">
+                <a:solidFill>
+                  <a:srgbClr val="333333"/>
+                </a:solidFill>
+                <a:latin typeface="Calibri"/>
+              </a:rPr>
+              <a:t>1.</a:t>
+            </a:r>
+            <a:r>
+              <a:rPr sz="1600" b="0" i="0">
+                <a:solidFill>
+                  <a:srgbClr val="333333"/>
+                </a:solidFill>
+                <a:latin typeface="Calibri"/>
+              </a:rPr>
+              <a:t> Paso 1: abran el C4 Context de la Clase 1 y escriban la lista canonica de nombres de CloudLite: exactamente 5 contenedores con nombre, responsabilidad en una frase y tecnologia tentativa (por ejemplo SPA Web, API CloudLite, Worker Notificaciones, Base de datos Citas, Cola Notificaciones), verificando que ninguno de los 5 sea un modulo interno de otro y que ningun nombre se repita; esa lista se congela y la reutilizan las clases 7, 11 y 15.</a:t>
+            </a:r>
+          </a:p>
+          <a:p>
+            <a:pPr>
+              <a:spcAft>
+                <a:spcPts val="800"/>
+              </a:spcAft>
+            </a:pPr>
+            <a:r>
+              <a:rPr sz="1600" b="0" i="0">
+                <a:solidFill>
+                  <a:srgbClr val="333333"/>
+                </a:solidFill>
+                <a:latin typeface="Calibri"/>
+              </a:rPr>
+              <a:t>–   </a:t>
+            </a:r>
+            <a:r>
+              <a:rPr sz="1600" b="1" i="0">
+                <a:solidFill>
+                  <a:srgbClr val="333333"/>
+                </a:solidFill>
+                <a:latin typeface="Calibri"/>
+              </a:rPr>
+              <a:t>2.</a:t>
+            </a:r>
+            <a:r>
+              <a:rPr sz="1600" b="0" i="0">
+                <a:solidFill>
+                  <a:srgbClr val="333333"/>
+                </a:solidFill>
+                <a:latin typeface="Calibri"/>
+              </a:rPr>
+              <a:t> Paso 2: escriban en ExamLab el diagrama C4Container en Mermaid con los 5 contenedores dentro de un Container_Boundary, los 2 Person y los 2 System_Ext de la Clase 1, y 8 relaciones etiquetadas con protocolo y puerto, verificando al renderizar que la base de datos usa ContainerDb, la cola usa ContainerQueue y que ningun actor habla directamente con la base de datos.</a:t>
+            </a:r>
+          </a:p>
+          <a:p>
+            <a:pPr>
+              <a:spcAft>
+                <a:spcPts val="800"/>
+              </a:spcAft>
+            </a:pPr>
+            <a:r>
+              <a:rPr sz="1600" b="0" i="0">
+                <a:solidFill>
+                  <a:srgbClr val="333333"/>
+                </a:solidFill>
+                <a:latin typeface="Calibri"/>
+              </a:rPr>
+              <a:t>–   </a:t>
+            </a:r>
+            <a:r>
+              <a:rPr sz="1600" b="1" i="0">
+                <a:solidFill>
+                  <a:srgbClr val="333333"/>
+                </a:solidFill>
+                <a:latin typeface="Calibri"/>
+              </a:rPr>
+              <a:t>3.</a:t>
+            </a:r>
+            <a:r>
+              <a:rPr sz="1600" b="0" i="0">
+                <a:solidFill>
+                  <a:srgbClr val="333333"/>
+                </a:solidFill>
+                <a:latin typeface="Calibri"/>
+              </a:rPr>
+              <a:t> Paso 3: definan los 3 contratos entre partes en una tabla de 6 columnas (ID, consumidor a proveedor, verbo y ruta, request, respuesta 2xx, error de negocio), verificando que al menos un contrato sea asincrono por evento y que cada fila declare un codigo de error de negocio real como 409 CUPO_OCUPADO o 401 TOKEN_INVALIDO, no solo 500.</a:t>
+            </a:r>
+          </a:p>
+          <a:p>
+            <a:pPr>
+              <a:spcAft>
+                <a:spcPts val="800"/>
+              </a:spcAft>
+            </a:pPr>
+            <a:r>
+              <a:rPr sz="1600" b="0" i="0">
+                <a:solidFill>
+                  <a:srgbClr val="333333"/>
+                </a:solidFill>
+                <a:latin typeface="Calibri"/>
+              </a:rPr>
+              <a:t>–   </a:t>
+            </a:r>
+            <a:r>
+              <a:rPr sz="1600" b="1" i="0">
+                <a:solidFill>
+                  <a:srgbClr val="333333"/>
+                </a:solidFill>
+                <a:latin typeface="Calibri"/>
+              </a:rPr>
+              <a:t>4.</a:t>
+            </a:r>
+            <a:r>
+              <a:rPr sz="1600" b="0" i="0">
+                <a:solidFill>
+                  <a:srgbClr val="333333"/>
+                </a:solidFill>
+                <a:latin typeface="Calibri"/>
+              </a:rPr>
+              <a:t> Paso 4: escriban el sequenceDiagram del contrato principal con 5 participantes y un bloque alt que cubra el camino feliz y el camino de error 409, verificando que los nombres de los participantes sean identicos a los 5 contenedores del paso 1 y que el mensaje de error muestre el mismo codigo declarado en la tabla de contratos.</a:t>
+            </a:r>
+          </a:p>
+          <a:p>
+            <a:pPr>
+              <a:spcAft>
+                <a:spcPts val="800"/>
+              </a:spcAft>
+            </a:pPr>
+            <a:r>
+              <a:rPr sz="1600" b="0" i="0">
+                <a:solidFill>
+                  <a:srgbClr val="333333"/>
+                </a:solidFill>
+                <a:latin typeface="Calibri"/>
+              </a:rPr>
+              <a:t>–   </a:t>
+            </a:r>
+            <a:r>
+              <a:rPr sz="1600" b="1" i="0">
+                <a:solidFill>
+                  <a:srgbClr val="333333"/>
+                </a:solidFill>
+                <a:latin typeface="Calibri"/>
+              </a:rPr>
+              <a:t>5.</a:t>
+            </a:r>
+            <a:r>
+              <a:rPr sz="1600" b="0" i="0">
+                <a:solidFill>
+                  <a:srgbClr val="333333"/>
+                </a:solidFill>
+                <a:latin typeface="Calibri"/>
+              </a:rPr>
+              <a:t> Paso 5: redacten los 3 riesgos de distribucion con su mitigacion, actualicen la seccion Arquitectura logica del informe con el diagrama y la tabla de contratos, y suban las 5 preguntas a ExamLab (modulo Talleres) antes del domingo 23:59, verificando que la lista canonica de 5 nombres aparezca identica en el diagrama, en los contratos y en el informe.</a:t>
+            </a:r>
+          </a:p>
+        </p:txBody>
+      </p:sp>
+      <p:sp>
+        <p:nvSpPr>
+          <p:cNvPr id="6" name="TextBox 5"/>
+          <p:cNvSpPr txBox="1"/>
+          <p:nvPr/>
+        </p:nvSpPr>
+        <p:spPr>
+          <a:xfrm>
+            <a:off x="11185855" y="6473952"/>
+            <a:ext cx="640080" cy="274320"/>
+          </a:xfrm>
+          <a:prstGeom prst="rect">
+            <a:avLst/>
+          </a:prstGeom>
+          <a:noFill/>
+        </p:spPr>
+        <p:txBody>
+          <a:bodyPr wrap="square">
+            <a:spAutoFit/>
+          </a:bodyPr>
+          <a:lstStyle/>
+          <a:p>
+            <a:pPr algn="r"/>
+            <a:r>
+              <a:rPr sz="1100" b="0" i="0">
+                <a:solidFill>
+                  <a:srgbClr val="666666"/>
+                </a:solidFill>
+                <a:latin typeface="Calibri"/>
+              </a:rPr>
+              <a:t>12</a:t>
+            </a:r>
+          </a:p>
+        </p:txBody>
+      </p:sp>
+    </p:spTree>
+  </p:cSld>
+  <p:clrMapOvr>
+    <a:masterClrMapping/>
+  </p:clrMapOvr>
+</p:sld>
+</file>
+
+<file path=ppt/slides/slide13.xml><?xml version="1.0" encoding="utf-8"?>
+<p:sld xmlns:a="http://schemas.openxmlformats.org/drawingml/2006/main" xmlns:p="http://schemas.openxmlformats.org/presentationml/2006/main" xmlns:r="http://schemas.openxmlformats.org/officeDocument/2006/relationships">
+  <p:cSld>
+    <p:bg>
+      <p:bgPr>
+        <a:solidFill>
+          <a:srgbClr val="FFFFFF"/>
+        </a:solidFill>
+        <a:effectLst/>
+      </p:bgPr>
+    </p:bg>
+    <p:spTree>
+      <p:nvGrpSpPr>
+        <p:cNvPr id="1" name=""/>
+        <p:cNvGrpSpPr/>
+        <p:nvPr/>
+      </p:nvGrpSpPr>
+      <p:grpSpPr/>
+      <p:sp>
+        <p:nvSpPr>
+          <p:cNvPr id="2" name="Rectangle 1"/>
+          <p:cNvSpPr/>
+          <p:nvPr/>
+        </p:nvSpPr>
+        <p:spPr>
+          <a:xfrm>
+            <a:off x="0" y="0"/>
+            <a:ext cx="12191695" cy="960120"/>
+          </a:xfrm>
+          <a:prstGeom prst="rect">
+            <a:avLst/>
+          </a:prstGeom>
+          <a:solidFill>
+            <a:srgbClr val="095292"/>
+          </a:solidFill>
+          <a:ln>
+            <a:noFill/>
+          </a:ln>
+        </p:spPr>
+        <p:style>
+          <a:lnRef idx="1">
+            <a:schemeClr val="accent1"/>
+          </a:lnRef>
+          <a:fillRef idx="3">
+            <a:schemeClr val="accent1"/>
+          </a:fillRef>
+          <a:effectRef idx="2">
+            <a:schemeClr val="accent1"/>
+          </a:effectRef>
+          <a:fontRef idx="minor">
+            <a:schemeClr val="lt1"/>
+          </a:fontRef>
+        </p:style>
+        <p:txBody>
+          <a:bodyPr rtlCol="0" anchor="ctr"/>
+          <a:lstStyle/>
+          <a:p>
+            <a:pPr algn="ctr"/>
+          </a:p>
+        </p:txBody>
+      </p:sp>
+      <p:sp>
+        <p:nvSpPr>
+          <p:cNvPr id="3" name="Rectangle 2"/>
+          <p:cNvSpPr/>
+          <p:nvPr/>
+        </p:nvSpPr>
+        <p:spPr>
+          <a:xfrm>
+            <a:off x="0" y="960120"/>
+            <a:ext cx="12191695" cy="41148"/>
+          </a:xfrm>
+          <a:prstGeom prst="rect">
+            <a:avLst/>
+          </a:prstGeom>
+          <a:solidFill>
+            <a:srgbClr val="FFD000"/>
+          </a:solidFill>
+          <a:ln>
+            <a:noFill/>
+          </a:ln>
+        </p:spPr>
+        <p:style>
+          <a:lnRef idx="1">
+            <a:schemeClr val="accent1"/>
+          </a:lnRef>
+          <a:fillRef idx="3">
+            <a:schemeClr val="accent1"/>
+          </a:fillRef>
+          <a:effectRef idx="2">
+            <a:schemeClr val="accent1"/>
+          </a:effectRef>
+          <a:fontRef idx="minor">
+            <a:schemeClr val="lt1"/>
+          </a:fontRef>
+        </p:style>
+        <p:txBody>
+          <a:bodyPr rtlCol="0" anchor="ctr"/>
+          <a:lstStyle/>
+          <a:p>
+            <a:pPr algn="ctr"/>
+          </a:p>
+        </p:txBody>
+      </p:sp>
+      <p:sp>
+        <p:nvSpPr>
+          <p:cNvPr id="4" name="TextBox 3"/>
+          <p:cNvSpPr txBox="1"/>
+          <p:nvPr/>
+        </p:nvSpPr>
+        <p:spPr>
+          <a:xfrm>
+            <a:off x="457200" y="164592"/>
+            <a:ext cx="11277295" cy="502920"/>
+          </a:xfrm>
+          <a:prstGeom prst="rect">
+            <a:avLst/>
+          </a:prstGeom>
+          <a:noFill/>
+        </p:spPr>
+        <p:txBody>
+          <a:bodyPr wrap="square">
+            <a:spAutoFit/>
+          </a:bodyPr>
+          <a:lstStyle/>
+          <a:p>
+            <a:r>
+              <a:rPr sz="2600" b="1" i="0">
+                <a:solidFill>
+                  <a:srgbClr val="FFFFFF"/>
+                </a:solidFill>
+                <a:latin typeface="Calibri"/>
+              </a:rPr>
+              <a:t>Para continuar (PI)</a:t>
+            </a:r>
+          </a:p>
+        </p:txBody>
+      </p:sp>
+      <p:sp>
+        <p:nvSpPr>
+          <p:cNvPr id="5" name="Rounded Rectangle 4"/>
+          <p:cNvSpPr/>
+          <p:nvPr/>
+        </p:nvSpPr>
+        <p:spPr>
+          <a:xfrm>
+            <a:off x="457200" y="1261872"/>
+            <a:ext cx="11277295" cy="1051560"/>
+          </a:xfrm>
+          <a:prstGeom prst="roundRect">
+            <a:avLst>
+              <a:gd name="adj" fmla="val 12000"/>
+            </a:avLst>
+          </a:prstGeom>
+          <a:solidFill>
+            <a:srgbClr val="E8F4FA"/>
+          </a:solidFill>
+          <a:ln>
+            <a:noFill/>
+          </a:ln>
+        </p:spPr>
+        <p:style>
+          <a:lnRef idx="1">
+            <a:schemeClr val="accent1"/>
+          </a:lnRef>
+          <a:fillRef idx="3">
+            <a:schemeClr val="accent1"/>
+          </a:fillRef>
+          <a:effectRef idx="2">
+            <a:schemeClr val="accent1"/>
+          </a:effectRef>
+          <a:fontRef idx="minor">
+            <a:schemeClr val="lt1"/>
+          </a:fontRef>
+        </p:style>
+        <p:txBody>
+          <a:bodyPr rtlCol="0" anchor="ctr"/>
+          <a:lstStyle/>
+          <a:p>
+            <a:pPr algn="ctr"/>
+          </a:p>
+        </p:txBody>
+      </p:sp>
+      <p:sp>
+        <p:nvSpPr>
+          <p:cNvPr id="6" name="Rectangle 5"/>
+          <p:cNvSpPr/>
+          <p:nvPr/>
+        </p:nvSpPr>
+        <p:spPr>
+          <a:xfrm>
+            <a:off x="457200" y="1261872"/>
+            <a:ext cx="128016" cy="1051560"/>
+          </a:xfrm>
+          <a:prstGeom prst="rect">
+            <a:avLst/>
+          </a:prstGeom>
+          <a:solidFill>
+            <a:srgbClr val="269CCB"/>
+          </a:solidFill>
+          <a:ln>
+            <a:noFill/>
+          </a:ln>
+        </p:spPr>
+        <p:style>
+          <a:lnRef idx="1">
+            <a:schemeClr val="accent1"/>
+          </a:lnRef>
+          <a:fillRef idx="3">
+            <a:schemeClr val="accent1"/>
+          </a:fillRef>
+          <a:effectRef idx="2">
+            <a:schemeClr val="accent1"/>
+          </a:effectRef>
+          <a:fontRef idx="minor">
+            <a:schemeClr val="lt1"/>
+          </a:fontRef>
+        </p:style>
+        <p:txBody>
+          <a:bodyPr rtlCol="0" anchor="ctr"/>
+          <a:lstStyle/>
+          <a:p>
+            <a:pPr algn="ctr"/>
+          </a:p>
+        </p:txBody>
+      </p:sp>
+      <p:sp>
+        <p:nvSpPr>
+          <p:cNvPr id="7" name="TextBox 6"/>
+          <p:cNvSpPr txBox="1"/>
+          <p:nvPr/>
+        </p:nvSpPr>
+        <p:spPr>
+          <a:xfrm>
+            <a:off x="777240" y="1399031"/>
+            <a:ext cx="10774375" cy="822959"/>
+          </a:xfrm>
+          <a:prstGeom prst="rect">
+            <a:avLst/>
+          </a:prstGeom>
+          <a:noFill/>
+        </p:spPr>
+        <p:txBody>
+          <a:bodyPr wrap="square">
+            <a:spAutoFit/>
+          </a:bodyPr>
+          <a:lstStyle/>
+          <a:p>
+            <a:r>
+              <a:rPr sz="1200" b="1" i="0">
+                <a:solidFill>
+                  <a:srgbClr val="269CCB"/>
+                </a:solidFill>
+                <a:latin typeface="Calibri"/>
+              </a:rPr>
+              <a:t>Info</a:t>
+            </a:r>
+          </a:p>
+          <a:p>
+            <a:pPr>
+              <a:spcBef>
+                <a:spcPts val="400"/>
+              </a:spcBef>
+            </a:pPr>
+            <a:r>
+              <a:rPr sz="1400" b="0" i="0">
+                <a:solidFill>
+                  <a:srgbClr val="333333"/>
+                </a:solidFill>
+                <a:latin typeface="Calibri"/>
+              </a:rPr>
+              <a:t>Entregable: Diagrama C4 Container/Componentes v0.9 + lista de APIs entre servicios</a:t>
+            </a:r>
+          </a:p>
+        </p:txBody>
+      </p:sp>
+      <p:sp>
+        <p:nvSpPr>
+          <p:cNvPr id="8" name="Rounded Rectangle 7"/>
+          <p:cNvSpPr/>
+          <p:nvPr/>
+        </p:nvSpPr>
+        <p:spPr>
+          <a:xfrm>
+            <a:off x="457200" y="2478024"/>
+            <a:ext cx="11277295" cy="1051560"/>
+          </a:xfrm>
+          <a:prstGeom prst="roundRect">
+            <a:avLst>
+              <a:gd name="adj" fmla="val 12000"/>
+            </a:avLst>
+          </a:prstGeom>
+          <a:solidFill>
+            <a:srgbClr val="FFF8E1"/>
+          </a:solidFill>
+          <a:ln>
+            <a:noFill/>
+          </a:ln>
+        </p:spPr>
+        <p:style>
+          <a:lnRef idx="1">
+            <a:schemeClr val="accent1"/>
+          </a:lnRef>
+          <a:fillRef idx="3">
+            <a:schemeClr val="accent1"/>
+          </a:fillRef>
+          <a:effectRef idx="2">
+            <a:schemeClr val="accent1"/>
+          </a:effectRef>
+          <a:fontRef idx="minor">
+            <a:schemeClr val="lt1"/>
+          </a:fontRef>
+        </p:style>
+        <p:txBody>
+          <a:bodyPr rtlCol="0" anchor="ctr"/>
+          <a:lstStyle/>
+          <a:p>
+            <a:pPr algn="ctr"/>
+          </a:p>
+        </p:txBody>
+      </p:sp>
+      <p:sp>
+        <p:nvSpPr>
+          <p:cNvPr id="9" name="Rectangle 8"/>
+          <p:cNvSpPr/>
+          <p:nvPr/>
+        </p:nvSpPr>
+        <p:spPr>
+          <a:xfrm>
+            <a:off x="457200" y="2478024"/>
+            <a:ext cx="128016" cy="1051560"/>
+          </a:xfrm>
+          <a:prstGeom prst="rect">
+            <a:avLst/>
+          </a:prstGeom>
+          <a:solidFill>
+            <a:srgbClr val="FFD000"/>
+          </a:solidFill>
+          <a:ln>
+            <a:noFill/>
+          </a:ln>
+        </p:spPr>
+        <p:style>
+          <a:lnRef idx="1">
+            <a:schemeClr val="accent1"/>
+          </a:lnRef>
+          <a:fillRef idx="3">
+            <a:schemeClr val="accent1"/>
+          </a:fillRef>
+          <a:effectRef idx="2">
+            <a:schemeClr val="accent1"/>
+          </a:effectRef>
+          <a:fontRef idx="minor">
+            <a:schemeClr val="lt1"/>
+          </a:fontRef>
+        </p:style>
+        <p:txBody>
+          <a:bodyPr rtlCol="0" anchor="ctr"/>
+          <a:lstStyle/>
+          <a:p>
+            <a:pPr algn="ctr"/>
+          </a:p>
+        </p:txBody>
+      </p:sp>
+      <p:sp>
+        <p:nvSpPr>
+          <p:cNvPr id="10" name="TextBox 9"/>
+          <p:cNvSpPr txBox="1"/>
+          <p:nvPr/>
+        </p:nvSpPr>
+        <p:spPr>
+          <a:xfrm>
+            <a:off x="777240" y="2615184"/>
+            <a:ext cx="10774375" cy="822959"/>
+          </a:xfrm>
+          <a:prstGeom prst="rect">
+            <a:avLst/>
+          </a:prstGeom>
+          <a:noFill/>
+        </p:spPr>
+        <p:txBody>
+          <a:bodyPr wrap="square">
+            <a:spAutoFit/>
+          </a:bodyPr>
+          <a:lstStyle/>
+          <a:p>
+            <a:r>
+              <a:rPr sz="1200" b="1" i="0">
+                <a:solidFill>
+                  <a:srgbClr val="FFD000"/>
+                </a:solidFill>
+                <a:latin typeface="Calibri"/>
+              </a:rPr>
+              <a:t>Aclaración</a:t>
+            </a:r>
+          </a:p>
+          <a:p>
+            <a:pPr>
+              <a:spcBef>
+                <a:spcPts val="400"/>
+              </a:spcBef>
+            </a:pPr>
+            <a:r>
+              <a:rPr sz="1400" b="0" i="0">
+                <a:solidFill>
+                  <a:srgbClr val="333333"/>
+                </a:solidFill>
+                <a:latin typeface="Calibri"/>
+              </a:rPr>
+              <a:t>Subir evidencias al paquete CloudLite (Drive/repo) y a ExamLab (https://uniaj.examlab.workers.dev/) domingo 23:59.</a:t>
+            </a:r>
+          </a:p>
+        </p:txBody>
+      </p:sp>
+      <p:sp>
+        <p:nvSpPr>
+          <p:cNvPr id="11" name="Rounded Rectangle 10"/>
+          <p:cNvSpPr/>
+          <p:nvPr/>
+        </p:nvSpPr>
+        <p:spPr>
+          <a:xfrm>
+            <a:off x="457200" y="3694176"/>
+            <a:ext cx="11277295" cy="1051560"/>
+          </a:xfrm>
+          <a:prstGeom prst="roundRect">
+            <a:avLst>
+              <a:gd name="adj" fmla="val 12000"/>
+            </a:avLst>
+          </a:prstGeom>
+          <a:solidFill>
+            <a:srgbClr val="FBE4E4"/>
+          </a:solidFill>
+          <a:ln>
+            <a:noFill/>
+          </a:ln>
+        </p:spPr>
+        <p:style>
+          <a:lnRef idx="1">
+            <a:schemeClr val="accent1"/>
+          </a:lnRef>
+          <a:fillRef idx="3">
+            <a:schemeClr val="accent1"/>
+          </a:fillRef>
+          <a:effectRef idx="2">
+            <a:schemeClr val="accent1"/>
+          </a:effectRef>
+          <a:fontRef idx="minor">
+            <a:schemeClr val="lt1"/>
+          </a:fontRef>
+        </p:style>
+        <p:txBody>
+          <a:bodyPr rtlCol="0" anchor="ctr"/>
+          <a:lstStyle/>
+          <a:p>
+            <a:pPr algn="ctr"/>
+          </a:p>
+        </p:txBody>
+      </p:sp>
+      <p:sp>
+        <p:nvSpPr>
+          <p:cNvPr id="12" name="Rectangle 11"/>
+          <p:cNvSpPr/>
+          <p:nvPr/>
+        </p:nvSpPr>
+        <p:spPr>
+          <a:xfrm>
+            <a:off x="457200" y="3694176"/>
+            <a:ext cx="128016" cy="1051560"/>
+          </a:xfrm>
+          <a:prstGeom prst="rect">
+            <a:avLst/>
+          </a:prstGeom>
+          <a:solidFill>
+            <a:srgbClr val="A02030"/>
+          </a:solidFill>
+          <a:ln>
+            <a:noFill/>
+          </a:ln>
+        </p:spPr>
+        <p:style>
+          <a:lnRef idx="1">
+            <a:schemeClr val="accent1"/>
+          </a:lnRef>
+          <a:fillRef idx="3">
+            <a:schemeClr val="accent1"/>
+          </a:fillRef>
+          <a:effectRef idx="2">
+            <a:schemeClr val="accent1"/>
+          </a:effectRef>
+          <a:fontRef idx="minor">
+            <a:schemeClr val="lt1"/>
+          </a:fontRef>
+        </p:style>
+        <p:txBody>
+          <a:bodyPr rtlCol="0" anchor="ctr"/>
+          <a:lstStyle/>
+          <a:p>
+            <a:pPr algn="ctr"/>
+          </a:p>
+        </p:txBody>
+      </p:sp>
+      <p:sp>
+        <p:nvSpPr>
+          <p:cNvPr id="13" name="TextBox 12"/>
+          <p:cNvSpPr txBox="1"/>
+          <p:nvPr/>
+        </p:nvSpPr>
+        <p:spPr>
+          <a:xfrm>
+            <a:off x="777240" y="3831336"/>
+            <a:ext cx="10774375" cy="822959"/>
+          </a:xfrm>
+          <a:prstGeom prst="rect">
+            <a:avLst/>
+          </a:prstGeom>
+          <a:noFill/>
+        </p:spPr>
+        <p:txBody>
+          <a:bodyPr wrap="square">
+            <a:spAutoFit/>
+          </a:bodyPr>
+          <a:lstStyle/>
+          <a:p>
+            <a:r>
+              <a:rPr sz="1200" b="1" i="0">
+                <a:solidFill>
+                  <a:srgbClr val="A02030"/>
+                </a:solidFill>
+                <a:latin typeface="Calibri"/>
+              </a:rPr>
+              <a:t>Atención</a:t>
+            </a:r>
+          </a:p>
+          <a:p>
+            <a:pPr>
+              <a:spcBef>
+                <a:spcPts val="400"/>
+              </a:spcBef>
+            </a:pPr>
+            <a:r>
+              <a:rPr sz="1400" b="0" i="0">
+                <a:solidFill>
+                  <a:srgbClr val="333333"/>
+                </a:solidFill>
+                <a:latin typeface="Calibri"/>
+              </a:rPr>
+              <a:t>Sin cloud de pago ni instalaciones obligatorias de hipervisores/Docker Desktop.</a:t>
+            </a:r>
+          </a:p>
+        </p:txBody>
+      </p:sp>
+      <p:sp>
+        <p:nvSpPr>
+          <p:cNvPr id="14" name="TextBox 13"/>
+          <p:cNvSpPr txBox="1"/>
+          <p:nvPr/>
+        </p:nvSpPr>
+        <p:spPr>
+          <a:xfrm>
+            <a:off x="11185855" y="6473952"/>
+            <a:ext cx="640080" cy="274320"/>
+          </a:xfrm>
+          <a:prstGeom prst="rect">
+            <a:avLst/>
+          </a:prstGeom>
+          <a:noFill/>
+        </p:spPr>
+        <p:txBody>
+          <a:bodyPr wrap="square">
+            <a:spAutoFit/>
+          </a:bodyPr>
+          <a:lstStyle/>
+          <a:p>
+            <a:pPr algn="r"/>
+            <a:r>
+              <a:rPr sz="1100" b="0" i="0">
+                <a:solidFill>
+                  <a:srgbClr val="666666"/>
+                </a:solidFill>
+                <a:latin typeface="Calibri"/>
+              </a:rPr>
+              <a:t>13</a:t>
+            </a:r>
+          </a:p>
+        </p:txBody>
+      </p:sp>
+    </p:spTree>
+  </p:cSld>
+  <p:clrMapOvr>
+    <a:masterClrMapping/>
+  </p:clrMapOvr>
+</p:sld>
+</file>
+
+<file path=ppt/slides/slide14.xml><?xml version="1.0" encoding="utf-8"?>
 <p:sld xmlns:a="http://schemas.openxmlformats.org/drawingml/2006/main" xmlns:p="http://schemas.openxmlformats.org/presentationml/2006/main" xmlns:r="http://schemas.openxmlformats.org/officeDocument/2006/relationships">
   <p:cSld>
     <p:bg>

--- a/Arquitectura de Sistemas Computacionales/Clases/Clase 4 - Microservicios y arquitecturas distribuidas/Presentacion.pptx
+++ b/Arquitectura de Sistemas Computacionales/Clases/Clase 4 - Microservicios y arquitecturas distribuidas/Presentacion.pptx
@@ -4984,7 +4984,7 @@
                 </a:solidFill>
                 <a:latin typeface="Calibri"/>
               </a:rPr>
-              <a:t>Copia o describe tu boceto a una IA y pidele el codigo Mermaid: «convierte este diagrama a Mermaid usando el tipo que pide el enunciado». Revisa el resultado: la IA acierta la sintaxis, no tu modelo.</a:t>
+              <a:t>Copia o describe tu boceto a una IA y pidele el codigo Mermaid: «convierte este diagrama a Mermaid usando C4Container». Revisa el resultado: la IA acierta la sintaxis, no tu modelo.</a:t>
             </a:r>
           </a:p>
         </p:txBody>
@@ -5555,7 +5555,7 @@
                 </a:solidFill>
                 <a:latin typeface="Calibri"/>
               </a:rPr>
-              <a:t> Paso 1: abran el C4 Context de la Clase 1 y escriban la lista canonica de nombres de CloudLite: exactamente 5 contenedores con nombre, responsabilidad en una frase y tecnologia tentativa (por ejemplo SPA Web, API CloudLite, Worker Notificaciones, Base de datos Citas, Cola Notificaciones), verificando que ninguno de los 5 sea un modulo interno de otro y que ningun nombre se repita; esa lista se congela y la reutilizan las clases 7, 11 y 15.</a:t>
+              <a:t> Paso 1: decida en la pregunta 12 si su CloudLite es un monolito modular o microservicios, con los dos criterios aplicados a su caso (tamano del equipo con numero y plazo, y que partes cambian juntas) y lo que gana y pierde; verifique que no escribio «un poco de los dos», porque eso vale cero.</a:t>
             </a:r>
           </a:p>
           <a:p>
@@ -5589,7 +5589,7 @@
                 </a:solidFill>
                 <a:latin typeface="Calibri"/>
               </a:rPr>
-              <a:t> Paso 2: escriban en ExamLab el diagrama C4Container en Mermaid con los 5 contenedores dentro de un Container_Boundary, los 2 Person y los 2 System_Ext de la Clase 1, y 8 relaciones etiquetadas con protocolo y puerto, verificando al renderizar que la base de datos usa ContainerDb, la cola usa ContainerQueue y que ningun actor habla directamente con la base de datos.</a:t>
+              <a:t> Paso 2: modele en la pregunta 13 el C4 Container partiendo del C4 Context de la pregunta 3, con entre 2 y 5 contenedores coherentes con la decision anterior, los almacenes de datos como ContainerDb y toda flecha con protocolo y formato; verifique que los nombres de sistema, actores y sistemas externos sean identicos a los del Context.</a:t>
             </a:r>
           </a:p>
           <a:p>
@@ -5623,7 +5623,7 @@
                 </a:solidFill>
                 <a:latin typeface="Calibri"/>
               </a:rPr>
-              <a:t> Paso 3: definan los 3 contratos entre partes en una tabla de 6 columnas (ID, consumidor a proveedor, verbo y ruta, request, respuesta 2xx, error de negocio), verificando que al menos un contrato sea asincrono por evento y que cada fila declare un codigo de error de negocio real como 409 CUPO_OCUPADO o 401 TOKEN_INVALIDO, no solo 500.</a:t>
+              <a:t> Paso 3: liste en la pregunta 14 los 3 contratos con quien llama a quien usando los nombres exactos del diagrama, el verbo y la ruta (o el evento) y el error de negocio con su codigo y su significado en el dominio; verifique que al menos uno sea un 409 de conflicto y que ninguno diga «500 error del servidor».</a:t>
             </a:r>
           </a:p>
           <a:p>
@@ -5657,41 +5657,7 @@
                 </a:solidFill>
                 <a:latin typeface="Calibri"/>
               </a:rPr>
-              <a:t> Paso 4: escriban el sequenceDiagram del contrato principal con 5 participantes y un bloque alt que cubra el camino feliz y el camino de error 409, verificando que los nombres de los participantes sean identicos a los 5 contenedores del paso 1 y que el mensaje de error muestre el mismo codigo declarado en la tabla de contratos.</a:t>
-            </a:r>
-          </a:p>
-          <a:p>
-            <a:pPr>
-              <a:spcAft>
-                <a:spcPts val="800"/>
-              </a:spcAft>
-            </a:pPr>
-            <a:r>
-              <a:rPr sz="1600" b="0" i="0">
-                <a:solidFill>
-                  <a:srgbClr val="333333"/>
-                </a:solidFill>
-                <a:latin typeface="Calibri"/>
-              </a:rPr>
-              <a:t>–   </a:t>
-            </a:r>
-            <a:r>
-              <a:rPr sz="1600" b="1" i="0">
-                <a:solidFill>
-                  <a:srgbClr val="333333"/>
-                </a:solidFill>
-                <a:latin typeface="Calibri"/>
-              </a:rPr>
-              <a:t>5.</a:t>
-            </a:r>
-            <a:r>
-              <a:rPr sz="1600" b="0" i="0">
-                <a:solidFill>
-                  <a:srgbClr val="333333"/>
-                </a:solidFill>
-                <a:latin typeface="Calibri"/>
-              </a:rPr>
-              <a:t> Paso 5: redacten los 3 riesgos de distribucion con su mitigacion, actualicen la seccion Arquitectura logica del informe con el diagrama y la tabla de contratos, y suban las 5 preguntas a ExamLab (modulo Talleres) antes del domingo 23:59, verificando que la lista canonica de 5 nombres aparezca identica en el diagrama, en los contratos y en el informe.</a:t>
+              <a:t> Paso 4: analice en la pregunta 15 los tres riesgos de distribucion nombrando una caja concreta que se cae, contando los saltos de red de una operacion de punta a punta y nombrando un dato expuesto a inconsistencia; con esto la actividad del Corte 1 queda completa y se entrega en ExamLab antes del domingo 23:59 de esta semana.</a:t>
             </a:r>
           </a:p>
         </p:txBody>

--- a/Arquitectura de Sistemas Computacionales/Clases/Clase 4 - Microservicios y arquitecturas distribuidas/Presentacion.pptx
+++ b/Arquitectura de Sistemas Computacionales/Clases/Clase 4 - Microservicios y arquitecturas distribuidas/Presentacion.pptx
@@ -19,6 +19,8 @@
     <p:sldId id="267" r:id="rId18"/>
     <p:sldId id="268" r:id="rId19"/>
     <p:sldId id="269" r:id="rId20"/>
+    <p:sldId id="270" r:id="rId21"/>
+    <p:sldId id="271" r:id="rId22"/>
   </p:sldIdLst>
   <p:sldSz cx="12191695" cy="6858000" type="screen4x3"/>
   <p:notesSz cx="6858000" cy="9144000"/>
@@ -3298,7 +3300,7 @@
                 </a:solidFill>
                 <a:latin typeface="Calibri"/>
               </a:rPr>
-              <a:t>C4 Componentes CloudLite</a:t>
+              <a:t>C4 Containers, contratos y riesgos</a:t>
             </a:r>
           </a:p>
         </p:txBody>
@@ -3471,7 +3473,7 @@
         <p:spPr>
           <a:xfrm>
             <a:off x="0" y="0"/>
-            <a:ext cx="12191695" cy="1170432"/>
+            <a:ext cx="12191695" cy="960120"/>
           </a:xfrm>
           <a:prstGeom prst="rect">
             <a:avLst/>
@@ -3513,7 +3515,7 @@
         </p:nvSpPr>
         <p:spPr>
           <a:xfrm>
-            <a:off x="0" y="1170432"/>
+            <a:off x="0" y="960120"/>
             <a:ext cx="12191695" cy="41148"/>
           </a:xfrm>
           <a:prstGeom prst="rect">
@@ -3557,7 +3559,7 @@
         <p:spPr>
           <a:xfrm>
             <a:off x="457200" y="164592"/>
-            <a:ext cx="11277295" cy="384048"/>
+            <a:ext cx="11277295" cy="502920"/>
           </a:xfrm>
           <a:prstGeom prst="rect">
             <a:avLst/>
@@ -3577,55 +3579,21 @@
                 </a:solidFill>
                 <a:latin typeface="Calibri"/>
               </a:rPr>
-              <a:t>Herramientas de hoy</a:t>
-            </a:r>
-          </a:p>
-        </p:txBody>
-      </p:sp>
-      <p:sp>
-        <p:nvSpPr>
-          <p:cNvPr id="5" name="TextBox 4"/>
-          <p:cNvSpPr txBox="1"/>
-          <p:nvPr/>
-        </p:nvSpPr>
-        <p:spPr>
-          <a:xfrm>
-            <a:off x="457200" y="566928"/>
-            <a:ext cx="11277295" cy="411480"/>
-          </a:xfrm>
-          <a:prstGeom prst="rect">
-            <a:avLst/>
-          </a:prstGeom>
-          <a:noFill/>
-        </p:spPr>
-        <p:txBody>
-          <a:bodyPr wrap="square">
-            <a:spAutoFit/>
-          </a:bodyPr>
-          <a:lstStyle/>
-          <a:p>
-            <a:r>
-              <a:rPr sz="1400" b="0" i="0">
-                <a:solidFill>
-                  <a:srgbClr val="B8D8EE"/>
-                </a:solidFill>
-                <a:latin typeface="Calibri"/>
-              </a:rPr>
-              <a:t>Gratis · navegador o free tier · sin cuenta de pago</a:t>
-            </a:r>
-          </a:p>
-        </p:txBody>
-      </p:sp>
-      <p:sp>
-        <p:nvSpPr>
-          <p:cNvPr id="6" name="Rounded Rectangle 5"/>
+              <a:t>Microservicios de verdad vs microservicios teatro</a:t>
+            </a:r>
+          </a:p>
+        </p:txBody>
+      </p:sp>
+      <p:sp>
+        <p:nvSpPr>
+          <p:cNvPr id="5" name="Rounded Rectangle 4"/>
           <p:cNvSpPr/>
           <p:nvPr/>
         </p:nvSpPr>
         <p:spPr>
           <a:xfrm>
-            <a:off x="457200" y="1591056"/>
-            <a:ext cx="3624986" cy="2299716"/>
+            <a:off x="457200" y="1261872"/>
+            <a:ext cx="5478627" cy="5093208"/>
           </a:xfrm>
           <a:prstGeom prst="roundRect">
             <a:avLst>
@@ -3633,7 +3601,7 @@
             </a:avLst>
           </a:prstGeom>
           <a:solidFill>
-            <a:srgbClr val="F2F2F2"/>
+            <a:srgbClr val="FBE4E4"/>
           </a:solidFill>
           <a:ln>
             <a:noFill/>
@@ -3663,14 +3631,222 @@
       </p:sp>
       <p:sp>
         <p:nvSpPr>
-          <p:cNvPr id="7" name="Rectangle 6"/>
+          <p:cNvPr id="6" name="Rectangle 5"/>
           <p:cNvSpPr/>
           <p:nvPr/>
         </p:nvSpPr>
         <p:spPr>
           <a:xfrm>
-            <a:off x="457200" y="1591056"/>
-            <a:ext cx="3624986" cy="64008"/>
+            <a:off x="457200" y="1261872"/>
+            <a:ext cx="5478627" cy="502920"/>
+          </a:xfrm>
+          <a:prstGeom prst="rect">
+            <a:avLst/>
+          </a:prstGeom>
+          <a:solidFill>
+            <a:srgbClr val="A02030"/>
+          </a:solidFill>
+          <a:ln>
+            <a:noFill/>
+          </a:ln>
+        </p:spPr>
+        <p:style>
+          <a:lnRef idx="1">
+            <a:schemeClr val="accent1"/>
+          </a:lnRef>
+          <a:fillRef idx="3">
+            <a:schemeClr val="accent1"/>
+          </a:fillRef>
+          <a:effectRef idx="2">
+            <a:schemeClr val="accent1"/>
+          </a:effectRef>
+          <a:fontRef idx="minor">
+            <a:schemeClr val="lt1"/>
+          </a:fontRef>
+        </p:style>
+        <p:txBody>
+          <a:bodyPr rtlCol="0" anchor="ctr"/>
+          <a:lstStyle/>
+          <a:p>
+            <a:pPr algn="ctr"/>
+          </a:p>
+        </p:txBody>
+      </p:sp>
+      <p:sp>
+        <p:nvSpPr>
+          <p:cNvPr id="7" name="TextBox 6"/>
+          <p:cNvSpPr txBox="1"/>
+          <p:nvPr/>
+        </p:nvSpPr>
+        <p:spPr>
+          <a:xfrm>
+            <a:off x="594360" y="1353312"/>
+            <a:ext cx="5204307" cy="365760"/>
+          </a:xfrm>
+          <a:prstGeom prst="rect">
+            <a:avLst/>
+          </a:prstGeom>
+          <a:noFill/>
+        </p:spPr>
+        <p:txBody>
+          <a:bodyPr wrap="square" anchor="ctr"/>
+          <a:lstStyle/>
+          <a:p>
+            <a:pPr algn="ctr"/>
+            <a:r>
+              <a:rPr sz="1600" b="1" i="0">
+                <a:solidFill>
+                  <a:srgbClr val="FFFFFF"/>
+                </a:solidFill>
+                <a:latin typeface="Calibri"/>
+              </a:rPr>
+              <a:t>Teatro (lo que NO queremos)</a:t>
+            </a:r>
+          </a:p>
+        </p:txBody>
+      </p:sp>
+      <p:sp>
+        <p:nvSpPr>
+          <p:cNvPr id="8" name="TextBox 7"/>
+          <p:cNvSpPr txBox="1"/>
+          <p:nvPr/>
+        </p:nvSpPr>
+        <p:spPr>
+          <a:xfrm>
+            <a:off x="621792" y="1901952"/>
+            <a:ext cx="5158587" cy="4498848"/>
+          </a:xfrm>
+          <a:prstGeom prst="rect">
+            <a:avLst/>
+          </a:prstGeom>
+          <a:noFill/>
+        </p:spPr>
+        <p:txBody>
+          <a:bodyPr wrap="square">
+            <a:spAutoFit/>
+          </a:bodyPr>
+          <a:lstStyle/>
+          <a:p>
+            <a:pPr>
+              <a:spcAft>
+                <a:spcPts val="800"/>
+              </a:spcAft>
+            </a:pPr>
+            <a:r>
+              <a:rPr sz="1500" b="0" i="0">
+                <a:solidFill>
+                  <a:srgbClr val="333333"/>
+                </a:solidFill>
+                <a:latin typeface="Calibri"/>
+              </a:rPr>
+              <a:t>–   12 servicios para un equipo de 3</a:t>
+            </a:r>
+          </a:p>
+          <a:p>
+            <a:pPr>
+              <a:spcAft>
+                <a:spcPts val="800"/>
+              </a:spcAft>
+            </a:pPr>
+            <a:r>
+              <a:rPr sz="1500" b="0" i="0">
+                <a:solidFill>
+                  <a:srgbClr val="333333"/>
+                </a:solidFill>
+                <a:latin typeface="Calibri"/>
+              </a:rPr>
+              <a:t>–   Se separan por capricho tecnico, no por negocio</a:t>
+            </a:r>
+          </a:p>
+          <a:p>
+            <a:pPr>
+              <a:spcAft>
+                <a:spcPts val="800"/>
+              </a:spcAft>
+            </a:pPr>
+            <a:r>
+              <a:rPr sz="1500" b="0" i="0">
+                <a:solidFill>
+                  <a:srgbClr val="333333"/>
+                </a:solidFill>
+                <a:latin typeface="Calibri"/>
+              </a:rPr>
+              <a:t>–   Flechas sin protocolo ni verbo</a:t>
+            </a:r>
+          </a:p>
+          <a:p>
+            <a:pPr>
+              <a:spcAft>
+                <a:spcPts val="800"/>
+              </a:spcAft>
+            </a:pPr>
+            <a:r>
+              <a:rPr sz="1500" b="0" i="0">
+                <a:solidFill>
+                  <a:srgbClr val="333333"/>
+                </a:solidFill>
+                <a:latin typeface="Calibri"/>
+              </a:rPr>
+              <a:t>–   Nadie sabe explicar por que ese corte</a:t>
+            </a:r>
+          </a:p>
+        </p:txBody>
+      </p:sp>
+      <p:sp>
+        <p:nvSpPr>
+          <p:cNvPr id="9" name="Rounded Rectangle 8"/>
+          <p:cNvSpPr/>
+          <p:nvPr/>
+        </p:nvSpPr>
+        <p:spPr>
+          <a:xfrm>
+            <a:off x="6255867" y="1261872"/>
+            <a:ext cx="5478627" cy="5093208"/>
+          </a:xfrm>
+          <a:prstGeom prst="roundRect">
+            <a:avLst>
+              <a:gd name="adj" fmla="val 12000"/>
+            </a:avLst>
+          </a:prstGeom>
+          <a:solidFill>
+            <a:srgbClr val="E8F4FA"/>
+          </a:solidFill>
+          <a:ln>
+            <a:noFill/>
+          </a:ln>
+        </p:spPr>
+        <p:style>
+          <a:lnRef idx="1">
+            <a:schemeClr val="accent1"/>
+          </a:lnRef>
+          <a:fillRef idx="3">
+            <a:schemeClr val="accent1"/>
+          </a:fillRef>
+          <a:effectRef idx="2">
+            <a:schemeClr val="accent1"/>
+          </a:effectRef>
+          <a:fontRef idx="minor">
+            <a:schemeClr val="lt1"/>
+          </a:fontRef>
+        </p:style>
+        <p:txBody>
+          <a:bodyPr rtlCol="0" anchor="ctr"/>
+          <a:lstStyle/>
+          <a:p>
+            <a:pPr algn="ctr"/>
+          </a:p>
+        </p:txBody>
+      </p:sp>
+      <p:sp>
+        <p:nvSpPr>
+          <p:cNvPr id="10" name="Rectangle 9"/>
+          <p:cNvSpPr/>
+          <p:nvPr/>
+        </p:nvSpPr>
+        <p:spPr>
+          <a:xfrm>
+            <a:off x="6255867" y="1261872"/>
+            <a:ext cx="5478627" cy="502920"/>
           </a:xfrm>
           <a:prstGeom prst="rect">
             <a:avLst/>
@@ -3706,81 +3882,47 @@
       </p:sp>
       <p:sp>
         <p:nvSpPr>
-          <p:cNvPr id="8" name="Rectangle 7"/>
-          <p:cNvSpPr/>
-          <p:nvPr/>
-        </p:nvSpPr>
-        <p:spPr>
-          <a:xfrm>
-            <a:off x="457200" y="1655064"/>
-            <a:ext cx="3624986" cy="27432"/>
-          </a:xfrm>
-          <a:prstGeom prst="rect">
-            <a:avLst/>
-          </a:prstGeom>
-          <a:solidFill>
-            <a:srgbClr val="FFD000"/>
-          </a:solidFill>
-          <a:ln>
-            <a:noFill/>
-          </a:ln>
-        </p:spPr>
-        <p:style>
-          <a:lnRef idx="1">
-            <a:schemeClr val="accent1"/>
-          </a:lnRef>
-          <a:fillRef idx="3">
-            <a:schemeClr val="accent1"/>
-          </a:fillRef>
-          <a:effectRef idx="2">
-            <a:schemeClr val="accent1"/>
-          </a:effectRef>
-          <a:fontRef idx="minor">
-            <a:schemeClr val="lt1"/>
-          </a:fontRef>
-        </p:style>
-        <p:txBody>
-          <a:bodyPr rtlCol="0" anchor="ctr"/>
+          <p:cNvPr id="11" name="TextBox 10"/>
+          <p:cNvSpPr txBox="1"/>
+          <p:nvPr/>
+        </p:nvSpPr>
+        <p:spPr>
+          <a:xfrm>
+            <a:off x="6393027" y="1353312"/>
+            <a:ext cx="5204307" cy="365760"/>
+          </a:xfrm>
+          <a:prstGeom prst="rect">
+            <a:avLst/>
+          </a:prstGeom>
+          <a:noFill/>
+        </p:spPr>
+        <p:txBody>
+          <a:bodyPr wrap="square" anchor="ctr"/>
           <a:lstStyle/>
           <a:p>
             <a:pPr algn="ctr"/>
-          </a:p>
-        </p:txBody>
-      </p:sp>
-      <p:pic>
-        <p:nvPicPr>
-          <p:cNvPr id="9" name="Picture 8" descr="drawio.png"/>
-          <p:cNvPicPr>
-            <a:picLocks noChangeAspect="1"/>
-          </p:cNvPicPr>
-          <p:nvPr/>
-        </p:nvPicPr>
-        <p:blipFill>
-          <a:blip r:embed="rId2"/>
-          <a:stretch>
-            <a:fillRect/>
-          </a:stretch>
-        </p:blipFill>
-        <p:spPr>
-          <a:xfrm>
-            <a:off x="1659331" y="1847087"/>
-            <a:ext cx="1220724" cy="1220724"/>
-          </a:xfrm>
-          <a:prstGeom prst="rect">
-            <a:avLst/>
-          </a:prstGeom>
-        </p:spPr>
-      </p:pic>
-      <p:sp>
-        <p:nvSpPr>
-          <p:cNvPr id="10" name="TextBox 9"/>
+            <a:r>
+              <a:rPr sz="1600" b="1" i="0">
+                <a:solidFill>
+                  <a:srgbClr val="FFFFFF"/>
+                </a:solidFill>
+                <a:latin typeface="Calibri"/>
+              </a:rPr>
+              <a:t>Frontera justificada</a:t>
+            </a:r>
+          </a:p>
+        </p:txBody>
+      </p:sp>
+      <p:sp>
+        <p:nvSpPr>
+          <p:cNvPr id="12" name="TextBox 11"/>
           <p:cNvSpPr txBox="1"/>
           <p:nvPr/>
         </p:nvSpPr>
         <p:spPr>
           <a:xfrm>
-            <a:off x="530352" y="3159251"/>
-            <a:ext cx="3478682" cy="621792"/>
+            <a:off x="6420459" y="1901952"/>
+            <a:ext cx="5158587" cy="4498848"/>
           </a:xfrm>
           <a:prstGeom prst="rect">
             <a:avLst/>
@@ -3788,653 +3930,79 @@
           <a:noFill/>
         </p:spPr>
         <p:txBody>
-          <a:bodyPr wrap="square" anchor="t"/>
-          <a:lstStyle/>
-          <a:p>
-            <a:pPr algn="ctr"/>
-            <a:r>
-              <a:rPr sz="1300" b="1" i="0">
-                <a:solidFill>
-                  <a:srgbClr val="095292"/>
-                </a:solidFill>
-                <a:latin typeface="Calibri"/>
-              </a:rPr>
-              <a:t>draw.io</a:t>
-            </a:r>
-          </a:p>
-          <a:p>
-            <a:pPr algn="ctr">
-              <a:spcBef>
-                <a:spcPts val="200"/>
-              </a:spcBef>
+          <a:bodyPr wrap="square">
+            <a:spAutoFit/>
+          </a:bodyPr>
+          <a:lstStyle/>
+          <a:p>
+            <a:pPr>
+              <a:spcAft>
+                <a:spcPts val="800"/>
+              </a:spcAft>
             </a:pPr>
             <a:r>
-              <a:rPr sz="1000" b="0" i="0">
-                <a:solidFill>
-                  <a:srgbClr val="666666"/>
-                </a:solidFill>
-                <a:latin typeface="Calibri"/>
-              </a:rPr>
-              <a:t>C4 Containers</a:t>
-            </a:r>
-          </a:p>
-        </p:txBody>
-      </p:sp>
-      <p:sp>
-        <p:nvSpPr>
-          <p:cNvPr id="11" name="Rounded Rectangle 10"/>
-          <p:cNvSpPr/>
-          <p:nvPr/>
-        </p:nvSpPr>
-        <p:spPr>
-          <a:xfrm>
-            <a:off x="4283354" y="1591056"/>
-            <a:ext cx="3624986" cy="2299716"/>
-          </a:xfrm>
-          <a:prstGeom prst="roundRect">
-            <a:avLst>
-              <a:gd name="adj" fmla="val 12000"/>
-            </a:avLst>
-          </a:prstGeom>
-          <a:solidFill>
-            <a:srgbClr val="F2F2F2"/>
-          </a:solidFill>
-          <a:ln>
-            <a:noFill/>
-          </a:ln>
-        </p:spPr>
-        <p:style>
-          <a:lnRef idx="1">
-            <a:schemeClr val="accent1"/>
-          </a:lnRef>
-          <a:fillRef idx="3">
-            <a:schemeClr val="accent1"/>
-          </a:fillRef>
-          <a:effectRef idx="2">
-            <a:schemeClr val="accent1"/>
-          </a:effectRef>
-          <a:fontRef idx="minor">
-            <a:schemeClr val="lt1"/>
-          </a:fontRef>
-        </p:style>
-        <p:txBody>
-          <a:bodyPr rtlCol="0" anchor="ctr"/>
-          <a:lstStyle/>
-          <a:p>
-            <a:pPr algn="ctr"/>
-          </a:p>
-        </p:txBody>
-      </p:sp>
-      <p:sp>
-        <p:nvSpPr>
-          <p:cNvPr id="12" name="Rectangle 11"/>
-          <p:cNvSpPr/>
-          <p:nvPr/>
-        </p:nvSpPr>
-        <p:spPr>
-          <a:xfrm>
-            <a:off x="4283354" y="1591056"/>
-            <a:ext cx="3624986" cy="64008"/>
-          </a:xfrm>
-          <a:prstGeom prst="rect">
-            <a:avLst/>
-          </a:prstGeom>
-          <a:solidFill>
-            <a:srgbClr val="095292"/>
-          </a:solidFill>
-          <a:ln>
-            <a:noFill/>
-          </a:ln>
-        </p:spPr>
-        <p:style>
-          <a:lnRef idx="1">
-            <a:schemeClr val="accent1"/>
-          </a:lnRef>
-          <a:fillRef idx="3">
-            <a:schemeClr val="accent1"/>
-          </a:fillRef>
-          <a:effectRef idx="2">
-            <a:schemeClr val="accent1"/>
-          </a:effectRef>
-          <a:fontRef idx="minor">
-            <a:schemeClr val="lt1"/>
-          </a:fontRef>
-        </p:style>
-        <p:txBody>
-          <a:bodyPr rtlCol="0" anchor="ctr"/>
-          <a:lstStyle/>
-          <a:p>
-            <a:pPr algn="ctr"/>
-          </a:p>
-        </p:txBody>
-      </p:sp>
-      <p:sp>
-        <p:nvSpPr>
-          <p:cNvPr id="13" name="Rectangle 12"/>
-          <p:cNvSpPr/>
-          <p:nvPr/>
-        </p:nvSpPr>
-        <p:spPr>
-          <a:xfrm>
-            <a:off x="4283354" y="1655064"/>
-            <a:ext cx="3624986" cy="27432"/>
-          </a:xfrm>
-          <a:prstGeom prst="rect">
-            <a:avLst/>
-          </a:prstGeom>
-          <a:solidFill>
-            <a:srgbClr val="FFD000"/>
-          </a:solidFill>
-          <a:ln>
-            <a:noFill/>
-          </a:ln>
-        </p:spPr>
-        <p:style>
-          <a:lnRef idx="1">
-            <a:schemeClr val="accent1"/>
-          </a:lnRef>
-          <a:fillRef idx="3">
-            <a:schemeClr val="accent1"/>
-          </a:fillRef>
-          <a:effectRef idx="2">
-            <a:schemeClr val="accent1"/>
-          </a:effectRef>
-          <a:fontRef idx="minor">
-            <a:schemeClr val="lt1"/>
-          </a:fontRef>
-        </p:style>
-        <p:txBody>
-          <a:bodyPr rtlCol="0" anchor="ctr"/>
-          <a:lstStyle/>
-          <a:p>
-            <a:pPr algn="ctr"/>
-          </a:p>
-        </p:txBody>
-      </p:sp>
-      <p:pic>
-        <p:nvPicPr>
-          <p:cNvPr id="14" name="Picture 13" descr="excalidraw.png"/>
-          <p:cNvPicPr>
-            <a:picLocks noChangeAspect="1"/>
-          </p:cNvPicPr>
-          <p:nvPr/>
-        </p:nvPicPr>
-        <p:blipFill>
-          <a:blip r:embed="rId3"/>
-          <a:stretch>
-            <a:fillRect/>
-          </a:stretch>
-        </p:blipFill>
-        <p:spPr>
-          <a:xfrm>
-            <a:off x="5485485" y="1847087"/>
-            <a:ext cx="1220724" cy="1220724"/>
-          </a:xfrm>
-          <a:prstGeom prst="rect">
-            <a:avLst/>
-          </a:prstGeom>
-        </p:spPr>
-      </p:pic>
-      <p:sp>
-        <p:nvSpPr>
-          <p:cNvPr id="15" name="TextBox 14"/>
-          <p:cNvSpPr txBox="1"/>
-          <p:nvPr/>
-        </p:nvSpPr>
-        <p:spPr>
-          <a:xfrm>
-            <a:off x="4356506" y="3159251"/>
-            <a:ext cx="3478682" cy="621792"/>
-          </a:xfrm>
-          <a:prstGeom prst="rect">
-            <a:avLst/>
-          </a:prstGeom>
-          <a:noFill/>
-        </p:spPr>
-        <p:txBody>
-          <a:bodyPr wrap="square" anchor="t"/>
-          <a:lstStyle/>
-          <a:p>
-            <a:pPr algn="ctr"/>
-            <a:r>
-              <a:rPr sz="1300" b="1" i="0">
-                <a:solidFill>
-                  <a:srgbClr val="095292"/>
-                </a:solidFill>
-                <a:latin typeface="Calibri"/>
-              </a:rPr>
-              <a:t>Excalidraw</a:t>
-            </a:r>
-          </a:p>
-          <a:p>
-            <a:pPr algn="ctr">
-              <a:spcBef>
-                <a:spcPts val="200"/>
-              </a:spcBef>
+              <a:rPr sz="1500" b="0" i="0">
+                <a:solidFill>
+                  <a:srgbClr val="333333"/>
+                </a:solidFill>
+                <a:latin typeface="Calibri"/>
+              </a:rPr>
+              <a:t>–   2-5 contenedores logicos, cada uno con su razon</a:t>
+            </a:r>
+          </a:p>
+          <a:p>
+            <a:pPr>
+              <a:spcAft>
+                <a:spcPts val="800"/>
+              </a:spcAft>
             </a:pPr>
             <a:r>
-              <a:rPr sz="1000" b="0" i="0">
-                <a:solidFill>
-                  <a:srgbClr val="666666"/>
-                </a:solidFill>
-                <a:latin typeface="Calibri"/>
-              </a:rPr>
-              <a:t>Boceto rapido</a:t>
-            </a:r>
-          </a:p>
-        </p:txBody>
-      </p:sp>
-      <p:sp>
-        <p:nvSpPr>
-          <p:cNvPr id="16" name="Rounded Rectangle 15"/>
-          <p:cNvSpPr/>
-          <p:nvPr/>
-        </p:nvSpPr>
-        <p:spPr>
-          <a:xfrm>
-            <a:off x="8109508" y="1591056"/>
-            <a:ext cx="3624986" cy="2299716"/>
-          </a:xfrm>
-          <a:prstGeom prst="roundRect">
-            <a:avLst>
-              <a:gd name="adj" fmla="val 12000"/>
-            </a:avLst>
-          </a:prstGeom>
-          <a:solidFill>
-            <a:srgbClr val="F2F2F2"/>
-          </a:solidFill>
-          <a:ln>
-            <a:noFill/>
-          </a:ln>
-        </p:spPr>
-        <p:style>
-          <a:lnRef idx="1">
-            <a:schemeClr val="accent1"/>
-          </a:lnRef>
-          <a:fillRef idx="3">
-            <a:schemeClr val="accent1"/>
-          </a:fillRef>
-          <a:effectRef idx="2">
-            <a:schemeClr val="accent1"/>
-          </a:effectRef>
-          <a:fontRef idx="minor">
-            <a:schemeClr val="lt1"/>
-          </a:fontRef>
-        </p:style>
-        <p:txBody>
-          <a:bodyPr rtlCol="0" anchor="ctr"/>
-          <a:lstStyle/>
-          <a:p>
-            <a:pPr algn="ctr"/>
-          </a:p>
-        </p:txBody>
-      </p:sp>
-      <p:sp>
-        <p:nvSpPr>
-          <p:cNvPr id="17" name="Rectangle 16"/>
-          <p:cNvSpPr/>
-          <p:nvPr/>
-        </p:nvSpPr>
-        <p:spPr>
-          <a:xfrm>
-            <a:off x="8109508" y="1591056"/>
-            <a:ext cx="3624986" cy="64008"/>
-          </a:xfrm>
-          <a:prstGeom prst="rect">
-            <a:avLst/>
-          </a:prstGeom>
-          <a:solidFill>
-            <a:srgbClr val="095292"/>
-          </a:solidFill>
-          <a:ln>
-            <a:noFill/>
-          </a:ln>
-        </p:spPr>
-        <p:style>
-          <a:lnRef idx="1">
-            <a:schemeClr val="accent1"/>
-          </a:lnRef>
-          <a:fillRef idx="3">
-            <a:schemeClr val="accent1"/>
-          </a:fillRef>
-          <a:effectRef idx="2">
-            <a:schemeClr val="accent1"/>
-          </a:effectRef>
-          <a:fontRef idx="minor">
-            <a:schemeClr val="lt1"/>
-          </a:fontRef>
-        </p:style>
-        <p:txBody>
-          <a:bodyPr rtlCol="0" anchor="ctr"/>
-          <a:lstStyle/>
-          <a:p>
-            <a:pPr algn="ctr"/>
-          </a:p>
-        </p:txBody>
-      </p:sp>
-      <p:sp>
-        <p:nvSpPr>
-          <p:cNvPr id="18" name="Rectangle 17"/>
-          <p:cNvSpPr/>
-          <p:nvPr/>
-        </p:nvSpPr>
-        <p:spPr>
-          <a:xfrm>
-            <a:off x="8109508" y="1655064"/>
-            <a:ext cx="3624986" cy="27432"/>
-          </a:xfrm>
-          <a:prstGeom prst="rect">
-            <a:avLst/>
-          </a:prstGeom>
-          <a:solidFill>
-            <a:srgbClr val="FFD000"/>
-          </a:solidFill>
-          <a:ln>
-            <a:noFill/>
-          </a:ln>
-        </p:spPr>
-        <p:style>
-          <a:lnRef idx="1">
-            <a:schemeClr val="accent1"/>
-          </a:lnRef>
-          <a:fillRef idx="3">
-            <a:schemeClr val="accent1"/>
-          </a:fillRef>
-          <a:effectRef idx="2">
-            <a:schemeClr val="accent1"/>
-          </a:effectRef>
-          <a:fontRef idx="minor">
-            <a:schemeClr val="lt1"/>
-          </a:fontRef>
-        </p:style>
-        <p:txBody>
-          <a:bodyPr rtlCol="0" anchor="ctr"/>
-          <a:lstStyle/>
-          <a:p>
-            <a:pPr algn="ctr"/>
-          </a:p>
-        </p:txBody>
-      </p:sp>
-      <p:pic>
-        <p:nvPicPr>
-          <p:cNvPr id="19" name="Picture 18" descr="mermaid.png"/>
-          <p:cNvPicPr>
-            <a:picLocks noChangeAspect="1"/>
-          </p:cNvPicPr>
-          <p:nvPr/>
-        </p:nvPicPr>
-        <p:blipFill>
-          <a:blip r:embed="rId4"/>
-          <a:stretch>
-            <a:fillRect/>
-          </a:stretch>
-        </p:blipFill>
-        <p:spPr>
-          <a:xfrm>
-            <a:off x="9311640" y="1847087"/>
-            <a:ext cx="1220724" cy="1220724"/>
-          </a:xfrm>
-          <a:prstGeom prst="rect">
-            <a:avLst/>
-          </a:prstGeom>
-        </p:spPr>
-      </p:pic>
-      <p:sp>
-        <p:nvSpPr>
-          <p:cNvPr id="20" name="TextBox 19"/>
-          <p:cNvSpPr txBox="1"/>
-          <p:nvPr/>
-        </p:nvSpPr>
-        <p:spPr>
-          <a:xfrm>
-            <a:off x="8182660" y="3159251"/>
-            <a:ext cx="3478682" cy="621792"/>
-          </a:xfrm>
-          <a:prstGeom prst="rect">
-            <a:avLst/>
-          </a:prstGeom>
-          <a:noFill/>
-        </p:spPr>
-        <p:txBody>
-          <a:bodyPr wrap="square" anchor="t"/>
-          <a:lstStyle/>
-          <a:p>
-            <a:pPr algn="ctr"/>
-            <a:r>
-              <a:rPr sz="1300" b="1" i="0">
-                <a:solidFill>
-                  <a:srgbClr val="095292"/>
-                </a:solidFill>
-                <a:latin typeface="Calibri"/>
-              </a:rPr>
-              <a:t>Mermaid</a:t>
-            </a:r>
-          </a:p>
-          <a:p>
-            <a:pPr algn="ctr">
-              <a:spcBef>
-                <a:spcPts val="200"/>
-              </a:spcBef>
+              <a:rPr sz="1500" b="0" i="0">
+                <a:solidFill>
+                  <a:srgbClr val="333333"/>
+                </a:solidFill>
+                <a:latin typeface="Calibri"/>
+              </a:rPr>
+              <a:t>–   Frontera = responsabilidad de negocio</a:t>
+            </a:r>
+          </a:p>
+          <a:p>
+            <a:pPr>
+              <a:spcAft>
+                <a:spcPts val="800"/>
+              </a:spcAft>
             </a:pPr>
             <a:r>
-              <a:rPr sz="1000" b="0" i="0">
-                <a:solidFill>
-                  <a:srgbClr val="666666"/>
-                </a:solidFill>
-                <a:latin typeface="Calibri"/>
-              </a:rPr>
-              <a:t>Codigo del diagrama</a:t>
-            </a:r>
-          </a:p>
-        </p:txBody>
-      </p:sp>
-      <p:sp>
-        <p:nvSpPr>
-          <p:cNvPr id="21" name="Rounded Rectangle 20"/>
-          <p:cNvSpPr/>
-          <p:nvPr/>
-        </p:nvSpPr>
-        <p:spPr>
-          <a:xfrm>
-            <a:off x="4283354" y="4055364"/>
-            <a:ext cx="3624986" cy="2299716"/>
-          </a:xfrm>
-          <a:prstGeom prst="roundRect">
-            <a:avLst>
-              <a:gd name="adj" fmla="val 12000"/>
-            </a:avLst>
-          </a:prstGeom>
-          <a:solidFill>
-            <a:srgbClr val="F2F2F2"/>
-          </a:solidFill>
-          <a:ln>
-            <a:noFill/>
-          </a:ln>
-        </p:spPr>
-        <p:style>
-          <a:lnRef idx="1">
-            <a:schemeClr val="accent1"/>
-          </a:lnRef>
-          <a:fillRef idx="3">
-            <a:schemeClr val="accent1"/>
-          </a:fillRef>
-          <a:effectRef idx="2">
-            <a:schemeClr val="accent1"/>
-          </a:effectRef>
-          <a:fontRef idx="minor">
-            <a:schemeClr val="lt1"/>
-          </a:fontRef>
-        </p:style>
-        <p:txBody>
-          <a:bodyPr rtlCol="0" anchor="ctr"/>
-          <a:lstStyle/>
-          <a:p>
-            <a:pPr algn="ctr"/>
-          </a:p>
-        </p:txBody>
-      </p:sp>
-      <p:sp>
-        <p:nvSpPr>
-          <p:cNvPr id="22" name="Rectangle 21"/>
-          <p:cNvSpPr/>
-          <p:nvPr/>
-        </p:nvSpPr>
-        <p:spPr>
-          <a:xfrm>
-            <a:off x="4283354" y="4055364"/>
-            <a:ext cx="3624986" cy="64008"/>
-          </a:xfrm>
-          <a:prstGeom prst="rect">
-            <a:avLst/>
-          </a:prstGeom>
-          <a:solidFill>
-            <a:srgbClr val="095292"/>
-          </a:solidFill>
-          <a:ln>
-            <a:noFill/>
-          </a:ln>
-        </p:spPr>
-        <p:style>
-          <a:lnRef idx="1">
-            <a:schemeClr val="accent1"/>
-          </a:lnRef>
-          <a:fillRef idx="3">
-            <a:schemeClr val="accent1"/>
-          </a:fillRef>
-          <a:effectRef idx="2">
-            <a:schemeClr val="accent1"/>
-          </a:effectRef>
-          <a:fontRef idx="minor">
-            <a:schemeClr val="lt1"/>
-          </a:fontRef>
-        </p:style>
-        <p:txBody>
-          <a:bodyPr rtlCol="0" anchor="ctr"/>
-          <a:lstStyle/>
-          <a:p>
-            <a:pPr algn="ctr"/>
-          </a:p>
-        </p:txBody>
-      </p:sp>
-      <p:sp>
-        <p:nvSpPr>
-          <p:cNvPr id="23" name="Rectangle 22"/>
-          <p:cNvSpPr/>
-          <p:nvPr/>
-        </p:nvSpPr>
-        <p:spPr>
-          <a:xfrm>
-            <a:off x="4283354" y="4119372"/>
-            <a:ext cx="3624986" cy="27432"/>
-          </a:xfrm>
-          <a:prstGeom prst="rect">
-            <a:avLst/>
-          </a:prstGeom>
-          <a:solidFill>
-            <a:srgbClr val="FFD000"/>
-          </a:solidFill>
-          <a:ln>
-            <a:noFill/>
-          </a:ln>
-        </p:spPr>
-        <p:style>
-          <a:lnRef idx="1">
-            <a:schemeClr val="accent1"/>
-          </a:lnRef>
-          <a:fillRef idx="3">
-            <a:schemeClr val="accent1"/>
-          </a:fillRef>
-          <a:effectRef idx="2">
-            <a:schemeClr val="accent1"/>
-          </a:effectRef>
-          <a:fontRef idx="minor">
-            <a:schemeClr val="lt1"/>
-          </a:fontRef>
-        </p:style>
-        <p:txBody>
-          <a:bodyPr rtlCol="0" anchor="ctr"/>
-          <a:lstStyle/>
-          <a:p>
-            <a:pPr algn="ctr"/>
-          </a:p>
-        </p:txBody>
-      </p:sp>
-      <p:pic>
-        <p:nvPicPr>
-          <p:cNvPr id="24" name="Picture 23" descr="examlab.png"/>
-          <p:cNvPicPr>
-            <a:picLocks noChangeAspect="1"/>
-          </p:cNvPicPr>
-          <p:nvPr/>
-        </p:nvPicPr>
-        <p:blipFill>
-          <a:blip r:embed="rId5"/>
-          <a:stretch>
-            <a:fillRect/>
-          </a:stretch>
-        </p:blipFill>
-        <p:spPr>
-          <a:xfrm>
-            <a:off x="5485485" y="4311396"/>
-            <a:ext cx="1220724" cy="1220724"/>
-          </a:xfrm>
-          <a:prstGeom prst="rect">
-            <a:avLst/>
-          </a:prstGeom>
-        </p:spPr>
-      </p:pic>
-      <p:sp>
-        <p:nvSpPr>
-          <p:cNvPr id="25" name="TextBox 24"/>
-          <p:cNvSpPr txBox="1"/>
-          <p:nvPr/>
-        </p:nvSpPr>
-        <p:spPr>
-          <a:xfrm>
-            <a:off x="4356506" y="5623560"/>
-            <a:ext cx="3478682" cy="621792"/>
-          </a:xfrm>
-          <a:prstGeom prst="rect">
-            <a:avLst/>
-          </a:prstGeom>
-          <a:noFill/>
-        </p:spPr>
-        <p:txBody>
-          <a:bodyPr wrap="square" anchor="t"/>
-          <a:lstStyle/>
-          <a:p>
-            <a:pPr algn="ctr"/>
-            <a:r>
-              <a:rPr sz="1300" b="1" i="0">
-                <a:solidFill>
-                  <a:srgbClr val="095292"/>
-                </a:solidFill>
-                <a:latin typeface="Calibri"/>
-              </a:rPr>
-              <a:t>ExamLab</a:t>
-            </a:r>
-          </a:p>
-          <a:p>
-            <a:pPr algn="ctr">
-              <a:spcBef>
-                <a:spcPts val="200"/>
-              </a:spcBef>
+              <a:rPr sz="1500" b="0" i="0">
+                <a:solidFill>
+                  <a:srgbClr val="333333"/>
+                </a:solidFill>
+                <a:latin typeface="Calibri"/>
+              </a:rPr>
+              <a:t>–   Cada flecha: protocolo + verbo (HTTP/JSON, 'reserva')</a:t>
+            </a:r>
+          </a:p>
+          <a:p>
+            <a:pPr>
+              <a:spcAft>
+                <a:spcPts val="800"/>
+              </a:spcAft>
             </a:pPr>
             <a:r>
-              <a:rPr sz="1000" b="0" i="0">
-                <a:solidFill>
-                  <a:srgbClr val="666666"/>
-                </a:solidFill>
-                <a:latin typeface="Calibri"/>
-              </a:rPr>
-              <a:t>Donde se entrega</a:t>
-            </a:r>
-          </a:p>
-        </p:txBody>
-      </p:sp>
-      <p:sp>
-        <p:nvSpPr>
-          <p:cNvPr id="26" name="TextBox 25"/>
+              <a:rPr sz="1500" b="0" i="0">
+                <a:solidFill>
+                  <a:srgbClr val="333333"/>
+                </a:solidFill>
+                <a:latin typeface="Calibri"/>
+              </a:rPr>
+              <a:t>–   Se explica en 60 s sin leer notas</a:t>
+            </a:r>
+          </a:p>
+        </p:txBody>
+      </p:sp>
+      <p:sp>
+        <p:nvSpPr>
+          <p:cNvPr id="13" name="TextBox 12"/>
           <p:cNvSpPr txBox="1"/>
           <p:nvPr/>
         </p:nvSpPr>
@@ -4502,7 +4070,7 @@
         <p:spPr>
           <a:xfrm>
             <a:off x="0" y="0"/>
-            <a:ext cx="12191695" cy="1170432"/>
+            <a:ext cx="12191695" cy="960120"/>
           </a:xfrm>
           <a:prstGeom prst="rect">
             <a:avLst/>
@@ -4544,7 +4112,7 @@
         </p:nvSpPr>
         <p:spPr>
           <a:xfrm>
-            <a:off x="0" y="1170432"/>
+            <a:off x="0" y="960120"/>
             <a:ext cx="12191695" cy="41148"/>
           </a:xfrm>
           <a:prstGeom prst="rect">
@@ -4588,7 +4156,7 @@
         <p:spPr>
           <a:xfrm>
             <a:off x="457200" y="164592"/>
-            <a:ext cx="11277295" cy="384048"/>
+            <a:ext cx="11277295" cy="502920"/>
           </a:xfrm>
           <a:prstGeom prst="rect">
             <a:avLst/>
@@ -4608,55 +4176,21 @@
                 </a:solidFill>
                 <a:latin typeface="Calibri"/>
               </a:rPr>
-              <a:t>Del boceto a ExamLab (diagrama)</a:t>
-            </a:r>
-          </a:p>
-        </p:txBody>
-      </p:sp>
-      <p:sp>
-        <p:nvSpPr>
-          <p:cNvPr id="5" name="TextBox 4"/>
-          <p:cNvSpPr txBox="1"/>
-          <p:nvPr/>
-        </p:nvSpPr>
-        <p:spPr>
-          <a:xfrm>
-            <a:off x="457200" y="566928"/>
-            <a:ext cx="11277295" cy="411480"/>
-          </a:xfrm>
-          <a:prstGeom prst="rect">
-            <a:avLst/>
-          </a:prstGeom>
-          <a:noFill/>
-        </p:spPr>
-        <p:txBody>
-          <a:bodyPr wrap="square">
-            <a:spAutoFit/>
-          </a:bodyPr>
-          <a:lstStyle/>
-          <a:p>
-            <a:r>
-              <a:rPr sz="1400" b="0" i="0">
-                <a:solidFill>
-                  <a:srgbClr val="B8D8EE"/>
-                </a:solidFill>
-                <a:latin typeface="Calibri"/>
-              </a:rPr>
-              <a:t>El diagrama se entrega como código Mermaid dentro de ExamLab, no como imagen</a:t>
-            </a:r>
-          </a:p>
-        </p:txBody>
-      </p:sp>
-      <p:sp>
-        <p:nvSpPr>
-          <p:cNvPr id="6" name="Rounded Rectangle 5"/>
+              <a:t>C4Container en Mermaid: el molde que ExamLab renderiza</a:t>
+            </a:r>
+          </a:p>
+        </p:txBody>
+      </p:sp>
+      <p:sp>
+        <p:nvSpPr>
+          <p:cNvPr id="5" name="Rounded Rectangle 4"/>
           <p:cNvSpPr/>
           <p:nvPr/>
         </p:nvSpPr>
         <p:spPr>
           <a:xfrm>
-            <a:off x="457200" y="1659636"/>
-            <a:ext cx="11277295" cy="1051560"/>
+            <a:off x="457200" y="1261872"/>
+            <a:ext cx="11277295" cy="4773168"/>
           </a:xfrm>
           <a:prstGeom prst="roundRect">
             <a:avLst>
@@ -4664,7 +4198,7 @@
             </a:avLst>
           </a:prstGeom>
           <a:solidFill>
-            <a:srgbClr val="F2F2F2"/>
+            <a:srgbClr val="1E2A38"/>
           </a:solidFill>
           <a:ln>
             <a:noFill/>
@@ -4694,19 +4228,17 @@
       </p:sp>
       <p:sp>
         <p:nvSpPr>
-          <p:cNvPr id="7" name="Rounded Rectangle 6"/>
+          <p:cNvPr id="6" name="Rectangle 5"/>
           <p:cNvSpPr/>
           <p:nvPr/>
         </p:nvSpPr>
         <p:spPr>
           <a:xfrm>
-            <a:off x="594360" y="1965960"/>
-            <a:ext cx="438912" cy="438912"/>
-          </a:xfrm>
-          <a:prstGeom prst="roundRect">
-            <a:avLst>
-              <a:gd name="adj" fmla="val 12000"/>
-            </a:avLst>
+            <a:off x="457200" y="1261872"/>
+            <a:ext cx="11277295" cy="320040"/>
+          </a:xfrm>
+          <a:prstGeom prst="rect">
+            <a:avLst/>
           </a:prstGeom>
           <a:solidFill>
             <a:srgbClr val="095292"/>
@@ -4739,14 +4271,46 @@
       </p:sp>
       <p:sp>
         <p:nvSpPr>
+          <p:cNvPr id="7" name="TextBox 6"/>
+          <p:cNvSpPr txBox="1"/>
+          <p:nvPr/>
+        </p:nvSpPr>
+        <p:spPr>
+          <a:xfrm>
+            <a:off x="685800" y="1307592"/>
+            <a:ext cx="10820095" cy="256032"/>
+          </a:xfrm>
+          <a:prstGeom prst="rect">
+            <a:avLst/>
+          </a:prstGeom>
+          <a:noFill/>
+        </p:spPr>
+        <p:txBody>
+          <a:bodyPr wrap="square" anchor="ctr"/>
+          <a:lstStyle/>
+          <a:p>
+            <a:r>
+              <a:rPr sz="1000" b="1" i="0">
+                <a:solidFill>
+                  <a:srgbClr val="269CCB"/>
+                </a:solidFill>
+                <a:latin typeface="Calibri"/>
+              </a:rPr>
+              <a:t>● ● ●</a:t>
+            </a:r>
+          </a:p>
+        </p:txBody>
+      </p:sp>
+      <p:sp>
+        <p:nvSpPr>
           <p:cNvPr id="8" name="TextBox 7"/>
           <p:cNvSpPr txBox="1"/>
           <p:nvPr/>
         </p:nvSpPr>
         <p:spPr>
           <a:xfrm>
-            <a:off x="594360" y="1965960"/>
-            <a:ext cx="438912" cy="438912"/>
+            <a:off x="777240" y="1719072"/>
+            <a:ext cx="10637215" cy="4133087"/>
           </a:xfrm>
           <a:prstGeom prst="rect">
             <a:avLst/>
@@ -4754,18 +4318,248 @@
           <a:noFill/>
         </p:spPr>
         <p:txBody>
-          <a:bodyPr wrap="square" anchor="ctr"/>
-          <a:lstStyle/>
-          <a:p>
-            <a:pPr algn="ctr"/>
-            <a:r>
-              <a:rPr sz="1600" b="1" i="0">
+          <a:bodyPr wrap="square">
+            <a:spAutoFit/>
+          </a:bodyPr>
+          <a:lstStyle/>
+          <a:p>
+            <a:pPr>
+              <a:spcAft>
+                <a:spcPts val="400"/>
+              </a:spcAft>
+            </a:pPr>
+            <a:r>
+              <a:rPr sz="1400" b="0" i="0">
                 <a:solidFill>
                   <a:srgbClr val="FFFFFF"/>
                 </a:solidFill>
                 <a:latin typeface="Calibri"/>
               </a:rPr>
-              <a:t>1</a:t>
+              <a:t>C4Container</a:t>
+            </a:r>
+          </a:p>
+          <a:p>
+            <a:pPr>
+              <a:spcAft>
+                <a:spcPts val="400"/>
+              </a:spcAft>
+            </a:pPr>
+            <a:r>
+              <a:rPr sz="1400" b="0" i="0">
+                <a:solidFill>
+                  <a:srgbClr val="FFFFFF"/>
+                </a:solidFill>
+                <a:latin typeface="Calibri"/>
+              </a:rPr>
+              <a:t>title Diagrama de contenedores - CloudLite Turnos</a:t>
+            </a:r>
+          </a:p>
+          <a:p>
+            <a:pPr>
+              <a:spcAft>
+                <a:spcPts val="400"/>
+              </a:spcAft>
+            </a:pPr>
+            <a:r>
+              <a:rPr sz="1400" b="0" i="0">
+                <a:solidFill>
+                  <a:srgbClr val="FFFFFF"/>
+                </a:solidFill>
+                <a:latin typeface="Calibri"/>
+              </a:rPr>
+              <a:t>Person(cliente, "Cliente de la barberia", "Reserva y consulta sus turnos")</a:t>
+            </a:r>
+          </a:p>
+          <a:p>
+            <a:pPr>
+              <a:spcAft>
+                <a:spcPts val="400"/>
+              </a:spcAft>
+            </a:pPr>
+            <a:r>
+              <a:rPr sz="1400" b="0" i="0">
+                <a:solidFill>
+                  <a:srgbClr val="FFFFFF"/>
+                </a:solidFill>
+                <a:latin typeface="Calibri"/>
+              </a:rPr>
+              <a:t>System_Boundary(cloudlite, "CloudLite App") {</a:t>
+            </a:r>
+          </a:p>
+          <a:p>
+            <a:pPr>
+              <a:spcAft>
+                <a:spcPts val="400"/>
+              </a:spcAft>
+            </a:pPr>
+            <a:r>
+              <a:rPr sz="1400" b="0" i="0">
+                <a:solidFill>
+                  <a:srgbClr val="FFFFFF"/>
+                </a:solidFill>
+                <a:latin typeface="Calibri"/>
+              </a:rPr>
+              <a:t>  Container(spa, "App web", "React", "Muestra franjas libres y crea la reserva")</a:t>
+            </a:r>
+          </a:p>
+          <a:p>
+            <a:pPr>
+              <a:spcAft>
+                <a:spcPts val="400"/>
+              </a:spcAft>
+            </a:pPr>
+            <a:r>
+              <a:rPr sz="1400" b="0" i="0">
+                <a:solidFill>
+                  <a:srgbClr val="FFFFFF"/>
+                </a:solidFill>
+                <a:latin typeface="Calibri"/>
+              </a:rPr>
+              <a:t>  Container(api, "API de turnos", "Node.js", "Valida la franja y registra el turno")</a:t>
+            </a:r>
+          </a:p>
+          <a:p>
+            <a:pPr>
+              <a:spcAft>
+                <a:spcPts val="400"/>
+              </a:spcAft>
+            </a:pPr>
+            <a:r>
+              <a:rPr sz="1400" b="0" i="0">
+                <a:solidFill>
+                  <a:srgbClr val="FFFFFF"/>
+                </a:solidFill>
+                <a:latin typeface="Calibri"/>
+              </a:rPr>
+              <a:t>  ContainerDb(db, "Base de turnos", "PostgreSQL", "Turnos, clientes y horarios")</a:t>
+            </a:r>
+          </a:p>
+          <a:p>
+            <a:pPr>
+              <a:spcAft>
+                <a:spcPts val="400"/>
+              </a:spcAft>
+            </a:pPr>
+            <a:r>
+              <a:rPr sz="1400" b="0" i="0">
+                <a:solidFill>
+                  <a:srgbClr val="FFFFFF"/>
+                </a:solidFill>
+                <a:latin typeface="Calibri"/>
+              </a:rPr>
+              <a:t>  Container(worker, "Worker de avisos", "cola", "Envia el aviso, con reintentos")</a:t>
+            </a:r>
+          </a:p>
+          <a:p>
+            <a:pPr>
+              <a:spcAft>
+                <a:spcPts val="400"/>
+              </a:spcAft>
+            </a:pPr>
+            <a:r>
+              <a:rPr sz="1400" b="0" i="0">
+                <a:solidFill>
+                  <a:srgbClr val="FFFFFF"/>
+                </a:solidFill>
+                <a:latin typeface="Calibri"/>
+              </a:rPr>
+              <a:t>}</a:t>
+            </a:r>
+          </a:p>
+          <a:p>
+            <a:pPr>
+              <a:spcAft>
+                <a:spcPts val="400"/>
+              </a:spcAft>
+            </a:pPr>
+            <a:r>
+              <a:rPr sz="1400" b="0" i="0">
+                <a:solidFill>
+                  <a:srgbClr val="FFFFFF"/>
+                </a:solidFill>
+                <a:latin typeface="Calibri"/>
+              </a:rPr>
+              <a:t>System_Ext(correo, "Correo transaccional", "Entrega el correo al cliente")</a:t>
+            </a:r>
+          </a:p>
+          <a:p>
+            <a:pPr>
+              <a:spcAft>
+                <a:spcPts val="400"/>
+              </a:spcAft>
+            </a:pPr>
+            <a:r>
+              <a:rPr sz="1400" b="0" i="0">
+                <a:solidFill>
+                  <a:srgbClr val="FFFFFF"/>
+                </a:solidFill>
+                <a:latin typeface="Calibri"/>
+              </a:rPr>
+              <a:t>Rel(cliente, spa, "Reserva un turno", "HTTPS")</a:t>
+            </a:r>
+          </a:p>
+          <a:p>
+            <a:pPr>
+              <a:spcAft>
+                <a:spcPts val="400"/>
+              </a:spcAft>
+            </a:pPr>
+            <a:r>
+              <a:rPr sz="1400" b="0" i="0">
+                <a:solidFill>
+                  <a:srgbClr val="FFFFFF"/>
+                </a:solidFill>
+                <a:latin typeface="Calibri"/>
+              </a:rPr>
+              <a:t>Rel(spa, api, "POST /turnos", "HTTPS/JSON")</a:t>
+            </a:r>
+          </a:p>
+          <a:p>
+            <a:pPr>
+              <a:spcAft>
+                <a:spcPts val="400"/>
+              </a:spcAft>
+            </a:pPr>
+            <a:r>
+              <a:rPr sz="1400" b="0" i="0">
+                <a:solidFill>
+                  <a:srgbClr val="FFFFFF"/>
+                </a:solidFill>
+                <a:latin typeface="Calibri"/>
+              </a:rPr>
+              <a:t>Rel(api, db, "INSERT / SELECT de turnos", "TCP/SQL")</a:t>
+            </a:r>
+          </a:p>
+          <a:p>
+            <a:pPr>
+              <a:spcAft>
+                <a:spcPts val="400"/>
+              </a:spcAft>
+            </a:pPr>
+            <a:r>
+              <a:rPr sz="1400" b="0" i="0">
+                <a:solidFill>
+                  <a:srgbClr val="FFFFFF"/>
+                </a:solidFill>
+                <a:latin typeface="Calibri"/>
+              </a:rPr>
+              <a:t>Rel(api, worker, "Publica aviso-de-turno", "evento/cola (AMQP)")</a:t>
+            </a:r>
+          </a:p>
+          <a:p>
+            <a:pPr>
+              <a:spcAft>
+                <a:spcPts val="400"/>
+              </a:spcAft>
+            </a:pPr>
+            <a:r>
+              <a:rPr sz="1400" b="0" i="0">
+                <a:solidFill>
+                  <a:srgbClr val="FFFFFF"/>
+                </a:solidFill>
+                <a:latin typeface="Calibri"/>
+              </a:rPr>
+              <a:t>Rel(worker, correo, "Envia la confirmacion", "API REST sobre HTTPS")</a:t>
             </a:r>
           </a:p>
         </p:txBody>
@@ -4778,8 +4572,8 @@
         </p:nvSpPr>
         <p:spPr>
           <a:xfrm>
-            <a:off x="1188720" y="1751076"/>
-            <a:ext cx="10271455" cy="886968"/>
+            <a:off x="457200" y="6080760"/>
+            <a:ext cx="11277295" cy="320040"/>
           </a:xfrm>
           <a:prstGeom prst="rect">
             <a:avLst/>
@@ -4787,553 +4581,27 @@
           <a:noFill/>
         </p:spPr>
         <p:txBody>
-          <a:bodyPr wrap="square" anchor="ctr"/>
-          <a:lstStyle/>
-          <a:p>
-            <a:r>
-              <a:rPr sz="1500" b="1" i="0">
-                <a:solidFill>
-                  <a:srgbClr val="095292"/>
-                </a:solidFill>
-                <a:latin typeface="Calibri"/>
-              </a:rPr>
-              <a:t>Disena visual</a:t>
-            </a:r>
-          </a:p>
-          <a:p>
-            <a:pPr>
-              <a:spcBef>
-                <a:spcPts val="200"/>
-              </a:spcBef>
-            </a:pPr>
-            <a:r>
-              <a:rPr sz="1300" b="0" i="0">
-                <a:solidFill>
-                  <a:srgbClr val="333333"/>
-                </a:solidFill>
-                <a:latin typeface="Calibri"/>
-              </a:rPr>
-              <a:t>Dibuja el diagrama como quieras en Excalidraw o draw.io: es mas rapido arrastrar cajas que escribir codigo, y ahi es donde piensas el modelo.</a:t>
-            </a:r>
-          </a:p>
-        </p:txBody>
-      </p:sp>
-      <p:sp>
-        <p:nvSpPr>
-          <p:cNvPr id="10" name="Rounded Rectangle 9"/>
-          <p:cNvSpPr/>
-          <p:nvPr/>
-        </p:nvSpPr>
-        <p:spPr>
-          <a:xfrm>
-            <a:off x="457200" y="2802636"/>
-            <a:ext cx="11277295" cy="1051560"/>
-          </a:xfrm>
-          <a:prstGeom prst="roundRect">
-            <a:avLst>
-              <a:gd name="adj" fmla="val 12000"/>
-            </a:avLst>
-          </a:prstGeom>
-          <a:solidFill>
-            <a:srgbClr val="E8F4FA"/>
-          </a:solidFill>
-          <a:ln>
-            <a:noFill/>
-          </a:ln>
-        </p:spPr>
-        <p:style>
-          <a:lnRef idx="1">
-            <a:schemeClr val="accent1"/>
-          </a:lnRef>
-          <a:fillRef idx="3">
-            <a:schemeClr val="accent1"/>
-          </a:fillRef>
-          <a:effectRef idx="2">
-            <a:schemeClr val="accent1"/>
-          </a:effectRef>
-          <a:fontRef idx="minor">
-            <a:schemeClr val="lt1"/>
-          </a:fontRef>
-        </p:style>
-        <p:txBody>
-          <a:bodyPr rtlCol="0" anchor="ctr"/>
+          <a:bodyPr wrap="square">
+            <a:spAutoFit/>
+          </a:bodyPr>
           <a:lstStyle/>
           <a:p>
             <a:pPr algn="ctr"/>
-          </a:p>
-        </p:txBody>
-      </p:sp>
-      <p:sp>
-        <p:nvSpPr>
-          <p:cNvPr id="11" name="Rounded Rectangle 10"/>
-          <p:cNvSpPr/>
-          <p:nvPr/>
-        </p:nvSpPr>
-        <p:spPr>
-          <a:xfrm>
-            <a:off x="594360" y="3108960"/>
-            <a:ext cx="438912" cy="438912"/>
-          </a:xfrm>
-          <a:prstGeom prst="roundRect">
-            <a:avLst>
-              <a:gd name="adj" fmla="val 12000"/>
-            </a:avLst>
-          </a:prstGeom>
-          <a:solidFill>
-            <a:srgbClr val="095292"/>
-          </a:solidFill>
-          <a:ln>
-            <a:noFill/>
-          </a:ln>
-        </p:spPr>
-        <p:style>
-          <a:lnRef idx="1">
-            <a:schemeClr val="accent1"/>
-          </a:lnRef>
-          <a:fillRef idx="3">
-            <a:schemeClr val="accent1"/>
-          </a:fillRef>
-          <a:effectRef idx="2">
-            <a:schemeClr val="accent1"/>
-          </a:effectRef>
-          <a:fontRef idx="minor">
-            <a:schemeClr val="lt1"/>
-          </a:fontRef>
-        </p:style>
-        <p:txBody>
-          <a:bodyPr rtlCol="0" anchor="ctr"/>
-          <a:lstStyle/>
-          <a:p>
-            <a:pPr algn="ctr"/>
-          </a:p>
-        </p:txBody>
-      </p:sp>
-      <p:sp>
-        <p:nvSpPr>
-          <p:cNvPr id="12" name="TextBox 11"/>
-          <p:cNvSpPr txBox="1"/>
-          <p:nvPr/>
-        </p:nvSpPr>
-        <p:spPr>
-          <a:xfrm>
-            <a:off x="594360" y="3108960"/>
-            <a:ext cx="438912" cy="438912"/>
-          </a:xfrm>
-          <a:prstGeom prst="rect">
-            <a:avLst/>
-          </a:prstGeom>
-          <a:noFill/>
-        </p:spPr>
-        <p:txBody>
-          <a:bodyPr wrap="square" anchor="ctr"/>
-          <a:lstStyle/>
-          <a:p>
-            <a:pPr algn="ctr"/>
-            <a:r>
-              <a:rPr sz="1600" b="1" i="0">
-                <a:solidFill>
-                  <a:srgbClr val="FFFFFF"/>
-                </a:solidFill>
-                <a:latin typeface="Calibri"/>
-              </a:rPr>
-              <a:t>2</a:t>
-            </a:r>
-          </a:p>
-        </p:txBody>
-      </p:sp>
-      <p:sp>
-        <p:nvSpPr>
-          <p:cNvPr id="13" name="TextBox 12"/>
-          <p:cNvSpPr txBox="1"/>
-          <p:nvPr/>
-        </p:nvSpPr>
-        <p:spPr>
-          <a:xfrm>
-            <a:off x="1188720" y="2894076"/>
-            <a:ext cx="10271455" cy="886968"/>
-          </a:xfrm>
-          <a:prstGeom prst="rect">
-            <a:avLst/>
-          </a:prstGeom>
-          <a:noFill/>
-        </p:spPr>
-        <p:txBody>
-          <a:bodyPr wrap="square" anchor="ctr"/>
-          <a:lstStyle/>
-          <a:p>
-            <a:r>
-              <a:rPr sz="1500" b="1" i="0">
-                <a:solidFill>
-                  <a:srgbClr val="095292"/>
-                </a:solidFill>
-                <a:latin typeface="Calibri"/>
-              </a:rPr>
-              <a:t>Traduce con IA</a:t>
-            </a:r>
-          </a:p>
-          <a:p>
-            <a:pPr>
-              <a:spcBef>
-                <a:spcPts val="200"/>
-              </a:spcBef>
-            </a:pPr>
-            <a:r>
-              <a:rPr sz="1300" b="0" i="0">
-                <a:solidFill>
-                  <a:srgbClr val="333333"/>
-                </a:solidFill>
-                <a:latin typeface="Calibri"/>
-              </a:rPr>
-              <a:t>Copia o describe tu boceto a una IA y pidele el codigo Mermaid: «convierte este diagrama a Mermaid usando C4Container». Revisa el resultado: la IA acierta la sintaxis, no tu modelo.</a:t>
-            </a:r>
-          </a:p>
-        </p:txBody>
-      </p:sp>
-      <p:sp>
-        <p:nvSpPr>
-          <p:cNvPr id="14" name="Rounded Rectangle 13"/>
-          <p:cNvSpPr/>
-          <p:nvPr/>
-        </p:nvSpPr>
-        <p:spPr>
-          <a:xfrm>
-            <a:off x="457200" y="3945636"/>
-            <a:ext cx="11277295" cy="1051560"/>
-          </a:xfrm>
-          <a:prstGeom prst="roundRect">
-            <a:avLst>
-              <a:gd name="adj" fmla="val 12000"/>
-            </a:avLst>
-          </a:prstGeom>
-          <a:solidFill>
-            <a:srgbClr val="F2F2F2"/>
-          </a:solidFill>
-          <a:ln>
-            <a:noFill/>
-          </a:ln>
-        </p:spPr>
-        <p:style>
-          <a:lnRef idx="1">
-            <a:schemeClr val="accent1"/>
-          </a:lnRef>
-          <a:fillRef idx="3">
-            <a:schemeClr val="accent1"/>
-          </a:fillRef>
-          <a:effectRef idx="2">
-            <a:schemeClr val="accent1"/>
-          </a:effectRef>
-          <a:fontRef idx="minor">
-            <a:schemeClr val="lt1"/>
-          </a:fontRef>
-        </p:style>
-        <p:txBody>
-          <a:bodyPr rtlCol="0" anchor="ctr"/>
-          <a:lstStyle/>
-          <a:p>
-            <a:pPr algn="ctr"/>
-          </a:p>
-        </p:txBody>
-      </p:sp>
-      <p:sp>
-        <p:nvSpPr>
-          <p:cNvPr id="15" name="Rounded Rectangle 14"/>
-          <p:cNvSpPr/>
-          <p:nvPr/>
-        </p:nvSpPr>
-        <p:spPr>
-          <a:xfrm>
-            <a:off x="594360" y="4251960"/>
-            <a:ext cx="438912" cy="438912"/>
-          </a:xfrm>
-          <a:prstGeom prst="roundRect">
-            <a:avLst>
-              <a:gd name="adj" fmla="val 12000"/>
-            </a:avLst>
-          </a:prstGeom>
-          <a:solidFill>
-            <a:srgbClr val="095292"/>
-          </a:solidFill>
-          <a:ln>
-            <a:noFill/>
-          </a:ln>
-        </p:spPr>
-        <p:style>
-          <a:lnRef idx="1">
-            <a:schemeClr val="accent1"/>
-          </a:lnRef>
-          <a:fillRef idx="3">
-            <a:schemeClr val="accent1"/>
-          </a:fillRef>
-          <a:effectRef idx="2">
-            <a:schemeClr val="accent1"/>
-          </a:effectRef>
-          <a:fontRef idx="minor">
-            <a:schemeClr val="lt1"/>
-          </a:fontRef>
-        </p:style>
-        <p:txBody>
-          <a:bodyPr rtlCol="0" anchor="ctr"/>
-          <a:lstStyle/>
-          <a:p>
-            <a:pPr algn="ctr"/>
-          </a:p>
-        </p:txBody>
-      </p:sp>
-      <p:sp>
-        <p:nvSpPr>
-          <p:cNvPr id="16" name="TextBox 15"/>
-          <p:cNvSpPr txBox="1"/>
-          <p:nvPr/>
-        </p:nvSpPr>
-        <p:spPr>
-          <a:xfrm>
-            <a:off x="594360" y="4251960"/>
-            <a:ext cx="438912" cy="438912"/>
-          </a:xfrm>
-          <a:prstGeom prst="rect">
-            <a:avLst/>
-          </a:prstGeom>
-          <a:noFill/>
-        </p:spPr>
-        <p:txBody>
-          <a:bodyPr wrap="square" anchor="ctr"/>
-          <a:lstStyle/>
-          <a:p>
-            <a:pPr algn="ctr"/>
-            <a:r>
-              <a:rPr sz="1600" b="1" i="0">
-                <a:solidFill>
-                  <a:srgbClr val="FFFFFF"/>
-                </a:solidFill>
-                <a:latin typeface="Calibri"/>
-              </a:rPr>
-              <a:t>3</a:t>
-            </a:r>
-          </a:p>
-        </p:txBody>
-      </p:sp>
-      <p:sp>
-        <p:nvSpPr>
-          <p:cNvPr id="17" name="TextBox 16"/>
-          <p:cNvSpPr txBox="1"/>
-          <p:nvPr/>
-        </p:nvSpPr>
-        <p:spPr>
-          <a:xfrm>
-            <a:off x="1188720" y="4037076"/>
-            <a:ext cx="10271455" cy="886968"/>
-          </a:xfrm>
-          <a:prstGeom prst="rect">
-            <a:avLst/>
-          </a:prstGeom>
-          <a:noFill/>
-        </p:spPr>
-        <p:txBody>
-          <a:bodyPr wrap="square" anchor="ctr"/>
-          <a:lstStyle/>
-          <a:p>
-            <a:r>
-              <a:rPr sz="1500" b="1" i="0">
-                <a:solidFill>
-                  <a:srgbClr val="095292"/>
-                </a:solidFill>
-                <a:latin typeface="Calibri"/>
-              </a:rPr>
-              <a:t>Pega y renderiza en ExamLab</a:t>
-            </a:r>
-          </a:p>
-          <a:p>
-            <a:pPr>
-              <a:spcBef>
-                <a:spcPts val="200"/>
-              </a:spcBef>
-            </a:pPr>
-            <a:r>
-              <a:rPr sz="1300" b="0" i="0">
-                <a:solidFill>
-                  <a:srgbClr val="333333"/>
-                </a:solidFill>
-                <a:latin typeface="Calibri"/>
-              </a:rPr>
-              <a:t>Pega ese codigo en la caja de texto de la pregunta y mira como lo dibuja la plataforma. Si no renderiza, corrige ahi mismo: lo que se califica es el diagrama renderizado dentro de ExamLab.</a:t>
-            </a:r>
-          </a:p>
-        </p:txBody>
-      </p:sp>
-      <p:sp>
-        <p:nvSpPr>
-          <p:cNvPr id="18" name="Rounded Rectangle 17"/>
-          <p:cNvSpPr/>
-          <p:nvPr/>
-        </p:nvSpPr>
-        <p:spPr>
-          <a:xfrm>
-            <a:off x="457200" y="5088636"/>
-            <a:ext cx="11277295" cy="1051560"/>
-          </a:xfrm>
-          <a:prstGeom prst="roundRect">
-            <a:avLst>
-              <a:gd name="adj" fmla="val 12000"/>
-            </a:avLst>
-          </a:prstGeom>
-          <a:solidFill>
-            <a:srgbClr val="E8F4FA"/>
-          </a:solidFill>
-          <a:ln>
-            <a:noFill/>
-          </a:ln>
-        </p:spPr>
-        <p:style>
-          <a:lnRef idx="1">
-            <a:schemeClr val="accent1"/>
-          </a:lnRef>
-          <a:fillRef idx="3">
-            <a:schemeClr val="accent1"/>
-          </a:fillRef>
-          <a:effectRef idx="2">
-            <a:schemeClr val="accent1"/>
-          </a:effectRef>
-          <a:fontRef idx="minor">
-            <a:schemeClr val="lt1"/>
-          </a:fontRef>
-        </p:style>
-        <p:txBody>
-          <a:bodyPr rtlCol="0" anchor="ctr"/>
-          <a:lstStyle/>
-          <a:p>
-            <a:pPr algn="ctr"/>
-          </a:p>
-        </p:txBody>
-      </p:sp>
-      <p:sp>
-        <p:nvSpPr>
-          <p:cNvPr id="19" name="Rounded Rectangle 18"/>
-          <p:cNvSpPr/>
-          <p:nvPr/>
-        </p:nvSpPr>
-        <p:spPr>
-          <a:xfrm>
-            <a:off x="594360" y="5394960"/>
-            <a:ext cx="438912" cy="438912"/>
-          </a:xfrm>
-          <a:prstGeom prst="roundRect">
-            <a:avLst>
-              <a:gd name="adj" fmla="val 12000"/>
-            </a:avLst>
-          </a:prstGeom>
-          <a:solidFill>
-            <a:srgbClr val="095292"/>
-          </a:solidFill>
-          <a:ln>
-            <a:noFill/>
-          </a:ln>
-        </p:spPr>
-        <p:style>
-          <a:lnRef idx="1">
-            <a:schemeClr val="accent1"/>
-          </a:lnRef>
-          <a:fillRef idx="3">
-            <a:schemeClr val="accent1"/>
-          </a:fillRef>
-          <a:effectRef idx="2">
-            <a:schemeClr val="accent1"/>
-          </a:effectRef>
-          <a:fontRef idx="minor">
-            <a:schemeClr val="lt1"/>
-          </a:fontRef>
-        </p:style>
-        <p:txBody>
-          <a:bodyPr rtlCol="0" anchor="ctr"/>
-          <a:lstStyle/>
-          <a:p>
-            <a:pPr algn="ctr"/>
-          </a:p>
-        </p:txBody>
-      </p:sp>
-      <p:sp>
-        <p:nvSpPr>
-          <p:cNvPr id="20" name="TextBox 19"/>
-          <p:cNvSpPr txBox="1"/>
-          <p:nvPr/>
-        </p:nvSpPr>
-        <p:spPr>
-          <a:xfrm>
-            <a:off x="594360" y="5394960"/>
-            <a:ext cx="438912" cy="438912"/>
-          </a:xfrm>
-          <a:prstGeom prst="rect">
-            <a:avLst/>
-          </a:prstGeom>
-          <a:noFill/>
-        </p:spPr>
-        <p:txBody>
-          <a:bodyPr wrap="square" anchor="ctr"/>
-          <a:lstStyle/>
-          <a:p>
-            <a:pPr algn="ctr"/>
-            <a:r>
-              <a:rPr sz="1600" b="1" i="0">
-                <a:solidFill>
-                  <a:srgbClr val="FFFFFF"/>
-                </a:solidFill>
-                <a:latin typeface="Calibri"/>
-              </a:rPr>
-              <a:t>4</a:t>
-            </a:r>
-          </a:p>
-        </p:txBody>
-      </p:sp>
-      <p:sp>
-        <p:nvSpPr>
-          <p:cNvPr id="21" name="TextBox 20"/>
-          <p:cNvSpPr txBox="1"/>
-          <p:nvPr/>
-        </p:nvSpPr>
-        <p:spPr>
-          <a:xfrm>
-            <a:off x="1188720" y="5180076"/>
-            <a:ext cx="10271455" cy="886968"/>
-          </a:xfrm>
-          <a:prstGeom prst="rect">
-            <a:avLst/>
-          </a:prstGeom>
-          <a:noFill/>
-        </p:spPr>
-        <p:txBody>
-          <a:bodyPr wrap="square" anchor="ctr"/>
-          <a:lstStyle/>
-          <a:p>
-            <a:r>
-              <a:rPr sz="1500" b="1" i="0">
-                <a:solidFill>
-                  <a:srgbClr val="095292"/>
-                </a:solidFill>
-                <a:latin typeface="Calibri"/>
-              </a:rPr>
-              <a:t>Guarda el PNG para tu PI</a:t>
-            </a:r>
-          </a:p>
-          <a:p>
-            <a:pPr>
-              <a:spcBef>
-                <a:spcPts val="200"/>
-              </a:spcBef>
-            </a:pPr>
-            <a:r>
-              <a:rPr sz="1300" b="0" i="0">
-                <a:solidFill>
-                  <a:srgbClr val="333333"/>
-                </a:solidFill>
-                <a:latin typeface="Calibri"/>
-              </a:rPr>
-              <a:t>Exporta tambien la imagen a la carpeta de tu Proyecto Integrador. Esa copia es para tu informe; no reemplaza la respuesta en la plataforma.</a:t>
-            </a:r>
-          </a:p>
-        </p:txBody>
-      </p:sp>
-      <p:sp>
-        <p:nvSpPr>
-          <p:cNvPr id="22" name="TextBox 21"/>
+            <a:r>
+              <a:rPr sz="1200" b="0" i="1">
+                <a:solidFill>
+                  <a:srgbClr val="666666"/>
+                </a:solidFill>
+                <a:latin typeface="Calibri"/>
+              </a:rPr>
+              <a:t>La base va como «ContainerDb» y cada «Rel» lleva protocolo Y formato. Los externos, FUERA del «System_Boundary».</a:t>
+            </a:r>
+          </a:p>
+        </p:txBody>
+      </p:sp>
+      <p:sp>
+        <p:nvSpPr>
+          <p:cNvPr id="10" name="TextBox 9"/>
           <p:cNvSpPr txBox="1"/>
           <p:nvPr/>
         </p:nvSpPr>
@@ -5401,7 +4669,7 @@
         <p:spPr>
           <a:xfrm>
             <a:off x="0" y="0"/>
-            <a:ext cx="12191695" cy="960120"/>
+            <a:ext cx="12191695" cy="1170432"/>
           </a:xfrm>
           <a:prstGeom prst="rect">
             <a:avLst/>
@@ -5443,7 +4711,7 @@
         </p:nvSpPr>
         <p:spPr>
           <a:xfrm>
-            <a:off x="0" y="960120"/>
+            <a:off x="0" y="1170432"/>
             <a:ext cx="12191695" cy="41148"/>
           </a:xfrm>
           <a:prstGeom prst="rect">
@@ -5487,7 +4755,7 @@
         <p:spPr>
           <a:xfrm>
             <a:off x="457200" y="164592"/>
-            <a:ext cx="11277295" cy="502920"/>
+            <a:ext cx="11277295" cy="384048"/>
           </a:xfrm>
           <a:prstGeom prst="rect">
             <a:avLst/>
@@ -5507,7 +4775,7 @@
                 </a:solidFill>
                 <a:latin typeface="Calibri"/>
               </a:rPr>
-              <a:t>Taller PI (paso a paso)</a:t>
+              <a:t>Herramientas de hoy</a:t>
             </a:r>
           </a:p>
         </p:txBody>
@@ -5520,8 +4788,8 @@
         </p:nvSpPr>
         <p:spPr>
           <a:xfrm>
-            <a:off x="457200" y="1170432"/>
-            <a:ext cx="11277295" cy="5230368"/>
+            <a:off x="457200" y="566928"/>
+            <a:ext cx="11277295" cy="411480"/>
           </a:xfrm>
           <a:prstGeom prst="rect">
             <a:avLst/>
@@ -5534,137 +4802,837 @@
           </a:bodyPr>
           <a:lstStyle/>
           <a:p>
-            <a:pPr>
-              <a:spcAft>
-                <a:spcPts val="800"/>
-              </a:spcAft>
+            <a:r>
+              <a:rPr sz="1400" b="0" i="0">
+                <a:solidFill>
+                  <a:srgbClr val="B8D8EE"/>
+                </a:solidFill>
+                <a:latin typeface="Calibri"/>
+              </a:rPr>
+              <a:t>Gratis · navegador o free tier · sin cuenta de pago</a:t>
+            </a:r>
+          </a:p>
+        </p:txBody>
+      </p:sp>
+      <p:sp>
+        <p:nvSpPr>
+          <p:cNvPr id="6" name="Rounded Rectangle 5"/>
+          <p:cNvSpPr/>
+          <p:nvPr/>
+        </p:nvSpPr>
+        <p:spPr>
+          <a:xfrm>
+            <a:off x="457200" y="1591056"/>
+            <a:ext cx="3624986" cy="2299716"/>
+          </a:xfrm>
+          <a:prstGeom prst="roundRect">
+            <a:avLst>
+              <a:gd name="adj" fmla="val 12000"/>
+            </a:avLst>
+          </a:prstGeom>
+          <a:solidFill>
+            <a:srgbClr val="F2F2F2"/>
+          </a:solidFill>
+          <a:ln>
+            <a:noFill/>
+          </a:ln>
+        </p:spPr>
+        <p:style>
+          <a:lnRef idx="1">
+            <a:schemeClr val="accent1"/>
+          </a:lnRef>
+          <a:fillRef idx="3">
+            <a:schemeClr val="accent1"/>
+          </a:fillRef>
+          <a:effectRef idx="2">
+            <a:schemeClr val="accent1"/>
+          </a:effectRef>
+          <a:fontRef idx="minor">
+            <a:schemeClr val="lt1"/>
+          </a:fontRef>
+        </p:style>
+        <p:txBody>
+          <a:bodyPr rtlCol="0" anchor="ctr"/>
+          <a:lstStyle/>
+          <a:p>
+            <a:pPr algn="ctr"/>
+          </a:p>
+        </p:txBody>
+      </p:sp>
+      <p:sp>
+        <p:nvSpPr>
+          <p:cNvPr id="7" name="Rectangle 6"/>
+          <p:cNvSpPr/>
+          <p:nvPr/>
+        </p:nvSpPr>
+        <p:spPr>
+          <a:xfrm>
+            <a:off x="457200" y="1591056"/>
+            <a:ext cx="3624986" cy="64008"/>
+          </a:xfrm>
+          <a:prstGeom prst="rect">
+            <a:avLst/>
+          </a:prstGeom>
+          <a:solidFill>
+            <a:srgbClr val="095292"/>
+          </a:solidFill>
+          <a:ln>
+            <a:noFill/>
+          </a:ln>
+        </p:spPr>
+        <p:style>
+          <a:lnRef idx="1">
+            <a:schemeClr val="accent1"/>
+          </a:lnRef>
+          <a:fillRef idx="3">
+            <a:schemeClr val="accent1"/>
+          </a:fillRef>
+          <a:effectRef idx="2">
+            <a:schemeClr val="accent1"/>
+          </a:effectRef>
+          <a:fontRef idx="minor">
+            <a:schemeClr val="lt1"/>
+          </a:fontRef>
+        </p:style>
+        <p:txBody>
+          <a:bodyPr rtlCol="0" anchor="ctr"/>
+          <a:lstStyle/>
+          <a:p>
+            <a:pPr algn="ctr"/>
+          </a:p>
+        </p:txBody>
+      </p:sp>
+      <p:sp>
+        <p:nvSpPr>
+          <p:cNvPr id="8" name="Rectangle 7"/>
+          <p:cNvSpPr/>
+          <p:nvPr/>
+        </p:nvSpPr>
+        <p:spPr>
+          <a:xfrm>
+            <a:off x="457200" y="1655064"/>
+            <a:ext cx="3624986" cy="27432"/>
+          </a:xfrm>
+          <a:prstGeom prst="rect">
+            <a:avLst/>
+          </a:prstGeom>
+          <a:solidFill>
+            <a:srgbClr val="FFD000"/>
+          </a:solidFill>
+          <a:ln>
+            <a:noFill/>
+          </a:ln>
+        </p:spPr>
+        <p:style>
+          <a:lnRef idx="1">
+            <a:schemeClr val="accent1"/>
+          </a:lnRef>
+          <a:fillRef idx="3">
+            <a:schemeClr val="accent1"/>
+          </a:fillRef>
+          <a:effectRef idx="2">
+            <a:schemeClr val="accent1"/>
+          </a:effectRef>
+          <a:fontRef idx="minor">
+            <a:schemeClr val="lt1"/>
+          </a:fontRef>
+        </p:style>
+        <p:txBody>
+          <a:bodyPr rtlCol="0" anchor="ctr"/>
+          <a:lstStyle/>
+          <a:p>
+            <a:pPr algn="ctr"/>
+          </a:p>
+        </p:txBody>
+      </p:sp>
+      <p:pic>
+        <p:nvPicPr>
+          <p:cNvPr id="9" name="Picture 8" descr="drawio.png"/>
+          <p:cNvPicPr>
+            <a:picLocks noChangeAspect="1"/>
+          </p:cNvPicPr>
+          <p:nvPr/>
+        </p:nvPicPr>
+        <p:blipFill>
+          <a:blip r:embed="rId2"/>
+          <a:stretch>
+            <a:fillRect/>
+          </a:stretch>
+        </p:blipFill>
+        <p:spPr>
+          <a:xfrm>
+            <a:off x="1659331" y="1847087"/>
+            <a:ext cx="1220724" cy="1220724"/>
+          </a:xfrm>
+          <a:prstGeom prst="rect">
+            <a:avLst/>
+          </a:prstGeom>
+        </p:spPr>
+      </p:pic>
+      <p:sp>
+        <p:nvSpPr>
+          <p:cNvPr id="10" name="TextBox 9"/>
+          <p:cNvSpPr txBox="1"/>
+          <p:nvPr/>
+        </p:nvSpPr>
+        <p:spPr>
+          <a:xfrm>
+            <a:off x="530352" y="3159251"/>
+            <a:ext cx="3478682" cy="621792"/>
+          </a:xfrm>
+          <a:prstGeom prst="rect">
+            <a:avLst/>
+          </a:prstGeom>
+          <a:noFill/>
+        </p:spPr>
+        <p:txBody>
+          <a:bodyPr wrap="square" anchor="t"/>
+          <a:lstStyle/>
+          <a:p>
+            <a:pPr algn="ctr"/>
+            <a:r>
+              <a:rPr sz="1300" b="1" i="0">
+                <a:solidFill>
+                  <a:srgbClr val="095292"/>
+                </a:solidFill>
+                <a:latin typeface="Calibri"/>
+              </a:rPr>
+              <a:t>draw.io</a:t>
+            </a:r>
+          </a:p>
+          <a:p>
+            <a:pPr algn="ctr">
+              <a:spcBef>
+                <a:spcPts val="200"/>
+              </a:spcBef>
             </a:pPr>
             <a:r>
-              <a:rPr sz="1600" b="1" i="0">
-                <a:solidFill>
-                  <a:srgbClr val="333333"/>
-                </a:solidFill>
-                <a:latin typeface="Calibri"/>
-              </a:rPr>
-              <a:t>1.</a:t>
-            </a:r>
-            <a:r>
-              <a:rPr sz="1600" b="0" i="0">
-                <a:solidFill>
-                  <a:srgbClr val="333333"/>
-                </a:solidFill>
-                <a:latin typeface="Calibri"/>
-              </a:rPr>
-              <a:t> Paso 1: decida en la pregunta 12 si su CloudLite es un monolito modular o microservicios, con los dos criterios aplicados a su caso (tamano del equipo con numero y plazo, y que partes cambian juntas) y lo que gana y pierde; verifique que no escribio «un poco de los dos», porque eso vale cero.</a:t>
-            </a:r>
-          </a:p>
-          <a:p>
-            <a:pPr>
-              <a:spcAft>
-                <a:spcPts val="800"/>
-              </a:spcAft>
+              <a:rPr sz="1000" b="0" i="0">
+                <a:solidFill>
+                  <a:srgbClr val="666666"/>
+                </a:solidFill>
+                <a:latin typeface="Calibri"/>
+              </a:rPr>
+              <a:t>Boceto del C4</a:t>
+            </a:r>
+          </a:p>
+        </p:txBody>
+      </p:sp>
+      <p:sp>
+        <p:nvSpPr>
+          <p:cNvPr id="11" name="Rounded Rectangle 10"/>
+          <p:cNvSpPr/>
+          <p:nvPr/>
+        </p:nvSpPr>
+        <p:spPr>
+          <a:xfrm>
+            <a:off x="4283354" y="1591056"/>
+            <a:ext cx="3624986" cy="2299716"/>
+          </a:xfrm>
+          <a:prstGeom prst="roundRect">
+            <a:avLst>
+              <a:gd name="adj" fmla="val 12000"/>
+            </a:avLst>
+          </a:prstGeom>
+          <a:solidFill>
+            <a:srgbClr val="F2F2F2"/>
+          </a:solidFill>
+          <a:ln>
+            <a:noFill/>
+          </a:ln>
+        </p:spPr>
+        <p:style>
+          <a:lnRef idx="1">
+            <a:schemeClr val="accent1"/>
+          </a:lnRef>
+          <a:fillRef idx="3">
+            <a:schemeClr val="accent1"/>
+          </a:fillRef>
+          <a:effectRef idx="2">
+            <a:schemeClr val="accent1"/>
+          </a:effectRef>
+          <a:fontRef idx="minor">
+            <a:schemeClr val="lt1"/>
+          </a:fontRef>
+        </p:style>
+        <p:txBody>
+          <a:bodyPr rtlCol="0" anchor="ctr"/>
+          <a:lstStyle/>
+          <a:p>
+            <a:pPr algn="ctr"/>
+          </a:p>
+        </p:txBody>
+      </p:sp>
+      <p:sp>
+        <p:nvSpPr>
+          <p:cNvPr id="12" name="Rectangle 11"/>
+          <p:cNvSpPr/>
+          <p:nvPr/>
+        </p:nvSpPr>
+        <p:spPr>
+          <a:xfrm>
+            <a:off x="4283354" y="1591056"/>
+            <a:ext cx="3624986" cy="64008"/>
+          </a:xfrm>
+          <a:prstGeom prst="rect">
+            <a:avLst/>
+          </a:prstGeom>
+          <a:solidFill>
+            <a:srgbClr val="095292"/>
+          </a:solidFill>
+          <a:ln>
+            <a:noFill/>
+          </a:ln>
+        </p:spPr>
+        <p:style>
+          <a:lnRef idx="1">
+            <a:schemeClr val="accent1"/>
+          </a:lnRef>
+          <a:fillRef idx="3">
+            <a:schemeClr val="accent1"/>
+          </a:fillRef>
+          <a:effectRef idx="2">
+            <a:schemeClr val="accent1"/>
+          </a:effectRef>
+          <a:fontRef idx="minor">
+            <a:schemeClr val="lt1"/>
+          </a:fontRef>
+        </p:style>
+        <p:txBody>
+          <a:bodyPr rtlCol="0" anchor="ctr"/>
+          <a:lstStyle/>
+          <a:p>
+            <a:pPr algn="ctr"/>
+          </a:p>
+        </p:txBody>
+      </p:sp>
+      <p:sp>
+        <p:nvSpPr>
+          <p:cNvPr id="13" name="Rectangle 12"/>
+          <p:cNvSpPr/>
+          <p:nvPr/>
+        </p:nvSpPr>
+        <p:spPr>
+          <a:xfrm>
+            <a:off x="4283354" y="1655064"/>
+            <a:ext cx="3624986" cy="27432"/>
+          </a:xfrm>
+          <a:prstGeom prst="rect">
+            <a:avLst/>
+          </a:prstGeom>
+          <a:solidFill>
+            <a:srgbClr val="FFD000"/>
+          </a:solidFill>
+          <a:ln>
+            <a:noFill/>
+          </a:ln>
+        </p:spPr>
+        <p:style>
+          <a:lnRef idx="1">
+            <a:schemeClr val="accent1"/>
+          </a:lnRef>
+          <a:fillRef idx="3">
+            <a:schemeClr val="accent1"/>
+          </a:fillRef>
+          <a:effectRef idx="2">
+            <a:schemeClr val="accent1"/>
+          </a:effectRef>
+          <a:fontRef idx="minor">
+            <a:schemeClr val="lt1"/>
+          </a:fontRef>
+        </p:style>
+        <p:txBody>
+          <a:bodyPr rtlCol="0" anchor="ctr"/>
+          <a:lstStyle/>
+          <a:p>
+            <a:pPr algn="ctr"/>
+          </a:p>
+        </p:txBody>
+      </p:sp>
+      <p:pic>
+        <p:nvPicPr>
+          <p:cNvPr id="14" name="Picture 13" descr="excalidraw.png"/>
+          <p:cNvPicPr>
+            <a:picLocks noChangeAspect="1"/>
+          </p:cNvPicPr>
+          <p:nvPr/>
+        </p:nvPicPr>
+        <p:blipFill>
+          <a:blip r:embed="rId3"/>
+          <a:stretch>
+            <a:fillRect/>
+          </a:stretch>
+        </p:blipFill>
+        <p:spPr>
+          <a:xfrm>
+            <a:off x="5485485" y="1847087"/>
+            <a:ext cx="1220724" cy="1220724"/>
+          </a:xfrm>
+          <a:prstGeom prst="rect">
+            <a:avLst/>
+          </a:prstGeom>
+        </p:spPr>
+      </p:pic>
+      <p:sp>
+        <p:nvSpPr>
+          <p:cNvPr id="15" name="TextBox 14"/>
+          <p:cNvSpPr txBox="1"/>
+          <p:nvPr/>
+        </p:nvSpPr>
+        <p:spPr>
+          <a:xfrm>
+            <a:off x="4356506" y="3159251"/>
+            <a:ext cx="3478682" cy="621792"/>
+          </a:xfrm>
+          <a:prstGeom prst="rect">
+            <a:avLst/>
+          </a:prstGeom>
+          <a:noFill/>
+        </p:spPr>
+        <p:txBody>
+          <a:bodyPr wrap="square" anchor="t"/>
+          <a:lstStyle/>
+          <a:p>
+            <a:pPr algn="ctr"/>
+            <a:r>
+              <a:rPr sz="1300" b="1" i="0">
+                <a:solidFill>
+                  <a:srgbClr val="095292"/>
+                </a:solidFill>
+                <a:latin typeface="Calibri"/>
+              </a:rPr>
+              <a:t>Excalidraw</a:t>
+            </a:r>
+          </a:p>
+          <a:p>
+            <a:pPr algn="ctr">
+              <a:spcBef>
+                <a:spcPts val="200"/>
+              </a:spcBef>
             </a:pPr>
             <a:r>
-              <a:rPr sz="1600" b="0" i="0">
-                <a:solidFill>
-                  <a:srgbClr val="333333"/>
-                </a:solidFill>
-                <a:latin typeface="Calibri"/>
-              </a:rPr>
-              <a:t>–   </a:t>
-            </a:r>
-            <a:r>
-              <a:rPr sz="1600" b="1" i="0">
-                <a:solidFill>
-                  <a:srgbClr val="333333"/>
-                </a:solidFill>
-                <a:latin typeface="Calibri"/>
-              </a:rPr>
-              <a:t>2.</a:t>
-            </a:r>
-            <a:r>
-              <a:rPr sz="1600" b="0" i="0">
-                <a:solidFill>
-                  <a:srgbClr val="333333"/>
-                </a:solidFill>
-                <a:latin typeface="Calibri"/>
-              </a:rPr>
-              <a:t> Paso 2: modele en la pregunta 13 el C4 Container partiendo del C4 Context de la pregunta 3, con entre 2 y 5 contenedores coherentes con la decision anterior, los almacenes de datos como ContainerDb y toda flecha con protocolo y formato; verifique que los nombres de sistema, actores y sistemas externos sean identicos a los del Context.</a:t>
-            </a:r>
-          </a:p>
-          <a:p>
-            <a:pPr>
-              <a:spcAft>
-                <a:spcPts val="800"/>
-              </a:spcAft>
+              <a:rPr sz="1000" b="0" i="0">
+                <a:solidFill>
+                  <a:srgbClr val="666666"/>
+                </a:solidFill>
+                <a:latin typeface="Calibri"/>
+              </a:rPr>
+              <a:t>Boceto rapido</a:t>
+            </a:r>
+          </a:p>
+        </p:txBody>
+      </p:sp>
+      <p:sp>
+        <p:nvSpPr>
+          <p:cNvPr id="16" name="Rounded Rectangle 15"/>
+          <p:cNvSpPr/>
+          <p:nvPr/>
+        </p:nvSpPr>
+        <p:spPr>
+          <a:xfrm>
+            <a:off x="8109508" y="1591056"/>
+            <a:ext cx="3624986" cy="2299716"/>
+          </a:xfrm>
+          <a:prstGeom prst="roundRect">
+            <a:avLst>
+              <a:gd name="adj" fmla="val 12000"/>
+            </a:avLst>
+          </a:prstGeom>
+          <a:solidFill>
+            <a:srgbClr val="F2F2F2"/>
+          </a:solidFill>
+          <a:ln>
+            <a:noFill/>
+          </a:ln>
+        </p:spPr>
+        <p:style>
+          <a:lnRef idx="1">
+            <a:schemeClr val="accent1"/>
+          </a:lnRef>
+          <a:fillRef idx="3">
+            <a:schemeClr val="accent1"/>
+          </a:fillRef>
+          <a:effectRef idx="2">
+            <a:schemeClr val="accent1"/>
+          </a:effectRef>
+          <a:fontRef idx="minor">
+            <a:schemeClr val="lt1"/>
+          </a:fontRef>
+        </p:style>
+        <p:txBody>
+          <a:bodyPr rtlCol="0" anchor="ctr"/>
+          <a:lstStyle/>
+          <a:p>
+            <a:pPr algn="ctr"/>
+          </a:p>
+        </p:txBody>
+      </p:sp>
+      <p:sp>
+        <p:nvSpPr>
+          <p:cNvPr id="17" name="Rectangle 16"/>
+          <p:cNvSpPr/>
+          <p:nvPr/>
+        </p:nvSpPr>
+        <p:spPr>
+          <a:xfrm>
+            <a:off x="8109508" y="1591056"/>
+            <a:ext cx="3624986" cy="64008"/>
+          </a:xfrm>
+          <a:prstGeom prst="rect">
+            <a:avLst/>
+          </a:prstGeom>
+          <a:solidFill>
+            <a:srgbClr val="095292"/>
+          </a:solidFill>
+          <a:ln>
+            <a:noFill/>
+          </a:ln>
+        </p:spPr>
+        <p:style>
+          <a:lnRef idx="1">
+            <a:schemeClr val="accent1"/>
+          </a:lnRef>
+          <a:fillRef idx="3">
+            <a:schemeClr val="accent1"/>
+          </a:fillRef>
+          <a:effectRef idx="2">
+            <a:schemeClr val="accent1"/>
+          </a:effectRef>
+          <a:fontRef idx="minor">
+            <a:schemeClr val="lt1"/>
+          </a:fontRef>
+        </p:style>
+        <p:txBody>
+          <a:bodyPr rtlCol="0" anchor="ctr"/>
+          <a:lstStyle/>
+          <a:p>
+            <a:pPr algn="ctr"/>
+          </a:p>
+        </p:txBody>
+      </p:sp>
+      <p:sp>
+        <p:nvSpPr>
+          <p:cNvPr id="18" name="Rectangle 17"/>
+          <p:cNvSpPr/>
+          <p:nvPr/>
+        </p:nvSpPr>
+        <p:spPr>
+          <a:xfrm>
+            <a:off x="8109508" y="1655064"/>
+            <a:ext cx="3624986" cy="27432"/>
+          </a:xfrm>
+          <a:prstGeom prst="rect">
+            <a:avLst/>
+          </a:prstGeom>
+          <a:solidFill>
+            <a:srgbClr val="FFD000"/>
+          </a:solidFill>
+          <a:ln>
+            <a:noFill/>
+          </a:ln>
+        </p:spPr>
+        <p:style>
+          <a:lnRef idx="1">
+            <a:schemeClr val="accent1"/>
+          </a:lnRef>
+          <a:fillRef idx="3">
+            <a:schemeClr val="accent1"/>
+          </a:fillRef>
+          <a:effectRef idx="2">
+            <a:schemeClr val="accent1"/>
+          </a:effectRef>
+          <a:fontRef idx="minor">
+            <a:schemeClr val="lt1"/>
+          </a:fontRef>
+        </p:style>
+        <p:txBody>
+          <a:bodyPr rtlCol="0" anchor="ctr"/>
+          <a:lstStyle/>
+          <a:p>
+            <a:pPr algn="ctr"/>
+          </a:p>
+        </p:txBody>
+      </p:sp>
+      <p:pic>
+        <p:nvPicPr>
+          <p:cNvPr id="19" name="Picture 18" descr="mermaid.png"/>
+          <p:cNvPicPr>
+            <a:picLocks noChangeAspect="1"/>
+          </p:cNvPicPr>
+          <p:nvPr/>
+        </p:nvPicPr>
+        <p:blipFill>
+          <a:blip r:embed="rId4"/>
+          <a:stretch>
+            <a:fillRect/>
+          </a:stretch>
+        </p:blipFill>
+        <p:spPr>
+          <a:xfrm>
+            <a:off x="9311640" y="1847087"/>
+            <a:ext cx="1220724" cy="1220724"/>
+          </a:xfrm>
+          <a:prstGeom prst="rect">
+            <a:avLst/>
+          </a:prstGeom>
+        </p:spPr>
+      </p:pic>
+      <p:sp>
+        <p:nvSpPr>
+          <p:cNvPr id="20" name="TextBox 19"/>
+          <p:cNvSpPr txBox="1"/>
+          <p:nvPr/>
+        </p:nvSpPr>
+        <p:spPr>
+          <a:xfrm>
+            <a:off x="8182660" y="3159251"/>
+            <a:ext cx="3478682" cy="621792"/>
+          </a:xfrm>
+          <a:prstGeom prst="rect">
+            <a:avLst/>
+          </a:prstGeom>
+          <a:noFill/>
+        </p:spPr>
+        <p:txBody>
+          <a:bodyPr wrap="square" anchor="t"/>
+          <a:lstStyle/>
+          <a:p>
+            <a:pPr algn="ctr"/>
+            <a:r>
+              <a:rPr sz="1300" b="1" i="0">
+                <a:solidFill>
+                  <a:srgbClr val="095292"/>
+                </a:solidFill>
+                <a:latin typeface="Calibri"/>
+              </a:rPr>
+              <a:t>Mermaid</a:t>
+            </a:r>
+          </a:p>
+          <a:p>
+            <a:pPr algn="ctr">
+              <a:spcBef>
+                <a:spcPts val="200"/>
+              </a:spcBef>
             </a:pPr>
             <a:r>
-              <a:rPr sz="1600" b="0" i="0">
-                <a:solidFill>
-                  <a:srgbClr val="333333"/>
-                </a:solidFill>
-                <a:latin typeface="Calibri"/>
-              </a:rPr>
-              <a:t>–   </a:t>
-            </a:r>
-            <a:r>
-              <a:rPr sz="1600" b="1" i="0">
-                <a:solidFill>
-                  <a:srgbClr val="333333"/>
-                </a:solidFill>
-                <a:latin typeface="Calibri"/>
-              </a:rPr>
-              <a:t>3.</a:t>
-            </a:r>
-            <a:r>
-              <a:rPr sz="1600" b="0" i="0">
-                <a:solidFill>
-                  <a:srgbClr val="333333"/>
-                </a:solidFill>
-                <a:latin typeface="Calibri"/>
-              </a:rPr>
-              <a:t> Paso 3: liste en la pregunta 14 los 3 contratos con quien llama a quien usando los nombres exactos del diagrama, el verbo y la ruta (o el evento) y el error de negocio con su codigo y su significado en el dominio; verifique que al menos uno sea un 409 de conflicto y que ninguno diga «500 error del servidor».</a:t>
-            </a:r>
-          </a:p>
-          <a:p>
-            <a:pPr>
-              <a:spcAft>
-                <a:spcPts val="800"/>
-              </a:spcAft>
+              <a:rPr sz="1000" b="0" i="0">
+                <a:solidFill>
+                  <a:srgbClr val="666666"/>
+                </a:solidFill>
+                <a:latin typeface="Calibri"/>
+              </a:rPr>
+              <a:t>Codigo del diagrama</a:t>
+            </a:r>
+          </a:p>
+        </p:txBody>
+      </p:sp>
+      <p:sp>
+        <p:nvSpPr>
+          <p:cNvPr id="21" name="Rounded Rectangle 20"/>
+          <p:cNvSpPr/>
+          <p:nvPr/>
+        </p:nvSpPr>
+        <p:spPr>
+          <a:xfrm>
+            <a:off x="4283354" y="4055364"/>
+            <a:ext cx="3624986" cy="2299716"/>
+          </a:xfrm>
+          <a:prstGeom prst="roundRect">
+            <a:avLst>
+              <a:gd name="adj" fmla="val 12000"/>
+            </a:avLst>
+          </a:prstGeom>
+          <a:solidFill>
+            <a:srgbClr val="F2F2F2"/>
+          </a:solidFill>
+          <a:ln>
+            <a:noFill/>
+          </a:ln>
+        </p:spPr>
+        <p:style>
+          <a:lnRef idx="1">
+            <a:schemeClr val="accent1"/>
+          </a:lnRef>
+          <a:fillRef idx="3">
+            <a:schemeClr val="accent1"/>
+          </a:fillRef>
+          <a:effectRef idx="2">
+            <a:schemeClr val="accent1"/>
+          </a:effectRef>
+          <a:fontRef idx="minor">
+            <a:schemeClr val="lt1"/>
+          </a:fontRef>
+        </p:style>
+        <p:txBody>
+          <a:bodyPr rtlCol="0" anchor="ctr"/>
+          <a:lstStyle/>
+          <a:p>
+            <a:pPr algn="ctr"/>
+          </a:p>
+        </p:txBody>
+      </p:sp>
+      <p:sp>
+        <p:nvSpPr>
+          <p:cNvPr id="22" name="Rectangle 21"/>
+          <p:cNvSpPr/>
+          <p:nvPr/>
+        </p:nvSpPr>
+        <p:spPr>
+          <a:xfrm>
+            <a:off x="4283354" y="4055364"/>
+            <a:ext cx="3624986" cy="64008"/>
+          </a:xfrm>
+          <a:prstGeom prst="rect">
+            <a:avLst/>
+          </a:prstGeom>
+          <a:solidFill>
+            <a:srgbClr val="095292"/>
+          </a:solidFill>
+          <a:ln>
+            <a:noFill/>
+          </a:ln>
+        </p:spPr>
+        <p:style>
+          <a:lnRef idx="1">
+            <a:schemeClr val="accent1"/>
+          </a:lnRef>
+          <a:fillRef idx="3">
+            <a:schemeClr val="accent1"/>
+          </a:fillRef>
+          <a:effectRef idx="2">
+            <a:schemeClr val="accent1"/>
+          </a:effectRef>
+          <a:fontRef idx="minor">
+            <a:schemeClr val="lt1"/>
+          </a:fontRef>
+        </p:style>
+        <p:txBody>
+          <a:bodyPr rtlCol="0" anchor="ctr"/>
+          <a:lstStyle/>
+          <a:p>
+            <a:pPr algn="ctr"/>
+          </a:p>
+        </p:txBody>
+      </p:sp>
+      <p:sp>
+        <p:nvSpPr>
+          <p:cNvPr id="23" name="Rectangle 22"/>
+          <p:cNvSpPr/>
+          <p:nvPr/>
+        </p:nvSpPr>
+        <p:spPr>
+          <a:xfrm>
+            <a:off x="4283354" y="4119372"/>
+            <a:ext cx="3624986" cy="27432"/>
+          </a:xfrm>
+          <a:prstGeom prst="rect">
+            <a:avLst/>
+          </a:prstGeom>
+          <a:solidFill>
+            <a:srgbClr val="FFD000"/>
+          </a:solidFill>
+          <a:ln>
+            <a:noFill/>
+          </a:ln>
+        </p:spPr>
+        <p:style>
+          <a:lnRef idx="1">
+            <a:schemeClr val="accent1"/>
+          </a:lnRef>
+          <a:fillRef idx="3">
+            <a:schemeClr val="accent1"/>
+          </a:fillRef>
+          <a:effectRef idx="2">
+            <a:schemeClr val="accent1"/>
+          </a:effectRef>
+          <a:fontRef idx="minor">
+            <a:schemeClr val="lt1"/>
+          </a:fontRef>
+        </p:style>
+        <p:txBody>
+          <a:bodyPr rtlCol="0" anchor="ctr"/>
+          <a:lstStyle/>
+          <a:p>
+            <a:pPr algn="ctr"/>
+          </a:p>
+        </p:txBody>
+      </p:sp>
+      <p:pic>
+        <p:nvPicPr>
+          <p:cNvPr id="24" name="Picture 23" descr="examlab.png"/>
+          <p:cNvPicPr>
+            <a:picLocks noChangeAspect="1"/>
+          </p:cNvPicPr>
+          <p:nvPr/>
+        </p:nvPicPr>
+        <p:blipFill>
+          <a:blip r:embed="rId5"/>
+          <a:stretch>
+            <a:fillRect/>
+          </a:stretch>
+        </p:blipFill>
+        <p:spPr>
+          <a:xfrm>
+            <a:off x="5485485" y="4311396"/>
+            <a:ext cx="1220724" cy="1220724"/>
+          </a:xfrm>
+          <a:prstGeom prst="rect">
+            <a:avLst/>
+          </a:prstGeom>
+        </p:spPr>
+      </p:pic>
+      <p:sp>
+        <p:nvSpPr>
+          <p:cNvPr id="25" name="TextBox 24"/>
+          <p:cNvSpPr txBox="1"/>
+          <p:nvPr/>
+        </p:nvSpPr>
+        <p:spPr>
+          <a:xfrm>
+            <a:off x="4356506" y="5623560"/>
+            <a:ext cx="3478682" cy="621792"/>
+          </a:xfrm>
+          <a:prstGeom prst="rect">
+            <a:avLst/>
+          </a:prstGeom>
+          <a:noFill/>
+        </p:spPr>
+        <p:txBody>
+          <a:bodyPr wrap="square" anchor="t"/>
+          <a:lstStyle/>
+          <a:p>
+            <a:pPr algn="ctr"/>
+            <a:r>
+              <a:rPr sz="1300" b="1" i="0">
+                <a:solidFill>
+                  <a:srgbClr val="095292"/>
+                </a:solidFill>
+                <a:latin typeface="Calibri"/>
+              </a:rPr>
+              <a:t>ExamLab</a:t>
+            </a:r>
+          </a:p>
+          <a:p>
+            <a:pPr algn="ctr">
+              <a:spcBef>
+                <a:spcPts val="200"/>
+              </a:spcBef>
             </a:pPr>
             <a:r>
-              <a:rPr sz="1600" b="0" i="0">
-                <a:solidFill>
-                  <a:srgbClr val="333333"/>
-                </a:solidFill>
-                <a:latin typeface="Calibri"/>
-              </a:rPr>
-              <a:t>–   </a:t>
-            </a:r>
-            <a:r>
-              <a:rPr sz="1600" b="1" i="0">
-                <a:solidFill>
-                  <a:srgbClr val="333333"/>
-                </a:solidFill>
-                <a:latin typeface="Calibri"/>
-              </a:rPr>
-              <a:t>4.</a:t>
-            </a:r>
-            <a:r>
-              <a:rPr sz="1600" b="0" i="0">
-                <a:solidFill>
-                  <a:srgbClr val="333333"/>
-                </a:solidFill>
-                <a:latin typeface="Calibri"/>
-              </a:rPr>
-              <a:t> Paso 4: analice en la pregunta 15 los tres riesgos de distribucion nombrando una caja concreta que se cae, contando los saltos de red de una operacion de punta a punta y nombrando un dato expuesto a inconsistencia; con esto la actividad del Corte 1 queda completa y se entrega en ExamLab antes del domingo 23:59 de esta semana.</a:t>
-            </a:r>
-          </a:p>
-        </p:txBody>
-      </p:sp>
-      <p:sp>
-        <p:nvSpPr>
-          <p:cNvPr id="6" name="TextBox 5"/>
+              <a:rPr sz="1000" b="0" i="0">
+                <a:solidFill>
+                  <a:srgbClr val="666666"/>
+                </a:solidFill>
+                <a:latin typeface="Calibri"/>
+              </a:rPr>
+              <a:t>Donde se entrega</a:t>
+            </a:r>
+          </a:p>
+        </p:txBody>
+      </p:sp>
+      <p:sp>
+        <p:nvSpPr>
+          <p:cNvPr id="26" name="TextBox 25"/>
           <p:cNvSpPr txBox="1"/>
           <p:nvPr/>
         </p:nvSpPr>
@@ -5732,7 +5700,7 @@
         <p:spPr>
           <a:xfrm>
             <a:off x="0" y="0"/>
-            <a:ext cx="12191695" cy="960120"/>
+            <a:ext cx="12191695" cy="1170432"/>
           </a:xfrm>
           <a:prstGeom prst="rect">
             <a:avLst/>
@@ -5774,7 +5742,7 @@
         </p:nvSpPr>
         <p:spPr>
           <a:xfrm>
-            <a:off x="0" y="960120"/>
+            <a:off x="0" y="1170432"/>
             <a:ext cx="12191695" cy="41148"/>
           </a:xfrm>
           <a:prstGeom prst="rect">
@@ -5818,7 +5786,7 @@
         <p:spPr>
           <a:xfrm>
             <a:off x="457200" y="164592"/>
-            <a:ext cx="11277295" cy="502920"/>
+            <a:ext cx="11277295" cy="384048"/>
           </a:xfrm>
           <a:prstGeom prst="rect">
             <a:avLst/>
@@ -5838,20 +5806,225 @@
                 </a:solidFill>
                 <a:latin typeface="Calibri"/>
               </a:rPr>
-              <a:t>Para continuar (PI)</a:t>
-            </a:r>
-          </a:p>
-        </p:txBody>
-      </p:sp>
-      <p:sp>
-        <p:nvSpPr>
-          <p:cNvPr id="5" name="Rounded Rectangle 4"/>
+              <a:t>Del boceto a ExamLab (diagrama)</a:t>
+            </a:r>
+          </a:p>
+        </p:txBody>
+      </p:sp>
+      <p:sp>
+        <p:nvSpPr>
+          <p:cNvPr id="5" name="TextBox 4"/>
+          <p:cNvSpPr txBox="1"/>
+          <p:nvPr/>
+        </p:nvSpPr>
+        <p:spPr>
+          <a:xfrm>
+            <a:off x="457200" y="566928"/>
+            <a:ext cx="11277295" cy="411480"/>
+          </a:xfrm>
+          <a:prstGeom prst="rect">
+            <a:avLst/>
+          </a:prstGeom>
+          <a:noFill/>
+        </p:spPr>
+        <p:txBody>
+          <a:bodyPr wrap="square">
+            <a:spAutoFit/>
+          </a:bodyPr>
+          <a:lstStyle/>
+          <a:p>
+            <a:r>
+              <a:rPr sz="1400" b="0" i="0">
+                <a:solidFill>
+                  <a:srgbClr val="B8D8EE"/>
+                </a:solidFill>
+                <a:latin typeface="Calibri"/>
+              </a:rPr>
+              <a:t>El diagrama se entrega como código Mermaid dentro de ExamLab, no como imagen</a:t>
+            </a:r>
+          </a:p>
+        </p:txBody>
+      </p:sp>
+      <p:sp>
+        <p:nvSpPr>
+          <p:cNvPr id="6" name="Rounded Rectangle 5"/>
           <p:cNvSpPr/>
           <p:nvPr/>
         </p:nvSpPr>
         <p:spPr>
           <a:xfrm>
-            <a:off x="457200" y="1261872"/>
+            <a:off x="457200" y="1659636"/>
+            <a:ext cx="11277295" cy="1051560"/>
+          </a:xfrm>
+          <a:prstGeom prst="roundRect">
+            <a:avLst>
+              <a:gd name="adj" fmla="val 12000"/>
+            </a:avLst>
+          </a:prstGeom>
+          <a:solidFill>
+            <a:srgbClr val="F2F2F2"/>
+          </a:solidFill>
+          <a:ln>
+            <a:noFill/>
+          </a:ln>
+        </p:spPr>
+        <p:style>
+          <a:lnRef idx="1">
+            <a:schemeClr val="accent1"/>
+          </a:lnRef>
+          <a:fillRef idx="3">
+            <a:schemeClr val="accent1"/>
+          </a:fillRef>
+          <a:effectRef idx="2">
+            <a:schemeClr val="accent1"/>
+          </a:effectRef>
+          <a:fontRef idx="minor">
+            <a:schemeClr val="lt1"/>
+          </a:fontRef>
+        </p:style>
+        <p:txBody>
+          <a:bodyPr rtlCol="0" anchor="ctr"/>
+          <a:lstStyle/>
+          <a:p>
+            <a:pPr algn="ctr"/>
+          </a:p>
+        </p:txBody>
+      </p:sp>
+      <p:sp>
+        <p:nvSpPr>
+          <p:cNvPr id="7" name="Rounded Rectangle 6"/>
+          <p:cNvSpPr/>
+          <p:nvPr/>
+        </p:nvSpPr>
+        <p:spPr>
+          <a:xfrm>
+            <a:off x="594360" y="1965960"/>
+            <a:ext cx="438912" cy="438912"/>
+          </a:xfrm>
+          <a:prstGeom prst="roundRect">
+            <a:avLst>
+              <a:gd name="adj" fmla="val 12000"/>
+            </a:avLst>
+          </a:prstGeom>
+          <a:solidFill>
+            <a:srgbClr val="095292"/>
+          </a:solidFill>
+          <a:ln>
+            <a:noFill/>
+          </a:ln>
+        </p:spPr>
+        <p:style>
+          <a:lnRef idx="1">
+            <a:schemeClr val="accent1"/>
+          </a:lnRef>
+          <a:fillRef idx="3">
+            <a:schemeClr val="accent1"/>
+          </a:fillRef>
+          <a:effectRef idx="2">
+            <a:schemeClr val="accent1"/>
+          </a:effectRef>
+          <a:fontRef idx="minor">
+            <a:schemeClr val="lt1"/>
+          </a:fontRef>
+        </p:style>
+        <p:txBody>
+          <a:bodyPr rtlCol="0" anchor="ctr"/>
+          <a:lstStyle/>
+          <a:p>
+            <a:pPr algn="ctr"/>
+          </a:p>
+        </p:txBody>
+      </p:sp>
+      <p:sp>
+        <p:nvSpPr>
+          <p:cNvPr id="8" name="TextBox 7"/>
+          <p:cNvSpPr txBox="1"/>
+          <p:nvPr/>
+        </p:nvSpPr>
+        <p:spPr>
+          <a:xfrm>
+            <a:off x="594360" y="1965960"/>
+            <a:ext cx="438912" cy="438912"/>
+          </a:xfrm>
+          <a:prstGeom prst="rect">
+            <a:avLst/>
+          </a:prstGeom>
+          <a:noFill/>
+        </p:spPr>
+        <p:txBody>
+          <a:bodyPr wrap="square" anchor="ctr"/>
+          <a:lstStyle/>
+          <a:p>
+            <a:pPr algn="ctr"/>
+            <a:r>
+              <a:rPr sz="1600" b="1" i="0">
+                <a:solidFill>
+                  <a:srgbClr val="FFFFFF"/>
+                </a:solidFill>
+                <a:latin typeface="Calibri"/>
+              </a:rPr>
+              <a:t>1</a:t>
+            </a:r>
+          </a:p>
+        </p:txBody>
+      </p:sp>
+      <p:sp>
+        <p:nvSpPr>
+          <p:cNvPr id="9" name="TextBox 8"/>
+          <p:cNvSpPr txBox="1"/>
+          <p:nvPr/>
+        </p:nvSpPr>
+        <p:spPr>
+          <a:xfrm>
+            <a:off x="1188720" y="1751076"/>
+            <a:ext cx="10271455" cy="886968"/>
+          </a:xfrm>
+          <a:prstGeom prst="rect">
+            <a:avLst/>
+          </a:prstGeom>
+          <a:noFill/>
+        </p:spPr>
+        <p:txBody>
+          <a:bodyPr wrap="square" anchor="ctr"/>
+          <a:lstStyle/>
+          <a:p>
+            <a:r>
+              <a:rPr sz="1500" b="1" i="0">
+                <a:solidFill>
+                  <a:srgbClr val="095292"/>
+                </a:solidFill>
+                <a:latin typeface="Calibri"/>
+              </a:rPr>
+              <a:t>Disena visual</a:t>
+            </a:r>
+          </a:p>
+          <a:p>
+            <a:pPr>
+              <a:spcBef>
+                <a:spcPts val="200"/>
+              </a:spcBef>
+            </a:pPr>
+            <a:r>
+              <a:rPr sz="1300" b="0" i="0">
+                <a:solidFill>
+                  <a:srgbClr val="333333"/>
+                </a:solidFill>
+                <a:latin typeface="Calibri"/>
+              </a:rPr>
+              <a:t>Dibuja el diagrama como quieras en Excalidraw o draw.io: es mas rapido arrastrar cajas que escribir codigo, y ahi es donde piensas el modelo.</a:t>
+            </a:r>
+          </a:p>
+        </p:txBody>
+      </p:sp>
+      <p:sp>
+        <p:nvSpPr>
+          <p:cNvPr id="10" name="Rounded Rectangle 9"/>
+          <p:cNvSpPr/>
+          <p:nvPr/>
+        </p:nvSpPr>
+        <p:spPr>
+          <a:xfrm>
+            <a:off x="457200" y="2802636"/>
             <a:ext cx="11277295" cy="1051560"/>
           </a:xfrm>
           <a:prstGeom prst="roundRect">
@@ -5890,20 +6063,22 @@
       </p:sp>
       <p:sp>
         <p:nvSpPr>
-          <p:cNvPr id="6" name="Rectangle 5"/>
+          <p:cNvPr id="11" name="Rounded Rectangle 10"/>
           <p:cNvSpPr/>
           <p:nvPr/>
         </p:nvSpPr>
         <p:spPr>
           <a:xfrm>
-            <a:off x="457200" y="1261872"/>
-            <a:ext cx="128016" cy="1051560"/>
-          </a:xfrm>
-          <a:prstGeom prst="rect">
-            <a:avLst/>
+            <a:off x="594360" y="3108960"/>
+            <a:ext cx="438912" cy="438912"/>
+          </a:xfrm>
+          <a:prstGeom prst="roundRect">
+            <a:avLst>
+              <a:gd name="adj" fmla="val 12000"/>
+            </a:avLst>
           </a:prstGeom>
           <a:solidFill>
-            <a:srgbClr val="269CCB"/>
+            <a:srgbClr val="095292"/>
           </a:solidFill>
           <a:ln>
             <a:noFill/>
@@ -5933,14 +6108,14 @@
       </p:sp>
       <p:sp>
         <p:nvSpPr>
-          <p:cNvPr id="7" name="TextBox 6"/>
+          <p:cNvPr id="12" name="TextBox 11"/>
           <p:cNvSpPr txBox="1"/>
           <p:nvPr/>
         </p:nvSpPr>
         <p:spPr>
           <a:xfrm>
-            <a:off x="777240" y="1399031"/>
-            <a:ext cx="10774375" cy="822959"/>
+            <a:off x="594360" y="3108960"/>
+            <a:ext cx="438912" cy="438912"/>
           </a:xfrm>
           <a:prstGeom prst="rect">
             <a:avLst/>
@@ -5948,48 +6123,79 @@
           <a:noFill/>
         </p:spPr>
         <p:txBody>
-          <a:bodyPr wrap="square">
-            <a:spAutoFit/>
-          </a:bodyPr>
-          <a:lstStyle/>
-          <a:p>
-            <a:r>
-              <a:rPr sz="1200" b="1" i="0">
-                <a:solidFill>
-                  <a:srgbClr val="269CCB"/>
-                </a:solidFill>
-                <a:latin typeface="Calibri"/>
-              </a:rPr>
-              <a:t>Info</a:t>
+          <a:bodyPr wrap="square" anchor="ctr"/>
+          <a:lstStyle/>
+          <a:p>
+            <a:pPr algn="ctr"/>
+            <a:r>
+              <a:rPr sz="1600" b="1" i="0">
+                <a:solidFill>
+                  <a:srgbClr val="FFFFFF"/>
+                </a:solidFill>
+                <a:latin typeface="Calibri"/>
+              </a:rPr>
+              <a:t>2</a:t>
+            </a:r>
+          </a:p>
+        </p:txBody>
+      </p:sp>
+      <p:sp>
+        <p:nvSpPr>
+          <p:cNvPr id="13" name="TextBox 12"/>
+          <p:cNvSpPr txBox="1"/>
+          <p:nvPr/>
+        </p:nvSpPr>
+        <p:spPr>
+          <a:xfrm>
+            <a:off x="1188720" y="2894076"/>
+            <a:ext cx="10271455" cy="886968"/>
+          </a:xfrm>
+          <a:prstGeom prst="rect">
+            <a:avLst/>
+          </a:prstGeom>
+          <a:noFill/>
+        </p:spPr>
+        <p:txBody>
+          <a:bodyPr wrap="square" anchor="ctr"/>
+          <a:lstStyle/>
+          <a:p>
+            <a:r>
+              <a:rPr sz="1500" b="1" i="0">
+                <a:solidFill>
+                  <a:srgbClr val="095292"/>
+                </a:solidFill>
+                <a:latin typeface="Calibri"/>
+              </a:rPr>
+              <a:t>Traduce con IA</a:t>
             </a:r>
           </a:p>
           <a:p>
             <a:pPr>
               <a:spcBef>
-                <a:spcPts val="400"/>
+                <a:spcPts val="200"/>
               </a:spcBef>
             </a:pPr>
             <a:r>
-              <a:rPr sz="1400" b="0" i="0">
+              <a:rPr sz="1300" b="0" i="0">
                 <a:solidFill>
                   <a:srgbClr val="333333"/>
                 </a:solidFill>
                 <a:latin typeface="Calibri"/>
               </a:rPr>
-              <a:t>Entregable: Diagrama C4 Container/Componentes v0.9 + lista de APIs entre servicios</a:t>
-            </a:r>
-          </a:p>
-        </p:txBody>
-      </p:sp>
-      <p:sp>
-        <p:nvSpPr>
-          <p:cNvPr id="8" name="Rounded Rectangle 7"/>
+              <a:t>Copia o describe tu boceto a una IA y pidele el codigo Mermaid: «convierte este diagrama a Mermaid usando C4Container». Revisa el resultado: la IA acierta la sintaxis, no tu modelo.</a:t>
+            </a:r>
+          </a:p>
+        </p:txBody>
+      </p:sp>
+      <p:sp>
+        <p:nvSpPr>
+          <p:cNvPr id="14" name="Rounded Rectangle 13"/>
           <p:cNvSpPr/>
           <p:nvPr/>
         </p:nvSpPr>
         <p:spPr>
           <a:xfrm>
-            <a:off x="457200" y="2478024"/>
+            <a:off x="457200" y="3945636"/>
             <a:ext cx="11277295" cy="1051560"/>
           </a:xfrm>
           <a:prstGeom prst="roundRect">
@@ -5998,7 +6204,7 @@
             </a:avLst>
           </a:prstGeom>
           <a:solidFill>
-            <a:srgbClr val="FFF8E1"/>
+            <a:srgbClr val="F2F2F2"/>
           </a:solidFill>
           <a:ln>
             <a:noFill/>
@@ -6028,20 +6234,22 @@
       </p:sp>
       <p:sp>
         <p:nvSpPr>
-          <p:cNvPr id="9" name="Rectangle 8"/>
+          <p:cNvPr id="15" name="Rounded Rectangle 14"/>
           <p:cNvSpPr/>
           <p:nvPr/>
         </p:nvSpPr>
         <p:spPr>
           <a:xfrm>
-            <a:off x="457200" y="2478024"/>
-            <a:ext cx="128016" cy="1051560"/>
-          </a:xfrm>
-          <a:prstGeom prst="rect">
-            <a:avLst/>
+            <a:off x="594360" y="4251960"/>
+            <a:ext cx="438912" cy="438912"/>
+          </a:xfrm>
+          <a:prstGeom prst="roundRect">
+            <a:avLst>
+              <a:gd name="adj" fmla="val 12000"/>
+            </a:avLst>
           </a:prstGeom>
           <a:solidFill>
-            <a:srgbClr val="FFD000"/>
+            <a:srgbClr val="095292"/>
           </a:solidFill>
           <a:ln>
             <a:noFill/>
@@ -6071,14 +6279,14 @@
       </p:sp>
       <p:sp>
         <p:nvSpPr>
-          <p:cNvPr id="10" name="TextBox 9"/>
+          <p:cNvPr id="16" name="TextBox 15"/>
           <p:cNvSpPr txBox="1"/>
           <p:nvPr/>
         </p:nvSpPr>
         <p:spPr>
           <a:xfrm>
-            <a:off x="777240" y="2615184"/>
-            <a:ext cx="10774375" cy="822959"/>
+            <a:off x="594360" y="4251960"/>
+            <a:ext cx="438912" cy="438912"/>
           </a:xfrm>
           <a:prstGeom prst="rect">
             <a:avLst/>
@@ -6086,48 +6294,79 @@
           <a:noFill/>
         </p:spPr>
         <p:txBody>
-          <a:bodyPr wrap="square">
-            <a:spAutoFit/>
-          </a:bodyPr>
-          <a:lstStyle/>
-          <a:p>
-            <a:r>
-              <a:rPr sz="1200" b="1" i="0">
-                <a:solidFill>
-                  <a:srgbClr val="FFD000"/>
-                </a:solidFill>
-                <a:latin typeface="Calibri"/>
-              </a:rPr>
-              <a:t>Aclaración</a:t>
+          <a:bodyPr wrap="square" anchor="ctr"/>
+          <a:lstStyle/>
+          <a:p>
+            <a:pPr algn="ctr"/>
+            <a:r>
+              <a:rPr sz="1600" b="1" i="0">
+                <a:solidFill>
+                  <a:srgbClr val="FFFFFF"/>
+                </a:solidFill>
+                <a:latin typeface="Calibri"/>
+              </a:rPr>
+              <a:t>3</a:t>
+            </a:r>
+          </a:p>
+        </p:txBody>
+      </p:sp>
+      <p:sp>
+        <p:nvSpPr>
+          <p:cNvPr id="17" name="TextBox 16"/>
+          <p:cNvSpPr txBox="1"/>
+          <p:nvPr/>
+        </p:nvSpPr>
+        <p:spPr>
+          <a:xfrm>
+            <a:off x="1188720" y="4037076"/>
+            <a:ext cx="10271455" cy="886968"/>
+          </a:xfrm>
+          <a:prstGeom prst="rect">
+            <a:avLst/>
+          </a:prstGeom>
+          <a:noFill/>
+        </p:spPr>
+        <p:txBody>
+          <a:bodyPr wrap="square" anchor="ctr"/>
+          <a:lstStyle/>
+          <a:p>
+            <a:r>
+              <a:rPr sz="1500" b="1" i="0">
+                <a:solidFill>
+                  <a:srgbClr val="095292"/>
+                </a:solidFill>
+                <a:latin typeface="Calibri"/>
+              </a:rPr>
+              <a:t>Pega y renderiza en ExamLab</a:t>
             </a:r>
           </a:p>
           <a:p>
             <a:pPr>
               <a:spcBef>
-                <a:spcPts val="400"/>
+                <a:spcPts val="200"/>
               </a:spcBef>
             </a:pPr>
             <a:r>
-              <a:rPr sz="1400" b="0" i="0">
+              <a:rPr sz="1300" b="0" i="0">
                 <a:solidFill>
                   <a:srgbClr val="333333"/>
                 </a:solidFill>
                 <a:latin typeface="Calibri"/>
               </a:rPr>
-              <a:t>Subir evidencias al paquete CloudLite (Drive/repo) y a ExamLab (https://uniaj.examlab.workers.dev/) domingo 23:59.</a:t>
-            </a:r>
-          </a:p>
-        </p:txBody>
-      </p:sp>
-      <p:sp>
-        <p:nvSpPr>
-          <p:cNvPr id="11" name="Rounded Rectangle 10"/>
+              <a:t>Pega ese codigo en la caja de texto de la pregunta y mira como lo dibuja la plataforma. Si no renderiza, corrige ahi mismo: lo que se califica es el diagrama renderizado dentro de ExamLab.</a:t>
+            </a:r>
+          </a:p>
+        </p:txBody>
+      </p:sp>
+      <p:sp>
+        <p:nvSpPr>
+          <p:cNvPr id="18" name="Rounded Rectangle 17"/>
           <p:cNvSpPr/>
           <p:nvPr/>
         </p:nvSpPr>
         <p:spPr>
           <a:xfrm>
-            <a:off x="457200" y="3694176"/>
+            <a:off x="457200" y="5088636"/>
             <a:ext cx="11277295" cy="1051560"/>
           </a:xfrm>
           <a:prstGeom prst="roundRect">
@@ -6136,7 +6375,7 @@
             </a:avLst>
           </a:prstGeom>
           <a:solidFill>
-            <a:srgbClr val="FBE4E4"/>
+            <a:srgbClr val="E8F4FA"/>
           </a:solidFill>
           <a:ln>
             <a:noFill/>
@@ -6166,20 +6405,22 @@
       </p:sp>
       <p:sp>
         <p:nvSpPr>
-          <p:cNvPr id="12" name="Rectangle 11"/>
+          <p:cNvPr id="19" name="Rounded Rectangle 18"/>
           <p:cNvSpPr/>
           <p:nvPr/>
         </p:nvSpPr>
         <p:spPr>
           <a:xfrm>
-            <a:off x="457200" y="3694176"/>
-            <a:ext cx="128016" cy="1051560"/>
-          </a:xfrm>
-          <a:prstGeom prst="rect">
-            <a:avLst/>
+            <a:off x="594360" y="5394960"/>
+            <a:ext cx="438912" cy="438912"/>
+          </a:xfrm>
+          <a:prstGeom prst="roundRect">
+            <a:avLst>
+              <a:gd name="adj" fmla="val 12000"/>
+            </a:avLst>
           </a:prstGeom>
           <a:solidFill>
-            <a:srgbClr val="A02030"/>
+            <a:srgbClr val="095292"/>
           </a:solidFill>
           <a:ln>
             <a:noFill/>
@@ -6209,14 +6450,14 @@
       </p:sp>
       <p:sp>
         <p:nvSpPr>
-          <p:cNvPr id="13" name="TextBox 12"/>
+          <p:cNvPr id="20" name="TextBox 19"/>
           <p:cNvSpPr txBox="1"/>
           <p:nvPr/>
         </p:nvSpPr>
         <p:spPr>
           <a:xfrm>
-            <a:off x="777240" y="3831336"/>
-            <a:ext cx="10774375" cy="822959"/>
+            <a:off x="594360" y="5394960"/>
+            <a:ext cx="438912" cy="438912"/>
           </a:xfrm>
           <a:prstGeom prst="rect">
             <a:avLst/>
@@ -6224,42 +6465,73 @@
           <a:noFill/>
         </p:spPr>
         <p:txBody>
-          <a:bodyPr wrap="square">
-            <a:spAutoFit/>
-          </a:bodyPr>
-          <a:lstStyle/>
-          <a:p>
-            <a:r>
-              <a:rPr sz="1200" b="1" i="0">
-                <a:solidFill>
-                  <a:srgbClr val="A02030"/>
-                </a:solidFill>
-                <a:latin typeface="Calibri"/>
-              </a:rPr>
-              <a:t>Atención</a:t>
+          <a:bodyPr wrap="square" anchor="ctr"/>
+          <a:lstStyle/>
+          <a:p>
+            <a:pPr algn="ctr"/>
+            <a:r>
+              <a:rPr sz="1600" b="1" i="0">
+                <a:solidFill>
+                  <a:srgbClr val="FFFFFF"/>
+                </a:solidFill>
+                <a:latin typeface="Calibri"/>
+              </a:rPr>
+              <a:t>4</a:t>
+            </a:r>
+          </a:p>
+        </p:txBody>
+      </p:sp>
+      <p:sp>
+        <p:nvSpPr>
+          <p:cNvPr id="21" name="TextBox 20"/>
+          <p:cNvSpPr txBox="1"/>
+          <p:nvPr/>
+        </p:nvSpPr>
+        <p:spPr>
+          <a:xfrm>
+            <a:off x="1188720" y="5180076"/>
+            <a:ext cx="10271455" cy="886968"/>
+          </a:xfrm>
+          <a:prstGeom prst="rect">
+            <a:avLst/>
+          </a:prstGeom>
+          <a:noFill/>
+        </p:spPr>
+        <p:txBody>
+          <a:bodyPr wrap="square" anchor="ctr"/>
+          <a:lstStyle/>
+          <a:p>
+            <a:r>
+              <a:rPr sz="1500" b="1" i="0">
+                <a:solidFill>
+                  <a:srgbClr val="095292"/>
+                </a:solidFill>
+                <a:latin typeface="Calibri"/>
+              </a:rPr>
+              <a:t>Guarda el PNG para tu PI</a:t>
             </a:r>
           </a:p>
           <a:p>
             <a:pPr>
               <a:spcBef>
-                <a:spcPts val="400"/>
+                <a:spcPts val="200"/>
               </a:spcBef>
             </a:pPr>
             <a:r>
-              <a:rPr sz="1400" b="0" i="0">
+              <a:rPr sz="1300" b="0" i="0">
                 <a:solidFill>
                   <a:srgbClr val="333333"/>
                 </a:solidFill>
                 <a:latin typeface="Calibri"/>
               </a:rPr>
-              <a:t>Sin cloud de pago ni instalaciones obligatorias de hipervisores/Docker Desktop.</a:t>
-            </a:r>
-          </a:p>
-        </p:txBody>
-      </p:sp>
-      <p:sp>
-        <p:nvSpPr>
-          <p:cNvPr id="14" name="TextBox 13"/>
+              <a:t>Exporta tambien la imagen a la carpeta de tu Proyecto Integrador. Esa copia es para tu informe; no reemplaza la respuesta en la plataforma.</a:t>
+            </a:r>
+          </a:p>
+        </p:txBody>
+      </p:sp>
+      <p:sp>
+        <p:nvSpPr>
+          <p:cNvPr id="22" name="TextBox 21"/>
           <p:cNvSpPr txBox="1"/>
           <p:nvPr/>
         </p:nvSpPr>
@@ -6327,6 +6599,932 @@
         <p:spPr>
           <a:xfrm>
             <a:off x="0" y="0"/>
+            <a:ext cx="12191695" cy="960120"/>
+          </a:xfrm>
+          <a:prstGeom prst="rect">
+            <a:avLst/>
+          </a:prstGeom>
+          <a:solidFill>
+            <a:srgbClr val="095292"/>
+          </a:solidFill>
+          <a:ln>
+            <a:noFill/>
+          </a:ln>
+        </p:spPr>
+        <p:style>
+          <a:lnRef idx="1">
+            <a:schemeClr val="accent1"/>
+          </a:lnRef>
+          <a:fillRef idx="3">
+            <a:schemeClr val="accent1"/>
+          </a:fillRef>
+          <a:effectRef idx="2">
+            <a:schemeClr val="accent1"/>
+          </a:effectRef>
+          <a:fontRef idx="minor">
+            <a:schemeClr val="lt1"/>
+          </a:fontRef>
+        </p:style>
+        <p:txBody>
+          <a:bodyPr rtlCol="0" anchor="ctr"/>
+          <a:lstStyle/>
+          <a:p>
+            <a:pPr algn="ctr"/>
+          </a:p>
+        </p:txBody>
+      </p:sp>
+      <p:sp>
+        <p:nvSpPr>
+          <p:cNvPr id="3" name="Rectangle 2"/>
+          <p:cNvSpPr/>
+          <p:nvPr/>
+        </p:nvSpPr>
+        <p:spPr>
+          <a:xfrm>
+            <a:off x="0" y="960120"/>
+            <a:ext cx="12191695" cy="41148"/>
+          </a:xfrm>
+          <a:prstGeom prst="rect">
+            <a:avLst/>
+          </a:prstGeom>
+          <a:solidFill>
+            <a:srgbClr val="FFD000"/>
+          </a:solidFill>
+          <a:ln>
+            <a:noFill/>
+          </a:ln>
+        </p:spPr>
+        <p:style>
+          <a:lnRef idx="1">
+            <a:schemeClr val="accent1"/>
+          </a:lnRef>
+          <a:fillRef idx="3">
+            <a:schemeClr val="accent1"/>
+          </a:fillRef>
+          <a:effectRef idx="2">
+            <a:schemeClr val="accent1"/>
+          </a:effectRef>
+          <a:fontRef idx="minor">
+            <a:schemeClr val="lt1"/>
+          </a:fontRef>
+        </p:style>
+        <p:txBody>
+          <a:bodyPr rtlCol="0" anchor="ctr"/>
+          <a:lstStyle/>
+          <a:p>
+            <a:pPr algn="ctr"/>
+          </a:p>
+        </p:txBody>
+      </p:sp>
+      <p:sp>
+        <p:nvSpPr>
+          <p:cNvPr id="4" name="TextBox 3"/>
+          <p:cNvSpPr txBox="1"/>
+          <p:nvPr/>
+        </p:nvSpPr>
+        <p:spPr>
+          <a:xfrm>
+            <a:off x="457200" y="164592"/>
+            <a:ext cx="11277295" cy="502920"/>
+          </a:xfrm>
+          <a:prstGeom prst="rect">
+            <a:avLst/>
+          </a:prstGeom>
+          <a:noFill/>
+        </p:spPr>
+        <p:txBody>
+          <a:bodyPr wrap="square">
+            <a:spAutoFit/>
+          </a:bodyPr>
+          <a:lstStyle/>
+          <a:p>
+            <a:r>
+              <a:rPr sz="2600" b="1" i="0">
+                <a:solidFill>
+                  <a:srgbClr val="FFFFFF"/>
+                </a:solidFill>
+                <a:latin typeface="Calibri"/>
+              </a:rPr>
+              <a:t>Taller PI (paso a paso)</a:t>
+            </a:r>
+          </a:p>
+        </p:txBody>
+      </p:sp>
+      <p:sp>
+        <p:nvSpPr>
+          <p:cNvPr id="5" name="TextBox 4"/>
+          <p:cNvSpPr txBox="1"/>
+          <p:nvPr/>
+        </p:nvSpPr>
+        <p:spPr>
+          <a:xfrm>
+            <a:off x="457200" y="1170432"/>
+            <a:ext cx="11277295" cy="5230368"/>
+          </a:xfrm>
+          <a:prstGeom prst="rect">
+            <a:avLst/>
+          </a:prstGeom>
+          <a:noFill/>
+        </p:spPr>
+        <p:txBody>
+          <a:bodyPr wrap="square">
+            <a:spAutoFit/>
+          </a:bodyPr>
+          <a:lstStyle/>
+          <a:p>
+            <a:pPr>
+              <a:spcAft>
+                <a:spcPts val="800"/>
+              </a:spcAft>
+            </a:pPr>
+            <a:r>
+              <a:rPr sz="1600" b="1" i="0">
+                <a:solidFill>
+                  <a:srgbClr val="333333"/>
+                </a:solidFill>
+                <a:latin typeface="Calibri"/>
+              </a:rPr>
+              <a:t>1.</a:t>
+            </a:r>
+            <a:r>
+              <a:rPr sz="1600" b="0" i="0">
+                <a:solidFill>
+                  <a:srgbClr val="333333"/>
+                </a:solidFill>
+                <a:latin typeface="Calibri"/>
+              </a:rPr>
+              <a:t> Paso 1: decida en la pregunta 12 si su CloudLite es un monolito modular o microservicios, con los dos criterios aplicados a su caso (tamano del equipo con numero y plazo, y que partes cambian juntas) y lo que gana y pierde; verifique que no escribio «un poco de los dos», porque eso vale cero.</a:t>
+            </a:r>
+          </a:p>
+          <a:p>
+            <a:pPr>
+              <a:spcAft>
+                <a:spcPts val="800"/>
+              </a:spcAft>
+            </a:pPr>
+            <a:r>
+              <a:rPr sz="1600" b="0" i="0">
+                <a:solidFill>
+                  <a:srgbClr val="333333"/>
+                </a:solidFill>
+                <a:latin typeface="Calibri"/>
+              </a:rPr>
+              <a:t>–   </a:t>
+            </a:r>
+            <a:r>
+              <a:rPr sz="1600" b="1" i="0">
+                <a:solidFill>
+                  <a:srgbClr val="333333"/>
+                </a:solidFill>
+                <a:latin typeface="Calibri"/>
+              </a:rPr>
+              <a:t>2.</a:t>
+            </a:r>
+            <a:r>
+              <a:rPr sz="1600" b="0" i="0">
+                <a:solidFill>
+                  <a:srgbClr val="333333"/>
+                </a:solidFill>
+                <a:latin typeface="Calibri"/>
+              </a:rPr>
+              <a:t> Paso 2: modele en la pregunta 13 el C4 Container partiendo del C4 Context de la pregunta 3, con entre 2 y 5 contenedores coherentes con la decision anterior, los almacenes de datos como ContainerDb y toda flecha con protocolo y formato; verifique que los nombres de sistema, actores y sistemas externos sean identicos a los del Context.</a:t>
+            </a:r>
+          </a:p>
+          <a:p>
+            <a:pPr>
+              <a:spcAft>
+                <a:spcPts val="800"/>
+              </a:spcAft>
+            </a:pPr>
+            <a:r>
+              <a:rPr sz="1600" b="0" i="0">
+                <a:solidFill>
+                  <a:srgbClr val="333333"/>
+                </a:solidFill>
+                <a:latin typeface="Calibri"/>
+              </a:rPr>
+              <a:t>–   </a:t>
+            </a:r>
+            <a:r>
+              <a:rPr sz="1600" b="1" i="0">
+                <a:solidFill>
+                  <a:srgbClr val="333333"/>
+                </a:solidFill>
+                <a:latin typeface="Calibri"/>
+              </a:rPr>
+              <a:t>3.</a:t>
+            </a:r>
+            <a:r>
+              <a:rPr sz="1600" b="0" i="0">
+                <a:solidFill>
+                  <a:srgbClr val="333333"/>
+                </a:solidFill>
+                <a:latin typeface="Calibri"/>
+              </a:rPr>
+              <a:t> Paso 3: liste en la pregunta 14 los 3 contratos con quien llama a quien usando los nombres exactos del diagrama, el verbo y la ruta (o el evento) y el error de negocio con su codigo y su significado en el dominio; verifique que al menos uno sea un 409 de conflicto y que ninguno diga «500 error del servidor».</a:t>
+            </a:r>
+          </a:p>
+          <a:p>
+            <a:pPr>
+              <a:spcAft>
+                <a:spcPts val="800"/>
+              </a:spcAft>
+            </a:pPr>
+            <a:r>
+              <a:rPr sz="1600" b="0" i="0">
+                <a:solidFill>
+                  <a:srgbClr val="333333"/>
+                </a:solidFill>
+                <a:latin typeface="Calibri"/>
+              </a:rPr>
+              <a:t>–   </a:t>
+            </a:r>
+            <a:r>
+              <a:rPr sz="1600" b="1" i="0">
+                <a:solidFill>
+                  <a:srgbClr val="333333"/>
+                </a:solidFill>
+                <a:latin typeface="Calibri"/>
+              </a:rPr>
+              <a:t>4.</a:t>
+            </a:r>
+            <a:r>
+              <a:rPr sz="1600" b="0" i="0">
+                <a:solidFill>
+                  <a:srgbClr val="333333"/>
+                </a:solidFill>
+                <a:latin typeface="Calibri"/>
+              </a:rPr>
+              <a:t> Paso 4: analice en la pregunta 15 los tres riesgos de distribucion nombrando una caja concreta que se cae, contando los saltos de red de una operacion de punta a punta y nombrando un dato expuesto a inconsistencia; con esto la actividad del Corte 1 queda completa y se entrega en ExamLab antes del domingo 23:59 de esta semana.</a:t>
+            </a:r>
+          </a:p>
+        </p:txBody>
+      </p:sp>
+      <p:sp>
+        <p:nvSpPr>
+          <p:cNvPr id="6" name="TextBox 5"/>
+          <p:cNvSpPr txBox="1"/>
+          <p:nvPr/>
+        </p:nvSpPr>
+        <p:spPr>
+          <a:xfrm>
+            <a:off x="11185855" y="6473952"/>
+            <a:ext cx="640080" cy="274320"/>
+          </a:xfrm>
+          <a:prstGeom prst="rect">
+            <a:avLst/>
+          </a:prstGeom>
+          <a:noFill/>
+        </p:spPr>
+        <p:txBody>
+          <a:bodyPr wrap="square">
+            <a:spAutoFit/>
+          </a:bodyPr>
+          <a:lstStyle/>
+          <a:p>
+            <a:pPr algn="r"/>
+            <a:r>
+              <a:rPr sz="1100" b="0" i="0">
+                <a:solidFill>
+                  <a:srgbClr val="666666"/>
+                </a:solidFill>
+                <a:latin typeface="Calibri"/>
+              </a:rPr>
+              <a:t>14</a:t>
+            </a:r>
+          </a:p>
+        </p:txBody>
+      </p:sp>
+    </p:spTree>
+  </p:cSld>
+  <p:clrMapOvr>
+    <a:masterClrMapping/>
+  </p:clrMapOvr>
+</p:sld>
+</file>
+
+<file path=ppt/slides/slide15.xml><?xml version="1.0" encoding="utf-8"?>
+<p:sld xmlns:a="http://schemas.openxmlformats.org/drawingml/2006/main" xmlns:p="http://schemas.openxmlformats.org/presentationml/2006/main" xmlns:r="http://schemas.openxmlformats.org/officeDocument/2006/relationships">
+  <p:cSld>
+    <p:bg>
+      <p:bgPr>
+        <a:solidFill>
+          <a:srgbClr val="FFFFFF"/>
+        </a:solidFill>
+        <a:effectLst/>
+      </p:bgPr>
+    </p:bg>
+    <p:spTree>
+      <p:nvGrpSpPr>
+        <p:cNvPr id="1" name=""/>
+        <p:cNvGrpSpPr/>
+        <p:nvPr/>
+      </p:nvGrpSpPr>
+      <p:grpSpPr/>
+      <p:sp>
+        <p:nvSpPr>
+          <p:cNvPr id="2" name="Rectangle 1"/>
+          <p:cNvSpPr/>
+          <p:nvPr/>
+        </p:nvSpPr>
+        <p:spPr>
+          <a:xfrm>
+            <a:off x="0" y="0"/>
+            <a:ext cx="12191695" cy="960120"/>
+          </a:xfrm>
+          <a:prstGeom prst="rect">
+            <a:avLst/>
+          </a:prstGeom>
+          <a:solidFill>
+            <a:srgbClr val="095292"/>
+          </a:solidFill>
+          <a:ln>
+            <a:noFill/>
+          </a:ln>
+        </p:spPr>
+        <p:style>
+          <a:lnRef idx="1">
+            <a:schemeClr val="accent1"/>
+          </a:lnRef>
+          <a:fillRef idx="3">
+            <a:schemeClr val="accent1"/>
+          </a:fillRef>
+          <a:effectRef idx="2">
+            <a:schemeClr val="accent1"/>
+          </a:effectRef>
+          <a:fontRef idx="minor">
+            <a:schemeClr val="lt1"/>
+          </a:fontRef>
+        </p:style>
+        <p:txBody>
+          <a:bodyPr rtlCol="0" anchor="ctr"/>
+          <a:lstStyle/>
+          <a:p>
+            <a:pPr algn="ctr"/>
+          </a:p>
+        </p:txBody>
+      </p:sp>
+      <p:sp>
+        <p:nvSpPr>
+          <p:cNvPr id="3" name="Rectangle 2"/>
+          <p:cNvSpPr/>
+          <p:nvPr/>
+        </p:nvSpPr>
+        <p:spPr>
+          <a:xfrm>
+            <a:off x="0" y="960120"/>
+            <a:ext cx="12191695" cy="41148"/>
+          </a:xfrm>
+          <a:prstGeom prst="rect">
+            <a:avLst/>
+          </a:prstGeom>
+          <a:solidFill>
+            <a:srgbClr val="FFD000"/>
+          </a:solidFill>
+          <a:ln>
+            <a:noFill/>
+          </a:ln>
+        </p:spPr>
+        <p:style>
+          <a:lnRef idx="1">
+            <a:schemeClr val="accent1"/>
+          </a:lnRef>
+          <a:fillRef idx="3">
+            <a:schemeClr val="accent1"/>
+          </a:fillRef>
+          <a:effectRef idx="2">
+            <a:schemeClr val="accent1"/>
+          </a:effectRef>
+          <a:fontRef idx="minor">
+            <a:schemeClr val="lt1"/>
+          </a:fontRef>
+        </p:style>
+        <p:txBody>
+          <a:bodyPr rtlCol="0" anchor="ctr"/>
+          <a:lstStyle/>
+          <a:p>
+            <a:pPr algn="ctr"/>
+          </a:p>
+        </p:txBody>
+      </p:sp>
+      <p:sp>
+        <p:nvSpPr>
+          <p:cNvPr id="4" name="TextBox 3"/>
+          <p:cNvSpPr txBox="1"/>
+          <p:nvPr/>
+        </p:nvSpPr>
+        <p:spPr>
+          <a:xfrm>
+            <a:off x="457200" y="164592"/>
+            <a:ext cx="11277295" cy="502920"/>
+          </a:xfrm>
+          <a:prstGeom prst="rect">
+            <a:avLst/>
+          </a:prstGeom>
+          <a:noFill/>
+        </p:spPr>
+        <p:txBody>
+          <a:bodyPr wrap="square">
+            <a:spAutoFit/>
+          </a:bodyPr>
+          <a:lstStyle/>
+          <a:p>
+            <a:r>
+              <a:rPr sz="2600" b="1" i="0">
+                <a:solidFill>
+                  <a:srgbClr val="FFFFFF"/>
+                </a:solidFill>
+                <a:latin typeface="Calibri"/>
+              </a:rPr>
+              <a:t>Para continuar (PI)</a:t>
+            </a:r>
+          </a:p>
+        </p:txBody>
+      </p:sp>
+      <p:sp>
+        <p:nvSpPr>
+          <p:cNvPr id="5" name="Rounded Rectangle 4"/>
+          <p:cNvSpPr/>
+          <p:nvPr/>
+        </p:nvSpPr>
+        <p:spPr>
+          <a:xfrm>
+            <a:off x="457200" y="1261872"/>
+            <a:ext cx="11277295" cy="1051560"/>
+          </a:xfrm>
+          <a:prstGeom prst="roundRect">
+            <a:avLst>
+              <a:gd name="adj" fmla="val 12000"/>
+            </a:avLst>
+          </a:prstGeom>
+          <a:solidFill>
+            <a:srgbClr val="E8F4FA"/>
+          </a:solidFill>
+          <a:ln>
+            <a:noFill/>
+          </a:ln>
+        </p:spPr>
+        <p:style>
+          <a:lnRef idx="1">
+            <a:schemeClr val="accent1"/>
+          </a:lnRef>
+          <a:fillRef idx="3">
+            <a:schemeClr val="accent1"/>
+          </a:fillRef>
+          <a:effectRef idx="2">
+            <a:schemeClr val="accent1"/>
+          </a:effectRef>
+          <a:fontRef idx="minor">
+            <a:schemeClr val="lt1"/>
+          </a:fontRef>
+        </p:style>
+        <p:txBody>
+          <a:bodyPr rtlCol="0" anchor="ctr"/>
+          <a:lstStyle/>
+          <a:p>
+            <a:pPr algn="ctr"/>
+          </a:p>
+        </p:txBody>
+      </p:sp>
+      <p:sp>
+        <p:nvSpPr>
+          <p:cNvPr id="6" name="Rectangle 5"/>
+          <p:cNvSpPr/>
+          <p:nvPr/>
+        </p:nvSpPr>
+        <p:spPr>
+          <a:xfrm>
+            <a:off x="457200" y="1261872"/>
+            <a:ext cx="128016" cy="1051560"/>
+          </a:xfrm>
+          <a:prstGeom prst="rect">
+            <a:avLst/>
+          </a:prstGeom>
+          <a:solidFill>
+            <a:srgbClr val="269CCB"/>
+          </a:solidFill>
+          <a:ln>
+            <a:noFill/>
+          </a:ln>
+        </p:spPr>
+        <p:style>
+          <a:lnRef idx="1">
+            <a:schemeClr val="accent1"/>
+          </a:lnRef>
+          <a:fillRef idx="3">
+            <a:schemeClr val="accent1"/>
+          </a:fillRef>
+          <a:effectRef idx="2">
+            <a:schemeClr val="accent1"/>
+          </a:effectRef>
+          <a:fontRef idx="minor">
+            <a:schemeClr val="lt1"/>
+          </a:fontRef>
+        </p:style>
+        <p:txBody>
+          <a:bodyPr rtlCol="0" anchor="ctr"/>
+          <a:lstStyle/>
+          <a:p>
+            <a:pPr algn="ctr"/>
+          </a:p>
+        </p:txBody>
+      </p:sp>
+      <p:sp>
+        <p:nvSpPr>
+          <p:cNvPr id="7" name="TextBox 6"/>
+          <p:cNvSpPr txBox="1"/>
+          <p:nvPr/>
+        </p:nvSpPr>
+        <p:spPr>
+          <a:xfrm>
+            <a:off x="777240" y="1399031"/>
+            <a:ext cx="10774375" cy="822959"/>
+          </a:xfrm>
+          <a:prstGeom prst="rect">
+            <a:avLst/>
+          </a:prstGeom>
+          <a:noFill/>
+        </p:spPr>
+        <p:txBody>
+          <a:bodyPr wrap="square">
+            <a:spAutoFit/>
+          </a:bodyPr>
+          <a:lstStyle/>
+          <a:p>
+            <a:r>
+              <a:rPr sz="1200" b="1" i="0">
+                <a:solidFill>
+                  <a:srgbClr val="269CCB"/>
+                </a:solidFill>
+                <a:latin typeface="Calibri"/>
+              </a:rPr>
+              <a:t>Info</a:t>
+            </a:r>
+          </a:p>
+          <a:p>
+            <a:pPr>
+              <a:spcBef>
+                <a:spcPts val="400"/>
+              </a:spcBef>
+            </a:pPr>
+            <a:r>
+              <a:rPr sz="1400" b="0" i="0">
+                <a:solidFill>
+                  <a:srgbClr val="333333"/>
+                </a:solidFill>
+                <a:latin typeface="Calibri"/>
+              </a:rPr>
+              <a:t>Entregable: Diagrama C4 Container en Mermaid + tabla de 3 contratos + 3 riesgos de distribución</a:t>
+            </a:r>
+          </a:p>
+        </p:txBody>
+      </p:sp>
+      <p:sp>
+        <p:nvSpPr>
+          <p:cNvPr id="8" name="Rounded Rectangle 7"/>
+          <p:cNvSpPr/>
+          <p:nvPr/>
+        </p:nvSpPr>
+        <p:spPr>
+          <a:xfrm>
+            <a:off x="457200" y="2478024"/>
+            <a:ext cx="11277295" cy="1051560"/>
+          </a:xfrm>
+          <a:prstGeom prst="roundRect">
+            <a:avLst>
+              <a:gd name="adj" fmla="val 12000"/>
+            </a:avLst>
+          </a:prstGeom>
+          <a:solidFill>
+            <a:srgbClr val="FFF8E1"/>
+          </a:solidFill>
+          <a:ln>
+            <a:noFill/>
+          </a:ln>
+        </p:spPr>
+        <p:style>
+          <a:lnRef idx="1">
+            <a:schemeClr val="accent1"/>
+          </a:lnRef>
+          <a:fillRef idx="3">
+            <a:schemeClr val="accent1"/>
+          </a:fillRef>
+          <a:effectRef idx="2">
+            <a:schemeClr val="accent1"/>
+          </a:effectRef>
+          <a:fontRef idx="minor">
+            <a:schemeClr val="lt1"/>
+          </a:fontRef>
+        </p:style>
+        <p:txBody>
+          <a:bodyPr rtlCol="0" anchor="ctr"/>
+          <a:lstStyle/>
+          <a:p>
+            <a:pPr algn="ctr"/>
+          </a:p>
+        </p:txBody>
+      </p:sp>
+      <p:sp>
+        <p:nvSpPr>
+          <p:cNvPr id="9" name="Rectangle 8"/>
+          <p:cNvSpPr/>
+          <p:nvPr/>
+        </p:nvSpPr>
+        <p:spPr>
+          <a:xfrm>
+            <a:off x="457200" y="2478024"/>
+            <a:ext cx="128016" cy="1051560"/>
+          </a:xfrm>
+          <a:prstGeom prst="rect">
+            <a:avLst/>
+          </a:prstGeom>
+          <a:solidFill>
+            <a:srgbClr val="FFD000"/>
+          </a:solidFill>
+          <a:ln>
+            <a:noFill/>
+          </a:ln>
+        </p:spPr>
+        <p:style>
+          <a:lnRef idx="1">
+            <a:schemeClr val="accent1"/>
+          </a:lnRef>
+          <a:fillRef idx="3">
+            <a:schemeClr val="accent1"/>
+          </a:fillRef>
+          <a:effectRef idx="2">
+            <a:schemeClr val="accent1"/>
+          </a:effectRef>
+          <a:fontRef idx="minor">
+            <a:schemeClr val="lt1"/>
+          </a:fontRef>
+        </p:style>
+        <p:txBody>
+          <a:bodyPr rtlCol="0" anchor="ctr"/>
+          <a:lstStyle/>
+          <a:p>
+            <a:pPr algn="ctr"/>
+          </a:p>
+        </p:txBody>
+      </p:sp>
+      <p:sp>
+        <p:nvSpPr>
+          <p:cNvPr id="10" name="TextBox 9"/>
+          <p:cNvSpPr txBox="1"/>
+          <p:nvPr/>
+        </p:nvSpPr>
+        <p:spPr>
+          <a:xfrm>
+            <a:off x="777240" y="2615184"/>
+            <a:ext cx="10774375" cy="822959"/>
+          </a:xfrm>
+          <a:prstGeom prst="rect">
+            <a:avLst/>
+          </a:prstGeom>
+          <a:noFill/>
+        </p:spPr>
+        <p:txBody>
+          <a:bodyPr wrap="square">
+            <a:spAutoFit/>
+          </a:bodyPr>
+          <a:lstStyle/>
+          <a:p>
+            <a:r>
+              <a:rPr sz="1200" b="1" i="0">
+                <a:solidFill>
+                  <a:srgbClr val="FFD000"/>
+                </a:solidFill>
+                <a:latin typeface="Calibri"/>
+              </a:rPr>
+              <a:t>Aclaración</a:t>
+            </a:r>
+          </a:p>
+          <a:p>
+            <a:pPr>
+              <a:spcBef>
+                <a:spcPts val="400"/>
+              </a:spcBef>
+            </a:pPr>
+            <a:r>
+              <a:rPr sz="1400" b="0" i="0">
+                <a:solidFill>
+                  <a:srgbClr val="333333"/>
+                </a:solidFill>
+                <a:latin typeface="Calibri"/>
+              </a:rPr>
+              <a:t>Subir evidencias al paquete CloudLite (Drive/repo) y a ExamLab (https://uniaj.examlab.workers.dev/) domingo 23:59.</a:t>
+            </a:r>
+          </a:p>
+        </p:txBody>
+      </p:sp>
+      <p:sp>
+        <p:nvSpPr>
+          <p:cNvPr id="11" name="Rounded Rectangle 10"/>
+          <p:cNvSpPr/>
+          <p:nvPr/>
+        </p:nvSpPr>
+        <p:spPr>
+          <a:xfrm>
+            <a:off x="457200" y="3694176"/>
+            <a:ext cx="11277295" cy="1051560"/>
+          </a:xfrm>
+          <a:prstGeom prst="roundRect">
+            <a:avLst>
+              <a:gd name="adj" fmla="val 12000"/>
+            </a:avLst>
+          </a:prstGeom>
+          <a:solidFill>
+            <a:srgbClr val="FBE4E4"/>
+          </a:solidFill>
+          <a:ln>
+            <a:noFill/>
+          </a:ln>
+        </p:spPr>
+        <p:style>
+          <a:lnRef idx="1">
+            <a:schemeClr val="accent1"/>
+          </a:lnRef>
+          <a:fillRef idx="3">
+            <a:schemeClr val="accent1"/>
+          </a:fillRef>
+          <a:effectRef idx="2">
+            <a:schemeClr val="accent1"/>
+          </a:effectRef>
+          <a:fontRef idx="minor">
+            <a:schemeClr val="lt1"/>
+          </a:fontRef>
+        </p:style>
+        <p:txBody>
+          <a:bodyPr rtlCol="0" anchor="ctr"/>
+          <a:lstStyle/>
+          <a:p>
+            <a:pPr algn="ctr"/>
+          </a:p>
+        </p:txBody>
+      </p:sp>
+      <p:sp>
+        <p:nvSpPr>
+          <p:cNvPr id="12" name="Rectangle 11"/>
+          <p:cNvSpPr/>
+          <p:nvPr/>
+        </p:nvSpPr>
+        <p:spPr>
+          <a:xfrm>
+            <a:off x="457200" y="3694176"/>
+            <a:ext cx="128016" cy="1051560"/>
+          </a:xfrm>
+          <a:prstGeom prst="rect">
+            <a:avLst/>
+          </a:prstGeom>
+          <a:solidFill>
+            <a:srgbClr val="A02030"/>
+          </a:solidFill>
+          <a:ln>
+            <a:noFill/>
+          </a:ln>
+        </p:spPr>
+        <p:style>
+          <a:lnRef idx="1">
+            <a:schemeClr val="accent1"/>
+          </a:lnRef>
+          <a:fillRef idx="3">
+            <a:schemeClr val="accent1"/>
+          </a:fillRef>
+          <a:effectRef idx="2">
+            <a:schemeClr val="accent1"/>
+          </a:effectRef>
+          <a:fontRef idx="minor">
+            <a:schemeClr val="lt1"/>
+          </a:fontRef>
+        </p:style>
+        <p:txBody>
+          <a:bodyPr rtlCol="0" anchor="ctr"/>
+          <a:lstStyle/>
+          <a:p>
+            <a:pPr algn="ctr"/>
+          </a:p>
+        </p:txBody>
+      </p:sp>
+      <p:sp>
+        <p:nvSpPr>
+          <p:cNvPr id="13" name="TextBox 12"/>
+          <p:cNvSpPr txBox="1"/>
+          <p:nvPr/>
+        </p:nvSpPr>
+        <p:spPr>
+          <a:xfrm>
+            <a:off x="777240" y="3831336"/>
+            <a:ext cx="10774375" cy="822959"/>
+          </a:xfrm>
+          <a:prstGeom prst="rect">
+            <a:avLst/>
+          </a:prstGeom>
+          <a:noFill/>
+        </p:spPr>
+        <p:txBody>
+          <a:bodyPr wrap="square">
+            <a:spAutoFit/>
+          </a:bodyPr>
+          <a:lstStyle/>
+          <a:p>
+            <a:r>
+              <a:rPr sz="1200" b="1" i="0">
+                <a:solidFill>
+                  <a:srgbClr val="A02030"/>
+                </a:solidFill>
+                <a:latin typeface="Calibri"/>
+              </a:rPr>
+              <a:t>Atención</a:t>
+            </a:r>
+          </a:p>
+          <a:p>
+            <a:pPr>
+              <a:spcBef>
+                <a:spcPts val="400"/>
+              </a:spcBef>
+            </a:pPr>
+            <a:r>
+              <a:rPr sz="1400" b="0" i="0">
+                <a:solidFill>
+                  <a:srgbClr val="333333"/>
+                </a:solidFill>
+                <a:latin typeface="Calibri"/>
+              </a:rPr>
+              <a:t>Sin cloud de pago ni instalaciones obligatorias de hipervisores/Docker Desktop.</a:t>
+            </a:r>
+          </a:p>
+        </p:txBody>
+      </p:sp>
+      <p:sp>
+        <p:nvSpPr>
+          <p:cNvPr id="14" name="TextBox 13"/>
+          <p:cNvSpPr txBox="1"/>
+          <p:nvPr/>
+        </p:nvSpPr>
+        <p:spPr>
+          <a:xfrm>
+            <a:off x="11185855" y="6473952"/>
+            <a:ext cx="640080" cy="274320"/>
+          </a:xfrm>
+          <a:prstGeom prst="rect">
+            <a:avLst/>
+          </a:prstGeom>
+          <a:noFill/>
+        </p:spPr>
+        <p:txBody>
+          <a:bodyPr wrap="square">
+            <a:spAutoFit/>
+          </a:bodyPr>
+          <a:lstStyle/>
+          <a:p>
+            <a:pPr algn="r"/>
+            <a:r>
+              <a:rPr sz="1100" b="0" i="0">
+                <a:solidFill>
+                  <a:srgbClr val="666666"/>
+                </a:solidFill>
+                <a:latin typeface="Calibri"/>
+              </a:rPr>
+              <a:t>15</a:t>
+            </a:r>
+          </a:p>
+        </p:txBody>
+      </p:sp>
+    </p:spTree>
+  </p:cSld>
+  <p:clrMapOvr>
+    <a:masterClrMapping/>
+  </p:clrMapOvr>
+</p:sld>
+</file>
+
+<file path=ppt/slides/slide16.xml><?xml version="1.0" encoding="utf-8"?>
+<p:sld xmlns:a="http://schemas.openxmlformats.org/drawingml/2006/main" xmlns:p="http://schemas.openxmlformats.org/presentationml/2006/main" xmlns:r="http://schemas.openxmlformats.org/officeDocument/2006/relationships">
+  <p:cSld>
+    <p:bg>
+      <p:bgPr>
+        <a:solidFill>
+          <a:srgbClr val="FFFFFF"/>
+        </a:solidFill>
+        <a:effectLst/>
+      </p:bgPr>
+    </p:bg>
+    <p:spTree>
+      <p:nvGrpSpPr>
+        <p:cNvPr id="1" name=""/>
+        <p:cNvGrpSpPr/>
+        <p:nvPr/>
+      </p:nvGrpSpPr>
+      <p:grpSpPr/>
+      <p:sp>
+        <p:nvSpPr>
+          <p:cNvPr id="2" name="Rectangle 1"/>
+          <p:cNvSpPr/>
+          <p:nvPr/>
+        </p:nvSpPr>
+        <p:spPr>
+          <a:xfrm>
+            <a:off x="0" y="0"/>
             <a:ext cx="12191695" cy="164592"/>
           </a:xfrm>
           <a:prstGeom prst="rect">
@@ -6468,7 +7666,7 @@
                 </a:solidFill>
                 <a:latin typeface="Calibri"/>
               </a:rPr>
-              <a:t>Evidencia: Diagrama C4 Container/Componentes v0.9 + lista de APIs entre servicios</a:t>
+              <a:t>Evidencia: Diagrama C4 Container en Mermaid + tabla de 3 contratos + 3 riesgos de distribución</a:t>
             </a:r>
           </a:p>
           <a:p>
@@ -7076,7 +8274,7 @@
                 </a:solidFill>
                 <a:latin typeface="Calibri"/>
               </a:rPr>
-              <a:t>C4 Container/Componentes</a:t>
+              <a:t>C4 Container</a:t>
             </a:r>
             <a:r>
               <a:rPr sz="1600" b="0" i="0">
@@ -7085,7 +8283,7 @@
                 </a:solidFill>
                 <a:latin typeface="Calibri"/>
               </a:rPr>
-              <a:t> sin exceso de servicios.</a:t>
+              <a:t> (Mermaid) con 2–5 cajas justificadas.</a:t>
             </a:r>
           </a:p>
           <a:p>
@@ -7101,7 +8299,43 @@
                 </a:solidFill>
                 <a:latin typeface="Calibri"/>
               </a:rPr>
-              <a:t>–   Definir 3 contratos/API entre partes del sistema.</a:t>
+              <a:t>–   Definir 3 contratos con verbo, ruta y </a:t>
+            </a:r>
+            <a:r>
+              <a:rPr sz="1600" b="1" i="0">
+                <a:solidFill>
+                  <a:srgbClr val="333333"/>
+                </a:solidFill>
+                <a:latin typeface="Calibri"/>
+              </a:rPr>
+              <a:t>error de negocio</a:t>
+            </a:r>
+            <a:r>
+              <a:rPr sz="1600" b="0" i="0">
+                <a:solidFill>
+                  <a:srgbClr val="333333"/>
+                </a:solidFill>
+                <a:latin typeface="Calibri"/>
+              </a:rPr>
+              <a:t>, y nombrar 3 </a:t>
+            </a:r>
+            <a:r>
+              <a:rPr sz="1600" b="1" i="0">
+                <a:solidFill>
+                  <a:srgbClr val="333333"/>
+                </a:solidFill>
+                <a:latin typeface="Calibri"/>
+              </a:rPr>
+              <a:t>riesgos de distribución</a:t>
+            </a:r>
+            <a:r>
+              <a:rPr sz="1600" b="0" i="0">
+                <a:solidFill>
+                  <a:srgbClr val="333333"/>
+                </a:solidFill>
+                <a:latin typeface="Calibri"/>
+              </a:rPr>
+              <a:t>.</a:t>
             </a:r>
           </a:p>
         </p:txBody>
@@ -7339,7 +8573,7 @@
                 </a:solidFill>
                 <a:latin typeface="Calibri"/>
               </a:rPr>
-              <a:t> Diagrama C4 Container/Componentes v0.9 + lista de APIs entre servicios</a:t>
+              <a:t> Diagrama C4 Container en Mermaid + tabla de 3 contratos + 3 riesgos de distribución</a:t>
             </a:r>
           </a:p>
           <a:p>
@@ -7364,7 +8598,7 @@
                 </a:solidFill>
                 <a:latin typeface="Calibri"/>
               </a:rPr>
-              <a:t>draw.io / diagrams.net</a:t>
+              <a:t>draw.io o Excalidraw para bocetar · Mermaid dentro de ExamLab para entregar</a:t>
             </a:r>
           </a:p>
           <a:p>
@@ -7700,7 +8934,93 @@
                 </a:solidFill>
                 <a:latin typeface="Calibri"/>
               </a:rPr>
-              <a:t>–   Regla CloudLite: 2–5 contenedores lógicos con razón clara.</a:t>
+              <a:t>–   La decisión se escribe en </a:t>
+            </a:r>
+            <a:r>
+              <a:rPr sz="1600" b="1" i="0">
+                <a:solidFill>
+                  <a:srgbClr val="333333"/>
+                </a:solidFill>
+                <a:latin typeface="Calibri"/>
+              </a:rPr>
+              <a:t>una sola frase</a:t>
+            </a:r>
+            <a:r>
+              <a:rPr sz="1600" b="0" i="0">
+                <a:solidFill>
+                  <a:srgbClr val="333333"/>
+                </a:solidFill>
+                <a:latin typeface="Calibri"/>
+              </a:rPr>
+              <a:t> y se elige UNA: «un poco de los dos» no es una decisión.</a:t>
+            </a:r>
+          </a:p>
+          <a:p>
+            <a:pPr>
+              <a:spcAft>
+                <a:spcPts val="800"/>
+              </a:spcAft>
+            </a:pPr>
+            <a:r>
+              <a:rPr sz="1600" b="0" i="0">
+                <a:solidFill>
+                  <a:srgbClr val="333333"/>
+                </a:solidFill>
+                <a:latin typeface="Calibri"/>
+              </a:rPr>
+              <a:t>–   Se sostiene con </a:t>
+            </a:r>
+            <a:r>
+              <a:rPr sz="1600" b="1" i="0">
+                <a:solidFill>
+                  <a:srgbClr val="333333"/>
+                </a:solidFill>
+                <a:latin typeface="Calibri"/>
+              </a:rPr>
+              <a:t>dos</a:t>
+            </a:r>
+            <a:r>
+              <a:rPr sz="1600" b="0" i="0">
+                <a:solidFill>
+                  <a:srgbClr val="333333"/>
+                </a:solidFill>
+                <a:latin typeface="Calibri"/>
+              </a:rPr>
+              <a:t> criterios: tamaño del equipo (con número y plazo) y acoplamiento (qué partes cambian juntas).</a:t>
+            </a:r>
+          </a:p>
+          <a:p>
+            <a:pPr>
+              <a:spcAft>
+                <a:spcPts val="800"/>
+              </a:spcAft>
+            </a:pPr>
+            <a:r>
+              <a:rPr sz="1600" b="0" i="0">
+                <a:solidFill>
+                  <a:srgbClr val="333333"/>
+                </a:solidFill>
+                <a:latin typeface="Calibri"/>
+              </a:rPr>
+              <a:t>–   Y con lo que se gana </a:t>
+            </a:r>
+            <a:r>
+              <a:rPr sz="1600" b="1" i="0">
+                <a:solidFill>
+                  <a:srgbClr val="333333"/>
+                </a:solidFill>
+                <a:latin typeface="Calibri"/>
+              </a:rPr>
+              <a:t>y</a:t>
+            </a:r>
+            <a:r>
+              <a:rPr sz="1600" b="0" i="0">
+                <a:solidFill>
+                  <a:srgbClr val="333333"/>
+                </a:solidFill>
+                <a:latin typeface="Calibri"/>
+              </a:rPr>
+              <a:t> lo que se pierde: sin la segunda mitad, no hubo decisión.</a:t>
             </a:r>
           </a:p>
         </p:txBody>
@@ -7881,7 +9201,7 @@
                 </a:solidFill>
                 <a:latin typeface="Calibri"/>
               </a:rPr>
-              <a:t>C4-lite en draw.io</a:t>
+              <a:t>C4-lite: del Context a los Containers</a:t>
             </a:r>
           </a:p>
         </p:txBody>
@@ -7920,7 +9240,25 @@
                 </a:solidFill>
                 <a:latin typeface="Calibri"/>
               </a:rPr>
-              <a:t>–   Context (ya) → Containers → Components (si aporta).</a:t>
+              <a:t>–   Se abre la ÚNICA caja del Context de la Clase 1: los actores y los externos siguen ahí, </a:t>
+            </a:r>
+            <a:r>
+              <a:rPr sz="1600" b="1" i="0">
+                <a:solidFill>
+                  <a:srgbClr val="333333"/>
+                </a:solidFill>
+                <a:latin typeface="Calibri"/>
+              </a:rPr>
+              <a:t>fuera</a:t>
+            </a:r>
+            <a:r>
+              <a:rPr sz="1600" b="0" i="0">
+                <a:solidFill>
+                  <a:srgbClr val="333333"/>
+                </a:solidFill>
+                <a:latin typeface="Calibri"/>
+              </a:rPr>
+              <a:t> del sistema.</a:t>
             </a:r>
           </a:p>
           <a:p>
@@ -7936,7 +9274,25 @@
                 </a:solidFill>
                 <a:latin typeface="Calibri"/>
               </a:rPr>
-              <a:t>–   Cada caja: nombre + responsabilidad + tecnología tentativas.</a:t>
+              <a:t>–   </a:t>
+            </a:r>
+            <a:r>
+              <a:rPr sz="1600" b="1" i="0">
+                <a:solidFill>
+                  <a:srgbClr val="333333"/>
+                </a:solidFill>
+                <a:latin typeface="Calibri"/>
+              </a:rPr>
+              <a:t>Tres datos por caja, obligatorios:</a:t>
+            </a:r>
+            <a:r>
+              <a:rPr sz="1600" b="0" i="0">
+                <a:solidFill>
+                  <a:srgbClr val="333333"/>
+                </a:solidFill>
+                <a:latin typeface="Calibri"/>
+              </a:rPr>
+              <a:t> nombre · tecnología · responsabilidad en una frase.</a:t>
             </a:r>
           </a:p>
           <a:p>
@@ -7952,7 +9308,25 @@
                 </a:solidFill>
                 <a:latin typeface="Calibri"/>
               </a:rPr>
-              <a:t>–   Flechas = protocolos (HTTPS/REST, eventos). Evite «líneas mágicas».</a:t>
+              <a:t>–   Lo que guarda datos se marca como </a:t>
+            </a:r>
+            <a:r>
+              <a:rPr sz="1600" b="1" i="0">
+                <a:solidFill>
+                  <a:srgbClr val="333333"/>
+                </a:solidFill>
+                <a:latin typeface="Calibri"/>
+              </a:rPr>
+              <a:t>almacén</a:t>
+            </a:r>
+            <a:r>
+              <a:rPr sz="1600" b="0" i="0">
+                <a:solidFill>
+                  <a:srgbClr val="333333"/>
+                </a:solidFill>
+                <a:latin typeface="Calibri"/>
+              </a:rPr>
+              <a:t> («ContainerDb»), no como una caja más.</a:t>
             </a:r>
           </a:p>
           <a:p>
@@ -7968,7 +9342,75 @@
                 </a:solidFill>
                 <a:latin typeface="Calibri"/>
               </a:rPr>
-              <a:t>–   Lienzo C4 de CloudLite.</a:t>
+              <a:t>–   Los nombres son </a:t>
+            </a:r>
+            <a:r>
+              <a:rPr sz="1600" b="1" i="0">
+                <a:solidFill>
+                  <a:srgbClr val="333333"/>
+                </a:solidFill>
+                <a:latin typeface="Calibri"/>
+              </a:rPr>
+              <a:t>idénticos</a:t>
+            </a:r>
+            <a:r>
+              <a:rPr sz="1600" b="0" i="0">
+                <a:solidFill>
+                  <a:srgbClr val="333333"/>
+                </a:solidFill>
+                <a:latin typeface="Calibri"/>
+              </a:rPr>
+              <a:t> a los del C4 Context: si allí decía «Pasarela de pagos», aquí no puede decir «Pagos».</a:t>
+            </a:r>
+          </a:p>
+          <a:p>
+            <a:pPr>
+              <a:spcAft>
+                <a:spcPts val="800"/>
+              </a:spcAft>
+            </a:pPr>
+            <a:r>
+              <a:rPr sz="1600" b="0" i="0">
+                <a:solidFill>
+                  <a:srgbClr val="333333"/>
+                </a:solidFill>
+                <a:latin typeface="Calibri"/>
+              </a:rPr>
+              <a:t>–   Cada flecha lleva </a:t>
+            </a:r>
+            <a:r>
+              <a:rPr sz="1600" b="1" i="0">
+                <a:solidFill>
+                  <a:srgbClr val="333333"/>
+                </a:solidFill>
+                <a:latin typeface="Calibri"/>
+              </a:rPr>
+              <a:t>protocolo Y formato</a:t>
+            </a:r>
+            <a:r>
+              <a:rPr sz="1600" b="0" i="0">
+                <a:solidFill>
+                  <a:srgbClr val="333333"/>
+                </a:solidFill>
+                <a:latin typeface="Calibri"/>
+              </a:rPr>
+              <a:t> («HTTPS/JSON», «TCP/SQL»): una línea muda no cuenta.</a:t>
+            </a:r>
+          </a:p>
+          <a:p>
+            <a:pPr>
+              <a:spcAft>
+                <a:spcPts val="800"/>
+              </a:spcAft>
+            </a:pPr>
+            <a:r>
+              <a:rPr sz="1600" b="0" i="0">
+                <a:solidFill>
+                  <a:srgbClr val="333333"/>
+                </a:solidFill>
+                <a:latin typeface="Calibri"/>
+              </a:rPr>
+              <a:t>–   Entre 2 y 5 cajas. El número tiene que ser coherente con la decisión de la diapositiva anterior.</a:t>
             </a:r>
           </a:p>
         </p:txBody>
@@ -8149,21 +9591,409 @@
                 </a:solidFill>
                 <a:latin typeface="Calibri"/>
               </a:rPr>
-              <a:t>Distribuido implica fallos</a:t>
-            </a:r>
-          </a:p>
-        </p:txBody>
-      </p:sp>
-      <p:sp>
-        <p:nvSpPr>
-          <p:cNvPr id="5" name="TextBox 4"/>
+              <a:t>Los tres contratos de CloudLite: cuatro datos por fila</a:t>
+            </a:r>
+          </a:p>
+        </p:txBody>
+      </p:sp>
+      <p:graphicFrame>
+        <p:nvGraphicFramePr>
+          <p:cNvPr id="5" name="Table 4"/>
+          <p:cNvGraphicFramePr>
+            <a:graphicFrameLocks noGrp="1"/>
+          </p:cNvGraphicFramePr>
+          <p:nvPr/>
+        </p:nvGraphicFramePr>
+        <p:xfrm>
+          <a:off x="457200" y="1216152"/>
+          <a:ext cx="11091672" cy="1536192"/>
+        </p:xfrm>
+        <a:graphic>
+          <a:graphicData uri="http://schemas.openxmlformats.org/drawingml/2006/table">
+            <a:tbl>
+              <a:tblPr firstRow="1" bandRow="1">
+                <a:tableStyleId>{5C22544A-7EE6-4342-B048-85BDC9FD1C3A}</a:tableStyleId>
+              </a:tblPr>
+              <a:tblGrid>
+                <a:gridCol w="2103120"/>
+                <a:gridCol w="2834640"/>
+                <a:gridCol w="2651760"/>
+                <a:gridCol w="3502152"/>
+              </a:tblGrid>
+              <a:tr h="384048">
+                <a:tc>
+                  <a:txBody>
+                    <a:bodyPr/>
+                    <a:lstStyle/>
+                    <a:p>
+                      <a:r>
+                        <a:rPr sz="1200" b="1" i="0">
+                          <a:solidFill>
+                            <a:srgbClr val="FFFFFF"/>
+                          </a:solidFill>
+                          <a:latin typeface="Calibri"/>
+                        </a:rPr>
+                        <a:t>Contrato</a:t>
+                      </a:r>
+                    </a:p>
+                  </a:txBody>
+                  <a:tcPr>
+                    <a:solidFill>
+                      <a:srgbClr val="095292"/>
+                    </a:solidFill>
+                  </a:tcPr>
+                </a:tc>
+                <a:tc>
+                  <a:txBody>
+                    <a:bodyPr/>
+                    <a:lstStyle/>
+                    <a:p>
+                      <a:r>
+                        <a:rPr sz="1200" b="1" i="0">
+                          <a:solidFill>
+                            <a:srgbClr val="FFFFFF"/>
+                          </a:solidFill>
+                          <a:latin typeface="Calibri"/>
+                        </a:rPr>
+                        <a:t>Quién llama a quién</a:t>
+                      </a:r>
+                    </a:p>
+                  </a:txBody>
+                  <a:tcPr>
+                    <a:solidFill>
+                      <a:srgbClr val="095292"/>
+                    </a:solidFill>
+                  </a:tcPr>
+                </a:tc>
+                <a:tc>
+                  <a:txBody>
+                    <a:bodyPr/>
+                    <a:lstStyle/>
+                    <a:p>
+                      <a:r>
+                        <a:rPr sz="1200" b="1" i="0">
+                          <a:solidFill>
+                            <a:srgbClr val="FFFFFF"/>
+                          </a:solidFill>
+                          <a:latin typeface="Calibri"/>
+                        </a:rPr>
+                        <a:t>Verbo y ruta</a:t>
+                      </a:r>
+                    </a:p>
+                  </a:txBody>
+                  <a:tcPr>
+                    <a:solidFill>
+                      <a:srgbClr val="095292"/>
+                    </a:solidFill>
+                  </a:tcPr>
+                </a:tc>
+                <a:tc>
+                  <a:txBody>
+                    <a:bodyPr/>
+                    <a:lstStyle/>
+                    <a:p>
+                      <a:r>
+                        <a:rPr sz="1200" b="1" i="0">
+                          <a:solidFill>
+                            <a:srgbClr val="FFFFFF"/>
+                          </a:solidFill>
+                          <a:latin typeface="Calibri"/>
+                        </a:rPr>
+                        <a:t>Error de negocio</a:t>
+                      </a:r>
+                    </a:p>
+                  </a:txBody>
+                  <a:tcPr>
+                    <a:solidFill>
+                      <a:srgbClr val="095292"/>
+                    </a:solidFill>
+                  </a:tcPr>
+                </a:tc>
+              </a:tr>
+              <a:tr h="384048">
+                <a:tc>
+                  <a:txBody>
+                    <a:bodyPr/>
+                    <a:lstStyle/>
+                    <a:p>
+                      <a:r>
+                        <a:rPr sz="1100" b="0" i="0">
+                          <a:solidFill>
+                            <a:srgbClr val="333333"/>
+                          </a:solidFill>
+                          <a:latin typeface="Calibri"/>
+                        </a:rPr>
+                        <a:t>Reservar turno</a:t>
+                      </a:r>
+                    </a:p>
+                  </a:txBody>
+                  <a:tcPr>
+                    <a:solidFill>
+                      <a:srgbClr val="FFFFFF"/>
+                    </a:solidFill>
+                  </a:tcPr>
+                </a:tc>
+                <a:tc>
+                  <a:txBody>
+                    <a:bodyPr/>
+                    <a:lstStyle/>
+                    <a:p>
+                      <a:r>
+                        <a:rPr sz="1100" b="0" i="0">
+                          <a:solidFill>
+                            <a:srgbClr val="333333"/>
+                          </a:solidFill>
+                          <a:latin typeface="Calibri"/>
+                        </a:rPr>
+                        <a:t>App web → API de turnos</a:t>
+                      </a:r>
+                    </a:p>
+                  </a:txBody>
+                  <a:tcPr>
+                    <a:solidFill>
+                      <a:srgbClr val="FFFFFF"/>
+                    </a:solidFill>
+                  </a:tcPr>
+                </a:tc>
+                <a:tc>
+                  <a:txBody>
+                    <a:bodyPr/>
+                    <a:lstStyle/>
+                    <a:p>
+                      <a:r>
+                        <a:rPr sz="1100" b="0" i="0">
+                          <a:solidFill>
+                            <a:srgbClr val="333333"/>
+                          </a:solidFill>
+                          <a:latin typeface="Calibri"/>
+                        </a:rPr>
+                        <a:t>POST /turnos</a:t>
+                      </a:r>
+                    </a:p>
+                  </a:txBody>
+                  <a:tcPr>
+                    <a:solidFill>
+                      <a:srgbClr val="FFFFFF"/>
+                    </a:solidFill>
+                  </a:tcPr>
+                </a:tc>
+                <a:tc>
+                  <a:txBody>
+                    <a:bodyPr/>
+                    <a:lstStyle/>
+                    <a:p>
+                      <a:r>
+                        <a:rPr sz="1100" b="0" i="0">
+                          <a:solidFill>
+                            <a:srgbClr val="333333"/>
+                          </a:solidFill>
+                          <a:latin typeface="Calibri"/>
+                        </a:rPr>
+                        <a:t>409 · la franja de las 10:00 ya la tomó otro cliente</a:t>
+                      </a:r>
+                    </a:p>
+                  </a:txBody>
+                  <a:tcPr>
+                    <a:solidFill>
+                      <a:srgbClr val="FFFFFF"/>
+                    </a:solidFill>
+                  </a:tcPr>
+                </a:tc>
+              </a:tr>
+              <a:tr h="384048">
+                <a:tc>
+                  <a:txBody>
+                    <a:bodyPr/>
+                    <a:lstStyle/>
+                    <a:p>
+                      <a:r>
+                        <a:rPr sz="1100" b="0" i="0">
+                          <a:solidFill>
+                            <a:srgbClr val="333333"/>
+                          </a:solidFill>
+                          <a:latin typeface="Calibri"/>
+                        </a:rPr>
+                        <a:t>Avisar al cliente</a:t>
+                      </a:r>
+                    </a:p>
+                  </a:txBody>
+                  <a:tcPr>
+                    <a:solidFill>
+                      <a:srgbClr val="F2F2F2"/>
+                    </a:solidFill>
+                  </a:tcPr>
+                </a:tc>
+                <a:tc>
+                  <a:txBody>
+                    <a:bodyPr/>
+                    <a:lstStyle/>
+                    <a:p>
+                      <a:r>
+                        <a:rPr sz="1100" b="0" i="0">
+                          <a:solidFill>
+                            <a:srgbClr val="333333"/>
+                          </a:solidFill>
+                          <a:latin typeface="Calibri"/>
+                        </a:rPr>
+                        <a:t>API de turnos → Correo transaccional (SaaS)</a:t>
+                      </a:r>
+                    </a:p>
+                  </a:txBody>
+                  <a:tcPr>
+                    <a:solidFill>
+                      <a:srgbClr val="F2F2F2"/>
+                    </a:solidFill>
+                  </a:tcPr>
+                </a:tc>
+                <a:tc>
+                  <a:txBody>
+                    <a:bodyPr/>
+                    <a:lstStyle/>
+                    <a:p>
+                      <a:r>
+                        <a:rPr sz="1100" b="0" i="0">
+                          <a:solidFill>
+                            <a:srgbClr val="333333"/>
+                          </a:solidFill>
+                          <a:latin typeface="Calibri"/>
+                        </a:rPr>
+                        <a:t>POST /v1/mensajes</a:t>
+                      </a:r>
+                    </a:p>
+                  </a:txBody>
+                  <a:tcPr>
+                    <a:solidFill>
+                      <a:srgbClr val="F2F2F2"/>
+                    </a:solidFill>
+                  </a:tcPr>
+                </a:tc>
+                <a:tc>
+                  <a:txBody>
+                    <a:bodyPr/>
+                    <a:lstStyle/>
+                    <a:p>
+                      <a:r>
+                        <a:rPr sz="1100" b="0" i="0">
+                          <a:solidFill>
+                            <a:srgbClr val="333333"/>
+                          </a:solidFill>
+                          <a:latin typeface="Calibri"/>
+                        </a:rPr>
+                        <a:t>422 · la dirección del cliente no existe</a:t>
+                      </a:r>
+                    </a:p>
+                  </a:txBody>
+                  <a:tcPr>
+                    <a:solidFill>
+                      <a:srgbClr val="F2F2F2"/>
+                    </a:solidFill>
+                  </a:tcPr>
+                </a:tc>
+              </a:tr>
+              <a:tr h="384048">
+                <a:tc>
+                  <a:txBody>
+                    <a:bodyPr/>
+                    <a:lstStyle/>
+                    <a:p>
+                      <a:r>
+                        <a:rPr sz="1100" b="0" i="0">
+                          <a:solidFill>
+                            <a:srgbClr val="333333"/>
+                          </a:solidFill>
+                          <a:latin typeface="Calibri"/>
+                        </a:rPr>
+                        <a:t>Guardar el turno</a:t>
+                      </a:r>
+                    </a:p>
+                  </a:txBody>
+                  <a:tcPr>
+                    <a:solidFill>
+                      <a:srgbClr val="FFFFFF"/>
+                    </a:solidFill>
+                  </a:tcPr>
+                </a:tc>
+                <a:tc>
+                  <a:txBody>
+                    <a:bodyPr/>
+                    <a:lstStyle/>
+                    <a:p>
+                      <a:r>
+                        <a:rPr sz="1100" b="0" i="0">
+                          <a:solidFill>
+                            <a:srgbClr val="333333"/>
+                          </a:solidFill>
+                          <a:latin typeface="Calibri"/>
+                        </a:rPr>
+                        <a:t>API de turnos → Base de turnos</a:t>
+                      </a:r>
+                    </a:p>
+                  </a:txBody>
+                  <a:tcPr>
+                    <a:solidFill>
+                      <a:srgbClr val="FFFFFF"/>
+                    </a:solidFill>
+                  </a:tcPr>
+                </a:tc>
+                <a:tc>
+                  <a:txBody>
+                    <a:bodyPr/>
+                    <a:lstStyle/>
+                    <a:p>
+                      <a:r>
+                        <a:rPr sz="1100" b="0" i="0">
+                          <a:solidFill>
+                            <a:srgbClr val="333333"/>
+                          </a:solidFill>
+                          <a:latin typeface="Calibri"/>
+                        </a:rPr>
+                        <a:t>INSERT INTO turno (es SQL, no una ruta REST)</a:t>
+                      </a:r>
+                    </a:p>
+                  </a:txBody>
+                  <a:tcPr>
+                    <a:solidFill>
+                      <a:srgbClr val="FFFFFF"/>
+                    </a:solidFill>
+                  </a:tcPr>
+                </a:tc>
+                <a:tc>
+                  <a:txBody>
+                    <a:bodyPr/>
+                    <a:lstStyle/>
+                    <a:p>
+                      <a:r>
+                        <a:rPr sz="1100" b="0" i="0">
+                          <a:solidFill>
+                            <a:srgbClr val="333333"/>
+                          </a:solidFill>
+                          <a:latin typeface="Calibri"/>
+                        </a:rPr>
+                        <a:t>Restricción única (barbero, franja) rechaza el duplicado</a:t>
+                      </a:r>
+                    </a:p>
+                  </a:txBody>
+                  <a:tcPr>
+                    <a:solidFill>
+                      <a:srgbClr val="FFFFFF"/>
+                    </a:solidFill>
+                  </a:tcPr>
+                </a:tc>
+              </a:tr>
+            </a:tbl>
+          </a:graphicData>
+        </a:graphic>
+      </p:graphicFrame>
+      <p:sp>
+        <p:nvSpPr>
+          <p:cNvPr id="6" name="TextBox 5"/>
           <p:cNvSpPr txBox="1"/>
           <p:nvPr/>
         </p:nvSpPr>
         <p:spPr>
           <a:xfrm>
-            <a:off x="457200" y="1170432"/>
-            <a:ext cx="11277295" cy="5230368"/>
+            <a:off x="457200" y="3291840"/>
+            <a:ext cx="11277295" cy="457200"/>
           </a:xfrm>
           <a:prstGeom prst="rect">
             <a:avLst/>
@@ -8176,76 +10006,21 @@
           </a:bodyPr>
           <a:lstStyle/>
           <a:p>
-            <a:pPr>
-              <a:spcAft>
-                <a:spcPts val="800"/>
-              </a:spcAft>
-            </a:pPr>
-            <a:r>
-              <a:rPr sz="1600" b="0" i="0">
-                <a:solidFill>
-                  <a:srgbClr val="333333"/>
-                </a:solidFill>
-                <a:latin typeface="Calibri"/>
-              </a:rPr>
-              <a:t>–   Latencia, reintentos, idempotencia, timeouts — anótenlos como riesgos PI.</a:t>
-            </a:r>
-          </a:p>
-          <a:p>
-            <a:pPr>
-              <a:spcAft>
-                <a:spcPts val="800"/>
-              </a:spcAft>
-            </a:pPr>
-            <a:r>
-              <a:rPr sz="1600" b="0" i="0">
-                <a:solidFill>
-                  <a:srgbClr val="333333"/>
-                </a:solidFill>
-                <a:latin typeface="Calibri"/>
-              </a:rPr>
-              <a:t>–   Consistencia eventual vs fuerte: elijan según el dominio (citas ≠ likes).</a:t>
-            </a:r>
-          </a:p>
-          <a:p>
-            <a:pPr>
-              <a:spcAft>
-                <a:spcPts val="800"/>
-              </a:spcAft>
-            </a:pPr>
-            <a:r>
-              <a:rPr sz="1600" b="0" i="0">
-                <a:solidFill>
-                  <a:srgbClr val="333333"/>
-                </a:solidFill>
-                <a:latin typeface="Calibri"/>
-              </a:rPr>
-              <a:t>–   Hoy no implementan saga completa: solo </a:t>
-            </a:r>
-            <a:r>
-              <a:rPr sz="1600" b="1" i="0">
-                <a:solidFill>
-                  <a:srgbClr val="333333"/>
-                </a:solidFill>
-                <a:latin typeface="Calibri"/>
-              </a:rPr>
-              <a:t>reconocen</a:t>
-            </a:r>
-            <a:r>
-              <a:rPr sz="1600" b="0" i="0">
-                <a:solidFill>
-                  <a:srgbClr val="333333"/>
-                </a:solidFill>
-                <a:latin typeface="Calibri"/>
-              </a:rPr>
-              <a:t> el trade-off en el informe.</a:t>
-            </a:r>
-          </a:p>
-        </p:txBody>
-      </p:sp>
-      <p:sp>
-        <p:nvSpPr>
-          <p:cNvPr id="6" name="TextBox 5"/>
+            <a:r>
+              <a:rPr sz="1100" b="0" i="1">
+                <a:solidFill>
+                  <a:srgbClr val="666666"/>
+                </a:solidFill>
+                <a:latin typeface="Calibri"/>
+              </a:rPr>
+              <a:t>Tres pares de cajas DISTINTOS, y al menos un 409 de conflicto: sin él se descuenta. Un 500 no es error de negocio, es una falla.</a:t>
+            </a:r>
+          </a:p>
+        </p:txBody>
+      </p:sp>
+      <p:sp>
+        <p:nvSpPr>
+          <p:cNvPr id="7" name="TextBox 6"/>
           <p:cNvSpPr txBox="1"/>
           <p:nvPr/>
         </p:nvSpPr>
@@ -8313,7 +10088,7 @@
         <p:spPr>
           <a:xfrm>
             <a:off x="0" y="0"/>
-            <a:ext cx="12191695" cy="1170432"/>
+            <a:ext cx="12191695" cy="960120"/>
           </a:xfrm>
           <a:prstGeom prst="rect">
             <a:avLst/>
@@ -8355,7 +10130,7 @@
         </p:nvSpPr>
         <p:spPr>
           <a:xfrm>
-            <a:off x="0" y="1170432"/>
+            <a:off x="0" y="960120"/>
             <a:ext cx="12191695" cy="41148"/>
           </a:xfrm>
           <a:prstGeom prst="rect">
@@ -8399,7 +10174,7 @@
         <p:spPr>
           <a:xfrm>
             <a:off x="457200" y="164592"/>
-            <a:ext cx="11277295" cy="384048"/>
+            <a:ext cx="11277295" cy="502920"/>
           </a:xfrm>
           <a:prstGeom prst="rect">
             <a:avLst/>
@@ -8419,7 +10194,7 @@
                 </a:solidFill>
                 <a:latin typeface="Calibri"/>
               </a:rPr>
-              <a:t>Ejemplo de diagrama C4 — nivel Containers</a:t>
+              <a:t>Distribuido implica fallos</a:t>
             </a:r>
           </a:p>
         </p:txBody>
@@ -8432,8 +10207,8 @@
         </p:nvSpPr>
         <p:spPr>
           <a:xfrm>
-            <a:off x="457200" y="566928"/>
-            <a:ext cx="11277295" cy="411480"/>
+            <a:off x="457200" y="1170432"/>
+            <a:ext cx="11277295" cy="5230368"/>
           </a:xfrm>
           <a:prstGeom prst="rect">
             <a:avLst/>
@@ -8446,488 +10221,214 @@
           </a:bodyPr>
           <a:lstStyle/>
           <a:p>
-            <a:r>
-              <a:rPr sz="1400" b="0" i="0">
-                <a:solidFill>
-                  <a:srgbClr val="B8D8EE"/>
-                </a:solidFill>
-                <a:latin typeface="Calibri"/>
-              </a:rPr>
-              <a:t>2–5 cajas justificadas, cada flecha con protocolo + verbo de negocio</a:t>
-            </a:r>
-          </a:p>
-        </p:txBody>
-      </p:sp>
-      <p:sp>
-        <p:nvSpPr>
-          <p:cNvPr id="6" name="Rounded Rectangle 5"/>
-          <p:cNvSpPr/>
-          <p:nvPr/>
-        </p:nvSpPr>
-        <p:spPr>
-          <a:xfrm>
-            <a:off x="822960" y="3931920"/>
-            <a:ext cx="2377440" cy="914400"/>
-          </a:xfrm>
-          <a:prstGeom prst="roundRect">
-            <a:avLst>
-              <a:gd name="adj" fmla="val 12000"/>
-            </a:avLst>
-          </a:prstGeom>
-          <a:solidFill>
-            <a:srgbClr val="FFD000"/>
-          </a:solidFill>
-          <a:ln>
-            <a:noFill/>
-          </a:ln>
-        </p:spPr>
-        <p:style>
-          <a:lnRef idx="1">
-            <a:schemeClr val="accent1"/>
-          </a:lnRef>
-          <a:fillRef idx="3">
-            <a:schemeClr val="accent1"/>
-          </a:fillRef>
-          <a:effectRef idx="2">
-            <a:schemeClr val="accent1"/>
-          </a:effectRef>
-          <a:fontRef idx="minor">
-            <a:schemeClr val="lt1"/>
-          </a:fontRef>
-        </p:style>
-        <p:txBody>
-          <a:bodyPr rtlCol="0" anchor="ctr" wrap="square"/>
-          <a:lstStyle/>
-          <a:p>
-            <a:pPr algn="ctr"/>
-            <a:r>
-              <a:rPr sz="1300" b="1" i="0">
-                <a:solidFill>
-                  <a:srgbClr val="095292"/>
-                </a:solidFill>
-                <a:latin typeface="Calibri"/>
-              </a:rPr>
-              <a:t>Cliente/App
-(actor)</a:t>
-            </a:r>
-          </a:p>
-        </p:txBody>
-      </p:sp>
-      <p:sp>
-        <p:nvSpPr>
-          <p:cNvPr id="7" name="Rounded Rectangle 6"/>
-          <p:cNvSpPr/>
-          <p:nvPr/>
-        </p:nvSpPr>
-        <p:spPr>
-          <a:xfrm>
-            <a:off x="822960" y="2011680"/>
-            <a:ext cx="2377440" cy="1097280"/>
-          </a:xfrm>
-          <a:prstGeom prst="roundRect">
-            <a:avLst>
-              <a:gd name="adj" fmla="val 12000"/>
-            </a:avLst>
-          </a:prstGeom>
-          <a:solidFill>
-            <a:srgbClr val="095292"/>
-          </a:solidFill>
-          <a:ln>
-            <a:noFill/>
-          </a:ln>
-        </p:spPr>
-        <p:style>
-          <a:lnRef idx="1">
-            <a:schemeClr val="accent1"/>
-          </a:lnRef>
-          <a:fillRef idx="3">
-            <a:schemeClr val="accent1"/>
-          </a:fillRef>
-          <a:effectRef idx="2">
-            <a:schemeClr val="accent1"/>
-          </a:effectRef>
-          <a:fontRef idx="minor">
-            <a:schemeClr val="lt1"/>
-          </a:fontRef>
-        </p:style>
-        <p:txBody>
-          <a:bodyPr rtlCol="0" anchor="ctr" wrap="square"/>
-          <a:lstStyle/>
-          <a:p>
-            <a:pPr algn="ctr"/>
-            <a:r>
-              <a:rPr sz="1300" b="1" i="0">
-                <a:solidFill>
-                  <a:srgbClr val="FFFFFF"/>
-                </a:solidFill>
-                <a:latin typeface="Calibri"/>
-              </a:rPr>
-              <a:t>API CloudLite
-(contenedor)</a:t>
-            </a:r>
-          </a:p>
-        </p:txBody>
-      </p:sp>
-      <p:sp>
-        <p:nvSpPr>
-          <p:cNvPr id="8" name="Rounded Rectangle 7"/>
-          <p:cNvSpPr/>
-          <p:nvPr/>
-        </p:nvSpPr>
-        <p:spPr>
-          <a:xfrm>
-            <a:off x="4754880" y="2011680"/>
-            <a:ext cx="2377440" cy="1097280"/>
-          </a:xfrm>
-          <a:prstGeom prst="roundRect">
-            <a:avLst>
-              <a:gd name="adj" fmla="val 12000"/>
-            </a:avLst>
-          </a:prstGeom>
-          <a:solidFill>
-            <a:srgbClr val="269CCB"/>
-          </a:solidFill>
-          <a:ln>
-            <a:noFill/>
-          </a:ln>
-        </p:spPr>
-        <p:style>
-          <a:lnRef idx="1">
-            <a:schemeClr val="accent1"/>
-          </a:lnRef>
-          <a:fillRef idx="3">
-            <a:schemeClr val="accent1"/>
-          </a:fillRef>
-          <a:effectRef idx="2">
-            <a:schemeClr val="accent1"/>
-          </a:effectRef>
-          <a:fontRef idx="minor">
-            <a:schemeClr val="lt1"/>
-          </a:fontRef>
-        </p:style>
-        <p:txBody>
-          <a:bodyPr rtlCol="0" anchor="ctr" wrap="square"/>
-          <a:lstStyle/>
-          <a:p>
-            <a:pPr algn="ctr"/>
-            <a:r>
-              <a:rPr sz="1300" b="1" i="0">
-                <a:solidFill>
-                  <a:srgbClr val="FFFFFF"/>
-                </a:solidFill>
-                <a:latin typeface="Calibri"/>
-              </a:rPr>
-              <a:t>Base de datos
-(contenedor)</a:t>
-            </a:r>
-          </a:p>
-        </p:txBody>
-      </p:sp>
-      <p:sp>
-        <p:nvSpPr>
-          <p:cNvPr id="9" name="Rounded Rectangle 8"/>
-          <p:cNvSpPr/>
-          <p:nvPr/>
-        </p:nvSpPr>
-        <p:spPr>
-          <a:xfrm>
-            <a:off x="8595360" y="2011680"/>
-            <a:ext cx="2377440" cy="1097280"/>
-          </a:xfrm>
-          <a:prstGeom prst="roundRect">
-            <a:avLst>
-              <a:gd name="adj" fmla="val 12000"/>
-            </a:avLst>
-          </a:prstGeom>
-          <a:solidFill>
-            <a:srgbClr val="269CCB"/>
-          </a:solidFill>
-          <a:ln>
-            <a:noFill/>
-          </a:ln>
-        </p:spPr>
-        <p:style>
-          <a:lnRef idx="1">
-            <a:schemeClr val="accent1"/>
-          </a:lnRef>
-          <a:fillRef idx="3">
-            <a:schemeClr val="accent1"/>
-          </a:fillRef>
-          <a:effectRef idx="2">
-            <a:schemeClr val="accent1"/>
-          </a:effectRef>
-          <a:fontRef idx="minor">
-            <a:schemeClr val="lt1"/>
-          </a:fontRef>
-        </p:style>
-        <p:txBody>
-          <a:bodyPr rtlCol="0" anchor="ctr" wrap="square"/>
-          <a:lstStyle/>
-          <a:p>
-            <a:pPr algn="ctr"/>
-            <a:r>
-              <a:rPr sz="1300" b="1" i="0">
-                <a:solidFill>
-                  <a:srgbClr val="FFFFFF"/>
-                </a:solidFill>
-                <a:latin typeface="Calibri"/>
-              </a:rPr>
-              <a:t>Servicio de
-notificaciones</a:t>
-            </a:r>
-          </a:p>
-        </p:txBody>
-      </p:sp>
-      <p:cxnSp>
-        <p:nvCxnSpPr>
-          <p:cNvPr id="10" name="Connector 9"/>
-          <p:cNvCxnSpPr/>
-          <p:nvPr/>
-        </p:nvCxnSpPr>
-        <p:spPr>
-          <a:xfrm flipV="1">
-            <a:off x="2011680" y="3108960"/>
-            <a:ext cx="0" cy="822960"/>
-          </a:xfrm>
-          <a:prstGeom prst="line">
-            <a:avLst/>
-          </a:prstGeom>
-          <a:ln w="22225">
-            <a:solidFill>
-              <a:srgbClr val="666666"/>
-            </a:solidFill>
-            <a:tailEnd type="triangle" w="med" len="med"/>
-          </a:ln>
-        </p:spPr>
-        <p:style>
-          <a:lnRef idx="2">
-            <a:schemeClr val="accent1"/>
-          </a:lnRef>
-          <a:fillRef idx="0">
-            <a:schemeClr val="accent1"/>
-          </a:fillRef>
-          <a:effectRef idx="1">
-            <a:schemeClr val="accent1"/>
-          </a:effectRef>
-          <a:fontRef idx="minor">
-            <a:schemeClr val="tx1"/>
-          </a:fontRef>
-        </p:style>
-      </p:cxnSp>
-      <p:sp>
-        <p:nvSpPr>
-          <p:cNvPr id="11" name="TextBox 10"/>
-          <p:cNvSpPr txBox="1"/>
-          <p:nvPr/>
-        </p:nvSpPr>
-        <p:spPr>
-          <a:xfrm>
-            <a:off x="1188720" y="3319272"/>
-            <a:ext cx="1645920" cy="320040"/>
-          </a:xfrm>
-          <a:prstGeom prst="rect">
-            <a:avLst/>
-          </a:prstGeom>
-          <a:noFill/>
-        </p:spPr>
-        <p:txBody>
-          <a:bodyPr wrap="square">
-            <a:spAutoFit/>
-          </a:bodyPr>
-          <a:lstStyle/>
-          <a:p>
-            <a:pPr algn="ctr"/>
-            <a:r>
-              <a:rPr sz="1000" b="0" i="1">
-                <a:solidFill>
-                  <a:srgbClr val="666666"/>
-                </a:solidFill>
-                <a:latin typeface="Calibri"/>
-              </a:rPr>
-              <a:t>HTTP/JSON</a:t>
-            </a:r>
-          </a:p>
-        </p:txBody>
-      </p:sp>
-      <p:cxnSp>
-        <p:nvCxnSpPr>
-          <p:cNvPr id="12" name="Connector 11"/>
-          <p:cNvCxnSpPr/>
-          <p:nvPr/>
-        </p:nvCxnSpPr>
-        <p:spPr>
-          <a:xfrm>
-            <a:off x="3200400" y="2560320"/>
-            <a:ext cx="1554480" cy="0"/>
-          </a:xfrm>
-          <a:prstGeom prst="line">
-            <a:avLst/>
-          </a:prstGeom>
-          <a:ln w="22225">
-            <a:solidFill>
-              <a:srgbClr val="666666"/>
-            </a:solidFill>
-            <a:tailEnd type="triangle" w="med" len="med"/>
-          </a:ln>
-        </p:spPr>
-        <p:style>
-          <a:lnRef idx="2">
-            <a:schemeClr val="accent1"/>
-          </a:lnRef>
-          <a:fillRef idx="0">
-            <a:schemeClr val="accent1"/>
-          </a:fillRef>
-          <a:effectRef idx="1">
-            <a:schemeClr val="accent1"/>
-          </a:effectRef>
-          <a:fontRef idx="minor">
-            <a:schemeClr val="tx1"/>
-          </a:fontRef>
-        </p:style>
-      </p:cxnSp>
-      <p:sp>
-        <p:nvSpPr>
-          <p:cNvPr id="13" name="TextBox 12"/>
-          <p:cNvSpPr txBox="1"/>
-          <p:nvPr/>
-        </p:nvSpPr>
-        <p:spPr>
-          <a:xfrm>
-            <a:off x="3154679" y="2359152"/>
-            <a:ext cx="1645920" cy="320040"/>
-          </a:xfrm>
-          <a:prstGeom prst="rect">
-            <a:avLst/>
-          </a:prstGeom>
-          <a:noFill/>
-        </p:spPr>
-        <p:txBody>
-          <a:bodyPr wrap="square">
-            <a:spAutoFit/>
-          </a:bodyPr>
-          <a:lstStyle/>
-          <a:p>
-            <a:pPr algn="ctr"/>
-            <a:r>
-              <a:rPr sz="1000" b="0" i="1">
-                <a:solidFill>
-                  <a:srgbClr val="666666"/>
-                </a:solidFill>
-                <a:latin typeface="Calibri"/>
-              </a:rPr>
-              <a:t>SQL</a:t>
-            </a:r>
-          </a:p>
-        </p:txBody>
-      </p:sp>
-      <p:cxnSp>
-        <p:nvCxnSpPr>
-          <p:cNvPr id="14" name="Connector 13"/>
-          <p:cNvCxnSpPr/>
-          <p:nvPr/>
-        </p:nvCxnSpPr>
-        <p:spPr>
-          <a:xfrm>
-            <a:off x="3200400" y="2560320"/>
-            <a:ext cx="5394960" cy="0"/>
-          </a:xfrm>
-          <a:prstGeom prst="line">
-            <a:avLst/>
-          </a:prstGeom>
-          <a:ln w="22225">
-            <a:solidFill>
-              <a:srgbClr val="666666"/>
-            </a:solidFill>
-            <a:tailEnd type="triangle" w="med" len="med"/>
-          </a:ln>
-        </p:spPr>
-        <p:style>
-          <a:lnRef idx="2">
-            <a:schemeClr val="accent1"/>
-          </a:lnRef>
-          <a:fillRef idx="0">
-            <a:schemeClr val="accent1"/>
-          </a:fillRef>
-          <a:effectRef idx="1">
-            <a:schemeClr val="accent1"/>
-          </a:effectRef>
-          <a:fontRef idx="minor">
-            <a:schemeClr val="tx1"/>
-          </a:fontRef>
-        </p:style>
-      </p:cxnSp>
-      <p:sp>
-        <p:nvSpPr>
-          <p:cNvPr id="15" name="TextBox 14"/>
-          <p:cNvSpPr txBox="1"/>
-          <p:nvPr/>
-        </p:nvSpPr>
-        <p:spPr>
-          <a:xfrm>
-            <a:off x="5074920" y="2359152"/>
-            <a:ext cx="1645920" cy="320040"/>
-          </a:xfrm>
-          <a:prstGeom prst="rect">
-            <a:avLst/>
-          </a:prstGeom>
-          <a:noFill/>
-        </p:spPr>
-        <p:txBody>
-          <a:bodyPr wrap="square">
-            <a:spAutoFit/>
-          </a:bodyPr>
-          <a:lstStyle/>
-          <a:p>
-            <a:pPr algn="ctr"/>
-            <a:r>
-              <a:rPr sz="1000" b="0" i="1">
-                <a:solidFill>
-                  <a:srgbClr val="666666"/>
-                </a:solidFill>
-                <a:latin typeface="Calibri"/>
-              </a:rPr>
-              <a:t>evento/cola</a:t>
-            </a:r>
-          </a:p>
-        </p:txBody>
-      </p:sp>
-      <p:sp>
-        <p:nvSpPr>
-          <p:cNvPr id="16" name="TextBox 15"/>
-          <p:cNvSpPr txBox="1"/>
-          <p:nvPr/>
-        </p:nvSpPr>
-        <p:spPr>
-          <a:xfrm>
-            <a:off x="457200" y="6263640"/>
-            <a:ext cx="11277295" cy="411480"/>
-          </a:xfrm>
-          <a:prstGeom prst="rect">
-            <a:avLst/>
-          </a:prstGeom>
-          <a:noFill/>
-        </p:spPr>
-        <p:txBody>
-          <a:bodyPr wrap="square">
-            <a:spAutoFit/>
-          </a:bodyPr>
-          <a:lstStyle/>
-          <a:p>
-            <a:r>
-              <a:rPr sz="1100" b="0" i="1">
-                <a:solidFill>
-                  <a:srgbClr val="666666"/>
-                </a:solidFill>
-                <a:latin typeface="Calibri"/>
-              </a:rPr>
-              <a:t>Los nombres de estas cajas deben reaparecer igual en el diagrama de Deployment (Clase 7) — es el mismo sistema visto desde otro ángulo.</a:t>
-            </a:r>
-          </a:p>
-        </p:txBody>
-      </p:sp>
-      <p:sp>
-        <p:nvSpPr>
-          <p:cNvPr id="17" name="TextBox 16"/>
+            <a:pPr>
+              <a:spcAft>
+                <a:spcPts val="800"/>
+              </a:spcAft>
+            </a:pPr>
+            <a:r>
+              <a:rPr sz="1600" b="0" i="0">
+                <a:solidFill>
+                  <a:srgbClr val="333333"/>
+                </a:solidFill>
+                <a:latin typeface="Calibri"/>
+              </a:rPr>
+              <a:t>–   Cada flecha del diagrama es una llamada de red: puede tardar, perderse o llegar dos veces.</a:t>
+            </a:r>
+          </a:p>
+          <a:p>
+            <a:pPr>
+              <a:spcAft>
+                <a:spcPts val="800"/>
+              </a:spcAft>
+            </a:pPr>
+            <a:r>
+              <a:rPr sz="1600" b="0" i="0">
+                <a:solidFill>
+                  <a:srgbClr val="333333"/>
+                </a:solidFill>
+                <a:latin typeface="Calibri"/>
+              </a:rPr>
+              <a:t>–   </a:t>
+            </a:r>
+            <a:r>
+              <a:rPr sz="1600" b="1" i="0">
+                <a:solidFill>
+                  <a:srgbClr val="333333"/>
+                </a:solidFill>
+                <a:latin typeface="Calibri"/>
+              </a:rPr>
+              <a:t>Riesgo 1 · qué se cae:</a:t>
+            </a:r>
+            <a:r>
+              <a:rPr sz="1600" b="0" i="0">
+                <a:solidFill>
+                  <a:srgbClr val="333333"/>
+                </a:solidFill>
+                <a:latin typeface="Calibri"/>
+              </a:rPr>
+              <a:t> nombra </a:t>
+            </a:r>
+            <a:r>
+              <a:rPr sz="1600" b="1" i="0">
+                <a:solidFill>
+                  <a:srgbClr val="333333"/>
+                </a:solidFill>
+                <a:latin typeface="Calibri"/>
+              </a:rPr>
+              <a:t>una</a:t>
+            </a:r>
+            <a:r>
+              <a:rPr sz="1600" b="0" i="0">
+                <a:solidFill>
+                  <a:srgbClr val="333333"/>
+                </a:solidFill>
+                <a:latin typeface="Calibri"/>
+              </a:rPr>
+              <a:t> caja, y di qué deja de funcionar </a:t>
+            </a:r>
+            <a:r>
+              <a:rPr sz="1600" b="1" i="0">
+                <a:solidFill>
+                  <a:srgbClr val="333333"/>
+                </a:solidFill>
+                <a:latin typeface="Calibri"/>
+              </a:rPr>
+              <a:t>y qué sigue funcionando</a:t>
+            </a:r>
+            <a:r>
+              <a:rPr sz="1600" b="0" i="0">
+                <a:solidFill>
+                  <a:srgbClr val="333333"/>
+                </a:solidFill>
+                <a:latin typeface="Calibri"/>
+              </a:rPr>
+              <a:t>. «Se cae todo» vale la mitad.</a:t>
+            </a:r>
+          </a:p>
+          <a:p>
+            <a:pPr>
+              <a:spcAft>
+                <a:spcPts val="800"/>
+              </a:spcAft>
+            </a:pPr>
+            <a:r>
+              <a:rPr sz="1600" b="0" i="0">
+                <a:solidFill>
+                  <a:srgbClr val="333333"/>
+                </a:solidFill>
+                <a:latin typeface="Calibri"/>
+              </a:rPr>
+              <a:t>–   </a:t>
+            </a:r>
+            <a:r>
+              <a:rPr sz="1600" b="1" i="0">
+                <a:solidFill>
+                  <a:srgbClr val="333333"/>
+                </a:solidFill>
+                <a:latin typeface="Calibri"/>
+              </a:rPr>
+              <a:t>Riesgo 2 · cuántos saltos de red</a:t>
+            </a:r>
+            <a:r>
+              <a:rPr sz="1600" b="0" i="0">
+                <a:solidFill>
+                  <a:srgbClr val="333333"/>
+                </a:solidFill>
+                <a:latin typeface="Calibri"/>
+              </a:rPr>
+              <a:t> tiene una operación de punta a punta: cuéntalos sobre tu propio diagrama.</a:t>
+            </a:r>
+          </a:p>
+          <a:p>
+            <a:pPr>
+              <a:spcAft>
+                <a:spcPts val="800"/>
+              </a:spcAft>
+            </a:pPr>
+            <a:r>
+              <a:rPr sz="1600" b="0" i="0">
+                <a:solidFill>
+                  <a:srgbClr val="333333"/>
+                </a:solidFill>
+                <a:latin typeface="Calibri"/>
+              </a:rPr>
+              <a:t>–   </a:t>
+            </a:r>
+            <a:r>
+              <a:rPr sz="1600" b="1" i="0">
+                <a:solidFill>
+                  <a:srgbClr val="333333"/>
+                </a:solidFill>
+                <a:latin typeface="Calibri"/>
+              </a:rPr>
+              <a:t>Riesgo 3 · un dato escrito en dos pasos:</a:t>
+            </a:r>
+            <a:r>
+              <a:rPr sz="1600" b="0" i="0">
+                <a:solidFill>
+                  <a:srgbClr val="333333"/>
+                </a:solidFill>
+                <a:latin typeface="Calibri"/>
+              </a:rPr>
+              <a:t> nómbralo y di qué pasa si el segundo falla.</a:t>
+            </a:r>
+          </a:p>
+          <a:p>
+            <a:pPr>
+              <a:spcAft>
+                <a:spcPts val="800"/>
+              </a:spcAft>
+            </a:pPr>
+            <a:r>
+              <a:rPr sz="1600" b="0" i="0">
+                <a:solidFill>
+                  <a:srgbClr val="333333"/>
+                </a:solidFill>
+                <a:latin typeface="Calibri"/>
+              </a:rPr>
+              <a:t>–   Caja de herramientas para mitigarlos: </a:t>
+            </a:r>
+            <a:r>
+              <a:rPr sz="1600" b="1" i="0">
+                <a:solidFill>
+                  <a:srgbClr val="333333"/>
+                </a:solidFill>
+                <a:latin typeface="Calibri"/>
+              </a:rPr>
+              <a:t>timeout · reintento con espera creciente · idempotencia · circuit breaker</a:t>
+            </a:r>
+            <a:r>
+              <a:rPr sz="1600" b="0" i="0">
+                <a:solidFill>
+                  <a:srgbClr val="333333"/>
+                </a:solidFill>
+                <a:latin typeface="Calibri"/>
+              </a:rPr>
+              <a:t>.</a:t>
+            </a:r>
+          </a:p>
+          <a:p>
+            <a:pPr>
+              <a:spcAft>
+                <a:spcPts val="800"/>
+              </a:spcAft>
+            </a:pPr>
+            <a:r>
+              <a:rPr sz="1600" b="0" i="0">
+                <a:solidFill>
+                  <a:srgbClr val="333333"/>
+                </a:solidFill>
+                <a:latin typeface="Calibri"/>
+              </a:rPr>
+              <a:t>–   «Los microservicios son más complejos» no es un riesgo: no nombra caja, ni salto, ni dato.</a:t>
+            </a:r>
+          </a:p>
+        </p:txBody>
+      </p:sp>
+      <p:sp>
+        <p:nvSpPr>
+          <p:cNvPr id="6" name="TextBox 5"/>
           <p:cNvSpPr txBox="1"/>
           <p:nvPr/>
         </p:nvSpPr>
@@ -8995,7 +10496,7 @@
         <p:spPr>
           <a:xfrm>
             <a:off x="0" y="0"/>
-            <a:ext cx="12191695" cy="960120"/>
+            <a:ext cx="12191695" cy="1170432"/>
           </a:xfrm>
           <a:prstGeom prst="rect">
             <a:avLst/>
@@ -9037,7 +10538,7 @@
         </p:nvSpPr>
         <p:spPr>
           <a:xfrm>
-            <a:off x="0" y="960120"/>
+            <a:off x="0" y="1170432"/>
             <a:ext cx="12191695" cy="41148"/>
           </a:xfrm>
           <a:prstGeom prst="rect">
@@ -9081,7 +10582,7 @@
         <p:spPr>
           <a:xfrm>
             <a:off x="457200" y="164592"/>
-            <a:ext cx="11277295" cy="502920"/>
+            <a:ext cx="11277295" cy="384048"/>
           </a:xfrm>
           <a:prstGeom prst="rect">
             <a:avLst/>
@@ -9101,277 +10602,60 @@
                 </a:solidFill>
                 <a:latin typeface="Calibri"/>
               </a:rPr>
-              <a:t>Microservicios de verdad vs microservicios teatro</a:t>
-            </a:r>
-          </a:p>
-        </p:txBody>
-      </p:sp>
-      <p:sp>
-        <p:nvSpPr>
-          <p:cNvPr id="5" name="Rounded Rectangle 4"/>
+              <a:t>Ejemplo de diagrama C4 — nivel Containers</a:t>
+            </a:r>
+          </a:p>
+        </p:txBody>
+      </p:sp>
+      <p:sp>
+        <p:nvSpPr>
+          <p:cNvPr id="5" name="TextBox 4"/>
+          <p:cNvSpPr txBox="1"/>
+          <p:nvPr/>
+        </p:nvSpPr>
+        <p:spPr>
+          <a:xfrm>
+            <a:off x="457200" y="566928"/>
+            <a:ext cx="11277295" cy="411480"/>
+          </a:xfrm>
+          <a:prstGeom prst="rect">
+            <a:avLst/>
+          </a:prstGeom>
+          <a:noFill/>
+        </p:spPr>
+        <p:txBody>
+          <a:bodyPr wrap="square">
+            <a:spAutoFit/>
+          </a:bodyPr>
+          <a:lstStyle/>
+          <a:p>
+            <a:r>
+              <a:rPr sz="1400" b="0" i="0">
+                <a:solidFill>
+                  <a:srgbClr val="B8D8EE"/>
+                </a:solidFill>
+                <a:latin typeface="Calibri"/>
+              </a:rPr>
+              <a:t>2–5 cajas justificadas, cada flecha con protocolo Y formato</a:t>
+            </a:r>
+          </a:p>
+        </p:txBody>
+      </p:sp>
+      <p:sp>
+        <p:nvSpPr>
+          <p:cNvPr id="6" name="Rounded Rectangle 5"/>
           <p:cNvSpPr/>
           <p:nvPr/>
         </p:nvSpPr>
         <p:spPr>
           <a:xfrm>
-            <a:off x="457200" y="1261872"/>
-            <a:ext cx="5478627" cy="5093208"/>
+            <a:off x="822960" y="2011680"/>
+            <a:ext cx="2377440" cy="1097280"/>
           </a:xfrm>
           <a:prstGeom prst="roundRect">
             <a:avLst>
               <a:gd name="adj" fmla="val 12000"/>
             </a:avLst>
-          </a:prstGeom>
-          <a:solidFill>
-            <a:srgbClr val="FBE4E4"/>
-          </a:solidFill>
-          <a:ln>
-            <a:noFill/>
-          </a:ln>
-        </p:spPr>
-        <p:style>
-          <a:lnRef idx="1">
-            <a:schemeClr val="accent1"/>
-          </a:lnRef>
-          <a:fillRef idx="3">
-            <a:schemeClr val="accent1"/>
-          </a:fillRef>
-          <a:effectRef idx="2">
-            <a:schemeClr val="accent1"/>
-          </a:effectRef>
-          <a:fontRef idx="minor">
-            <a:schemeClr val="lt1"/>
-          </a:fontRef>
-        </p:style>
-        <p:txBody>
-          <a:bodyPr rtlCol="0" anchor="ctr"/>
-          <a:lstStyle/>
-          <a:p>
-            <a:pPr algn="ctr"/>
-          </a:p>
-        </p:txBody>
-      </p:sp>
-      <p:sp>
-        <p:nvSpPr>
-          <p:cNvPr id="6" name="Rectangle 5"/>
-          <p:cNvSpPr/>
-          <p:nvPr/>
-        </p:nvSpPr>
-        <p:spPr>
-          <a:xfrm>
-            <a:off x="457200" y="1261872"/>
-            <a:ext cx="5478627" cy="502920"/>
-          </a:xfrm>
-          <a:prstGeom prst="rect">
-            <a:avLst/>
-          </a:prstGeom>
-          <a:solidFill>
-            <a:srgbClr val="A02030"/>
-          </a:solidFill>
-          <a:ln>
-            <a:noFill/>
-          </a:ln>
-        </p:spPr>
-        <p:style>
-          <a:lnRef idx="1">
-            <a:schemeClr val="accent1"/>
-          </a:lnRef>
-          <a:fillRef idx="3">
-            <a:schemeClr val="accent1"/>
-          </a:fillRef>
-          <a:effectRef idx="2">
-            <a:schemeClr val="accent1"/>
-          </a:effectRef>
-          <a:fontRef idx="minor">
-            <a:schemeClr val="lt1"/>
-          </a:fontRef>
-        </p:style>
-        <p:txBody>
-          <a:bodyPr rtlCol="0" anchor="ctr"/>
-          <a:lstStyle/>
-          <a:p>
-            <a:pPr algn="ctr"/>
-          </a:p>
-        </p:txBody>
-      </p:sp>
-      <p:sp>
-        <p:nvSpPr>
-          <p:cNvPr id="7" name="TextBox 6"/>
-          <p:cNvSpPr txBox="1"/>
-          <p:nvPr/>
-        </p:nvSpPr>
-        <p:spPr>
-          <a:xfrm>
-            <a:off x="594360" y="1353312"/>
-            <a:ext cx="5204307" cy="365760"/>
-          </a:xfrm>
-          <a:prstGeom prst="rect">
-            <a:avLst/>
-          </a:prstGeom>
-          <a:noFill/>
-        </p:spPr>
-        <p:txBody>
-          <a:bodyPr wrap="square" anchor="ctr"/>
-          <a:lstStyle/>
-          <a:p>
-            <a:pPr algn="ctr"/>
-            <a:r>
-              <a:rPr sz="1600" b="1" i="0">
-                <a:solidFill>
-                  <a:srgbClr val="FFFFFF"/>
-                </a:solidFill>
-                <a:latin typeface="Calibri"/>
-              </a:rPr>
-              <a:t>Teatro (lo que NO queremos)</a:t>
-            </a:r>
-          </a:p>
-        </p:txBody>
-      </p:sp>
-      <p:sp>
-        <p:nvSpPr>
-          <p:cNvPr id="8" name="TextBox 7"/>
-          <p:cNvSpPr txBox="1"/>
-          <p:nvPr/>
-        </p:nvSpPr>
-        <p:spPr>
-          <a:xfrm>
-            <a:off x="621792" y="1901952"/>
-            <a:ext cx="5158587" cy="4498848"/>
-          </a:xfrm>
-          <a:prstGeom prst="rect">
-            <a:avLst/>
-          </a:prstGeom>
-          <a:noFill/>
-        </p:spPr>
-        <p:txBody>
-          <a:bodyPr wrap="square">
-            <a:spAutoFit/>
-          </a:bodyPr>
-          <a:lstStyle/>
-          <a:p>
-            <a:pPr>
-              <a:spcAft>
-                <a:spcPts val="800"/>
-              </a:spcAft>
-            </a:pPr>
-            <a:r>
-              <a:rPr sz="1500" b="0" i="0">
-                <a:solidFill>
-                  <a:srgbClr val="333333"/>
-                </a:solidFill>
-                <a:latin typeface="Calibri"/>
-              </a:rPr>
-              <a:t>–   12 servicios para un equipo de 3</a:t>
-            </a:r>
-          </a:p>
-          <a:p>
-            <a:pPr>
-              <a:spcAft>
-                <a:spcPts val="800"/>
-              </a:spcAft>
-            </a:pPr>
-            <a:r>
-              <a:rPr sz="1500" b="0" i="0">
-                <a:solidFill>
-                  <a:srgbClr val="333333"/>
-                </a:solidFill>
-                <a:latin typeface="Calibri"/>
-              </a:rPr>
-              <a:t>–   Se separan por capricho tecnico, no por negocio</a:t>
-            </a:r>
-          </a:p>
-          <a:p>
-            <a:pPr>
-              <a:spcAft>
-                <a:spcPts val="800"/>
-              </a:spcAft>
-            </a:pPr>
-            <a:r>
-              <a:rPr sz="1500" b="0" i="0">
-                <a:solidFill>
-                  <a:srgbClr val="333333"/>
-                </a:solidFill>
-                <a:latin typeface="Calibri"/>
-              </a:rPr>
-              <a:t>–   Flechas sin protocolo ni verbo</a:t>
-            </a:r>
-          </a:p>
-          <a:p>
-            <a:pPr>
-              <a:spcAft>
-                <a:spcPts val="800"/>
-              </a:spcAft>
-            </a:pPr>
-            <a:r>
-              <a:rPr sz="1500" b="0" i="0">
-                <a:solidFill>
-                  <a:srgbClr val="333333"/>
-                </a:solidFill>
-                <a:latin typeface="Calibri"/>
-              </a:rPr>
-              <a:t>–   Nadie sabe explicar por que ese corte</a:t>
-            </a:r>
-          </a:p>
-        </p:txBody>
-      </p:sp>
-      <p:sp>
-        <p:nvSpPr>
-          <p:cNvPr id="9" name="Rounded Rectangle 8"/>
-          <p:cNvSpPr/>
-          <p:nvPr/>
-        </p:nvSpPr>
-        <p:spPr>
-          <a:xfrm>
-            <a:off x="6255867" y="1261872"/>
-            <a:ext cx="5478627" cy="5093208"/>
-          </a:xfrm>
-          <a:prstGeom prst="roundRect">
-            <a:avLst>
-              <a:gd name="adj" fmla="val 12000"/>
-            </a:avLst>
-          </a:prstGeom>
-          <a:solidFill>
-            <a:srgbClr val="E8F4FA"/>
-          </a:solidFill>
-          <a:ln>
-            <a:noFill/>
-          </a:ln>
-        </p:spPr>
-        <p:style>
-          <a:lnRef idx="1">
-            <a:schemeClr val="accent1"/>
-          </a:lnRef>
-          <a:fillRef idx="3">
-            <a:schemeClr val="accent1"/>
-          </a:fillRef>
-          <a:effectRef idx="2">
-            <a:schemeClr val="accent1"/>
-          </a:effectRef>
-          <a:fontRef idx="minor">
-            <a:schemeClr val="lt1"/>
-          </a:fontRef>
-        </p:style>
-        <p:txBody>
-          <a:bodyPr rtlCol="0" anchor="ctr"/>
-          <a:lstStyle/>
-          <a:p>
-            <a:pPr algn="ctr"/>
-          </a:p>
-        </p:txBody>
-      </p:sp>
-      <p:sp>
-        <p:nvSpPr>
-          <p:cNvPr id="10" name="Rectangle 9"/>
-          <p:cNvSpPr/>
-          <p:nvPr/>
-        </p:nvSpPr>
-        <p:spPr>
-          <a:xfrm>
-            <a:off x="6255867" y="1261872"/>
-            <a:ext cx="5478627" cy="502920"/>
-          </a:xfrm>
-          <a:prstGeom prst="rect">
-            <a:avLst/>
           </a:prstGeom>
           <a:solidFill>
             <a:srgbClr val="095292"/>
@@ -9395,46 +10679,279 @@
           </a:fontRef>
         </p:style>
         <p:txBody>
-          <a:bodyPr rtlCol="0" anchor="ctr"/>
+          <a:bodyPr rtlCol="0" anchor="ctr" wrap="square"/>
           <a:lstStyle/>
           <a:p>
             <a:pPr algn="ctr"/>
-          </a:p>
-        </p:txBody>
-      </p:sp>
-      <p:sp>
-        <p:nvSpPr>
-          <p:cNvPr id="11" name="TextBox 10"/>
-          <p:cNvSpPr txBox="1"/>
-          <p:nvPr/>
-        </p:nvSpPr>
-        <p:spPr>
-          <a:xfrm>
-            <a:off x="6393027" y="1353312"/>
-            <a:ext cx="5204307" cy="365760"/>
-          </a:xfrm>
-          <a:prstGeom prst="rect">
-            <a:avLst/>
-          </a:prstGeom>
-          <a:noFill/>
-        </p:spPr>
-        <p:txBody>
-          <a:bodyPr wrap="square" anchor="ctr"/>
+            <a:r>
+              <a:rPr sz="1100" b="1" i="0">
+                <a:solidFill>
+                  <a:srgbClr val="FFFFFF"/>
+                </a:solidFill>
+                <a:latin typeface="Calibri"/>
+              </a:rPr>
+              <a:t>App web
+(Container · React)</a:t>
+            </a:r>
+          </a:p>
+        </p:txBody>
+      </p:sp>
+      <p:sp>
+        <p:nvSpPr>
+          <p:cNvPr id="7" name="Rounded Rectangle 6"/>
+          <p:cNvSpPr/>
+          <p:nvPr/>
+        </p:nvSpPr>
+        <p:spPr>
+          <a:xfrm>
+            <a:off x="4754880" y="2011680"/>
+            <a:ext cx="2377440" cy="1097280"/>
+          </a:xfrm>
+          <a:prstGeom prst="roundRect">
+            <a:avLst>
+              <a:gd name="adj" fmla="val 12000"/>
+            </a:avLst>
+          </a:prstGeom>
+          <a:solidFill>
+            <a:srgbClr val="095292"/>
+          </a:solidFill>
+          <a:ln>
+            <a:noFill/>
+          </a:ln>
+        </p:spPr>
+        <p:style>
+          <a:lnRef idx="1">
+            <a:schemeClr val="accent1"/>
+          </a:lnRef>
+          <a:fillRef idx="3">
+            <a:schemeClr val="accent1"/>
+          </a:fillRef>
+          <a:effectRef idx="2">
+            <a:schemeClr val="accent1"/>
+          </a:effectRef>
+          <a:fontRef idx="minor">
+            <a:schemeClr val="lt1"/>
+          </a:fontRef>
+        </p:style>
+        <p:txBody>
+          <a:bodyPr rtlCol="0" anchor="ctr" wrap="square"/>
           <a:lstStyle/>
           <a:p>
             <a:pPr algn="ctr"/>
             <a:r>
-              <a:rPr sz="1600" b="1" i="0">
+              <a:rPr sz="1100" b="1" i="0">
                 <a:solidFill>
                   <a:srgbClr val="FFFFFF"/>
                 </a:solidFill>
                 <a:latin typeface="Calibri"/>
               </a:rPr>
-              <a:t>Frontera justificada</a:t>
-            </a:r>
-          </a:p>
-        </p:txBody>
-      </p:sp>
+              <a:t>API de turnos
+(Container · Node.js)</a:t>
+            </a:r>
+          </a:p>
+        </p:txBody>
+      </p:sp>
+      <p:sp>
+        <p:nvSpPr>
+          <p:cNvPr id="8" name="Rounded Rectangle 7"/>
+          <p:cNvSpPr/>
+          <p:nvPr/>
+        </p:nvSpPr>
+        <p:spPr>
+          <a:xfrm>
+            <a:off x="8595360" y="2011680"/>
+            <a:ext cx="2377440" cy="1097280"/>
+          </a:xfrm>
+          <a:prstGeom prst="roundRect">
+            <a:avLst>
+              <a:gd name="adj" fmla="val 12000"/>
+            </a:avLst>
+          </a:prstGeom>
+          <a:solidFill>
+            <a:srgbClr val="269CCB"/>
+          </a:solidFill>
+          <a:ln>
+            <a:noFill/>
+          </a:ln>
+        </p:spPr>
+        <p:style>
+          <a:lnRef idx="1">
+            <a:schemeClr val="accent1"/>
+          </a:lnRef>
+          <a:fillRef idx="3">
+            <a:schemeClr val="accent1"/>
+          </a:fillRef>
+          <a:effectRef idx="2">
+            <a:schemeClr val="accent1"/>
+          </a:effectRef>
+          <a:fontRef idx="minor">
+            <a:schemeClr val="lt1"/>
+          </a:fontRef>
+        </p:style>
+        <p:txBody>
+          <a:bodyPr rtlCol="0" anchor="ctr" wrap="square"/>
+          <a:lstStyle/>
+          <a:p>
+            <a:pPr algn="ctr"/>
+            <a:r>
+              <a:rPr sz="1100" b="1" i="0">
+                <a:solidFill>
+                  <a:srgbClr val="FFFFFF"/>
+                </a:solidFill>
+                <a:latin typeface="Calibri"/>
+              </a:rPr>
+              <a:t>Base de turnos
+(ContainerDb · PostgreSQL)</a:t>
+            </a:r>
+          </a:p>
+        </p:txBody>
+      </p:sp>
+      <p:sp>
+        <p:nvSpPr>
+          <p:cNvPr id="9" name="Rounded Rectangle 8"/>
+          <p:cNvSpPr/>
+          <p:nvPr/>
+        </p:nvSpPr>
+        <p:spPr>
+          <a:xfrm>
+            <a:off x="822960" y="3931920"/>
+            <a:ext cx="2377440" cy="914400"/>
+          </a:xfrm>
+          <a:prstGeom prst="roundRect">
+            <a:avLst>
+              <a:gd name="adj" fmla="val 12000"/>
+            </a:avLst>
+          </a:prstGeom>
+          <a:solidFill>
+            <a:srgbClr val="FFD000"/>
+          </a:solidFill>
+          <a:ln>
+            <a:noFill/>
+          </a:ln>
+        </p:spPr>
+        <p:style>
+          <a:lnRef idx="1">
+            <a:schemeClr val="accent1"/>
+          </a:lnRef>
+          <a:fillRef idx="3">
+            <a:schemeClr val="accent1"/>
+          </a:fillRef>
+          <a:effectRef idx="2">
+            <a:schemeClr val="accent1"/>
+          </a:effectRef>
+          <a:fontRef idx="minor">
+            <a:schemeClr val="lt1"/>
+          </a:fontRef>
+        </p:style>
+        <p:txBody>
+          <a:bodyPr rtlCol="0" anchor="ctr" wrap="square"/>
+          <a:lstStyle/>
+          <a:p>
+            <a:pPr algn="ctr"/>
+            <a:r>
+              <a:rPr sz="1300" b="1" i="0">
+                <a:solidFill>
+                  <a:srgbClr val="095292"/>
+                </a:solidFill>
+                <a:latin typeface="Calibri"/>
+              </a:rPr>
+              <a:t>Cliente
+(Person)</a:t>
+            </a:r>
+          </a:p>
+        </p:txBody>
+      </p:sp>
+      <p:sp>
+        <p:nvSpPr>
+          <p:cNvPr id="10" name="Rounded Rectangle 9"/>
+          <p:cNvSpPr/>
+          <p:nvPr/>
+        </p:nvSpPr>
+        <p:spPr>
+          <a:xfrm>
+            <a:off x="4754880" y="3931920"/>
+            <a:ext cx="2377440" cy="914400"/>
+          </a:xfrm>
+          <a:prstGeom prst="roundRect">
+            <a:avLst>
+              <a:gd name="adj" fmla="val 12000"/>
+            </a:avLst>
+          </a:prstGeom>
+          <a:solidFill>
+            <a:srgbClr val="095292"/>
+          </a:solidFill>
+          <a:ln>
+            <a:noFill/>
+          </a:ln>
+        </p:spPr>
+        <p:style>
+          <a:lnRef idx="1">
+            <a:schemeClr val="accent1"/>
+          </a:lnRef>
+          <a:fillRef idx="3">
+            <a:schemeClr val="accent1"/>
+          </a:fillRef>
+          <a:effectRef idx="2">
+            <a:schemeClr val="accent1"/>
+          </a:effectRef>
+          <a:fontRef idx="minor">
+            <a:schemeClr val="lt1"/>
+          </a:fontRef>
+        </p:style>
+        <p:txBody>
+          <a:bodyPr rtlCol="0" anchor="ctr" wrap="square"/>
+          <a:lstStyle/>
+          <a:p>
+            <a:pPr algn="ctr"/>
+            <a:r>
+              <a:rPr sz="1100" b="1" i="0">
+                <a:solidFill>
+                  <a:srgbClr val="FFFFFF"/>
+                </a:solidFill>
+                <a:latin typeface="Calibri"/>
+              </a:rPr>
+              <a:t>Worker de avisos
+(Container · cola)</a:t>
+            </a:r>
+          </a:p>
+        </p:txBody>
+      </p:sp>
+      <p:cxnSp>
+        <p:nvCxnSpPr>
+          <p:cNvPr id="11" name="Connector 10"/>
+          <p:cNvCxnSpPr/>
+          <p:nvPr/>
+        </p:nvCxnSpPr>
+        <p:spPr>
+          <a:xfrm flipV="1">
+            <a:off x="2011680" y="3108960"/>
+            <a:ext cx="0" cy="822960"/>
+          </a:xfrm>
+          <a:prstGeom prst="line">
+            <a:avLst/>
+          </a:prstGeom>
+          <a:ln w="22225">
+            <a:solidFill>
+              <a:srgbClr val="666666"/>
+            </a:solidFill>
+            <a:tailEnd type="triangle" w="med" len="med"/>
+          </a:ln>
+        </p:spPr>
+        <p:style>
+          <a:lnRef idx="2">
+            <a:schemeClr val="accent1"/>
+          </a:lnRef>
+          <a:fillRef idx="0">
+            <a:schemeClr val="accent1"/>
+          </a:fillRef>
+          <a:effectRef idx="1">
+            <a:schemeClr val="accent1"/>
+          </a:effectRef>
+          <a:fontRef idx="minor">
+            <a:schemeClr val="tx1"/>
+          </a:fontRef>
+        </p:style>
+      </p:cxnSp>
       <p:sp>
         <p:nvSpPr>
           <p:cNvPr id="12" name="TextBox 11"/>
@@ -9443,8 +10960,8 @@
         </p:nvSpPr>
         <p:spPr>
           <a:xfrm>
-            <a:off x="6420459" y="1901952"/>
-            <a:ext cx="5158587" cy="4498848"/>
+            <a:off x="2121408" y="3319272"/>
+            <a:ext cx="1645920" cy="320040"/>
           </a:xfrm>
           <a:prstGeom prst="rect">
             <a:avLst/>
@@ -9457,74 +10974,269 @@
           </a:bodyPr>
           <a:lstStyle/>
           <a:p>
-            <a:pPr>
-              <a:spcAft>
-                <a:spcPts val="800"/>
-              </a:spcAft>
-            </a:pPr>
-            <a:r>
-              <a:rPr sz="1500" b="0" i="0">
-                <a:solidFill>
-                  <a:srgbClr val="333333"/>
-                </a:solidFill>
-                <a:latin typeface="Calibri"/>
-              </a:rPr>
-              <a:t>–   2-5 contenedores logicos, cada uno con su razon</a:t>
-            </a:r>
-          </a:p>
-          <a:p>
-            <a:pPr>
-              <a:spcAft>
-                <a:spcPts val="800"/>
-              </a:spcAft>
-            </a:pPr>
-            <a:r>
-              <a:rPr sz="1500" b="0" i="0">
-                <a:solidFill>
-                  <a:srgbClr val="333333"/>
-                </a:solidFill>
-                <a:latin typeface="Calibri"/>
-              </a:rPr>
-              <a:t>–   Frontera = responsabilidad de negocio</a:t>
-            </a:r>
-          </a:p>
-          <a:p>
-            <a:pPr>
-              <a:spcAft>
-                <a:spcPts val="800"/>
-              </a:spcAft>
-            </a:pPr>
-            <a:r>
-              <a:rPr sz="1500" b="0" i="0">
-                <a:solidFill>
-                  <a:srgbClr val="333333"/>
-                </a:solidFill>
-                <a:latin typeface="Calibri"/>
-              </a:rPr>
-              <a:t>–   Cada flecha: protocolo + verbo (HTTP/JSON, 'reserva')</a:t>
-            </a:r>
-          </a:p>
-          <a:p>
-            <a:pPr>
-              <a:spcAft>
-                <a:spcPts val="800"/>
-              </a:spcAft>
-            </a:pPr>
-            <a:r>
-              <a:rPr sz="1500" b="0" i="0">
-                <a:solidFill>
-                  <a:srgbClr val="333333"/>
-                </a:solidFill>
-                <a:latin typeface="Calibri"/>
-              </a:rPr>
-              <a:t>–   Se explica en 60 s sin leer notas</a:t>
-            </a:r>
-          </a:p>
-        </p:txBody>
-      </p:sp>
-      <p:sp>
-        <p:nvSpPr>
-          <p:cNvPr id="13" name="TextBox 12"/>
+            <a:pPr algn="l"/>
+            <a:r>
+              <a:rPr sz="1000" b="0" i="1">
+                <a:solidFill>
+                  <a:srgbClr val="666666"/>
+                </a:solidFill>
+                <a:latin typeface="Calibri"/>
+              </a:rPr>
+              <a:t>usa · HTTPS</a:t>
+            </a:r>
+          </a:p>
+        </p:txBody>
+      </p:sp>
+      <p:cxnSp>
+        <p:nvCxnSpPr>
+          <p:cNvPr id="13" name="Connector 12"/>
+          <p:cNvCxnSpPr/>
+          <p:nvPr/>
+        </p:nvCxnSpPr>
+        <p:spPr>
+          <a:xfrm>
+            <a:off x="3200400" y="2560320"/>
+            <a:ext cx="1554480" cy="0"/>
+          </a:xfrm>
+          <a:prstGeom prst="line">
+            <a:avLst/>
+          </a:prstGeom>
+          <a:ln w="22225">
+            <a:solidFill>
+              <a:srgbClr val="666666"/>
+            </a:solidFill>
+            <a:tailEnd type="triangle" w="med" len="med"/>
+          </a:ln>
+        </p:spPr>
+        <p:style>
+          <a:lnRef idx="2">
+            <a:schemeClr val="accent1"/>
+          </a:lnRef>
+          <a:fillRef idx="0">
+            <a:schemeClr val="accent1"/>
+          </a:fillRef>
+          <a:effectRef idx="1">
+            <a:schemeClr val="accent1"/>
+          </a:effectRef>
+          <a:fontRef idx="minor">
+            <a:schemeClr val="tx1"/>
+          </a:fontRef>
+        </p:style>
+      </p:cxnSp>
+      <p:sp>
+        <p:nvSpPr>
+          <p:cNvPr id="14" name="TextBox 13"/>
+          <p:cNvSpPr txBox="1"/>
+          <p:nvPr/>
+        </p:nvSpPr>
+        <p:spPr>
+          <a:xfrm>
+            <a:off x="3154679" y="2359152"/>
+            <a:ext cx="1645920" cy="320040"/>
+          </a:xfrm>
+          <a:prstGeom prst="rect">
+            <a:avLst/>
+          </a:prstGeom>
+          <a:noFill/>
+        </p:spPr>
+        <p:txBody>
+          <a:bodyPr wrap="square">
+            <a:spAutoFit/>
+          </a:bodyPr>
+          <a:lstStyle/>
+          <a:p>
+            <a:pPr algn="ctr"/>
+            <a:r>
+              <a:rPr sz="1000" b="0" i="1">
+                <a:solidFill>
+                  <a:srgbClr val="666666"/>
+                </a:solidFill>
+                <a:latin typeface="Calibri"/>
+              </a:rPr>
+              <a:t>HTTPS/JSON</a:t>
+            </a:r>
+          </a:p>
+        </p:txBody>
+      </p:sp>
+      <p:cxnSp>
+        <p:nvCxnSpPr>
+          <p:cNvPr id="15" name="Connector 14"/>
+          <p:cNvCxnSpPr/>
+          <p:nvPr/>
+        </p:nvCxnSpPr>
+        <p:spPr>
+          <a:xfrm>
+            <a:off x="7132320" y="2560320"/>
+            <a:ext cx="1463040" cy="0"/>
+          </a:xfrm>
+          <a:prstGeom prst="line">
+            <a:avLst/>
+          </a:prstGeom>
+          <a:ln w="22225">
+            <a:solidFill>
+              <a:srgbClr val="666666"/>
+            </a:solidFill>
+            <a:tailEnd type="triangle" w="med" len="med"/>
+          </a:ln>
+        </p:spPr>
+        <p:style>
+          <a:lnRef idx="2">
+            <a:schemeClr val="accent1"/>
+          </a:lnRef>
+          <a:fillRef idx="0">
+            <a:schemeClr val="accent1"/>
+          </a:fillRef>
+          <a:effectRef idx="1">
+            <a:schemeClr val="accent1"/>
+          </a:effectRef>
+          <a:fontRef idx="minor">
+            <a:schemeClr val="tx1"/>
+          </a:fontRef>
+        </p:style>
+      </p:cxnSp>
+      <p:sp>
+        <p:nvSpPr>
+          <p:cNvPr id="16" name="TextBox 15"/>
+          <p:cNvSpPr txBox="1"/>
+          <p:nvPr/>
+        </p:nvSpPr>
+        <p:spPr>
+          <a:xfrm>
+            <a:off x="7040880" y="2359152"/>
+            <a:ext cx="1645920" cy="320040"/>
+          </a:xfrm>
+          <a:prstGeom prst="rect">
+            <a:avLst/>
+          </a:prstGeom>
+          <a:noFill/>
+        </p:spPr>
+        <p:txBody>
+          <a:bodyPr wrap="square">
+            <a:spAutoFit/>
+          </a:bodyPr>
+          <a:lstStyle/>
+          <a:p>
+            <a:pPr algn="ctr"/>
+            <a:r>
+              <a:rPr sz="1000" b="0" i="1">
+                <a:solidFill>
+                  <a:srgbClr val="666666"/>
+                </a:solidFill>
+                <a:latin typeface="Calibri"/>
+              </a:rPr>
+              <a:t>TCP/SQL</a:t>
+            </a:r>
+          </a:p>
+        </p:txBody>
+      </p:sp>
+      <p:cxnSp>
+        <p:nvCxnSpPr>
+          <p:cNvPr id="17" name="Connector 16"/>
+          <p:cNvCxnSpPr/>
+          <p:nvPr/>
+        </p:nvCxnSpPr>
+        <p:spPr>
+          <a:xfrm>
+            <a:off x="5943600" y="3108960"/>
+            <a:ext cx="0" cy="822960"/>
+          </a:xfrm>
+          <a:prstGeom prst="line">
+            <a:avLst/>
+          </a:prstGeom>
+          <a:ln w="22225">
+            <a:solidFill>
+              <a:srgbClr val="666666"/>
+            </a:solidFill>
+            <a:tailEnd type="triangle" w="med" len="med"/>
+          </a:ln>
+        </p:spPr>
+        <p:style>
+          <a:lnRef idx="2">
+            <a:schemeClr val="accent1"/>
+          </a:lnRef>
+          <a:fillRef idx="0">
+            <a:schemeClr val="accent1"/>
+          </a:fillRef>
+          <a:effectRef idx="1">
+            <a:schemeClr val="accent1"/>
+          </a:effectRef>
+          <a:fontRef idx="minor">
+            <a:schemeClr val="tx1"/>
+          </a:fontRef>
+        </p:style>
+      </p:cxnSp>
+      <p:sp>
+        <p:nvSpPr>
+          <p:cNvPr id="18" name="TextBox 17"/>
+          <p:cNvSpPr txBox="1"/>
+          <p:nvPr/>
+        </p:nvSpPr>
+        <p:spPr>
+          <a:xfrm>
+            <a:off x="6053328" y="3319272"/>
+            <a:ext cx="1645920" cy="320040"/>
+          </a:xfrm>
+          <a:prstGeom prst="rect">
+            <a:avLst/>
+          </a:prstGeom>
+          <a:noFill/>
+        </p:spPr>
+        <p:txBody>
+          <a:bodyPr wrap="square">
+            <a:spAutoFit/>
+          </a:bodyPr>
+          <a:lstStyle/>
+          <a:p>
+            <a:pPr algn="l"/>
+            <a:r>
+              <a:rPr sz="1000" b="0" i="1">
+                <a:solidFill>
+                  <a:srgbClr val="666666"/>
+                </a:solidFill>
+                <a:latin typeface="Calibri"/>
+              </a:rPr>
+              <a:t>evento/cola (AMQP)</a:t>
+            </a:r>
+          </a:p>
+        </p:txBody>
+      </p:sp>
+      <p:sp>
+        <p:nvSpPr>
+          <p:cNvPr id="19" name="TextBox 18"/>
+          <p:cNvSpPr txBox="1"/>
+          <p:nvPr/>
+        </p:nvSpPr>
+        <p:spPr>
+          <a:xfrm>
+            <a:off x="457200" y="6263640"/>
+            <a:ext cx="11277295" cy="411480"/>
+          </a:xfrm>
+          <a:prstGeom prst="rect">
+            <a:avLst/>
+          </a:prstGeom>
+          <a:noFill/>
+        </p:spPr>
+        <p:txBody>
+          <a:bodyPr wrap="square">
+            <a:spAutoFit/>
+          </a:bodyPr>
+          <a:lstStyle/>
+          <a:p>
+            <a:r>
+              <a:rPr sz="1100" b="0" i="1">
+                <a:solidFill>
+                  <a:srgbClr val="666666"/>
+                </a:solidFill>
+                <a:latin typeface="Calibri"/>
+              </a:rPr>
+              <a:t>Lo que guarda datos va como ContainerDb, no como un Container más. La cuarta caja (el worker) existe porque el correo tarda: sin esa razón, no va. Y estos nombres deben reaparecer igual en el Deployment (Clase 7).</a:t>
+            </a:r>
+          </a:p>
+        </p:txBody>
+      </p:sp>
+      <p:sp>
+        <p:nvSpPr>
+          <p:cNvPr id="20" name="TextBox 19"/>
           <p:cNvSpPr txBox="1"/>
           <p:nvPr/>
         </p:nvSpPr>

--- a/Arquitectura de Sistemas Computacionales/Clases/Clase 4 - Microservicios y arquitecturas distribuidas/Presentacion.pptx
+++ b/Arquitectura de Sistemas Computacionales/Clases/Clase 4 - Microservicios y arquitecturas distribuidas/Presentacion.pptx
@@ -6738,7 +6738,7 @@
               </a:spcAft>
             </a:pPr>
             <a:r>
-              <a:rPr sz="1600" b="1" i="0">
+              <a:rPr sz="2000" b="1" i="0">
                 <a:solidFill>
                   <a:srgbClr val="333333"/>
                 </a:solidFill>
@@ -6747,7 +6747,7 @@
               <a:t>1.</a:t>
             </a:r>
             <a:r>
-              <a:rPr sz="1600" b="0" i="0">
+              <a:rPr sz="2000" b="0" i="0">
                 <a:solidFill>
                   <a:srgbClr val="333333"/>
                 </a:solidFill>
@@ -6763,7 +6763,7 @@
               </a:spcAft>
             </a:pPr>
             <a:r>
-              <a:rPr sz="1600" b="0" i="0">
+              <a:rPr sz="2000" b="0" i="0">
                 <a:solidFill>
                   <a:srgbClr val="333333"/>
                 </a:solidFill>
@@ -6772,7 +6772,7 @@
               <a:t>–   </a:t>
             </a:r>
             <a:r>
-              <a:rPr sz="1600" b="1" i="0">
+              <a:rPr sz="2000" b="1" i="0">
                 <a:solidFill>
                   <a:srgbClr val="333333"/>
                 </a:solidFill>
@@ -6781,7 +6781,7 @@
               <a:t>2.</a:t>
             </a:r>
             <a:r>
-              <a:rPr sz="1600" b="0" i="0">
+              <a:rPr sz="2000" b="0" i="0">
                 <a:solidFill>
                   <a:srgbClr val="333333"/>
                 </a:solidFill>
@@ -6797,7 +6797,7 @@
               </a:spcAft>
             </a:pPr>
             <a:r>
-              <a:rPr sz="1600" b="0" i="0">
+              <a:rPr sz="2000" b="0" i="0">
                 <a:solidFill>
                   <a:srgbClr val="333333"/>
                 </a:solidFill>
@@ -6806,7 +6806,7 @@
               <a:t>–   </a:t>
             </a:r>
             <a:r>
-              <a:rPr sz="1600" b="1" i="0">
+              <a:rPr sz="2000" b="1" i="0">
                 <a:solidFill>
                   <a:srgbClr val="333333"/>
                 </a:solidFill>
@@ -6815,7 +6815,7 @@
               <a:t>3.</a:t>
             </a:r>
             <a:r>
-              <a:rPr sz="1600" b="0" i="0">
+              <a:rPr sz="2000" b="0" i="0">
                 <a:solidFill>
                   <a:srgbClr val="333333"/>
                 </a:solidFill>
@@ -6831,7 +6831,7 @@
               </a:spcAft>
             </a:pPr>
             <a:r>
-              <a:rPr sz="1600" b="0" i="0">
+              <a:rPr sz="2000" b="0" i="0">
                 <a:solidFill>
                   <a:srgbClr val="333333"/>
                 </a:solidFill>
@@ -6840,7 +6840,7 @@
               <a:t>–   </a:t>
             </a:r>
             <a:r>
-              <a:rPr sz="1600" b="1" i="0">
+              <a:rPr sz="2000" b="1" i="0">
                 <a:solidFill>
                   <a:srgbClr val="333333"/>
                 </a:solidFill>
@@ -6849,7 +6849,7 @@
               <a:t>4.</a:t>
             </a:r>
             <a:r>
-              <a:rPr sz="1600" b="0" i="0">
+              <a:rPr sz="2000" b="0" i="0">
                 <a:solidFill>
                   <a:srgbClr val="333333"/>
                 </a:solidFill>
@@ -7896,7 +7896,7 @@
               </a:spcAft>
             </a:pPr>
             <a:r>
-              <a:rPr sz="1600" b="0" i="0">
+              <a:rPr sz="2000" b="0" i="0">
                 <a:solidFill>
                   <a:srgbClr val="333333"/>
                 </a:solidFill>
@@ -7905,7 +7905,7 @@
               <a:t>–   </a:t>
             </a:r>
             <a:r>
-              <a:rPr sz="1600" b="1" i="0">
+              <a:rPr sz="2000" b="1" i="0">
                 <a:solidFill>
                   <a:srgbClr val="333333"/>
                 </a:solidFill>
@@ -7914,7 +7914,7 @@
               <a:t>0–10</a:t>
             </a:r>
             <a:r>
-              <a:rPr sz="1600" b="0" i="0">
+              <a:rPr sz="2000" b="0" i="0">
                 <a:solidFill>
                   <a:srgbClr val="333333"/>
                 </a:solidFill>
@@ -7930,7 +7930,7 @@
               </a:spcAft>
             </a:pPr>
             <a:r>
-              <a:rPr sz="1600" b="1" i="0">
+              <a:rPr sz="2000" b="1" i="0">
                 <a:solidFill>
                   <a:srgbClr val="333333"/>
                 </a:solidFill>
@@ -7939,7 +7939,7 @@
               <a:t>10–40</a:t>
             </a:r>
             <a:r>
-              <a:rPr sz="1600" b="0" i="0">
+              <a:rPr sz="2000" b="0" i="0">
                 <a:solidFill>
                   <a:srgbClr val="333333"/>
                 </a:solidFill>
@@ -7955,7 +7955,7 @@
               </a:spcAft>
             </a:pPr>
             <a:r>
-              <a:rPr sz="1600" b="0" i="0">
+              <a:rPr sz="2000" b="0" i="0">
                 <a:solidFill>
                   <a:srgbClr val="333333"/>
                 </a:solidFill>
@@ -7964,7 +7964,7 @@
               <a:t>–   </a:t>
             </a:r>
             <a:r>
-              <a:rPr sz="1600" b="1" i="0">
+              <a:rPr sz="2000" b="1" i="0">
                 <a:solidFill>
                   <a:srgbClr val="333333"/>
                 </a:solidFill>
@@ -7973,7 +7973,7 @@
               <a:t>40–100</a:t>
             </a:r>
             <a:r>
-              <a:rPr sz="1600" b="0" i="0">
+              <a:rPr sz="2000" b="0" i="0">
                 <a:solidFill>
                   <a:srgbClr val="333333"/>
                 </a:solidFill>
@@ -7989,7 +7989,7 @@
               </a:spcAft>
             </a:pPr>
             <a:r>
-              <a:rPr sz="1600" b="1" i="0">
+              <a:rPr sz="2000" b="1" i="0">
                 <a:solidFill>
                   <a:srgbClr val="333333"/>
                 </a:solidFill>
@@ -7998,7 +7998,7 @@
               <a:t>100–115</a:t>
             </a:r>
             <a:r>
-              <a:rPr sz="1600" b="0" i="0">
+              <a:rPr sz="2000" b="0" i="0">
                 <a:solidFill>
                   <a:srgbClr val="333333"/>
                 </a:solidFill>
@@ -8014,7 +8014,7 @@
               </a:spcAft>
             </a:pPr>
             <a:r>
-              <a:rPr sz="1600" b="1" i="0">
+              <a:rPr sz="2000" b="1" i="0">
                 <a:solidFill>
                   <a:srgbClr val="333333"/>
                 </a:solidFill>
@@ -8023,7 +8023,7 @@
               <a:t>115–120</a:t>
             </a:r>
             <a:r>
-              <a:rPr sz="1600" b="0" i="0">
+              <a:rPr sz="2000" b="0" i="0">
                 <a:solidFill>
                   <a:srgbClr val="333333"/>
                 </a:solidFill>
@@ -8243,7 +8243,7 @@
               </a:spcAft>
             </a:pPr>
             <a:r>
-              <a:rPr sz="1600" b="0" i="0">
+              <a:rPr sz="2000" b="0" i="0">
                 <a:solidFill>
                   <a:srgbClr val="333333"/>
                 </a:solidFill>
@@ -8259,7 +8259,7 @@
               </a:spcAft>
             </a:pPr>
             <a:r>
-              <a:rPr sz="1600" b="0" i="0">
+              <a:rPr sz="2000" b="0" i="0">
                 <a:solidFill>
                   <a:srgbClr val="333333"/>
                 </a:solidFill>
@@ -8268,7 +8268,7 @@
               <a:t>–   Modelar CloudLite en </a:t>
             </a:r>
             <a:r>
-              <a:rPr sz="1600" b="1" i="0">
+              <a:rPr sz="2000" b="1" i="0">
                 <a:solidFill>
                   <a:srgbClr val="333333"/>
                 </a:solidFill>
@@ -8277,7 +8277,7 @@
               <a:t>C4 Container</a:t>
             </a:r>
             <a:r>
-              <a:rPr sz="1600" b="0" i="0">
+              <a:rPr sz="2000" b="0" i="0">
                 <a:solidFill>
                   <a:srgbClr val="333333"/>
                 </a:solidFill>
@@ -8293,7 +8293,7 @@
               </a:spcAft>
             </a:pPr>
             <a:r>
-              <a:rPr sz="1600" b="0" i="0">
+              <a:rPr sz="2000" b="0" i="0">
                 <a:solidFill>
                   <a:srgbClr val="333333"/>
                 </a:solidFill>
@@ -8302,7 +8302,7 @@
               <a:t>–   Definir 3 contratos con verbo, ruta y </a:t>
             </a:r>
             <a:r>
-              <a:rPr sz="1600" b="1" i="0">
+              <a:rPr sz="2000" b="1" i="0">
                 <a:solidFill>
                   <a:srgbClr val="333333"/>
                 </a:solidFill>
@@ -8311,7 +8311,7 @@
               <a:t>error de negocio</a:t>
             </a:r>
             <a:r>
-              <a:rPr sz="1600" b="0" i="0">
+              <a:rPr sz="2000" b="0" i="0">
                 <a:solidFill>
                   <a:srgbClr val="333333"/>
                 </a:solidFill>
@@ -8320,7 +8320,7 @@
               <a:t>, y nombrar 3 </a:t>
             </a:r>
             <a:r>
-              <a:rPr sz="1600" b="1" i="0">
+              <a:rPr sz="2000" b="1" i="0">
                 <a:solidFill>
                   <a:srgbClr val="333333"/>
                 </a:solidFill>
@@ -8329,7 +8329,7 @@
               <a:t>riesgos de distribución</a:t>
             </a:r>
             <a:r>
-              <a:rPr sz="1600" b="0" i="0">
+              <a:rPr sz="2000" b="0" i="0">
                 <a:solidFill>
                   <a:srgbClr val="333333"/>
                 </a:solidFill>
@@ -8549,7 +8549,7 @@
               </a:spcAft>
             </a:pPr>
             <a:r>
-              <a:rPr sz="1600" b="0" i="0">
+              <a:rPr sz="2000" b="0" i="0">
                 <a:solidFill>
                   <a:srgbClr val="333333"/>
                 </a:solidFill>
@@ -8558,7 +8558,7 @@
               <a:t>–   </a:t>
             </a:r>
             <a:r>
-              <a:rPr sz="1600" b="1" i="0">
+              <a:rPr sz="2000" b="1" i="0">
                 <a:solidFill>
                   <a:srgbClr val="333333"/>
                 </a:solidFill>
@@ -8567,7 +8567,7 @@
               <a:t>Entregable:</a:t>
             </a:r>
             <a:r>
-              <a:rPr sz="1600" b="0" i="0">
+              <a:rPr sz="2000" b="0" i="0">
                 <a:solidFill>
                   <a:srgbClr val="333333"/>
                 </a:solidFill>
@@ -8583,7 +8583,7 @@
               </a:spcAft>
             </a:pPr>
             <a:r>
-              <a:rPr sz="1600" b="0" i="0">
+              <a:rPr sz="2000" b="0" i="0">
                 <a:solidFill>
                   <a:srgbClr val="333333"/>
                 </a:solidFill>
@@ -8592,7 +8592,7 @@
               <a:t>–   Herramienta: </a:t>
             </a:r>
             <a:r>
-              <a:rPr sz="1600" b="1" i="0">
+              <a:rPr sz="2000" b="1" i="0">
                 <a:solidFill>
                   <a:srgbClr val="333333"/>
                 </a:solidFill>
@@ -8608,7 +8608,7 @@
               </a:spcAft>
             </a:pPr>
             <a:r>
-              <a:rPr sz="1600" b="0" i="0">
+              <a:rPr sz="2000" b="0" i="0">
                 <a:solidFill>
                   <a:srgbClr val="333333"/>
                 </a:solidFill>
@@ -8617,7 +8617,7 @@
               <a:t>–   Todo lo que construyan hoy entra al </a:t>
             </a:r>
             <a:r>
-              <a:rPr sz="1600" b="1" i="0">
+              <a:rPr sz="2000" b="1" i="0">
                 <a:solidFill>
                   <a:srgbClr val="333333"/>
                 </a:solidFill>
@@ -8626,7 +8626,7 @@
               <a:t>informe/repo del PI</a:t>
             </a:r>
             <a:r>
-              <a:rPr sz="1600" b="0" i="0">
+              <a:rPr sz="2000" b="0" i="0">
                 <a:solidFill>
                   <a:srgbClr val="333333"/>
                 </a:solidFill>
@@ -8642,7 +8642,7 @@
               </a:spcAft>
             </a:pPr>
             <a:r>
-              <a:rPr sz="1600" b="0" i="0">
+              <a:rPr sz="2000" b="0" i="0">
                 <a:solidFill>
                   <a:srgbClr val="333333"/>
                 </a:solidFill>
@@ -8862,7 +8862,7 @@
               </a:spcAft>
             </a:pPr>
             <a:r>
-              <a:rPr sz="1600" b="0" i="0">
+              <a:rPr sz="2000" b="0" i="0">
                 <a:solidFill>
                   <a:srgbClr val="333333"/>
                 </a:solidFill>
@@ -8878,7 +8878,7 @@
               </a:spcAft>
             </a:pPr>
             <a:r>
-              <a:rPr sz="1600" b="0" i="0">
+              <a:rPr sz="2000" b="0" i="0">
                 <a:solidFill>
                   <a:srgbClr val="333333"/>
                 </a:solidFill>
@@ -8887,7 +8887,7 @@
               <a:t>–   Microservicio: frontera de </a:t>
             </a:r>
             <a:r>
-              <a:rPr sz="1600" b="1" i="0">
+              <a:rPr sz="2000" b="1" i="0">
                 <a:solidFill>
                   <a:srgbClr val="333333"/>
                 </a:solidFill>
@@ -8896,7 +8896,7 @@
               <a:t>despliegue</a:t>
             </a:r>
             <a:r>
-              <a:rPr sz="1600" b="0" i="0">
+              <a:rPr sz="2000" b="0" i="0">
                 <a:solidFill>
                   <a:srgbClr val="333333"/>
                 </a:solidFill>
@@ -8912,7 +8912,7 @@
               </a:spcAft>
             </a:pPr>
             <a:r>
-              <a:rPr sz="1600" b="0" i="0">
+              <a:rPr sz="2000" b="0" i="0">
                 <a:solidFill>
                   <a:srgbClr val="333333"/>
                 </a:solidFill>
@@ -8928,7 +8928,7 @@
               </a:spcAft>
             </a:pPr>
             <a:r>
-              <a:rPr sz="1600" b="0" i="0">
+              <a:rPr sz="2000" b="0" i="0">
                 <a:solidFill>
                   <a:srgbClr val="333333"/>
                 </a:solidFill>
@@ -8937,7 +8937,7 @@
               <a:t>–   La decisión se escribe en </a:t>
             </a:r>
             <a:r>
-              <a:rPr sz="1600" b="1" i="0">
+              <a:rPr sz="2000" b="1" i="0">
                 <a:solidFill>
                   <a:srgbClr val="333333"/>
                 </a:solidFill>
@@ -8946,7 +8946,7 @@
               <a:t>una sola frase</a:t>
             </a:r>
             <a:r>
-              <a:rPr sz="1600" b="0" i="0">
+              <a:rPr sz="2000" b="0" i="0">
                 <a:solidFill>
                   <a:srgbClr val="333333"/>
                 </a:solidFill>
@@ -8962,7 +8962,7 @@
               </a:spcAft>
             </a:pPr>
             <a:r>
-              <a:rPr sz="1600" b="0" i="0">
+              <a:rPr sz="2000" b="0" i="0">
                 <a:solidFill>
                   <a:srgbClr val="333333"/>
                 </a:solidFill>
@@ -8971,7 +8971,7 @@
               <a:t>–   Se sostiene con </a:t>
             </a:r>
             <a:r>
-              <a:rPr sz="1600" b="1" i="0">
+              <a:rPr sz="2000" b="1" i="0">
                 <a:solidFill>
                   <a:srgbClr val="333333"/>
                 </a:solidFill>
@@ -8980,7 +8980,7 @@
               <a:t>dos</a:t>
             </a:r>
             <a:r>
-              <a:rPr sz="1600" b="0" i="0">
+              <a:rPr sz="2000" b="0" i="0">
                 <a:solidFill>
                   <a:srgbClr val="333333"/>
                 </a:solidFill>
@@ -8996,7 +8996,7 @@
               </a:spcAft>
             </a:pPr>
             <a:r>
-              <a:rPr sz="1600" b="0" i="0">
+              <a:rPr sz="2000" b="0" i="0">
                 <a:solidFill>
                   <a:srgbClr val="333333"/>
                 </a:solidFill>
@@ -9005,7 +9005,7 @@
               <a:t>–   Y con lo que se gana </a:t>
             </a:r>
             <a:r>
-              <a:rPr sz="1600" b="1" i="0">
+              <a:rPr sz="2000" b="1" i="0">
                 <a:solidFill>
                   <a:srgbClr val="333333"/>
                 </a:solidFill>
@@ -9014,7 +9014,7 @@
               <a:t>y</a:t>
             </a:r>
             <a:r>
-              <a:rPr sz="1600" b="0" i="0">
+              <a:rPr sz="2000" b="0" i="0">
                 <a:solidFill>
                   <a:srgbClr val="333333"/>
                 </a:solidFill>
@@ -9234,7 +9234,7 @@
               </a:spcAft>
             </a:pPr>
             <a:r>
-              <a:rPr sz="1600" b="0" i="0">
+              <a:rPr sz="2000" b="0" i="0">
                 <a:solidFill>
                   <a:srgbClr val="333333"/>
                 </a:solidFill>
@@ -9243,7 +9243,7 @@
               <a:t>–   Se abre la ÚNICA caja del Context de la Clase 1: los actores y los externos siguen ahí, </a:t>
             </a:r>
             <a:r>
-              <a:rPr sz="1600" b="1" i="0">
+              <a:rPr sz="2000" b="1" i="0">
                 <a:solidFill>
                   <a:srgbClr val="333333"/>
                 </a:solidFill>
@@ -9252,7 +9252,7 @@
               <a:t>fuera</a:t>
             </a:r>
             <a:r>
-              <a:rPr sz="1600" b="0" i="0">
+              <a:rPr sz="2000" b="0" i="0">
                 <a:solidFill>
                   <a:srgbClr val="333333"/>
                 </a:solidFill>
@@ -9268,7 +9268,7 @@
               </a:spcAft>
             </a:pPr>
             <a:r>
-              <a:rPr sz="1600" b="0" i="0">
+              <a:rPr sz="2000" b="0" i="0">
                 <a:solidFill>
                   <a:srgbClr val="333333"/>
                 </a:solidFill>
@@ -9277,7 +9277,7 @@
               <a:t>–   </a:t>
             </a:r>
             <a:r>
-              <a:rPr sz="1600" b="1" i="0">
+              <a:rPr sz="2000" b="1" i="0">
                 <a:solidFill>
                   <a:srgbClr val="333333"/>
                 </a:solidFill>
@@ -9286,7 +9286,7 @@
               <a:t>Tres datos por caja, obligatorios:</a:t>
             </a:r>
             <a:r>
-              <a:rPr sz="1600" b="0" i="0">
+              <a:rPr sz="2000" b="0" i="0">
                 <a:solidFill>
                   <a:srgbClr val="333333"/>
                 </a:solidFill>
@@ -9302,7 +9302,7 @@
               </a:spcAft>
             </a:pPr>
             <a:r>
-              <a:rPr sz="1600" b="0" i="0">
+              <a:rPr sz="2000" b="0" i="0">
                 <a:solidFill>
                   <a:srgbClr val="333333"/>
                 </a:solidFill>
@@ -9311,7 +9311,7 @@
               <a:t>–   Lo que guarda datos se marca como </a:t>
             </a:r>
             <a:r>
-              <a:rPr sz="1600" b="1" i="0">
+              <a:rPr sz="2000" b="1" i="0">
                 <a:solidFill>
                   <a:srgbClr val="333333"/>
                 </a:solidFill>
@@ -9320,7 +9320,7 @@
               <a:t>almacén</a:t>
             </a:r>
             <a:r>
-              <a:rPr sz="1600" b="0" i="0">
+              <a:rPr sz="2000" b="0" i="0">
                 <a:solidFill>
                   <a:srgbClr val="333333"/>
                 </a:solidFill>
@@ -9336,7 +9336,7 @@
               </a:spcAft>
             </a:pPr>
             <a:r>
-              <a:rPr sz="1600" b="0" i="0">
+              <a:rPr sz="2000" b="0" i="0">
                 <a:solidFill>
                   <a:srgbClr val="333333"/>
                 </a:solidFill>
@@ -9345,7 +9345,7 @@
               <a:t>–   Los nombres son </a:t>
             </a:r>
             <a:r>
-              <a:rPr sz="1600" b="1" i="0">
+              <a:rPr sz="2000" b="1" i="0">
                 <a:solidFill>
                   <a:srgbClr val="333333"/>
                 </a:solidFill>
@@ -9354,7 +9354,7 @@
               <a:t>idénticos</a:t>
             </a:r>
             <a:r>
-              <a:rPr sz="1600" b="0" i="0">
+              <a:rPr sz="2000" b="0" i="0">
                 <a:solidFill>
                   <a:srgbClr val="333333"/>
                 </a:solidFill>
@@ -9370,7 +9370,7 @@
               </a:spcAft>
             </a:pPr>
             <a:r>
-              <a:rPr sz="1600" b="0" i="0">
+              <a:rPr sz="2000" b="0" i="0">
                 <a:solidFill>
                   <a:srgbClr val="333333"/>
                 </a:solidFill>
@@ -9379,7 +9379,7 @@
               <a:t>–   Cada flecha lleva </a:t>
             </a:r>
             <a:r>
-              <a:rPr sz="1600" b="1" i="0">
+              <a:rPr sz="2000" b="1" i="0">
                 <a:solidFill>
                   <a:srgbClr val="333333"/>
                 </a:solidFill>
@@ -9388,7 +9388,7 @@
               <a:t>protocolo Y formato</a:t>
             </a:r>
             <a:r>
-              <a:rPr sz="1600" b="0" i="0">
+              <a:rPr sz="2000" b="0" i="0">
                 <a:solidFill>
                   <a:srgbClr val="333333"/>
                 </a:solidFill>
@@ -9404,7 +9404,7 @@
               </a:spcAft>
             </a:pPr>
             <a:r>
-              <a:rPr sz="1600" b="0" i="0">
+              <a:rPr sz="2000" b="0" i="0">
                 <a:solidFill>
                   <a:srgbClr val="333333"/>
                 </a:solidFill>
@@ -10227,7 +10227,7 @@
               </a:spcAft>
             </a:pPr>
             <a:r>
-              <a:rPr sz="1600" b="0" i="0">
+              <a:rPr sz="2000" b="0" i="0">
                 <a:solidFill>
                   <a:srgbClr val="333333"/>
                 </a:solidFill>
@@ -10243,7 +10243,7 @@
               </a:spcAft>
             </a:pPr>
             <a:r>
-              <a:rPr sz="1600" b="0" i="0">
+              <a:rPr sz="2000" b="0" i="0">
                 <a:solidFill>
                   <a:srgbClr val="333333"/>
                 </a:solidFill>
@@ -10252,7 +10252,7 @@
               <a:t>–   </a:t>
             </a:r>
             <a:r>
-              <a:rPr sz="1600" b="1" i="0">
+              <a:rPr sz="2000" b="1" i="0">
                 <a:solidFill>
                   <a:srgbClr val="333333"/>
                 </a:solidFill>
@@ -10261,7 +10261,7 @@
               <a:t>Riesgo 1 · qué se cae:</a:t>
             </a:r>
             <a:r>
-              <a:rPr sz="1600" b="0" i="0">
+              <a:rPr sz="2000" b="0" i="0">
                 <a:solidFill>
                   <a:srgbClr val="333333"/>
                 </a:solidFill>
@@ -10270,7 +10270,7 @@
               <a:t> nombra </a:t>
             </a:r>
             <a:r>
-              <a:rPr sz="1600" b="1" i="0">
+              <a:rPr sz="2000" b="1" i="0">
                 <a:solidFill>
                   <a:srgbClr val="333333"/>
                 </a:solidFill>
@@ -10279,7 +10279,7 @@
               <a:t>una</a:t>
             </a:r>
             <a:r>
-              <a:rPr sz="1600" b="0" i="0">
+              <a:rPr sz="2000" b="0" i="0">
                 <a:solidFill>
                   <a:srgbClr val="333333"/>
                 </a:solidFill>
@@ -10288,7 +10288,7 @@
               <a:t> caja, y di qué deja de funcionar </a:t>
             </a:r>
             <a:r>
-              <a:rPr sz="1600" b="1" i="0">
+              <a:rPr sz="2000" b="1" i="0">
                 <a:solidFill>
                   <a:srgbClr val="333333"/>
                 </a:solidFill>
@@ -10297,7 +10297,7 @@
               <a:t>y qué sigue funcionando</a:t>
             </a:r>
             <a:r>
-              <a:rPr sz="1600" b="0" i="0">
+              <a:rPr sz="2000" b="0" i="0">
                 <a:solidFill>
                   <a:srgbClr val="333333"/>
                 </a:solidFill>
@@ -10313,7 +10313,7 @@
               </a:spcAft>
             </a:pPr>
             <a:r>
-              <a:rPr sz="1600" b="0" i="0">
+              <a:rPr sz="2000" b="0" i="0">
                 <a:solidFill>
                   <a:srgbClr val="333333"/>
                 </a:solidFill>
@@ -10322,7 +10322,7 @@
               <a:t>–   </a:t>
             </a:r>
             <a:r>
-              <a:rPr sz="1600" b="1" i="0">
+              <a:rPr sz="2000" b="1" i="0">
                 <a:solidFill>
                   <a:srgbClr val="333333"/>
                 </a:solidFill>
@@ -10331,7 +10331,7 @@
               <a:t>Riesgo 2 · cuántos saltos de red</a:t>
             </a:r>
             <a:r>
-              <a:rPr sz="1600" b="0" i="0">
+              <a:rPr sz="2000" b="0" i="0">
                 <a:solidFill>
                   <a:srgbClr val="333333"/>
                 </a:solidFill>
@@ -10347,7 +10347,7 @@
               </a:spcAft>
             </a:pPr>
             <a:r>
-              <a:rPr sz="1600" b="0" i="0">
+              <a:rPr sz="2000" b="0" i="0">
                 <a:solidFill>
                   <a:srgbClr val="333333"/>
                 </a:solidFill>
@@ -10356,7 +10356,7 @@
               <a:t>–   </a:t>
             </a:r>
             <a:r>
-              <a:rPr sz="1600" b="1" i="0">
+              <a:rPr sz="2000" b="1" i="0">
                 <a:solidFill>
                   <a:srgbClr val="333333"/>
                 </a:solidFill>
@@ -10365,7 +10365,7 @@
               <a:t>Riesgo 3 · un dato escrito en dos pasos:</a:t>
             </a:r>
             <a:r>
-              <a:rPr sz="1600" b="0" i="0">
+              <a:rPr sz="2000" b="0" i="0">
                 <a:solidFill>
                   <a:srgbClr val="333333"/>
                 </a:solidFill>
@@ -10381,7 +10381,7 @@
               </a:spcAft>
             </a:pPr>
             <a:r>
-              <a:rPr sz="1600" b="0" i="0">
+              <a:rPr sz="2000" b="0" i="0">
                 <a:solidFill>
                   <a:srgbClr val="333333"/>
                 </a:solidFill>
@@ -10390,7 +10390,7 @@
               <a:t>–   Caja de herramientas para mitigarlos: </a:t>
             </a:r>
             <a:r>
-              <a:rPr sz="1600" b="1" i="0">
+              <a:rPr sz="2000" b="1" i="0">
                 <a:solidFill>
                   <a:srgbClr val="333333"/>
                 </a:solidFill>
@@ -10399,7 +10399,7 @@
               <a:t>timeout · reintento con espera creciente · idempotencia · circuit breaker</a:t>
             </a:r>
             <a:r>
-              <a:rPr sz="1600" b="0" i="0">
+              <a:rPr sz="2000" b="0" i="0">
                 <a:solidFill>
                   <a:srgbClr val="333333"/>
                 </a:solidFill>
@@ -10415,7 +10415,7 @@
               </a:spcAft>
             </a:pPr>
             <a:r>
-              <a:rPr sz="1600" b="0" i="0">
+              <a:rPr sz="2000" b="0" i="0">
                 <a:solidFill>
                   <a:srgbClr val="333333"/>
                 </a:solidFill>

--- a/Arquitectura de Sistemas Computacionales/Clases/Clase 4 - Microservicios y arquitecturas distribuidas/Presentacion.pptx
+++ b/Arquitectura de Sistemas Computacionales/Clases/Clase 4 - Microservicios y arquitecturas distribuidas/Presentacion.pptx
@@ -4176,7 +4176,7 @@
                 </a:solidFill>
                 <a:latin typeface="Calibri"/>
               </a:rPr>
-              <a:t>C4Container en Mermaid: el molde que ExamLab renderiza</a:t>
+              <a:t>C4Container en Mermaid: el molde que la plataforma del curso renderiza</a:t>
             </a:r>
           </a:p>
         </p:txBody>
@@ -5609,7 +5609,7 @@
                 </a:solidFill>
                 <a:latin typeface="Calibri"/>
               </a:rPr>
-              <a:t>ExamLab</a:t>
+              <a:t>la plataforma del curso</a:t>
             </a:r>
           </a:p>
           <a:p>
@@ -5806,7 +5806,7 @@
                 </a:solidFill>
                 <a:latin typeface="Calibri"/>
               </a:rPr>
-              <a:t>Del boceto a ExamLab (diagrama)</a:t>
+              <a:t>Del boceto a la plataforma del curso (diagrama)</a:t>
             </a:r>
           </a:p>
         </p:txBody>
@@ -5840,7 +5840,7 @@
                 </a:solidFill>
                 <a:latin typeface="Calibri"/>
               </a:rPr>
-              <a:t>El diagrama se entrega como código Mermaid dentro de ExamLab, no como imagen</a:t>
+              <a:t>El diagrama se entrega como código Mermaid dentro de la plataforma del curso, no como imagen</a:t>
             </a:r>
           </a:p>
         </p:txBody>
@@ -6337,7 +6337,7 @@
                 </a:solidFill>
                 <a:latin typeface="Calibri"/>
               </a:rPr>
-              <a:t>Pega y renderiza en ExamLab</a:t>
+              <a:t>Pega y renderiza en la plataforma del curso</a:t>
             </a:r>
           </a:p>
           <a:p>
@@ -6353,7 +6353,7 @@
                 </a:solidFill>
                 <a:latin typeface="Calibri"/>
               </a:rPr>
-              <a:t>Pega ese codigo en la caja de texto de la pregunta y mira como lo dibuja la plataforma. Si no renderiza, corrige ahi mismo: lo que se califica es el diagrama renderizado dentro de ExamLab.</a:t>
+              <a:t>Pega ese codigo en la caja de texto de la pregunta y mira como lo dibuja la plataforma. Si no renderiza, corrige ahi mismo: lo que se califica es el diagrama renderizado dentro de la plataforma del curso.</a:t>
             </a:r>
           </a:p>
         </p:txBody>
@@ -6855,7 +6855,7 @@
                 </a:solidFill>
                 <a:latin typeface="Calibri"/>
               </a:rPr>
-              <a:t> Paso 4: analice en la pregunta 15 los tres riesgos de distribucion nombrando una caja concreta que se cae, contando los saltos de red de una operacion de punta a punta y nombrando un dato expuesto a inconsistencia; con esto la actividad del Corte 1 queda completa y se entrega en ExamLab antes del domingo 23:59 de esta semana.</a:t>
+              <a:t> Paso 4: analice en la pregunta 15 los tres riesgos de distribucion nombrando una caja concreta que se cae, contando los saltos de red de una operacion de punta a punta y nombrando un dato expuesto a inconsistencia; con esto la actividad del Corte 1 queda completa y se entrega en la plataforma del curso antes del en la fecha que indique el docentede esta semana.</a:t>
             </a:r>
           </a:p>
         </p:txBody>
@@ -7312,7 +7312,7 @@
                 </a:solidFill>
                 <a:latin typeface="Calibri"/>
               </a:rPr>
-              <a:t>Subir evidencias al paquete CloudLite (Drive/repo) y a ExamLab (https://uniaj.examlab.workers.dev/) domingo 23:59.</a:t>
+              <a:t>Subir evidencias al paquete CloudLite (Drive/repo) y a la plataforma del curso en la fecha que indique el docente.</a:t>
             </a:r>
           </a:p>
         </p:txBody>
@@ -8029,7 +8029,7 @@
                 </a:solidFill>
                 <a:latin typeface="Calibri"/>
               </a:rPr>
-              <a:t> Cierre: criterio de éxito + plazo domingo 23:59.</a:t>
+              <a:t> Cierre: criterio de éxito + plazo en la fecha que indique el docente.</a:t>
             </a:r>
           </a:p>
         </p:txBody>
@@ -8598,7 +8598,7 @@
                 </a:solidFill>
                 <a:latin typeface="Calibri"/>
               </a:rPr>
-              <a:t>draw.io o Excalidraw para bocetar · Mermaid dentro de ExamLab para entregar</a:t>
+              <a:t>draw.io o Excalidraw para bocetar · Mermaid dentro de la plataforma del curso para entregar</a:t>
             </a:r>
           </a:p>
           <a:p>
@@ -8648,7 +8648,7 @@
                 </a:solidFill>
                 <a:latin typeface="Calibri"/>
               </a:rPr>
-              <a:t>–   Individual por defecto · el docente puede autorizar equipos de 2–3; la entrega en ExamLab siempre es individual.</a:t>
+              <a:t>–   Individual por defecto · el docente puede autorizar equipos de 2–3; la entrega en la plataforma del curso siempre es individual.</a:t>
             </a:r>
           </a:p>
         </p:txBody>

--- a/Arquitectura de Sistemas Computacionales/Clases/Clase 4 - Microservicios y arquitecturas distribuidas/Presentacion.pptx
+++ b/Arquitectura de Sistemas Computacionales/Clases/Clase 4 - Microservicios y arquitecturas distribuidas/Presentacion.pptx
@@ -3579,7 +3579,7 @@
                 </a:solidFill>
                 <a:latin typeface="Calibri"/>
               </a:rPr>
-              <a:t>Microservicios de verdad vs microservicios teatro</a:t>
+              <a:t>C4Container en Mermaid: el molde que la plataforma del curso renderiza</a:t>
             </a:r>
           </a:p>
         </p:txBody>
@@ -3593,7 +3593,7 @@
         <p:spPr>
           <a:xfrm>
             <a:off x="457200" y="1261872"/>
-            <a:ext cx="5478627" cy="5093208"/>
+            <a:ext cx="11277295" cy="4773168"/>
           </a:xfrm>
           <a:prstGeom prst="roundRect">
             <a:avLst>
@@ -3601,7 +3601,7 @@
             </a:avLst>
           </a:prstGeom>
           <a:solidFill>
-            <a:srgbClr val="FBE4E4"/>
+            <a:srgbClr val="1E2A38"/>
           </a:solidFill>
           <a:ln>
             <a:noFill/>
@@ -3638,215 +3638,7 @@
         <p:spPr>
           <a:xfrm>
             <a:off x="457200" y="1261872"/>
-            <a:ext cx="5478627" cy="502920"/>
-          </a:xfrm>
-          <a:prstGeom prst="rect">
-            <a:avLst/>
-          </a:prstGeom>
-          <a:solidFill>
-            <a:srgbClr val="A02030"/>
-          </a:solidFill>
-          <a:ln>
-            <a:noFill/>
-          </a:ln>
-        </p:spPr>
-        <p:style>
-          <a:lnRef idx="1">
-            <a:schemeClr val="accent1"/>
-          </a:lnRef>
-          <a:fillRef idx="3">
-            <a:schemeClr val="accent1"/>
-          </a:fillRef>
-          <a:effectRef idx="2">
-            <a:schemeClr val="accent1"/>
-          </a:effectRef>
-          <a:fontRef idx="minor">
-            <a:schemeClr val="lt1"/>
-          </a:fontRef>
-        </p:style>
-        <p:txBody>
-          <a:bodyPr rtlCol="0" anchor="ctr"/>
-          <a:lstStyle/>
-          <a:p>
-            <a:pPr algn="ctr"/>
-          </a:p>
-        </p:txBody>
-      </p:sp>
-      <p:sp>
-        <p:nvSpPr>
-          <p:cNvPr id="7" name="TextBox 6"/>
-          <p:cNvSpPr txBox="1"/>
-          <p:nvPr/>
-        </p:nvSpPr>
-        <p:spPr>
-          <a:xfrm>
-            <a:off x="594360" y="1353312"/>
-            <a:ext cx="5204307" cy="365760"/>
-          </a:xfrm>
-          <a:prstGeom prst="rect">
-            <a:avLst/>
-          </a:prstGeom>
-          <a:noFill/>
-        </p:spPr>
-        <p:txBody>
-          <a:bodyPr wrap="square" anchor="ctr"/>
-          <a:lstStyle/>
-          <a:p>
-            <a:pPr algn="ctr"/>
-            <a:r>
-              <a:rPr sz="1600" b="1" i="0">
-                <a:solidFill>
-                  <a:srgbClr val="FFFFFF"/>
-                </a:solidFill>
-                <a:latin typeface="Calibri"/>
-              </a:rPr>
-              <a:t>Teatro (lo que NO queremos)</a:t>
-            </a:r>
-          </a:p>
-        </p:txBody>
-      </p:sp>
-      <p:sp>
-        <p:nvSpPr>
-          <p:cNvPr id="8" name="TextBox 7"/>
-          <p:cNvSpPr txBox="1"/>
-          <p:nvPr/>
-        </p:nvSpPr>
-        <p:spPr>
-          <a:xfrm>
-            <a:off x="621792" y="1901952"/>
-            <a:ext cx="5158587" cy="4498848"/>
-          </a:xfrm>
-          <a:prstGeom prst="rect">
-            <a:avLst/>
-          </a:prstGeom>
-          <a:noFill/>
-        </p:spPr>
-        <p:txBody>
-          <a:bodyPr wrap="square">
-            <a:spAutoFit/>
-          </a:bodyPr>
-          <a:lstStyle/>
-          <a:p>
-            <a:pPr>
-              <a:spcAft>
-                <a:spcPts val="800"/>
-              </a:spcAft>
-            </a:pPr>
-            <a:r>
-              <a:rPr sz="1500" b="0" i="0">
-                <a:solidFill>
-                  <a:srgbClr val="333333"/>
-                </a:solidFill>
-                <a:latin typeface="Calibri"/>
-              </a:rPr>
-              <a:t>–   12 servicios para un equipo de 3</a:t>
-            </a:r>
-          </a:p>
-          <a:p>
-            <a:pPr>
-              <a:spcAft>
-                <a:spcPts val="800"/>
-              </a:spcAft>
-            </a:pPr>
-            <a:r>
-              <a:rPr sz="1500" b="0" i="0">
-                <a:solidFill>
-                  <a:srgbClr val="333333"/>
-                </a:solidFill>
-                <a:latin typeface="Calibri"/>
-              </a:rPr>
-              <a:t>–   Se separan por capricho tecnico, no por negocio</a:t>
-            </a:r>
-          </a:p>
-          <a:p>
-            <a:pPr>
-              <a:spcAft>
-                <a:spcPts val="800"/>
-              </a:spcAft>
-            </a:pPr>
-            <a:r>
-              <a:rPr sz="1500" b="0" i="0">
-                <a:solidFill>
-                  <a:srgbClr val="333333"/>
-                </a:solidFill>
-                <a:latin typeface="Calibri"/>
-              </a:rPr>
-              <a:t>–   Flechas sin protocolo ni verbo</a:t>
-            </a:r>
-          </a:p>
-          <a:p>
-            <a:pPr>
-              <a:spcAft>
-                <a:spcPts val="800"/>
-              </a:spcAft>
-            </a:pPr>
-            <a:r>
-              <a:rPr sz="1500" b="0" i="0">
-                <a:solidFill>
-                  <a:srgbClr val="333333"/>
-                </a:solidFill>
-                <a:latin typeface="Calibri"/>
-              </a:rPr>
-              <a:t>–   Nadie sabe explicar por que ese corte</a:t>
-            </a:r>
-          </a:p>
-        </p:txBody>
-      </p:sp>
-      <p:sp>
-        <p:nvSpPr>
-          <p:cNvPr id="9" name="Rounded Rectangle 8"/>
-          <p:cNvSpPr/>
-          <p:nvPr/>
-        </p:nvSpPr>
-        <p:spPr>
-          <a:xfrm>
-            <a:off x="6255867" y="1261872"/>
-            <a:ext cx="5478627" cy="5093208"/>
-          </a:xfrm>
-          <a:prstGeom prst="roundRect">
-            <a:avLst>
-              <a:gd name="adj" fmla="val 12000"/>
-            </a:avLst>
-          </a:prstGeom>
-          <a:solidFill>
-            <a:srgbClr val="E8F4FA"/>
-          </a:solidFill>
-          <a:ln>
-            <a:noFill/>
-          </a:ln>
-        </p:spPr>
-        <p:style>
-          <a:lnRef idx="1">
-            <a:schemeClr val="accent1"/>
-          </a:lnRef>
-          <a:fillRef idx="3">
-            <a:schemeClr val="accent1"/>
-          </a:fillRef>
-          <a:effectRef idx="2">
-            <a:schemeClr val="accent1"/>
-          </a:effectRef>
-          <a:fontRef idx="minor">
-            <a:schemeClr val="lt1"/>
-          </a:fontRef>
-        </p:style>
-        <p:txBody>
-          <a:bodyPr rtlCol="0" anchor="ctr"/>
-          <a:lstStyle/>
-          <a:p>
-            <a:pPr algn="ctr"/>
-          </a:p>
-        </p:txBody>
-      </p:sp>
-      <p:sp>
-        <p:nvSpPr>
-          <p:cNvPr id="10" name="Rectangle 9"/>
-          <p:cNvSpPr/>
-          <p:nvPr/>
-        </p:nvSpPr>
-        <p:spPr>
-          <a:xfrm>
-            <a:off x="6255867" y="1261872"/>
-            <a:ext cx="5478627" cy="502920"/>
+            <a:ext cx="11277295" cy="320040"/>
           </a:xfrm>
           <a:prstGeom prst="rect">
             <a:avLst/>
@@ -3882,14 +3674,14 @@
       </p:sp>
       <p:sp>
         <p:nvSpPr>
-          <p:cNvPr id="11" name="TextBox 10"/>
+          <p:cNvPr id="7" name="TextBox 6"/>
           <p:cNvSpPr txBox="1"/>
           <p:nvPr/>
         </p:nvSpPr>
         <p:spPr>
           <a:xfrm>
-            <a:off x="6393027" y="1353312"/>
-            <a:ext cx="5204307" cy="365760"/>
+            <a:off x="685800" y="1307592"/>
+            <a:ext cx="10820095" cy="256032"/>
           </a:xfrm>
           <a:prstGeom prst="rect">
             <a:avLst/>
@@ -3900,29 +3692,28 @@
           <a:bodyPr wrap="square" anchor="ctr"/>
           <a:lstStyle/>
           <a:p>
-            <a:pPr algn="ctr"/>
-            <a:r>
-              <a:rPr sz="1600" b="1" i="0">
-                <a:solidFill>
-                  <a:srgbClr val="FFFFFF"/>
-                </a:solidFill>
-                <a:latin typeface="Calibri"/>
-              </a:rPr>
-              <a:t>Frontera justificada</a:t>
-            </a:r>
-          </a:p>
-        </p:txBody>
-      </p:sp>
-      <p:sp>
-        <p:nvSpPr>
-          <p:cNvPr id="12" name="TextBox 11"/>
+            <a:r>
+              <a:rPr sz="1000" b="1" i="0">
+                <a:solidFill>
+                  <a:srgbClr val="269CCB"/>
+                </a:solidFill>
+                <a:latin typeface="Calibri"/>
+              </a:rPr>
+              <a:t>● ● ●</a:t>
+            </a:r>
+          </a:p>
+        </p:txBody>
+      </p:sp>
+      <p:sp>
+        <p:nvSpPr>
+          <p:cNvPr id="8" name="TextBox 7"/>
           <p:cNvSpPr txBox="1"/>
           <p:nvPr/>
         </p:nvSpPr>
         <p:spPr>
           <a:xfrm>
-            <a:off x="6420459" y="1901952"/>
-            <a:ext cx="5158587" cy="4498848"/>
+            <a:off x="777240" y="1719072"/>
+            <a:ext cx="10637215" cy="4133087"/>
           </a:xfrm>
           <a:prstGeom prst="rect">
             <a:avLst/>
@@ -3937,72 +3728,283 @@
           <a:p>
             <a:pPr>
               <a:spcAft>
-                <a:spcPts val="800"/>
+                <a:spcPts val="400"/>
               </a:spcAft>
             </a:pPr>
             <a:r>
-              <a:rPr sz="1500" b="0" i="0">
-                <a:solidFill>
-                  <a:srgbClr val="333333"/>
-                </a:solidFill>
-                <a:latin typeface="Calibri"/>
-              </a:rPr>
-              <a:t>–   2-5 contenedores logicos, cada uno con su razon</a:t>
+              <a:rPr sz="1400" b="0" i="0">
+                <a:solidFill>
+                  <a:srgbClr val="FFFFFF"/>
+                </a:solidFill>
+                <a:latin typeface="Calibri"/>
+              </a:rPr>
+              <a:t>C4Container</a:t>
             </a:r>
           </a:p>
           <a:p>
             <a:pPr>
               <a:spcAft>
-                <a:spcPts val="800"/>
+                <a:spcPts val="400"/>
               </a:spcAft>
             </a:pPr>
             <a:r>
-              <a:rPr sz="1500" b="0" i="0">
-                <a:solidFill>
-                  <a:srgbClr val="333333"/>
-                </a:solidFill>
-                <a:latin typeface="Calibri"/>
-              </a:rPr>
-              <a:t>–   Frontera = responsabilidad de negocio</a:t>
+              <a:rPr sz="1400" b="0" i="0">
+                <a:solidFill>
+                  <a:srgbClr val="FFFFFF"/>
+                </a:solidFill>
+                <a:latin typeface="Calibri"/>
+              </a:rPr>
+              <a:t>title Diagrama de contenedores - CloudLite Turnos</a:t>
             </a:r>
           </a:p>
           <a:p>
             <a:pPr>
               <a:spcAft>
-                <a:spcPts val="800"/>
+                <a:spcPts val="400"/>
               </a:spcAft>
             </a:pPr>
             <a:r>
-              <a:rPr sz="1500" b="0" i="0">
-                <a:solidFill>
-                  <a:srgbClr val="333333"/>
-                </a:solidFill>
-                <a:latin typeface="Calibri"/>
-              </a:rPr>
-              <a:t>–   Cada flecha: protocolo + verbo (HTTP/JSON, 'reserva')</a:t>
+              <a:rPr sz="1400" b="0" i="0">
+                <a:solidFill>
+                  <a:srgbClr val="FFFFFF"/>
+                </a:solidFill>
+                <a:latin typeface="Calibri"/>
+              </a:rPr>
+              <a:t>Person(cliente, "Cliente de la barberia", "Reserva y consulta sus turnos")</a:t>
             </a:r>
           </a:p>
           <a:p>
             <a:pPr>
               <a:spcAft>
-                <a:spcPts val="800"/>
+                <a:spcPts val="400"/>
               </a:spcAft>
             </a:pPr>
             <a:r>
-              <a:rPr sz="1500" b="0" i="0">
-                <a:solidFill>
-                  <a:srgbClr val="333333"/>
-                </a:solidFill>
-                <a:latin typeface="Calibri"/>
-              </a:rPr>
-              <a:t>–   Se explica en 60 s sin leer notas</a:t>
-            </a:r>
-          </a:p>
-        </p:txBody>
-      </p:sp>
-      <p:sp>
-        <p:nvSpPr>
-          <p:cNvPr id="13" name="TextBox 12"/>
+              <a:rPr sz="1400" b="0" i="0">
+                <a:solidFill>
+                  <a:srgbClr val="FFFFFF"/>
+                </a:solidFill>
+                <a:latin typeface="Calibri"/>
+              </a:rPr>
+              <a:t>System_Boundary(cloudlite, "CloudLite App") {</a:t>
+            </a:r>
+          </a:p>
+          <a:p>
+            <a:pPr>
+              <a:spcAft>
+                <a:spcPts val="400"/>
+              </a:spcAft>
+            </a:pPr>
+            <a:r>
+              <a:rPr sz="1400" b="0" i="0">
+                <a:solidFill>
+                  <a:srgbClr val="FFFFFF"/>
+                </a:solidFill>
+                <a:latin typeface="Calibri"/>
+              </a:rPr>
+              <a:t>  Container(spa, "App web", "React", "Muestra franjas libres y crea la reserva")</a:t>
+            </a:r>
+          </a:p>
+          <a:p>
+            <a:pPr>
+              <a:spcAft>
+                <a:spcPts val="400"/>
+              </a:spcAft>
+            </a:pPr>
+            <a:r>
+              <a:rPr sz="1400" b="0" i="0">
+                <a:solidFill>
+                  <a:srgbClr val="FFFFFF"/>
+                </a:solidFill>
+                <a:latin typeface="Calibri"/>
+              </a:rPr>
+              <a:t>  Container(api, "API de turnos", "Node.js", "Valida la franja y registra el turno")</a:t>
+            </a:r>
+          </a:p>
+          <a:p>
+            <a:pPr>
+              <a:spcAft>
+                <a:spcPts val="400"/>
+              </a:spcAft>
+            </a:pPr>
+            <a:r>
+              <a:rPr sz="1400" b="0" i="0">
+                <a:solidFill>
+                  <a:srgbClr val="FFFFFF"/>
+                </a:solidFill>
+                <a:latin typeface="Calibri"/>
+              </a:rPr>
+              <a:t>  ContainerDb(db, "Base de turnos", "PostgreSQL", "Turnos, clientes y horarios")</a:t>
+            </a:r>
+          </a:p>
+          <a:p>
+            <a:pPr>
+              <a:spcAft>
+                <a:spcPts val="400"/>
+              </a:spcAft>
+            </a:pPr>
+            <a:r>
+              <a:rPr sz="1400" b="0" i="0">
+                <a:solidFill>
+                  <a:srgbClr val="FFFFFF"/>
+                </a:solidFill>
+                <a:latin typeface="Calibri"/>
+              </a:rPr>
+              <a:t>  Container(worker, "Worker de avisos", "cola", "Envia el aviso, con reintentos")</a:t>
+            </a:r>
+          </a:p>
+          <a:p>
+            <a:pPr>
+              <a:spcAft>
+                <a:spcPts val="400"/>
+              </a:spcAft>
+            </a:pPr>
+            <a:r>
+              <a:rPr sz="1400" b="0" i="0">
+                <a:solidFill>
+                  <a:srgbClr val="FFFFFF"/>
+                </a:solidFill>
+                <a:latin typeface="Calibri"/>
+              </a:rPr>
+              <a:t>}</a:t>
+            </a:r>
+          </a:p>
+          <a:p>
+            <a:pPr>
+              <a:spcAft>
+                <a:spcPts val="400"/>
+              </a:spcAft>
+            </a:pPr>
+            <a:r>
+              <a:rPr sz="1400" b="0" i="0">
+                <a:solidFill>
+                  <a:srgbClr val="FFFFFF"/>
+                </a:solidFill>
+                <a:latin typeface="Calibri"/>
+              </a:rPr>
+              <a:t>System_Ext(correo, "Correo transaccional", "Entrega el correo al cliente")</a:t>
+            </a:r>
+          </a:p>
+          <a:p>
+            <a:pPr>
+              <a:spcAft>
+                <a:spcPts val="400"/>
+              </a:spcAft>
+            </a:pPr>
+            <a:r>
+              <a:rPr sz="1400" b="0" i="0">
+                <a:solidFill>
+                  <a:srgbClr val="FFFFFF"/>
+                </a:solidFill>
+                <a:latin typeface="Calibri"/>
+              </a:rPr>
+              <a:t>Rel(cliente, spa, "Reserva un turno", "HTTPS")</a:t>
+            </a:r>
+          </a:p>
+          <a:p>
+            <a:pPr>
+              <a:spcAft>
+                <a:spcPts val="400"/>
+              </a:spcAft>
+            </a:pPr>
+            <a:r>
+              <a:rPr sz="1400" b="0" i="0">
+                <a:solidFill>
+                  <a:srgbClr val="FFFFFF"/>
+                </a:solidFill>
+                <a:latin typeface="Calibri"/>
+              </a:rPr>
+              <a:t>Rel(spa, api, "POST /turnos", "HTTPS/JSON")</a:t>
+            </a:r>
+          </a:p>
+          <a:p>
+            <a:pPr>
+              <a:spcAft>
+                <a:spcPts val="400"/>
+              </a:spcAft>
+            </a:pPr>
+            <a:r>
+              <a:rPr sz="1400" b="0" i="0">
+                <a:solidFill>
+                  <a:srgbClr val="FFFFFF"/>
+                </a:solidFill>
+                <a:latin typeface="Calibri"/>
+              </a:rPr>
+              <a:t>Rel(api, db, "INSERT / SELECT de turnos", "TCP/SQL")</a:t>
+            </a:r>
+          </a:p>
+          <a:p>
+            <a:pPr>
+              <a:spcAft>
+                <a:spcPts val="400"/>
+              </a:spcAft>
+            </a:pPr>
+            <a:r>
+              <a:rPr sz="1400" b="0" i="0">
+                <a:solidFill>
+                  <a:srgbClr val="FFFFFF"/>
+                </a:solidFill>
+                <a:latin typeface="Calibri"/>
+              </a:rPr>
+              <a:t>Rel(api, worker, "Publica aviso-de-turno", "evento/cola (AMQP)")</a:t>
+            </a:r>
+          </a:p>
+          <a:p>
+            <a:pPr>
+              <a:spcAft>
+                <a:spcPts val="400"/>
+              </a:spcAft>
+            </a:pPr>
+            <a:r>
+              <a:rPr sz="1400" b="0" i="0">
+                <a:solidFill>
+                  <a:srgbClr val="FFFFFF"/>
+                </a:solidFill>
+                <a:latin typeface="Calibri"/>
+              </a:rPr>
+              <a:t>Rel(worker, correo, "Envia la confirmacion", "API REST sobre HTTPS")</a:t>
+            </a:r>
+          </a:p>
+        </p:txBody>
+      </p:sp>
+      <p:sp>
+        <p:nvSpPr>
+          <p:cNvPr id="9" name="TextBox 8"/>
+          <p:cNvSpPr txBox="1"/>
+          <p:nvPr/>
+        </p:nvSpPr>
+        <p:spPr>
+          <a:xfrm>
+            <a:off x="457200" y="6080760"/>
+            <a:ext cx="11277295" cy="320040"/>
+          </a:xfrm>
+          <a:prstGeom prst="rect">
+            <a:avLst/>
+          </a:prstGeom>
+          <a:noFill/>
+        </p:spPr>
+        <p:txBody>
+          <a:bodyPr wrap="square">
+            <a:spAutoFit/>
+          </a:bodyPr>
+          <a:lstStyle/>
+          <a:p>
+            <a:pPr algn="ctr"/>
+            <a:r>
+              <a:rPr sz="1200" b="0" i="1">
+                <a:solidFill>
+                  <a:srgbClr val="666666"/>
+                </a:solidFill>
+                <a:latin typeface="Calibri"/>
+              </a:rPr>
+              <a:t>La base va como «ContainerDb» y cada «Rel» lleva protocolo Y formato. Los externos, FUERA del «System_Boundary».</a:t>
+            </a:r>
+          </a:p>
+        </p:txBody>
+      </p:sp>
+      <p:sp>
+        <p:nvSpPr>
+          <p:cNvPr id="10" name="TextBox 9"/>
           <p:cNvSpPr txBox="1"/>
           <p:nvPr/>
         </p:nvSpPr>
@@ -4070,7 +4072,7 @@
         <p:spPr>
           <a:xfrm>
             <a:off x="0" y="0"/>
-            <a:ext cx="12191695" cy="960120"/>
+            <a:ext cx="12191695" cy="1170432"/>
           </a:xfrm>
           <a:prstGeom prst="rect">
             <a:avLst/>
@@ -4112,7 +4114,7 @@
         </p:nvSpPr>
         <p:spPr>
           <a:xfrm>
-            <a:off x="0" y="960120"/>
+            <a:off x="0" y="1170432"/>
             <a:ext cx="12191695" cy="41148"/>
           </a:xfrm>
           <a:prstGeom prst="rect">
@@ -4156,7 +4158,7 @@
         <p:spPr>
           <a:xfrm>
             <a:off x="457200" y="164592"/>
-            <a:ext cx="11277295" cy="502920"/>
+            <a:ext cx="11277295" cy="384048"/>
           </a:xfrm>
           <a:prstGeom prst="rect">
             <a:avLst/>
@@ -4176,21 +4178,55 @@
                 </a:solidFill>
                 <a:latin typeface="Calibri"/>
               </a:rPr>
-              <a:t>C4Container en Mermaid: el molde que la plataforma del curso renderiza</a:t>
-            </a:r>
-          </a:p>
-        </p:txBody>
-      </p:sp>
-      <p:sp>
-        <p:nvSpPr>
-          <p:cNvPr id="5" name="Rounded Rectangle 4"/>
+              <a:t>Herramientas de hoy</a:t>
+            </a:r>
+          </a:p>
+        </p:txBody>
+      </p:sp>
+      <p:sp>
+        <p:nvSpPr>
+          <p:cNvPr id="5" name="TextBox 4"/>
+          <p:cNvSpPr txBox="1"/>
+          <p:nvPr/>
+        </p:nvSpPr>
+        <p:spPr>
+          <a:xfrm>
+            <a:off x="457200" y="566928"/>
+            <a:ext cx="11277295" cy="411480"/>
+          </a:xfrm>
+          <a:prstGeom prst="rect">
+            <a:avLst/>
+          </a:prstGeom>
+          <a:noFill/>
+        </p:spPr>
+        <p:txBody>
+          <a:bodyPr wrap="square">
+            <a:spAutoFit/>
+          </a:bodyPr>
+          <a:lstStyle/>
+          <a:p>
+            <a:r>
+              <a:rPr sz="1400" b="0" i="0">
+                <a:solidFill>
+                  <a:srgbClr val="B8D8EE"/>
+                </a:solidFill>
+                <a:latin typeface="Calibri"/>
+              </a:rPr>
+              <a:t>Gratis · navegador o free tier · sin cuenta de pago</a:t>
+            </a:r>
+          </a:p>
+        </p:txBody>
+      </p:sp>
+      <p:sp>
+        <p:nvSpPr>
+          <p:cNvPr id="6" name="Rounded Rectangle 5"/>
           <p:cNvSpPr/>
           <p:nvPr/>
         </p:nvSpPr>
         <p:spPr>
           <a:xfrm>
-            <a:off x="457200" y="1261872"/>
-            <a:ext cx="11277295" cy="4773168"/>
+            <a:off x="457200" y="1591056"/>
+            <a:ext cx="3624986" cy="2299716"/>
           </a:xfrm>
           <a:prstGeom prst="roundRect">
             <a:avLst>
@@ -4198,7 +4234,7 @@
             </a:avLst>
           </a:prstGeom>
           <a:solidFill>
-            <a:srgbClr val="1E2A38"/>
+            <a:srgbClr val="F2F2F2"/>
           </a:solidFill>
           <a:ln>
             <a:noFill/>
@@ -4228,14 +4264,14 @@
       </p:sp>
       <p:sp>
         <p:nvSpPr>
-          <p:cNvPr id="6" name="Rectangle 5"/>
+          <p:cNvPr id="7" name="Rectangle 6"/>
           <p:cNvSpPr/>
           <p:nvPr/>
         </p:nvSpPr>
         <p:spPr>
           <a:xfrm>
-            <a:off x="457200" y="1261872"/>
-            <a:ext cx="11277295" cy="320040"/>
+            <a:off x="457200" y="1591056"/>
+            <a:ext cx="3624986" cy="64008"/>
           </a:xfrm>
           <a:prstGeom prst="rect">
             <a:avLst/>
@@ -4271,14 +4307,81 @@
       </p:sp>
       <p:sp>
         <p:nvSpPr>
-          <p:cNvPr id="7" name="TextBox 6"/>
+          <p:cNvPr id="8" name="Rectangle 7"/>
+          <p:cNvSpPr/>
+          <p:nvPr/>
+        </p:nvSpPr>
+        <p:spPr>
+          <a:xfrm>
+            <a:off x="457200" y="1655064"/>
+            <a:ext cx="3624986" cy="27432"/>
+          </a:xfrm>
+          <a:prstGeom prst="rect">
+            <a:avLst/>
+          </a:prstGeom>
+          <a:solidFill>
+            <a:srgbClr val="FFD000"/>
+          </a:solidFill>
+          <a:ln>
+            <a:noFill/>
+          </a:ln>
+        </p:spPr>
+        <p:style>
+          <a:lnRef idx="1">
+            <a:schemeClr val="accent1"/>
+          </a:lnRef>
+          <a:fillRef idx="3">
+            <a:schemeClr val="accent1"/>
+          </a:fillRef>
+          <a:effectRef idx="2">
+            <a:schemeClr val="accent1"/>
+          </a:effectRef>
+          <a:fontRef idx="minor">
+            <a:schemeClr val="lt1"/>
+          </a:fontRef>
+        </p:style>
+        <p:txBody>
+          <a:bodyPr rtlCol="0" anchor="ctr"/>
+          <a:lstStyle/>
+          <a:p>
+            <a:pPr algn="ctr"/>
+          </a:p>
+        </p:txBody>
+      </p:sp>
+      <p:pic>
+        <p:nvPicPr>
+          <p:cNvPr id="9" name="Picture 8" descr="drawio.png"/>
+          <p:cNvPicPr>
+            <a:picLocks noChangeAspect="1"/>
+          </p:cNvPicPr>
+          <p:nvPr/>
+        </p:nvPicPr>
+        <p:blipFill>
+          <a:blip r:embed="rId2"/>
+          <a:stretch>
+            <a:fillRect/>
+          </a:stretch>
+        </p:blipFill>
+        <p:spPr>
+          <a:xfrm>
+            <a:off x="1659331" y="1847087"/>
+            <a:ext cx="1220724" cy="1220724"/>
+          </a:xfrm>
+          <a:prstGeom prst="rect">
+            <a:avLst/>
+          </a:prstGeom>
+        </p:spPr>
+      </p:pic>
+      <p:sp>
+        <p:nvSpPr>
+          <p:cNvPr id="10" name="TextBox 9"/>
           <p:cNvSpPr txBox="1"/>
           <p:nvPr/>
         </p:nvSpPr>
         <p:spPr>
           <a:xfrm>
-            <a:off x="685800" y="1307592"/>
-            <a:ext cx="10820095" cy="256032"/>
+            <a:off x="530352" y="3159251"/>
+            <a:ext cx="3478682" cy="621792"/>
           </a:xfrm>
           <a:prstGeom prst="rect">
             <a:avLst/>
@@ -4286,31 +4389,203 @@
           <a:noFill/>
         </p:spPr>
         <p:txBody>
-          <a:bodyPr wrap="square" anchor="ctr"/>
-          <a:lstStyle/>
-          <a:p>
-            <a:r>
-              <a:rPr sz="1000" b="1" i="0">
-                <a:solidFill>
-                  <a:srgbClr val="269CCB"/>
-                </a:solidFill>
-                <a:latin typeface="Calibri"/>
-              </a:rPr>
-              <a:t>● ● ●</a:t>
-            </a:r>
-          </a:p>
-        </p:txBody>
-      </p:sp>
-      <p:sp>
-        <p:nvSpPr>
-          <p:cNvPr id="8" name="TextBox 7"/>
+          <a:bodyPr wrap="square" anchor="t"/>
+          <a:lstStyle/>
+          <a:p>
+            <a:pPr algn="ctr"/>
+            <a:r>
+              <a:rPr sz="1300" b="1" i="0">
+                <a:solidFill>
+                  <a:srgbClr val="095292"/>
+                </a:solidFill>
+                <a:latin typeface="Calibri"/>
+              </a:rPr>
+              <a:t>draw.io</a:t>
+            </a:r>
+          </a:p>
+          <a:p>
+            <a:pPr algn="ctr">
+              <a:spcBef>
+                <a:spcPts val="200"/>
+              </a:spcBef>
+            </a:pPr>
+            <a:r>
+              <a:rPr sz="1000" b="0" i="0">
+                <a:solidFill>
+                  <a:srgbClr val="666666"/>
+                </a:solidFill>
+                <a:latin typeface="Calibri"/>
+              </a:rPr>
+              <a:t>Boceto del C4</a:t>
+            </a:r>
+          </a:p>
+        </p:txBody>
+      </p:sp>
+      <p:sp>
+        <p:nvSpPr>
+          <p:cNvPr id="11" name="Rounded Rectangle 10"/>
+          <p:cNvSpPr/>
+          <p:nvPr/>
+        </p:nvSpPr>
+        <p:spPr>
+          <a:xfrm>
+            <a:off x="4283354" y="1591056"/>
+            <a:ext cx="3624986" cy="2299716"/>
+          </a:xfrm>
+          <a:prstGeom prst="roundRect">
+            <a:avLst>
+              <a:gd name="adj" fmla="val 12000"/>
+            </a:avLst>
+          </a:prstGeom>
+          <a:solidFill>
+            <a:srgbClr val="F2F2F2"/>
+          </a:solidFill>
+          <a:ln>
+            <a:noFill/>
+          </a:ln>
+        </p:spPr>
+        <p:style>
+          <a:lnRef idx="1">
+            <a:schemeClr val="accent1"/>
+          </a:lnRef>
+          <a:fillRef idx="3">
+            <a:schemeClr val="accent1"/>
+          </a:fillRef>
+          <a:effectRef idx="2">
+            <a:schemeClr val="accent1"/>
+          </a:effectRef>
+          <a:fontRef idx="minor">
+            <a:schemeClr val="lt1"/>
+          </a:fontRef>
+        </p:style>
+        <p:txBody>
+          <a:bodyPr rtlCol="0" anchor="ctr"/>
+          <a:lstStyle/>
+          <a:p>
+            <a:pPr algn="ctr"/>
+          </a:p>
+        </p:txBody>
+      </p:sp>
+      <p:sp>
+        <p:nvSpPr>
+          <p:cNvPr id="12" name="Rectangle 11"/>
+          <p:cNvSpPr/>
+          <p:nvPr/>
+        </p:nvSpPr>
+        <p:spPr>
+          <a:xfrm>
+            <a:off x="4283354" y="1591056"/>
+            <a:ext cx="3624986" cy="64008"/>
+          </a:xfrm>
+          <a:prstGeom prst="rect">
+            <a:avLst/>
+          </a:prstGeom>
+          <a:solidFill>
+            <a:srgbClr val="095292"/>
+          </a:solidFill>
+          <a:ln>
+            <a:noFill/>
+          </a:ln>
+        </p:spPr>
+        <p:style>
+          <a:lnRef idx="1">
+            <a:schemeClr val="accent1"/>
+          </a:lnRef>
+          <a:fillRef idx="3">
+            <a:schemeClr val="accent1"/>
+          </a:fillRef>
+          <a:effectRef idx="2">
+            <a:schemeClr val="accent1"/>
+          </a:effectRef>
+          <a:fontRef idx="minor">
+            <a:schemeClr val="lt1"/>
+          </a:fontRef>
+        </p:style>
+        <p:txBody>
+          <a:bodyPr rtlCol="0" anchor="ctr"/>
+          <a:lstStyle/>
+          <a:p>
+            <a:pPr algn="ctr"/>
+          </a:p>
+        </p:txBody>
+      </p:sp>
+      <p:sp>
+        <p:nvSpPr>
+          <p:cNvPr id="13" name="Rectangle 12"/>
+          <p:cNvSpPr/>
+          <p:nvPr/>
+        </p:nvSpPr>
+        <p:spPr>
+          <a:xfrm>
+            <a:off x="4283354" y="1655064"/>
+            <a:ext cx="3624986" cy="27432"/>
+          </a:xfrm>
+          <a:prstGeom prst="rect">
+            <a:avLst/>
+          </a:prstGeom>
+          <a:solidFill>
+            <a:srgbClr val="FFD000"/>
+          </a:solidFill>
+          <a:ln>
+            <a:noFill/>
+          </a:ln>
+        </p:spPr>
+        <p:style>
+          <a:lnRef idx="1">
+            <a:schemeClr val="accent1"/>
+          </a:lnRef>
+          <a:fillRef idx="3">
+            <a:schemeClr val="accent1"/>
+          </a:fillRef>
+          <a:effectRef idx="2">
+            <a:schemeClr val="accent1"/>
+          </a:effectRef>
+          <a:fontRef idx="minor">
+            <a:schemeClr val="lt1"/>
+          </a:fontRef>
+        </p:style>
+        <p:txBody>
+          <a:bodyPr rtlCol="0" anchor="ctr"/>
+          <a:lstStyle/>
+          <a:p>
+            <a:pPr algn="ctr"/>
+          </a:p>
+        </p:txBody>
+      </p:sp>
+      <p:pic>
+        <p:nvPicPr>
+          <p:cNvPr id="14" name="Picture 13" descr="excalidraw.png"/>
+          <p:cNvPicPr>
+            <a:picLocks noChangeAspect="1"/>
+          </p:cNvPicPr>
+          <p:nvPr/>
+        </p:nvPicPr>
+        <p:blipFill>
+          <a:blip r:embed="rId3"/>
+          <a:stretch>
+            <a:fillRect/>
+          </a:stretch>
+        </p:blipFill>
+        <p:spPr>
+          <a:xfrm>
+            <a:off x="5485485" y="1847087"/>
+            <a:ext cx="1220724" cy="1220724"/>
+          </a:xfrm>
+          <a:prstGeom prst="rect">
+            <a:avLst/>
+          </a:prstGeom>
+        </p:spPr>
+      </p:pic>
+      <p:sp>
+        <p:nvSpPr>
+          <p:cNvPr id="15" name="TextBox 14"/>
           <p:cNvSpPr txBox="1"/>
           <p:nvPr/>
         </p:nvSpPr>
         <p:spPr>
           <a:xfrm>
-            <a:off x="777240" y="1719072"/>
-            <a:ext cx="10637215" cy="4133087"/>
+            <a:off x="4356506" y="3159251"/>
+            <a:ext cx="3478682" cy="621792"/>
           </a:xfrm>
           <a:prstGeom prst="rect">
             <a:avLst/>
@@ -4318,290 +4593,449 @@
           <a:noFill/>
         </p:spPr>
         <p:txBody>
-          <a:bodyPr wrap="square">
-            <a:spAutoFit/>
-          </a:bodyPr>
-          <a:lstStyle/>
-          <a:p>
-            <a:pPr>
-              <a:spcAft>
-                <a:spcPts val="400"/>
-              </a:spcAft>
+          <a:bodyPr wrap="square" anchor="t"/>
+          <a:lstStyle/>
+          <a:p>
+            <a:pPr algn="ctr"/>
+            <a:r>
+              <a:rPr sz="1300" b="1" i="0">
+                <a:solidFill>
+                  <a:srgbClr val="095292"/>
+                </a:solidFill>
+                <a:latin typeface="Calibri"/>
+              </a:rPr>
+              <a:t>Excalidraw</a:t>
+            </a:r>
+          </a:p>
+          <a:p>
+            <a:pPr algn="ctr">
+              <a:spcBef>
+                <a:spcPts val="200"/>
+              </a:spcBef>
             </a:pPr>
             <a:r>
-              <a:rPr sz="1400" b="0" i="0">
-                <a:solidFill>
-                  <a:srgbClr val="FFFFFF"/>
-                </a:solidFill>
-                <a:latin typeface="Calibri"/>
-              </a:rPr>
-              <a:t>C4Container</a:t>
-            </a:r>
-          </a:p>
-          <a:p>
-            <a:pPr>
-              <a:spcAft>
-                <a:spcPts val="400"/>
-              </a:spcAft>
+              <a:rPr sz="1000" b="0" i="0">
+                <a:solidFill>
+                  <a:srgbClr val="666666"/>
+                </a:solidFill>
+                <a:latin typeface="Calibri"/>
+              </a:rPr>
+              <a:t>Boceto rapido</a:t>
+            </a:r>
+          </a:p>
+        </p:txBody>
+      </p:sp>
+      <p:sp>
+        <p:nvSpPr>
+          <p:cNvPr id="16" name="Rounded Rectangle 15"/>
+          <p:cNvSpPr/>
+          <p:nvPr/>
+        </p:nvSpPr>
+        <p:spPr>
+          <a:xfrm>
+            <a:off x="8109508" y="1591056"/>
+            <a:ext cx="3624986" cy="2299716"/>
+          </a:xfrm>
+          <a:prstGeom prst="roundRect">
+            <a:avLst>
+              <a:gd name="adj" fmla="val 12000"/>
+            </a:avLst>
+          </a:prstGeom>
+          <a:solidFill>
+            <a:srgbClr val="F2F2F2"/>
+          </a:solidFill>
+          <a:ln>
+            <a:noFill/>
+          </a:ln>
+        </p:spPr>
+        <p:style>
+          <a:lnRef idx="1">
+            <a:schemeClr val="accent1"/>
+          </a:lnRef>
+          <a:fillRef idx="3">
+            <a:schemeClr val="accent1"/>
+          </a:fillRef>
+          <a:effectRef idx="2">
+            <a:schemeClr val="accent1"/>
+          </a:effectRef>
+          <a:fontRef idx="minor">
+            <a:schemeClr val="lt1"/>
+          </a:fontRef>
+        </p:style>
+        <p:txBody>
+          <a:bodyPr rtlCol="0" anchor="ctr"/>
+          <a:lstStyle/>
+          <a:p>
+            <a:pPr algn="ctr"/>
+          </a:p>
+        </p:txBody>
+      </p:sp>
+      <p:sp>
+        <p:nvSpPr>
+          <p:cNvPr id="17" name="Rectangle 16"/>
+          <p:cNvSpPr/>
+          <p:nvPr/>
+        </p:nvSpPr>
+        <p:spPr>
+          <a:xfrm>
+            <a:off x="8109508" y="1591056"/>
+            <a:ext cx="3624986" cy="64008"/>
+          </a:xfrm>
+          <a:prstGeom prst="rect">
+            <a:avLst/>
+          </a:prstGeom>
+          <a:solidFill>
+            <a:srgbClr val="095292"/>
+          </a:solidFill>
+          <a:ln>
+            <a:noFill/>
+          </a:ln>
+        </p:spPr>
+        <p:style>
+          <a:lnRef idx="1">
+            <a:schemeClr val="accent1"/>
+          </a:lnRef>
+          <a:fillRef idx="3">
+            <a:schemeClr val="accent1"/>
+          </a:fillRef>
+          <a:effectRef idx="2">
+            <a:schemeClr val="accent1"/>
+          </a:effectRef>
+          <a:fontRef idx="minor">
+            <a:schemeClr val="lt1"/>
+          </a:fontRef>
+        </p:style>
+        <p:txBody>
+          <a:bodyPr rtlCol="0" anchor="ctr"/>
+          <a:lstStyle/>
+          <a:p>
+            <a:pPr algn="ctr"/>
+          </a:p>
+        </p:txBody>
+      </p:sp>
+      <p:sp>
+        <p:nvSpPr>
+          <p:cNvPr id="18" name="Rectangle 17"/>
+          <p:cNvSpPr/>
+          <p:nvPr/>
+        </p:nvSpPr>
+        <p:spPr>
+          <a:xfrm>
+            <a:off x="8109508" y="1655064"/>
+            <a:ext cx="3624986" cy="27432"/>
+          </a:xfrm>
+          <a:prstGeom prst="rect">
+            <a:avLst/>
+          </a:prstGeom>
+          <a:solidFill>
+            <a:srgbClr val="FFD000"/>
+          </a:solidFill>
+          <a:ln>
+            <a:noFill/>
+          </a:ln>
+        </p:spPr>
+        <p:style>
+          <a:lnRef idx="1">
+            <a:schemeClr val="accent1"/>
+          </a:lnRef>
+          <a:fillRef idx="3">
+            <a:schemeClr val="accent1"/>
+          </a:fillRef>
+          <a:effectRef idx="2">
+            <a:schemeClr val="accent1"/>
+          </a:effectRef>
+          <a:fontRef idx="minor">
+            <a:schemeClr val="lt1"/>
+          </a:fontRef>
+        </p:style>
+        <p:txBody>
+          <a:bodyPr rtlCol="0" anchor="ctr"/>
+          <a:lstStyle/>
+          <a:p>
+            <a:pPr algn="ctr"/>
+          </a:p>
+        </p:txBody>
+      </p:sp>
+      <p:pic>
+        <p:nvPicPr>
+          <p:cNvPr id="19" name="Picture 18" descr="mermaid.png"/>
+          <p:cNvPicPr>
+            <a:picLocks noChangeAspect="1"/>
+          </p:cNvPicPr>
+          <p:nvPr/>
+        </p:nvPicPr>
+        <p:blipFill>
+          <a:blip r:embed="rId4"/>
+          <a:stretch>
+            <a:fillRect/>
+          </a:stretch>
+        </p:blipFill>
+        <p:spPr>
+          <a:xfrm>
+            <a:off x="9311640" y="1847087"/>
+            <a:ext cx="1220724" cy="1220724"/>
+          </a:xfrm>
+          <a:prstGeom prst="rect">
+            <a:avLst/>
+          </a:prstGeom>
+        </p:spPr>
+      </p:pic>
+      <p:sp>
+        <p:nvSpPr>
+          <p:cNvPr id="20" name="TextBox 19"/>
+          <p:cNvSpPr txBox="1"/>
+          <p:nvPr/>
+        </p:nvSpPr>
+        <p:spPr>
+          <a:xfrm>
+            <a:off x="8182660" y="3159251"/>
+            <a:ext cx="3478682" cy="621792"/>
+          </a:xfrm>
+          <a:prstGeom prst="rect">
+            <a:avLst/>
+          </a:prstGeom>
+          <a:noFill/>
+        </p:spPr>
+        <p:txBody>
+          <a:bodyPr wrap="square" anchor="t"/>
+          <a:lstStyle/>
+          <a:p>
+            <a:pPr algn="ctr"/>
+            <a:r>
+              <a:rPr sz="1300" b="1" i="0">
+                <a:solidFill>
+                  <a:srgbClr val="095292"/>
+                </a:solidFill>
+                <a:latin typeface="Calibri"/>
+              </a:rPr>
+              <a:t>Mermaid</a:t>
+            </a:r>
+          </a:p>
+          <a:p>
+            <a:pPr algn="ctr">
+              <a:spcBef>
+                <a:spcPts val="200"/>
+              </a:spcBef>
             </a:pPr>
             <a:r>
-              <a:rPr sz="1400" b="0" i="0">
-                <a:solidFill>
-                  <a:srgbClr val="FFFFFF"/>
-                </a:solidFill>
-                <a:latin typeface="Calibri"/>
-              </a:rPr>
-              <a:t>title Diagrama de contenedores - CloudLite Turnos</a:t>
-            </a:r>
-          </a:p>
-          <a:p>
-            <a:pPr>
-              <a:spcAft>
-                <a:spcPts val="400"/>
-              </a:spcAft>
+              <a:rPr sz="1000" b="0" i="0">
+                <a:solidFill>
+                  <a:srgbClr val="666666"/>
+                </a:solidFill>
+                <a:latin typeface="Calibri"/>
+              </a:rPr>
+              <a:t>Codigo del diagrama</a:t>
+            </a:r>
+          </a:p>
+        </p:txBody>
+      </p:sp>
+      <p:sp>
+        <p:nvSpPr>
+          <p:cNvPr id="21" name="Rounded Rectangle 20"/>
+          <p:cNvSpPr/>
+          <p:nvPr/>
+        </p:nvSpPr>
+        <p:spPr>
+          <a:xfrm>
+            <a:off x="4283354" y="4055364"/>
+            <a:ext cx="3624986" cy="2299716"/>
+          </a:xfrm>
+          <a:prstGeom prst="roundRect">
+            <a:avLst>
+              <a:gd name="adj" fmla="val 12000"/>
+            </a:avLst>
+          </a:prstGeom>
+          <a:solidFill>
+            <a:srgbClr val="F2F2F2"/>
+          </a:solidFill>
+          <a:ln>
+            <a:noFill/>
+          </a:ln>
+        </p:spPr>
+        <p:style>
+          <a:lnRef idx="1">
+            <a:schemeClr val="accent1"/>
+          </a:lnRef>
+          <a:fillRef idx="3">
+            <a:schemeClr val="accent1"/>
+          </a:fillRef>
+          <a:effectRef idx="2">
+            <a:schemeClr val="accent1"/>
+          </a:effectRef>
+          <a:fontRef idx="minor">
+            <a:schemeClr val="lt1"/>
+          </a:fontRef>
+        </p:style>
+        <p:txBody>
+          <a:bodyPr rtlCol="0" anchor="ctr"/>
+          <a:lstStyle/>
+          <a:p>
+            <a:pPr algn="ctr"/>
+          </a:p>
+        </p:txBody>
+      </p:sp>
+      <p:sp>
+        <p:nvSpPr>
+          <p:cNvPr id="22" name="Rectangle 21"/>
+          <p:cNvSpPr/>
+          <p:nvPr/>
+        </p:nvSpPr>
+        <p:spPr>
+          <a:xfrm>
+            <a:off x="4283354" y="4055364"/>
+            <a:ext cx="3624986" cy="64008"/>
+          </a:xfrm>
+          <a:prstGeom prst="rect">
+            <a:avLst/>
+          </a:prstGeom>
+          <a:solidFill>
+            <a:srgbClr val="095292"/>
+          </a:solidFill>
+          <a:ln>
+            <a:noFill/>
+          </a:ln>
+        </p:spPr>
+        <p:style>
+          <a:lnRef idx="1">
+            <a:schemeClr val="accent1"/>
+          </a:lnRef>
+          <a:fillRef idx="3">
+            <a:schemeClr val="accent1"/>
+          </a:fillRef>
+          <a:effectRef idx="2">
+            <a:schemeClr val="accent1"/>
+          </a:effectRef>
+          <a:fontRef idx="minor">
+            <a:schemeClr val="lt1"/>
+          </a:fontRef>
+        </p:style>
+        <p:txBody>
+          <a:bodyPr rtlCol="0" anchor="ctr"/>
+          <a:lstStyle/>
+          <a:p>
+            <a:pPr algn="ctr"/>
+          </a:p>
+        </p:txBody>
+      </p:sp>
+      <p:sp>
+        <p:nvSpPr>
+          <p:cNvPr id="23" name="Rectangle 22"/>
+          <p:cNvSpPr/>
+          <p:nvPr/>
+        </p:nvSpPr>
+        <p:spPr>
+          <a:xfrm>
+            <a:off x="4283354" y="4119372"/>
+            <a:ext cx="3624986" cy="27432"/>
+          </a:xfrm>
+          <a:prstGeom prst="rect">
+            <a:avLst/>
+          </a:prstGeom>
+          <a:solidFill>
+            <a:srgbClr val="FFD000"/>
+          </a:solidFill>
+          <a:ln>
+            <a:noFill/>
+          </a:ln>
+        </p:spPr>
+        <p:style>
+          <a:lnRef idx="1">
+            <a:schemeClr val="accent1"/>
+          </a:lnRef>
+          <a:fillRef idx="3">
+            <a:schemeClr val="accent1"/>
+          </a:fillRef>
+          <a:effectRef idx="2">
+            <a:schemeClr val="accent1"/>
+          </a:effectRef>
+          <a:fontRef idx="minor">
+            <a:schemeClr val="lt1"/>
+          </a:fontRef>
+        </p:style>
+        <p:txBody>
+          <a:bodyPr rtlCol="0" anchor="ctr"/>
+          <a:lstStyle/>
+          <a:p>
+            <a:pPr algn="ctr"/>
+          </a:p>
+        </p:txBody>
+      </p:sp>
+      <p:pic>
+        <p:nvPicPr>
+          <p:cNvPr id="24" name="Picture 23" descr="examlab.png"/>
+          <p:cNvPicPr>
+            <a:picLocks noChangeAspect="1"/>
+          </p:cNvPicPr>
+          <p:nvPr/>
+        </p:nvPicPr>
+        <p:blipFill>
+          <a:blip r:embed="rId5"/>
+          <a:stretch>
+            <a:fillRect/>
+          </a:stretch>
+        </p:blipFill>
+        <p:spPr>
+          <a:xfrm>
+            <a:off x="5485485" y="4311396"/>
+            <a:ext cx="1220724" cy="1220724"/>
+          </a:xfrm>
+          <a:prstGeom prst="rect">
+            <a:avLst/>
+          </a:prstGeom>
+        </p:spPr>
+      </p:pic>
+      <p:sp>
+        <p:nvSpPr>
+          <p:cNvPr id="25" name="TextBox 24"/>
+          <p:cNvSpPr txBox="1"/>
+          <p:nvPr/>
+        </p:nvSpPr>
+        <p:spPr>
+          <a:xfrm>
+            <a:off x="4356506" y="5623560"/>
+            <a:ext cx="3478682" cy="621792"/>
+          </a:xfrm>
+          <a:prstGeom prst="rect">
+            <a:avLst/>
+          </a:prstGeom>
+          <a:noFill/>
+        </p:spPr>
+        <p:txBody>
+          <a:bodyPr wrap="square" anchor="t"/>
+          <a:lstStyle/>
+          <a:p>
+            <a:pPr algn="ctr"/>
+            <a:r>
+              <a:rPr sz="1300" b="1" i="0">
+                <a:solidFill>
+                  <a:srgbClr val="095292"/>
+                </a:solidFill>
+                <a:latin typeface="Calibri"/>
+              </a:rPr>
+              <a:t>la plataforma del curso</a:t>
+            </a:r>
+          </a:p>
+          <a:p>
+            <a:pPr algn="ctr">
+              <a:spcBef>
+                <a:spcPts val="200"/>
+              </a:spcBef>
             </a:pPr>
             <a:r>
-              <a:rPr sz="1400" b="0" i="0">
-                <a:solidFill>
-                  <a:srgbClr val="FFFFFF"/>
-                </a:solidFill>
-                <a:latin typeface="Calibri"/>
-              </a:rPr>
-              <a:t>Person(cliente, "Cliente de la barberia", "Reserva y consulta sus turnos")</a:t>
-            </a:r>
-          </a:p>
-          <a:p>
-            <a:pPr>
-              <a:spcAft>
-                <a:spcPts val="400"/>
-              </a:spcAft>
-            </a:pPr>
-            <a:r>
-              <a:rPr sz="1400" b="0" i="0">
-                <a:solidFill>
-                  <a:srgbClr val="FFFFFF"/>
-                </a:solidFill>
-                <a:latin typeface="Calibri"/>
-              </a:rPr>
-              <a:t>System_Boundary(cloudlite, "CloudLite App") {</a:t>
-            </a:r>
-          </a:p>
-          <a:p>
-            <a:pPr>
-              <a:spcAft>
-                <a:spcPts val="400"/>
-              </a:spcAft>
-            </a:pPr>
-            <a:r>
-              <a:rPr sz="1400" b="0" i="0">
-                <a:solidFill>
-                  <a:srgbClr val="FFFFFF"/>
-                </a:solidFill>
-                <a:latin typeface="Calibri"/>
-              </a:rPr>
-              <a:t>  Container(spa, "App web", "React", "Muestra franjas libres y crea la reserva")</a:t>
-            </a:r>
-          </a:p>
-          <a:p>
-            <a:pPr>
-              <a:spcAft>
-                <a:spcPts val="400"/>
-              </a:spcAft>
-            </a:pPr>
-            <a:r>
-              <a:rPr sz="1400" b="0" i="0">
-                <a:solidFill>
-                  <a:srgbClr val="FFFFFF"/>
-                </a:solidFill>
-                <a:latin typeface="Calibri"/>
-              </a:rPr>
-              <a:t>  Container(api, "API de turnos", "Node.js", "Valida la franja y registra el turno")</a:t>
-            </a:r>
-          </a:p>
-          <a:p>
-            <a:pPr>
-              <a:spcAft>
-                <a:spcPts val="400"/>
-              </a:spcAft>
-            </a:pPr>
-            <a:r>
-              <a:rPr sz="1400" b="0" i="0">
-                <a:solidFill>
-                  <a:srgbClr val="FFFFFF"/>
-                </a:solidFill>
-                <a:latin typeface="Calibri"/>
-              </a:rPr>
-              <a:t>  ContainerDb(db, "Base de turnos", "PostgreSQL", "Turnos, clientes y horarios")</a:t>
-            </a:r>
-          </a:p>
-          <a:p>
-            <a:pPr>
-              <a:spcAft>
-                <a:spcPts val="400"/>
-              </a:spcAft>
-            </a:pPr>
-            <a:r>
-              <a:rPr sz="1400" b="0" i="0">
-                <a:solidFill>
-                  <a:srgbClr val="FFFFFF"/>
-                </a:solidFill>
-                <a:latin typeface="Calibri"/>
-              </a:rPr>
-              <a:t>  Container(worker, "Worker de avisos", "cola", "Envia el aviso, con reintentos")</a:t>
-            </a:r>
-          </a:p>
-          <a:p>
-            <a:pPr>
-              <a:spcAft>
-                <a:spcPts val="400"/>
-              </a:spcAft>
-            </a:pPr>
-            <a:r>
-              <a:rPr sz="1400" b="0" i="0">
-                <a:solidFill>
-                  <a:srgbClr val="FFFFFF"/>
-                </a:solidFill>
-                <a:latin typeface="Calibri"/>
-              </a:rPr>
-              <a:t>}</a:t>
-            </a:r>
-          </a:p>
-          <a:p>
-            <a:pPr>
-              <a:spcAft>
-                <a:spcPts val="400"/>
-              </a:spcAft>
-            </a:pPr>
-            <a:r>
-              <a:rPr sz="1400" b="0" i="0">
-                <a:solidFill>
-                  <a:srgbClr val="FFFFFF"/>
-                </a:solidFill>
-                <a:latin typeface="Calibri"/>
-              </a:rPr>
-              <a:t>System_Ext(correo, "Correo transaccional", "Entrega el correo al cliente")</a:t>
-            </a:r>
-          </a:p>
-          <a:p>
-            <a:pPr>
-              <a:spcAft>
-                <a:spcPts val="400"/>
-              </a:spcAft>
-            </a:pPr>
-            <a:r>
-              <a:rPr sz="1400" b="0" i="0">
-                <a:solidFill>
-                  <a:srgbClr val="FFFFFF"/>
-                </a:solidFill>
-                <a:latin typeface="Calibri"/>
-              </a:rPr>
-              <a:t>Rel(cliente, spa, "Reserva un turno", "HTTPS")</a:t>
-            </a:r>
-          </a:p>
-          <a:p>
-            <a:pPr>
-              <a:spcAft>
-                <a:spcPts val="400"/>
-              </a:spcAft>
-            </a:pPr>
-            <a:r>
-              <a:rPr sz="1400" b="0" i="0">
-                <a:solidFill>
-                  <a:srgbClr val="FFFFFF"/>
-                </a:solidFill>
-                <a:latin typeface="Calibri"/>
-              </a:rPr>
-              <a:t>Rel(spa, api, "POST /turnos", "HTTPS/JSON")</a:t>
-            </a:r>
-          </a:p>
-          <a:p>
-            <a:pPr>
-              <a:spcAft>
-                <a:spcPts val="400"/>
-              </a:spcAft>
-            </a:pPr>
-            <a:r>
-              <a:rPr sz="1400" b="0" i="0">
-                <a:solidFill>
-                  <a:srgbClr val="FFFFFF"/>
-                </a:solidFill>
-                <a:latin typeface="Calibri"/>
-              </a:rPr>
-              <a:t>Rel(api, db, "INSERT / SELECT de turnos", "TCP/SQL")</a:t>
-            </a:r>
-          </a:p>
-          <a:p>
-            <a:pPr>
-              <a:spcAft>
-                <a:spcPts val="400"/>
-              </a:spcAft>
-            </a:pPr>
-            <a:r>
-              <a:rPr sz="1400" b="0" i="0">
-                <a:solidFill>
-                  <a:srgbClr val="FFFFFF"/>
-                </a:solidFill>
-                <a:latin typeface="Calibri"/>
-              </a:rPr>
-              <a:t>Rel(api, worker, "Publica aviso-de-turno", "evento/cola (AMQP)")</a:t>
-            </a:r>
-          </a:p>
-          <a:p>
-            <a:pPr>
-              <a:spcAft>
-                <a:spcPts val="400"/>
-              </a:spcAft>
-            </a:pPr>
-            <a:r>
-              <a:rPr sz="1400" b="0" i="0">
-                <a:solidFill>
-                  <a:srgbClr val="FFFFFF"/>
-                </a:solidFill>
-                <a:latin typeface="Calibri"/>
-              </a:rPr>
-              <a:t>Rel(worker, correo, "Envia la confirmacion", "API REST sobre HTTPS")</a:t>
-            </a:r>
-          </a:p>
-        </p:txBody>
-      </p:sp>
-      <p:sp>
-        <p:nvSpPr>
-          <p:cNvPr id="9" name="TextBox 8"/>
-          <p:cNvSpPr txBox="1"/>
-          <p:nvPr/>
-        </p:nvSpPr>
-        <p:spPr>
-          <a:xfrm>
-            <a:off x="457200" y="6080760"/>
-            <a:ext cx="11277295" cy="320040"/>
-          </a:xfrm>
-          <a:prstGeom prst="rect">
-            <a:avLst/>
-          </a:prstGeom>
-          <a:noFill/>
-        </p:spPr>
-        <p:txBody>
-          <a:bodyPr wrap="square">
-            <a:spAutoFit/>
-          </a:bodyPr>
-          <a:lstStyle/>
-          <a:p>
-            <a:pPr algn="ctr"/>
-            <a:r>
-              <a:rPr sz="1200" b="0" i="1">
+              <a:rPr sz="1000" b="0" i="0">
                 <a:solidFill>
                   <a:srgbClr val="666666"/>
                 </a:solidFill>
                 <a:latin typeface="Calibri"/>
               </a:rPr>
-              <a:t>La base va como «ContainerDb» y cada «Rel» lleva protocolo Y formato. Los externos, FUERA del «System_Boundary».</a:t>
-            </a:r>
-          </a:p>
-        </p:txBody>
-      </p:sp>
-      <p:sp>
-        <p:nvSpPr>
-          <p:cNvPr id="10" name="TextBox 9"/>
+              <a:t>Donde se entrega</a:t>
+            </a:r>
+          </a:p>
+        </p:txBody>
+      </p:sp>
+      <p:sp>
+        <p:nvSpPr>
+          <p:cNvPr id="26" name="TextBox 25"/>
           <p:cNvSpPr txBox="1"/>
           <p:nvPr/>
         </p:nvSpPr>
@@ -4775,7 +5209,7 @@
                 </a:solidFill>
                 <a:latin typeface="Calibri"/>
               </a:rPr>
-              <a:t>Herramientas de hoy</a:t>
+              <a:t>Del boceto a la plataforma del curso (diagrama)</a:t>
             </a:r>
           </a:p>
         </p:txBody>
@@ -4809,7 +5243,7 @@
                 </a:solidFill>
                 <a:latin typeface="Calibri"/>
               </a:rPr>
-              <a:t>Gratis · navegador o free tier · sin cuenta de pago</a:t>
+              <a:t>El diagrama se entrega como código Mermaid dentro de la plataforma del curso, no como imagen</a:t>
             </a:r>
           </a:p>
         </p:txBody>
@@ -4822,8 +5256,8 @@
         </p:nvSpPr>
         <p:spPr>
           <a:xfrm>
-            <a:off x="457200" y="1591056"/>
-            <a:ext cx="3624986" cy="2299716"/>
+            <a:off x="457200" y="1659636"/>
+            <a:ext cx="11277295" cy="1051560"/>
           </a:xfrm>
           <a:prstGeom prst="roundRect">
             <a:avLst>
@@ -4861,17 +5295,19 @@
       </p:sp>
       <p:sp>
         <p:nvSpPr>
-          <p:cNvPr id="7" name="Rectangle 6"/>
+          <p:cNvPr id="7" name="Rounded Rectangle 6"/>
           <p:cNvSpPr/>
           <p:nvPr/>
         </p:nvSpPr>
         <p:spPr>
           <a:xfrm>
-            <a:off x="457200" y="1591056"/>
-            <a:ext cx="3624986" cy="64008"/>
-          </a:xfrm>
-          <a:prstGeom prst="rect">
-            <a:avLst/>
+            <a:off x="594360" y="1965960"/>
+            <a:ext cx="438912" cy="438912"/>
+          </a:xfrm>
+          <a:prstGeom prst="roundRect">
+            <a:avLst>
+              <a:gd name="adj" fmla="val 12000"/>
+            </a:avLst>
           </a:prstGeom>
           <a:solidFill>
             <a:srgbClr val="095292"/>
@@ -4904,20 +5340,103 @@
       </p:sp>
       <p:sp>
         <p:nvSpPr>
-          <p:cNvPr id="8" name="Rectangle 7"/>
+          <p:cNvPr id="8" name="TextBox 7"/>
+          <p:cNvSpPr txBox="1"/>
+          <p:nvPr/>
+        </p:nvSpPr>
+        <p:spPr>
+          <a:xfrm>
+            <a:off x="594360" y="1965960"/>
+            <a:ext cx="438912" cy="438912"/>
+          </a:xfrm>
+          <a:prstGeom prst="rect">
+            <a:avLst/>
+          </a:prstGeom>
+          <a:noFill/>
+        </p:spPr>
+        <p:txBody>
+          <a:bodyPr wrap="square" anchor="ctr"/>
+          <a:lstStyle/>
+          <a:p>
+            <a:pPr algn="ctr"/>
+            <a:r>
+              <a:rPr sz="1600" b="1" i="0">
+                <a:solidFill>
+                  <a:srgbClr val="FFFFFF"/>
+                </a:solidFill>
+                <a:latin typeface="Calibri"/>
+              </a:rPr>
+              <a:t>1</a:t>
+            </a:r>
+          </a:p>
+        </p:txBody>
+      </p:sp>
+      <p:sp>
+        <p:nvSpPr>
+          <p:cNvPr id="9" name="TextBox 8"/>
+          <p:cNvSpPr txBox="1"/>
+          <p:nvPr/>
+        </p:nvSpPr>
+        <p:spPr>
+          <a:xfrm>
+            <a:off x="1188720" y="1751076"/>
+            <a:ext cx="10271455" cy="886968"/>
+          </a:xfrm>
+          <a:prstGeom prst="rect">
+            <a:avLst/>
+          </a:prstGeom>
+          <a:noFill/>
+        </p:spPr>
+        <p:txBody>
+          <a:bodyPr wrap="square" anchor="ctr"/>
+          <a:lstStyle/>
+          <a:p>
+            <a:r>
+              <a:rPr sz="1500" b="1" i="0">
+                <a:solidFill>
+                  <a:srgbClr val="095292"/>
+                </a:solidFill>
+                <a:latin typeface="Calibri"/>
+              </a:rPr>
+              <a:t>Disena visual</a:t>
+            </a:r>
+          </a:p>
+          <a:p>
+            <a:pPr>
+              <a:spcBef>
+                <a:spcPts val="200"/>
+              </a:spcBef>
+            </a:pPr>
+            <a:r>
+              <a:rPr sz="1300" b="0" i="0">
+                <a:solidFill>
+                  <a:srgbClr val="333333"/>
+                </a:solidFill>
+                <a:latin typeface="Calibri"/>
+              </a:rPr>
+              <a:t>Dibuja el diagrama como quieras en Excalidraw o draw.io: es mas rapido arrastrar cajas que escribir codigo, y ahi es donde piensas el modelo.</a:t>
+            </a:r>
+          </a:p>
+        </p:txBody>
+      </p:sp>
+      <p:sp>
+        <p:nvSpPr>
+          <p:cNvPr id="10" name="Rounded Rectangle 9"/>
           <p:cNvSpPr/>
           <p:nvPr/>
         </p:nvSpPr>
         <p:spPr>
           <a:xfrm>
-            <a:off x="457200" y="1655064"/>
-            <a:ext cx="3624986" cy="27432"/>
-          </a:xfrm>
-          <a:prstGeom prst="rect">
-            <a:avLst/>
+            <a:off x="457200" y="2802636"/>
+            <a:ext cx="11277295" cy="1051560"/>
+          </a:xfrm>
+          <a:prstGeom prst="roundRect">
+            <a:avLst>
+              <a:gd name="adj" fmla="val 12000"/>
+            </a:avLst>
           </a:prstGeom>
           <a:solidFill>
-            <a:srgbClr val="FFD000"/>
+            <a:srgbClr val="E8F4FA"/>
           </a:solidFill>
           <a:ln>
             <a:noFill/>
@@ -4945,40 +5464,61 @@
           </a:p>
         </p:txBody>
       </p:sp>
-      <p:pic>
-        <p:nvPicPr>
-          <p:cNvPr id="9" name="Picture 8" descr="drawio.png"/>
-          <p:cNvPicPr>
-            <a:picLocks noChangeAspect="1"/>
-          </p:cNvPicPr>
-          <p:nvPr/>
-        </p:nvPicPr>
-        <p:blipFill>
-          <a:blip r:embed="rId2"/>
-          <a:stretch>
-            <a:fillRect/>
-          </a:stretch>
-        </p:blipFill>
-        <p:spPr>
-          <a:xfrm>
-            <a:off x="1659331" y="1847087"/>
-            <a:ext cx="1220724" cy="1220724"/>
-          </a:xfrm>
-          <a:prstGeom prst="rect">
-            <a:avLst/>
-          </a:prstGeom>
-        </p:spPr>
-      </p:pic>
-      <p:sp>
-        <p:nvSpPr>
-          <p:cNvPr id="10" name="TextBox 9"/>
+      <p:sp>
+        <p:nvSpPr>
+          <p:cNvPr id="11" name="Rounded Rectangle 10"/>
+          <p:cNvSpPr/>
+          <p:nvPr/>
+        </p:nvSpPr>
+        <p:spPr>
+          <a:xfrm>
+            <a:off x="594360" y="3108960"/>
+            <a:ext cx="438912" cy="438912"/>
+          </a:xfrm>
+          <a:prstGeom prst="roundRect">
+            <a:avLst>
+              <a:gd name="adj" fmla="val 12000"/>
+            </a:avLst>
+          </a:prstGeom>
+          <a:solidFill>
+            <a:srgbClr val="095292"/>
+          </a:solidFill>
+          <a:ln>
+            <a:noFill/>
+          </a:ln>
+        </p:spPr>
+        <p:style>
+          <a:lnRef idx="1">
+            <a:schemeClr val="accent1"/>
+          </a:lnRef>
+          <a:fillRef idx="3">
+            <a:schemeClr val="accent1"/>
+          </a:fillRef>
+          <a:effectRef idx="2">
+            <a:schemeClr val="accent1"/>
+          </a:effectRef>
+          <a:fontRef idx="minor">
+            <a:schemeClr val="lt1"/>
+          </a:fontRef>
+        </p:style>
+        <p:txBody>
+          <a:bodyPr rtlCol="0" anchor="ctr"/>
+          <a:lstStyle/>
+          <a:p>
+            <a:pPr algn="ctr"/>
+          </a:p>
+        </p:txBody>
+      </p:sp>
+      <p:sp>
+        <p:nvSpPr>
+          <p:cNvPr id="12" name="TextBox 11"/>
           <p:cNvSpPr txBox="1"/>
           <p:nvPr/>
         </p:nvSpPr>
         <p:spPr>
           <a:xfrm>
-            <a:off x="530352" y="3159251"/>
-            <a:ext cx="3478682" cy="621792"/>
+            <a:off x="594360" y="3108960"/>
+            <a:ext cx="438912" cy="438912"/>
           </a:xfrm>
           <a:prstGeom prst="rect">
             <a:avLst/>
@@ -4986,48 +5526,80 @@
           <a:noFill/>
         </p:spPr>
         <p:txBody>
-          <a:bodyPr wrap="square" anchor="t"/>
+          <a:bodyPr wrap="square" anchor="ctr"/>
           <a:lstStyle/>
           <a:p>
             <a:pPr algn="ctr"/>
             <a:r>
-              <a:rPr sz="1300" b="1" i="0">
+              <a:rPr sz="1600" b="1" i="0">
+                <a:solidFill>
+                  <a:srgbClr val="FFFFFF"/>
+                </a:solidFill>
+                <a:latin typeface="Calibri"/>
+              </a:rPr>
+              <a:t>2</a:t>
+            </a:r>
+          </a:p>
+        </p:txBody>
+      </p:sp>
+      <p:sp>
+        <p:nvSpPr>
+          <p:cNvPr id="13" name="TextBox 12"/>
+          <p:cNvSpPr txBox="1"/>
+          <p:nvPr/>
+        </p:nvSpPr>
+        <p:spPr>
+          <a:xfrm>
+            <a:off x="1188720" y="2894076"/>
+            <a:ext cx="10271455" cy="886968"/>
+          </a:xfrm>
+          <a:prstGeom prst="rect">
+            <a:avLst/>
+          </a:prstGeom>
+          <a:noFill/>
+        </p:spPr>
+        <p:txBody>
+          <a:bodyPr wrap="square" anchor="ctr"/>
+          <a:lstStyle/>
+          <a:p>
+            <a:r>
+              <a:rPr sz="1500" b="1" i="0">
                 <a:solidFill>
                   <a:srgbClr val="095292"/>
                 </a:solidFill>
                 <a:latin typeface="Calibri"/>
               </a:rPr>
-              <a:t>draw.io</a:t>
-            </a:r>
-          </a:p>
-          <a:p>
-            <a:pPr algn="ctr">
+              <a:t>Traduce con IA</a:t>
+            </a:r>
+          </a:p>
+          <a:p>
+            <a:pPr>
               <a:spcBef>
                 <a:spcPts val="200"/>
               </a:spcBef>
             </a:pPr>
             <a:r>
-              <a:rPr sz="1000" b="0" i="0">
-                <a:solidFill>
-                  <a:srgbClr val="666666"/>
-                </a:solidFill>
-                <a:latin typeface="Calibri"/>
-              </a:rPr>
-              <a:t>Boceto del C4</a:t>
-            </a:r>
-          </a:p>
-        </p:txBody>
-      </p:sp>
-      <p:sp>
-        <p:nvSpPr>
-          <p:cNvPr id="11" name="Rounded Rectangle 10"/>
+              <a:rPr sz="1300" b="0" i="0">
+                <a:solidFill>
+                  <a:srgbClr val="333333"/>
+                </a:solidFill>
+                <a:latin typeface="Calibri"/>
+              </a:rPr>
+              <a:t>Copia o describe tu boceto a una IA y pidele el codigo Mermaid: «convierte este diagrama a Mermaid usando C4Container». Revisa el resultado: la IA acierta la sintaxis, no tu modelo.</a:t>
+            </a:r>
+          </a:p>
+        </p:txBody>
+      </p:sp>
+      <p:sp>
+        <p:nvSpPr>
+          <p:cNvPr id="14" name="Rounded Rectangle 13"/>
           <p:cNvSpPr/>
           <p:nvPr/>
         </p:nvSpPr>
         <p:spPr>
           <a:xfrm>
-            <a:off x="4283354" y="1591056"/>
-            <a:ext cx="3624986" cy="2299716"/>
+            <a:off x="457200" y="3945636"/>
+            <a:ext cx="11277295" cy="1051560"/>
           </a:xfrm>
           <a:prstGeom prst="roundRect">
             <a:avLst>
@@ -5065,17 +5637,19 @@
       </p:sp>
       <p:sp>
         <p:nvSpPr>
-          <p:cNvPr id="12" name="Rectangle 11"/>
+          <p:cNvPr id="15" name="Rounded Rectangle 14"/>
           <p:cNvSpPr/>
           <p:nvPr/>
         </p:nvSpPr>
         <p:spPr>
           <a:xfrm>
-            <a:off x="4283354" y="1591056"/>
-            <a:ext cx="3624986" cy="64008"/>
-          </a:xfrm>
-          <a:prstGeom prst="rect">
-            <a:avLst/>
+            <a:off x="594360" y="4251960"/>
+            <a:ext cx="438912" cy="438912"/>
+          </a:xfrm>
+          <a:prstGeom prst="roundRect">
+            <a:avLst>
+              <a:gd name="adj" fmla="val 12000"/>
+            </a:avLst>
           </a:prstGeom>
           <a:solidFill>
             <a:srgbClr val="095292"/>
@@ -5108,20 +5682,103 @@
       </p:sp>
       <p:sp>
         <p:nvSpPr>
-          <p:cNvPr id="13" name="Rectangle 12"/>
+          <p:cNvPr id="16" name="TextBox 15"/>
+          <p:cNvSpPr txBox="1"/>
+          <p:nvPr/>
+        </p:nvSpPr>
+        <p:spPr>
+          <a:xfrm>
+            <a:off x="594360" y="4251960"/>
+            <a:ext cx="438912" cy="438912"/>
+          </a:xfrm>
+          <a:prstGeom prst="rect">
+            <a:avLst/>
+          </a:prstGeom>
+          <a:noFill/>
+        </p:spPr>
+        <p:txBody>
+          <a:bodyPr wrap="square" anchor="ctr"/>
+          <a:lstStyle/>
+          <a:p>
+            <a:pPr algn="ctr"/>
+            <a:r>
+              <a:rPr sz="1600" b="1" i="0">
+                <a:solidFill>
+                  <a:srgbClr val="FFFFFF"/>
+                </a:solidFill>
+                <a:latin typeface="Calibri"/>
+              </a:rPr>
+              <a:t>3</a:t>
+            </a:r>
+          </a:p>
+        </p:txBody>
+      </p:sp>
+      <p:sp>
+        <p:nvSpPr>
+          <p:cNvPr id="17" name="TextBox 16"/>
+          <p:cNvSpPr txBox="1"/>
+          <p:nvPr/>
+        </p:nvSpPr>
+        <p:spPr>
+          <a:xfrm>
+            <a:off x="1188720" y="4037076"/>
+            <a:ext cx="10271455" cy="886968"/>
+          </a:xfrm>
+          <a:prstGeom prst="rect">
+            <a:avLst/>
+          </a:prstGeom>
+          <a:noFill/>
+        </p:spPr>
+        <p:txBody>
+          <a:bodyPr wrap="square" anchor="ctr"/>
+          <a:lstStyle/>
+          <a:p>
+            <a:r>
+              <a:rPr sz="1500" b="1" i="0">
+                <a:solidFill>
+                  <a:srgbClr val="095292"/>
+                </a:solidFill>
+                <a:latin typeface="Calibri"/>
+              </a:rPr>
+              <a:t>Pega y renderiza en la plataforma del curso</a:t>
+            </a:r>
+          </a:p>
+          <a:p>
+            <a:pPr>
+              <a:spcBef>
+                <a:spcPts val="200"/>
+              </a:spcBef>
+            </a:pPr>
+            <a:r>
+              <a:rPr sz="1300" b="0" i="0">
+                <a:solidFill>
+                  <a:srgbClr val="333333"/>
+                </a:solidFill>
+                <a:latin typeface="Calibri"/>
+              </a:rPr>
+              <a:t>Pega ese codigo en la caja de texto de la pregunta y mira como lo dibuja la plataforma. Si no renderiza, corrige ahi mismo: lo que se califica es el diagrama renderizado dentro de la plataforma del curso.</a:t>
+            </a:r>
+          </a:p>
+        </p:txBody>
+      </p:sp>
+      <p:sp>
+        <p:nvSpPr>
+          <p:cNvPr id="18" name="Rounded Rectangle 17"/>
           <p:cNvSpPr/>
           <p:nvPr/>
         </p:nvSpPr>
         <p:spPr>
           <a:xfrm>
-            <a:off x="4283354" y="1655064"/>
-            <a:ext cx="3624986" cy="27432"/>
-          </a:xfrm>
-          <a:prstGeom prst="rect">
-            <a:avLst/>
+            <a:off x="457200" y="5088636"/>
+            <a:ext cx="11277295" cy="1051560"/>
+          </a:xfrm>
+          <a:prstGeom prst="roundRect">
+            <a:avLst>
+              <a:gd name="adj" fmla="val 12000"/>
+            </a:avLst>
           </a:prstGeom>
           <a:solidFill>
-            <a:srgbClr val="FFD000"/>
+            <a:srgbClr val="E8F4FA"/>
           </a:solidFill>
           <a:ln>
             <a:noFill/>
@@ -5149,137 +5806,21 @@
           </a:p>
         </p:txBody>
       </p:sp>
-      <p:pic>
-        <p:nvPicPr>
-          <p:cNvPr id="14" name="Picture 13" descr="excalidraw.png"/>
-          <p:cNvPicPr>
-            <a:picLocks noChangeAspect="1"/>
-          </p:cNvPicPr>
-          <p:nvPr/>
-        </p:nvPicPr>
-        <p:blipFill>
-          <a:blip r:embed="rId3"/>
-          <a:stretch>
-            <a:fillRect/>
-          </a:stretch>
-        </p:blipFill>
-        <p:spPr>
-          <a:xfrm>
-            <a:off x="5485485" y="1847087"/>
-            <a:ext cx="1220724" cy="1220724"/>
-          </a:xfrm>
-          <a:prstGeom prst="rect">
-            <a:avLst/>
-          </a:prstGeom>
-        </p:spPr>
-      </p:pic>
-      <p:sp>
-        <p:nvSpPr>
-          <p:cNvPr id="15" name="TextBox 14"/>
-          <p:cNvSpPr txBox="1"/>
-          <p:nvPr/>
-        </p:nvSpPr>
-        <p:spPr>
-          <a:xfrm>
-            <a:off x="4356506" y="3159251"/>
-            <a:ext cx="3478682" cy="621792"/>
-          </a:xfrm>
-          <a:prstGeom prst="rect">
-            <a:avLst/>
-          </a:prstGeom>
-          <a:noFill/>
-        </p:spPr>
-        <p:txBody>
-          <a:bodyPr wrap="square" anchor="t"/>
-          <a:lstStyle/>
-          <a:p>
-            <a:pPr algn="ctr"/>
-            <a:r>
-              <a:rPr sz="1300" b="1" i="0">
-                <a:solidFill>
-                  <a:srgbClr val="095292"/>
-                </a:solidFill>
-                <a:latin typeface="Calibri"/>
-              </a:rPr>
-              <a:t>Excalidraw</a:t>
-            </a:r>
-          </a:p>
-          <a:p>
-            <a:pPr algn="ctr">
-              <a:spcBef>
-                <a:spcPts val="200"/>
-              </a:spcBef>
-            </a:pPr>
-            <a:r>
-              <a:rPr sz="1000" b="0" i="0">
-                <a:solidFill>
-                  <a:srgbClr val="666666"/>
-                </a:solidFill>
-                <a:latin typeface="Calibri"/>
-              </a:rPr>
-              <a:t>Boceto rapido</a:t>
-            </a:r>
-          </a:p>
-        </p:txBody>
-      </p:sp>
-      <p:sp>
-        <p:nvSpPr>
-          <p:cNvPr id="16" name="Rounded Rectangle 15"/>
+      <p:sp>
+        <p:nvSpPr>
+          <p:cNvPr id="19" name="Rounded Rectangle 18"/>
           <p:cNvSpPr/>
           <p:nvPr/>
         </p:nvSpPr>
         <p:spPr>
           <a:xfrm>
-            <a:off x="8109508" y="1591056"/>
-            <a:ext cx="3624986" cy="2299716"/>
+            <a:off x="594360" y="5394960"/>
+            <a:ext cx="438912" cy="438912"/>
           </a:xfrm>
           <a:prstGeom prst="roundRect">
             <a:avLst>
               <a:gd name="adj" fmla="val 12000"/>
             </a:avLst>
-          </a:prstGeom>
-          <a:solidFill>
-            <a:srgbClr val="F2F2F2"/>
-          </a:solidFill>
-          <a:ln>
-            <a:noFill/>
-          </a:ln>
-        </p:spPr>
-        <p:style>
-          <a:lnRef idx="1">
-            <a:schemeClr val="accent1"/>
-          </a:lnRef>
-          <a:fillRef idx="3">
-            <a:schemeClr val="accent1"/>
-          </a:fillRef>
-          <a:effectRef idx="2">
-            <a:schemeClr val="accent1"/>
-          </a:effectRef>
-          <a:fontRef idx="minor">
-            <a:schemeClr val="lt1"/>
-          </a:fontRef>
-        </p:style>
-        <p:txBody>
-          <a:bodyPr rtlCol="0" anchor="ctr"/>
-          <a:lstStyle/>
-          <a:p>
-            <a:pPr algn="ctr"/>
-          </a:p>
-        </p:txBody>
-      </p:sp>
-      <p:sp>
-        <p:nvSpPr>
-          <p:cNvPr id="17" name="Rectangle 16"/>
-          <p:cNvSpPr/>
-          <p:nvPr/>
-        </p:nvSpPr>
-        <p:spPr>
-          <a:xfrm>
-            <a:off x="8109508" y="1591056"/>
-            <a:ext cx="3624986" cy="64008"/>
-          </a:xfrm>
-          <a:prstGeom prst="rect">
-            <a:avLst/>
           </a:prstGeom>
           <a:solidFill>
             <a:srgbClr val="095292"/>
@@ -5312,81 +5853,14 @@
       </p:sp>
       <p:sp>
         <p:nvSpPr>
-          <p:cNvPr id="18" name="Rectangle 17"/>
-          <p:cNvSpPr/>
-          <p:nvPr/>
-        </p:nvSpPr>
-        <p:spPr>
-          <a:xfrm>
-            <a:off x="8109508" y="1655064"/>
-            <a:ext cx="3624986" cy="27432"/>
-          </a:xfrm>
-          <a:prstGeom prst="rect">
-            <a:avLst/>
-          </a:prstGeom>
-          <a:solidFill>
-            <a:srgbClr val="FFD000"/>
-          </a:solidFill>
-          <a:ln>
-            <a:noFill/>
-          </a:ln>
-        </p:spPr>
-        <p:style>
-          <a:lnRef idx="1">
-            <a:schemeClr val="accent1"/>
-          </a:lnRef>
-          <a:fillRef idx="3">
-            <a:schemeClr val="accent1"/>
-          </a:fillRef>
-          <a:effectRef idx="2">
-            <a:schemeClr val="accent1"/>
-          </a:effectRef>
-          <a:fontRef idx="minor">
-            <a:schemeClr val="lt1"/>
-          </a:fontRef>
-        </p:style>
-        <p:txBody>
-          <a:bodyPr rtlCol="0" anchor="ctr"/>
-          <a:lstStyle/>
-          <a:p>
-            <a:pPr algn="ctr"/>
-          </a:p>
-        </p:txBody>
-      </p:sp>
-      <p:pic>
-        <p:nvPicPr>
-          <p:cNvPr id="19" name="Picture 18" descr="mermaid.png"/>
-          <p:cNvPicPr>
-            <a:picLocks noChangeAspect="1"/>
-          </p:cNvPicPr>
-          <p:nvPr/>
-        </p:nvPicPr>
-        <p:blipFill>
-          <a:blip r:embed="rId4"/>
-          <a:stretch>
-            <a:fillRect/>
-          </a:stretch>
-        </p:blipFill>
-        <p:spPr>
-          <a:xfrm>
-            <a:off x="9311640" y="1847087"/>
-            <a:ext cx="1220724" cy="1220724"/>
-          </a:xfrm>
-          <a:prstGeom prst="rect">
-            <a:avLst/>
-          </a:prstGeom>
-        </p:spPr>
-      </p:pic>
-      <p:sp>
-        <p:nvSpPr>
           <p:cNvPr id="20" name="TextBox 19"/>
           <p:cNvSpPr txBox="1"/>
           <p:nvPr/>
         </p:nvSpPr>
         <p:spPr>
           <a:xfrm>
-            <a:off x="8182660" y="3159251"/>
-            <a:ext cx="3478682" cy="621792"/>
+            <a:off x="594360" y="5394960"/>
+            <a:ext cx="438912" cy="438912"/>
           </a:xfrm>
           <a:prstGeom prst="rect">
             <a:avLst/>
@@ -5394,245 +5868,73 @@
           <a:noFill/>
         </p:spPr>
         <p:txBody>
-          <a:bodyPr wrap="square" anchor="t"/>
+          <a:bodyPr wrap="square" anchor="ctr"/>
           <a:lstStyle/>
           <a:p>
             <a:pPr algn="ctr"/>
             <a:r>
-              <a:rPr sz="1300" b="1" i="0">
+              <a:rPr sz="1600" b="1" i="0">
+                <a:solidFill>
+                  <a:srgbClr val="FFFFFF"/>
+                </a:solidFill>
+                <a:latin typeface="Calibri"/>
+              </a:rPr>
+              <a:t>4</a:t>
+            </a:r>
+          </a:p>
+        </p:txBody>
+      </p:sp>
+      <p:sp>
+        <p:nvSpPr>
+          <p:cNvPr id="21" name="TextBox 20"/>
+          <p:cNvSpPr txBox="1"/>
+          <p:nvPr/>
+        </p:nvSpPr>
+        <p:spPr>
+          <a:xfrm>
+            <a:off x="1188720" y="5180076"/>
+            <a:ext cx="10271455" cy="886968"/>
+          </a:xfrm>
+          <a:prstGeom prst="rect">
+            <a:avLst/>
+          </a:prstGeom>
+          <a:noFill/>
+        </p:spPr>
+        <p:txBody>
+          <a:bodyPr wrap="square" anchor="ctr"/>
+          <a:lstStyle/>
+          <a:p>
+            <a:r>
+              <a:rPr sz="1500" b="1" i="0">
                 <a:solidFill>
                   <a:srgbClr val="095292"/>
                 </a:solidFill>
                 <a:latin typeface="Calibri"/>
               </a:rPr>
-              <a:t>Mermaid</a:t>
-            </a:r>
-          </a:p>
-          <a:p>
-            <a:pPr algn="ctr">
+              <a:t>Guarda el PNG para tu PI</a:t>
+            </a:r>
+          </a:p>
+          <a:p>
+            <a:pPr>
               <a:spcBef>
                 <a:spcPts val="200"/>
               </a:spcBef>
             </a:pPr>
             <a:r>
-              <a:rPr sz="1000" b="0" i="0">
-                <a:solidFill>
-                  <a:srgbClr val="666666"/>
-                </a:solidFill>
-                <a:latin typeface="Calibri"/>
-              </a:rPr>
-              <a:t>Codigo del diagrama</a:t>
-            </a:r>
-          </a:p>
-        </p:txBody>
-      </p:sp>
-      <p:sp>
-        <p:nvSpPr>
-          <p:cNvPr id="21" name="Rounded Rectangle 20"/>
-          <p:cNvSpPr/>
-          <p:nvPr/>
-        </p:nvSpPr>
-        <p:spPr>
-          <a:xfrm>
-            <a:off x="4283354" y="4055364"/>
-            <a:ext cx="3624986" cy="2299716"/>
-          </a:xfrm>
-          <a:prstGeom prst="roundRect">
-            <a:avLst>
-              <a:gd name="adj" fmla="val 12000"/>
-            </a:avLst>
-          </a:prstGeom>
-          <a:solidFill>
-            <a:srgbClr val="F2F2F2"/>
-          </a:solidFill>
-          <a:ln>
-            <a:noFill/>
-          </a:ln>
-        </p:spPr>
-        <p:style>
-          <a:lnRef idx="1">
-            <a:schemeClr val="accent1"/>
-          </a:lnRef>
-          <a:fillRef idx="3">
-            <a:schemeClr val="accent1"/>
-          </a:fillRef>
-          <a:effectRef idx="2">
-            <a:schemeClr val="accent1"/>
-          </a:effectRef>
-          <a:fontRef idx="minor">
-            <a:schemeClr val="lt1"/>
-          </a:fontRef>
-        </p:style>
-        <p:txBody>
-          <a:bodyPr rtlCol="0" anchor="ctr"/>
-          <a:lstStyle/>
-          <a:p>
-            <a:pPr algn="ctr"/>
-          </a:p>
-        </p:txBody>
-      </p:sp>
-      <p:sp>
-        <p:nvSpPr>
-          <p:cNvPr id="22" name="Rectangle 21"/>
-          <p:cNvSpPr/>
-          <p:nvPr/>
-        </p:nvSpPr>
-        <p:spPr>
-          <a:xfrm>
-            <a:off x="4283354" y="4055364"/>
-            <a:ext cx="3624986" cy="64008"/>
-          </a:xfrm>
-          <a:prstGeom prst="rect">
-            <a:avLst/>
-          </a:prstGeom>
-          <a:solidFill>
-            <a:srgbClr val="095292"/>
-          </a:solidFill>
-          <a:ln>
-            <a:noFill/>
-          </a:ln>
-        </p:spPr>
-        <p:style>
-          <a:lnRef idx="1">
-            <a:schemeClr val="accent1"/>
-          </a:lnRef>
-          <a:fillRef idx="3">
-            <a:schemeClr val="accent1"/>
-          </a:fillRef>
-          <a:effectRef idx="2">
-            <a:schemeClr val="accent1"/>
-          </a:effectRef>
-          <a:fontRef idx="minor">
-            <a:schemeClr val="lt1"/>
-          </a:fontRef>
-        </p:style>
-        <p:txBody>
-          <a:bodyPr rtlCol="0" anchor="ctr"/>
-          <a:lstStyle/>
-          <a:p>
-            <a:pPr algn="ctr"/>
-          </a:p>
-        </p:txBody>
-      </p:sp>
-      <p:sp>
-        <p:nvSpPr>
-          <p:cNvPr id="23" name="Rectangle 22"/>
-          <p:cNvSpPr/>
-          <p:nvPr/>
-        </p:nvSpPr>
-        <p:spPr>
-          <a:xfrm>
-            <a:off x="4283354" y="4119372"/>
-            <a:ext cx="3624986" cy="27432"/>
-          </a:xfrm>
-          <a:prstGeom prst="rect">
-            <a:avLst/>
-          </a:prstGeom>
-          <a:solidFill>
-            <a:srgbClr val="FFD000"/>
-          </a:solidFill>
-          <a:ln>
-            <a:noFill/>
-          </a:ln>
-        </p:spPr>
-        <p:style>
-          <a:lnRef idx="1">
-            <a:schemeClr val="accent1"/>
-          </a:lnRef>
-          <a:fillRef idx="3">
-            <a:schemeClr val="accent1"/>
-          </a:fillRef>
-          <a:effectRef idx="2">
-            <a:schemeClr val="accent1"/>
-          </a:effectRef>
-          <a:fontRef idx="minor">
-            <a:schemeClr val="lt1"/>
-          </a:fontRef>
-        </p:style>
-        <p:txBody>
-          <a:bodyPr rtlCol="0" anchor="ctr"/>
-          <a:lstStyle/>
-          <a:p>
-            <a:pPr algn="ctr"/>
-          </a:p>
-        </p:txBody>
-      </p:sp>
-      <p:pic>
-        <p:nvPicPr>
-          <p:cNvPr id="24" name="Picture 23" descr="examlab.png"/>
-          <p:cNvPicPr>
-            <a:picLocks noChangeAspect="1"/>
-          </p:cNvPicPr>
-          <p:nvPr/>
-        </p:nvPicPr>
-        <p:blipFill>
-          <a:blip r:embed="rId5"/>
-          <a:stretch>
-            <a:fillRect/>
-          </a:stretch>
-        </p:blipFill>
-        <p:spPr>
-          <a:xfrm>
-            <a:off x="5485485" y="4311396"/>
-            <a:ext cx="1220724" cy="1220724"/>
-          </a:xfrm>
-          <a:prstGeom prst="rect">
-            <a:avLst/>
-          </a:prstGeom>
-        </p:spPr>
-      </p:pic>
-      <p:sp>
-        <p:nvSpPr>
-          <p:cNvPr id="25" name="TextBox 24"/>
-          <p:cNvSpPr txBox="1"/>
-          <p:nvPr/>
-        </p:nvSpPr>
-        <p:spPr>
-          <a:xfrm>
-            <a:off x="4356506" y="5623560"/>
-            <a:ext cx="3478682" cy="621792"/>
-          </a:xfrm>
-          <a:prstGeom prst="rect">
-            <a:avLst/>
-          </a:prstGeom>
-          <a:noFill/>
-        </p:spPr>
-        <p:txBody>
-          <a:bodyPr wrap="square" anchor="t"/>
-          <a:lstStyle/>
-          <a:p>
-            <a:pPr algn="ctr"/>
-            <a:r>
-              <a:rPr sz="1300" b="1" i="0">
-                <a:solidFill>
-                  <a:srgbClr val="095292"/>
-                </a:solidFill>
-                <a:latin typeface="Calibri"/>
-              </a:rPr>
-              <a:t>la plataforma del curso</a:t>
-            </a:r>
-          </a:p>
-          <a:p>
-            <a:pPr algn="ctr">
-              <a:spcBef>
-                <a:spcPts val="200"/>
-              </a:spcBef>
-            </a:pPr>
-            <a:r>
-              <a:rPr sz="1000" b="0" i="0">
-                <a:solidFill>
-                  <a:srgbClr val="666666"/>
-                </a:solidFill>
-                <a:latin typeface="Calibri"/>
-              </a:rPr>
-              <a:t>Donde se entrega</a:t>
-            </a:r>
-          </a:p>
-        </p:txBody>
-      </p:sp>
-      <p:sp>
-        <p:nvSpPr>
-          <p:cNvPr id="26" name="TextBox 25"/>
+              <a:rPr sz="1300" b="0" i="0">
+                <a:solidFill>
+                  <a:srgbClr val="333333"/>
+                </a:solidFill>
+                <a:latin typeface="Calibri"/>
+              </a:rPr>
+              <a:t>Exporta tambien la imagen a la carpeta de tu Proyecto Integrador. Esa copia es para tu informe; no reemplaza la respuesta en la plataforma.</a:t>
+            </a:r>
+          </a:p>
+        </p:txBody>
+      </p:sp>
+      <p:sp>
+        <p:nvSpPr>
+          <p:cNvPr id="22" name="TextBox 21"/>
           <p:cNvSpPr txBox="1"/>
           <p:nvPr/>
         </p:nvSpPr>
@@ -5700,7 +6002,7 @@
         <p:spPr>
           <a:xfrm>
             <a:off x="0" y="0"/>
-            <a:ext cx="12191695" cy="1170432"/>
+            <a:ext cx="12191695" cy="960120"/>
           </a:xfrm>
           <a:prstGeom prst="rect">
             <a:avLst/>
@@ -5742,7 +6044,7 @@
         </p:nvSpPr>
         <p:spPr>
           <a:xfrm>
-            <a:off x="0" y="1170432"/>
+            <a:off x="0" y="960120"/>
             <a:ext cx="12191695" cy="41148"/>
           </a:xfrm>
           <a:prstGeom prst="rect">
@@ -5786,7 +6088,7 @@
         <p:spPr>
           <a:xfrm>
             <a:off x="457200" y="164592"/>
-            <a:ext cx="11277295" cy="384048"/>
+            <a:ext cx="11277295" cy="502920"/>
           </a:xfrm>
           <a:prstGeom prst="rect">
             <a:avLst/>
@@ -5806,7 +6108,7 @@
                 </a:solidFill>
                 <a:latin typeface="Calibri"/>
               </a:rPr>
-              <a:t>Del boceto a la plataforma del curso (diagrama)</a:t>
+              <a:t>PI CloudLite — entregable de hoy</a:t>
             </a:r>
           </a:p>
         </p:txBody>
@@ -5819,8 +6121,8 @@
         </p:nvSpPr>
         <p:spPr>
           <a:xfrm>
-            <a:off x="457200" y="566928"/>
-            <a:ext cx="11277295" cy="411480"/>
+            <a:off x="457200" y="1170432"/>
+            <a:ext cx="11277295" cy="5230368"/>
           </a:xfrm>
           <a:prstGeom prst="rect">
             <a:avLst/>
@@ -5833,705 +6135,119 @@
           </a:bodyPr>
           <a:lstStyle/>
           <a:p>
-            <a:r>
-              <a:rPr sz="1400" b="0" i="0">
-                <a:solidFill>
-                  <a:srgbClr val="B8D8EE"/>
-                </a:solidFill>
-                <a:latin typeface="Calibri"/>
-              </a:rPr>
-              <a:t>El diagrama se entrega como código Mermaid dentro de la plataforma del curso, no como imagen</a:t>
-            </a:r>
-          </a:p>
-        </p:txBody>
-      </p:sp>
-      <p:sp>
-        <p:nvSpPr>
-          <p:cNvPr id="6" name="Rounded Rectangle 5"/>
-          <p:cNvSpPr/>
-          <p:nvPr/>
-        </p:nvSpPr>
-        <p:spPr>
-          <a:xfrm>
-            <a:off x="457200" y="1659636"/>
-            <a:ext cx="11277295" cy="1051560"/>
-          </a:xfrm>
-          <a:prstGeom prst="roundRect">
-            <a:avLst>
-              <a:gd name="adj" fmla="val 12000"/>
-            </a:avLst>
-          </a:prstGeom>
-          <a:solidFill>
-            <a:srgbClr val="F2F2F2"/>
-          </a:solidFill>
-          <a:ln>
-            <a:noFill/>
-          </a:ln>
-        </p:spPr>
-        <p:style>
-          <a:lnRef idx="1">
-            <a:schemeClr val="accent1"/>
-          </a:lnRef>
-          <a:fillRef idx="3">
-            <a:schemeClr val="accent1"/>
-          </a:fillRef>
-          <a:effectRef idx="2">
-            <a:schemeClr val="accent1"/>
-          </a:effectRef>
-          <a:fontRef idx="minor">
-            <a:schemeClr val="lt1"/>
-          </a:fontRef>
-        </p:style>
-        <p:txBody>
-          <a:bodyPr rtlCol="0" anchor="ctr"/>
-          <a:lstStyle/>
-          <a:p>
-            <a:pPr algn="ctr"/>
-          </a:p>
-        </p:txBody>
-      </p:sp>
-      <p:sp>
-        <p:nvSpPr>
-          <p:cNvPr id="7" name="Rounded Rectangle 6"/>
-          <p:cNvSpPr/>
-          <p:nvPr/>
-        </p:nvSpPr>
-        <p:spPr>
-          <a:xfrm>
-            <a:off x="594360" y="1965960"/>
-            <a:ext cx="438912" cy="438912"/>
-          </a:xfrm>
-          <a:prstGeom prst="roundRect">
-            <a:avLst>
-              <a:gd name="adj" fmla="val 12000"/>
-            </a:avLst>
-          </a:prstGeom>
-          <a:solidFill>
-            <a:srgbClr val="095292"/>
-          </a:solidFill>
-          <a:ln>
-            <a:noFill/>
-          </a:ln>
-        </p:spPr>
-        <p:style>
-          <a:lnRef idx="1">
-            <a:schemeClr val="accent1"/>
-          </a:lnRef>
-          <a:fillRef idx="3">
-            <a:schemeClr val="accent1"/>
-          </a:fillRef>
-          <a:effectRef idx="2">
-            <a:schemeClr val="accent1"/>
-          </a:effectRef>
-          <a:fontRef idx="minor">
-            <a:schemeClr val="lt1"/>
-          </a:fontRef>
-        </p:style>
-        <p:txBody>
-          <a:bodyPr rtlCol="0" anchor="ctr"/>
-          <a:lstStyle/>
-          <a:p>
-            <a:pPr algn="ctr"/>
-          </a:p>
-        </p:txBody>
-      </p:sp>
-      <p:sp>
-        <p:nvSpPr>
-          <p:cNvPr id="8" name="TextBox 7"/>
-          <p:cNvSpPr txBox="1"/>
-          <p:nvPr/>
-        </p:nvSpPr>
-        <p:spPr>
-          <a:xfrm>
-            <a:off x="594360" y="1965960"/>
-            <a:ext cx="438912" cy="438912"/>
-          </a:xfrm>
-          <a:prstGeom prst="rect">
-            <a:avLst/>
-          </a:prstGeom>
-          <a:noFill/>
-        </p:spPr>
-        <p:txBody>
-          <a:bodyPr wrap="square" anchor="ctr"/>
-          <a:lstStyle/>
-          <a:p>
-            <a:pPr algn="ctr"/>
-            <a:r>
-              <a:rPr sz="1600" b="1" i="0">
-                <a:solidFill>
-                  <a:srgbClr val="FFFFFF"/>
-                </a:solidFill>
-                <a:latin typeface="Calibri"/>
-              </a:rPr>
-              <a:t>1</a:t>
-            </a:r>
-          </a:p>
-        </p:txBody>
-      </p:sp>
-      <p:sp>
-        <p:nvSpPr>
-          <p:cNvPr id="9" name="TextBox 8"/>
-          <p:cNvSpPr txBox="1"/>
-          <p:nvPr/>
-        </p:nvSpPr>
-        <p:spPr>
-          <a:xfrm>
-            <a:off x="1188720" y="1751076"/>
-            <a:ext cx="10271455" cy="886968"/>
-          </a:xfrm>
-          <a:prstGeom prst="rect">
-            <a:avLst/>
-          </a:prstGeom>
-          <a:noFill/>
-        </p:spPr>
-        <p:txBody>
-          <a:bodyPr wrap="square" anchor="ctr"/>
-          <a:lstStyle/>
-          <a:p>
-            <a:r>
-              <a:rPr sz="1500" b="1" i="0">
-                <a:solidFill>
-                  <a:srgbClr val="095292"/>
-                </a:solidFill>
-                <a:latin typeface="Calibri"/>
-              </a:rPr>
-              <a:t>Disena visual</a:t>
-            </a:r>
-          </a:p>
-          <a:p>
             <a:pPr>
-              <a:spcBef>
-                <a:spcPts val="200"/>
-              </a:spcBef>
+              <a:spcAft>
+                <a:spcPts val="800"/>
+              </a:spcAft>
             </a:pPr>
             <a:r>
-              <a:rPr sz="1300" b="0" i="0">
+              <a:rPr sz="2000" b="0" i="0">
                 <a:solidFill>
                   <a:srgbClr val="333333"/>
                 </a:solidFill>
                 <a:latin typeface="Calibri"/>
               </a:rPr>
-              <a:t>Dibuja el diagrama como quieras en Excalidraw o draw.io: es mas rapido arrastrar cajas que escribir codigo, y ahi es donde piensas el modelo.</a:t>
-            </a:r>
-          </a:p>
-        </p:txBody>
-      </p:sp>
-      <p:sp>
-        <p:nvSpPr>
-          <p:cNvPr id="10" name="Rounded Rectangle 9"/>
-          <p:cNvSpPr/>
-          <p:nvPr/>
-        </p:nvSpPr>
-        <p:spPr>
-          <a:xfrm>
-            <a:off x="457200" y="2802636"/>
-            <a:ext cx="11277295" cy="1051560"/>
-          </a:xfrm>
-          <a:prstGeom prst="roundRect">
-            <a:avLst>
-              <a:gd name="adj" fmla="val 12000"/>
-            </a:avLst>
-          </a:prstGeom>
-          <a:solidFill>
-            <a:srgbClr val="E8F4FA"/>
-          </a:solidFill>
-          <a:ln>
-            <a:noFill/>
-          </a:ln>
-        </p:spPr>
-        <p:style>
-          <a:lnRef idx="1">
-            <a:schemeClr val="accent1"/>
-          </a:lnRef>
-          <a:fillRef idx="3">
-            <a:schemeClr val="accent1"/>
-          </a:fillRef>
-          <a:effectRef idx="2">
-            <a:schemeClr val="accent1"/>
-          </a:effectRef>
-          <a:fontRef idx="minor">
-            <a:schemeClr val="lt1"/>
-          </a:fontRef>
-        </p:style>
-        <p:txBody>
-          <a:bodyPr rtlCol="0" anchor="ctr"/>
-          <a:lstStyle/>
-          <a:p>
-            <a:pPr algn="ctr"/>
-          </a:p>
-        </p:txBody>
-      </p:sp>
-      <p:sp>
-        <p:nvSpPr>
-          <p:cNvPr id="11" name="Rounded Rectangle 10"/>
-          <p:cNvSpPr/>
-          <p:nvPr/>
-        </p:nvSpPr>
-        <p:spPr>
-          <a:xfrm>
-            <a:off x="594360" y="3108960"/>
-            <a:ext cx="438912" cy="438912"/>
-          </a:xfrm>
-          <a:prstGeom prst="roundRect">
-            <a:avLst>
-              <a:gd name="adj" fmla="val 12000"/>
-            </a:avLst>
-          </a:prstGeom>
-          <a:solidFill>
-            <a:srgbClr val="095292"/>
-          </a:solidFill>
-          <a:ln>
-            <a:noFill/>
-          </a:ln>
-        </p:spPr>
-        <p:style>
-          <a:lnRef idx="1">
-            <a:schemeClr val="accent1"/>
-          </a:lnRef>
-          <a:fillRef idx="3">
-            <a:schemeClr val="accent1"/>
-          </a:fillRef>
-          <a:effectRef idx="2">
-            <a:schemeClr val="accent1"/>
-          </a:effectRef>
-          <a:fontRef idx="minor">
-            <a:schemeClr val="lt1"/>
-          </a:fontRef>
-        </p:style>
-        <p:txBody>
-          <a:bodyPr rtlCol="0" anchor="ctr"/>
-          <a:lstStyle/>
-          <a:p>
-            <a:pPr algn="ctr"/>
-          </a:p>
-        </p:txBody>
-      </p:sp>
-      <p:sp>
-        <p:nvSpPr>
-          <p:cNvPr id="12" name="TextBox 11"/>
-          <p:cNvSpPr txBox="1"/>
-          <p:nvPr/>
-        </p:nvSpPr>
-        <p:spPr>
-          <a:xfrm>
-            <a:off x="594360" y="3108960"/>
-            <a:ext cx="438912" cy="438912"/>
-          </a:xfrm>
-          <a:prstGeom prst="rect">
-            <a:avLst/>
-          </a:prstGeom>
-          <a:noFill/>
-        </p:spPr>
-        <p:txBody>
-          <a:bodyPr wrap="square" anchor="ctr"/>
-          <a:lstStyle/>
-          <a:p>
-            <a:pPr algn="ctr"/>
-            <a:r>
-              <a:rPr sz="1600" b="1" i="0">
-                <a:solidFill>
-                  <a:srgbClr val="FFFFFF"/>
-                </a:solidFill>
-                <a:latin typeface="Calibri"/>
-              </a:rPr>
-              <a:t>2</a:t>
-            </a:r>
-          </a:p>
-        </p:txBody>
-      </p:sp>
-      <p:sp>
-        <p:nvSpPr>
-          <p:cNvPr id="13" name="TextBox 12"/>
-          <p:cNvSpPr txBox="1"/>
-          <p:nvPr/>
-        </p:nvSpPr>
-        <p:spPr>
-          <a:xfrm>
-            <a:off x="1188720" y="2894076"/>
-            <a:ext cx="10271455" cy="886968"/>
-          </a:xfrm>
-          <a:prstGeom prst="rect">
-            <a:avLst/>
-          </a:prstGeom>
-          <a:noFill/>
-        </p:spPr>
-        <p:txBody>
-          <a:bodyPr wrap="square" anchor="ctr"/>
-          <a:lstStyle/>
-          <a:p>
-            <a:r>
-              <a:rPr sz="1500" b="1" i="0">
-                <a:solidFill>
-                  <a:srgbClr val="095292"/>
-                </a:solidFill>
-                <a:latin typeface="Calibri"/>
-              </a:rPr>
-              <a:t>Traduce con IA</a:t>
+              <a:t>–   </a:t>
+            </a:r>
+            <a:r>
+              <a:rPr sz="2000" b="1" i="0">
+                <a:solidFill>
+                  <a:srgbClr val="333333"/>
+                </a:solidFill>
+                <a:latin typeface="Calibri"/>
+              </a:rPr>
+              <a:t>Entregable:</a:t>
+            </a:r>
+            <a:r>
+              <a:rPr sz="2000" b="0" i="0">
+                <a:solidFill>
+                  <a:srgbClr val="333333"/>
+                </a:solidFill>
+                <a:latin typeface="Calibri"/>
+              </a:rPr>
+              <a:t> Diagrama C4 Container en Mermaid + tabla de 3 contratos + 3 riesgos de distribución</a:t>
             </a:r>
           </a:p>
           <a:p>
             <a:pPr>
-              <a:spcBef>
-                <a:spcPts val="200"/>
-              </a:spcBef>
+              <a:spcAft>
+                <a:spcPts val="800"/>
+              </a:spcAft>
             </a:pPr>
             <a:r>
-              <a:rPr sz="1300" b="0" i="0">
+              <a:rPr sz="2000" b="0" i="0">
                 <a:solidFill>
                   <a:srgbClr val="333333"/>
                 </a:solidFill>
                 <a:latin typeface="Calibri"/>
               </a:rPr>
-              <a:t>Copia o describe tu boceto a una IA y pidele el codigo Mermaid: «convierte este diagrama a Mermaid usando C4Container». Revisa el resultado: la IA acierta la sintaxis, no tu modelo.</a:t>
-            </a:r>
-          </a:p>
-        </p:txBody>
-      </p:sp>
-      <p:sp>
-        <p:nvSpPr>
-          <p:cNvPr id="14" name="Rounded Rectangle 13"/>
-          <p:cNvSpPr/>
-          <p:nvPr/>
-        </p:nvSpPr>
-        <p:spPr>
-          <a:xfrm>
-            <a:off x="457200" y="3945636"/>
-            <a:ext cx="11277295" cy="1051560"/>
-          </a:xfrm>
-          <a:prstGeom prst="roundRect">
-            <a:avLst>
-              <a:gd name="adj" fmla="val 12000"/>
-            </a:avLst>
-          </a:prstGeom>
-          <a:solidFill>
-            <a:srgbClr val="F2F2F2"/>
-          </a:solidFill>
-          <a:ln>
-            <a:noFill/>
-          </a:ln>
-        </p:spPr>
-        <p:style>
-          <a:lnRef idx="1">
-            <a:schemeClr val="accent1"/>
-          </a:lnRef>
-          <a:fillRef idx="3">
-            <a:schemeClr val="accent1"/>
-          </a:fillRef>
-          <a:effectRef idx="2">
-            <a:schemeClr val="accent1"/>
-          </a:effectRef>
-          <a:fontRef idx="minor">
-            <a:schemeClr val="lt1"/>
-          </a:fontRef>
-        </p:style>
-        <p:txBody>
-          <a:bodyPr rtlCol="0" anchor="ctr"/>
-          <a:lstStyle/>
-          <a:p>
-            <a:pPr algn="ctr"/>
-          </a:p>
-        </p:txBody>
-      </p:sp>
-      <p:sp>
-        <p:nvSpPr>
-          <p:cNvPr id="15" name="Rounded Rectangle 14"/>
-          <p:cNvSpPr/>
-          <p:nvPr/>
-        </p:nvSpPr>
-        <p:spPr>
-          <a:xfrm>
-            <a:off x="594360" y="4251960"/>
-            <a:ext cx="438912" cy="438912"/>
-          </a:xfrm>
-          <a:prstGeom prst="roundRect">
-            <a:avLst>
-              <a:gd name="adj" fmla="val 12000"/>
-            </a:avLst>
-          </a:prstGeom>
-          <a:solidFill>
-            <a:srgbClr val="095292"/>
-          </a:solidFill>
-          <a:ln>
-            <a:noFill/>
-          </a:ln>
-        </p:spPr>
-        <p:style>
-          <a:lnRef idx="1">
-            <a:schemeClr val="accent1"/>
-          </a:lnRef>
-          <a:fillRef idx="3">
-            <a:schemeClr val="accent1"/>
-          </a:fillRef>
-          <a:effectRef idx="2">
-            <a:schemeClr val="accent1"/>
-          </a:effectRef>
-          <a:fontRef idx="minor">
-            <a:schemeClr val="lt1"/>
-          </a:fontRef>
-        </p:style>
-        <p:txBody>
-          <a:bodyPr rtlCol="0" anchor="ctr"/>
-          <a:lstStyle/>
-          <a:p>
-            <a:pPr algn="ctr"/>
-          </a:p>
-        </p:txBody>
-      </p:sp>
-      <p:sp>
-        <p:nvSpPr>
-          <p:cNvPr id="16" name="TextBox 15"/>
-          <p:cNvSpPr txBox="1"/>
-          <p:nvPr/>
-        </p:nvSpPr>
-        <p:spPr>
-          <a:xfrm>
-            <a:off x="594360" y="4251960"/>
-            <a:ext cx="438912" cy="438912"/>
-          </a:xfrm>
-          <a:prstGeom prst="rect">
-            <a:avLst/>
-          </a:prstGeom>
-          <a:noFill/>
-        </p:spPr>
-        <p:txBody>
-          <a:bodyPr wrap="square" anchor="ctr"/>
-          <a:lstStyle/>
-          <a:p>
-            <a:pPr algn="ctr"/>
-            <a:r>
-              <a:rPr sz="1600" b="1" i="0">
-                <a:solidFill>
-                  <a:srgbClr val="FFFFFF"/>
-                </a:solidFill>
-                <a:latin typeface="Calibri"/>
-              </a:rPr>
-              <a:t>3</a:t>
-            </a:r>
-          </a:p>
-        </p:txBody>
-      </p:sp>
-      <p:sp>
-        <p:nvSpPr>
-          <p:cNvPr id="17" name="TextBox 16"/>
-          <p:cNvSpPr txBox="1"/>
-          <p:nvPr/>
-        </p:nvSpPr>
-        <p:spPr>
-          <a:xfrm>
-            <a:off x="1188720" y="4037076"/>
-            <a:ext cx="10271455" cy="886968"/>
-          </a:xfrm>
-          <a:prstGeom prst="rect">
-            <a:avLst/>
-          </a:prstGeom>
-          <a:noFill/>
-        </p:spPr>
-        <p:txBody>
-          <a:bodyPr wrap="square" anchor="ctr"/>
-          <a:lstStyle/>
-          <a:p>
-            <a:r>
-              <a:rPr sz="1500" b="1" i="0">
-                <a:solidFill>
-                  <a:srgbClr val="095292"/>
-                </a:solidFill>
-                <a:latin typeface="Calibri"/>
-              </a:rPr>
-              <a:t>Pega y renderiza en la plataforma del curso</a:t>
+              <a:t>–   Herramienta: </a:t>
+            </a:r>
+            <a:r>
+              <a:rPr sz="2000" b="1" i="0">
+                <a:solidFill>
+                  <a:srgbClr val="333333"/>
+                </a:solidFill>
+                <a:latin typeface="Calibri"/>
+              </a:rPr>
+              <a:t>draw.io o Excalidraw para bocetar · Mermaid dentro de la plataforma del curso para entregar</a:t>
             </a:r>
           </a:p>
           <a:p>
             <a:pPr>
-              <a:spcBef>
-                <a:spcPts val="200"/>
-              </a:spcBef>
+              <a:spcAft>
+                <a:spcPts val="800"/>
+              </a:spcAft>
             </a:pPr>
             <a:r>
-              <a:rPr sz="1300" b="0" i="0">
+              <a:rPr sz="2000" b="0" i="0">
                 <a:solidFill>
                   <a:srgbClr val="333333"/>
                 </a:solidFill>
                 <a:latin typeface="Calibri"/>
               </a:rPr>
-              <a:t>Pega ese codigo en la caja de texto de la pregunta y mira como lo dibuja la plataforma. Si no renderiza, corrige ahi mismo: lo que se califica es el diagrama renderizado dentro de la plataforma del curso.</a:t>
-            </a:r>
-          </a:p>
-        </p:txBody>
-      </p:sp>
-      <p:sp>
-        <p:nvSpPr>
-          <p:cNvPr id="18" name="Rounded Rectangle 17"/>
-          <p:cNvSpPr/>
-          <p:nvPr/>
-        </p:nvSpPr>
-        <p:spPr>
-          <a:xfrm>
-            <a:off x="457200" y="5088636"/>
-            <a:ext cx="11277295" cy="1051560"/>
-          </a:xfrm>
-          <a:prstGeom prst="roundRect">
-            <a:avLst>
-              <a:gd name="adj" fmla="val 12000"/>
-            </a:avLst>
-          </a:prstGeom>
-          <a:solidFill>
-            <a:srgbClr val="E8F4FA"/>
-          </a:solidFill>
-          <a:ln>
-            <a:noFill/>
-          </a:ln>
-        </p:spPr>
-        <p:style>
-          <a:lnRef idx="1">
-            <a:schemeClr val="accent1"/>
-          </a:lnRef>
-          <a:fillRef idx="3">
-            <a:schemeClr val="accent1"/>
-          </a:fillRef>
-          <a:effectRef idx="2">
-            <a:schemeClr val="accent1"/>
-          </a:effectRef>
-          <a:fontRef idx="minor">
-            <a:schemeClr val="lt1"/>
-          </a:fontRef>
-        </p:style>
-        <p:txBody>
-          <a:bodyPr rtlCol="0" anchor="ctr"/>
-          <a:lstStyle/>
-          <a:p>
-            <a:pPr algn="ctr"/>
-          </a:p>
-        </p:txBody>
-      </p:sp>
-      <p:sp>
-        <p:nvSpPr>
-          <p:cNvPr id="19" name="Rounded Rectangle 18"/>
-          <p:cNvSpPr/>
-          <p:nvPr/>
-        </p:nvSpPr>
-        <p:spPr>
-          <a:xfrm>
-            <a:off x="594360" y="5394960"/>
-            <a:ext cx="438912" cy="438912"/>
-          </a:xfrm>
-          <a:prstGeom prst="roundRect">
-            <a:avLst>
-              <a:gd name="adj" fmla="val 12000"/>
-            </a:avLst>
-          </a:prstGeom>
-          <a:solidFill>
-            <a:srgbClr val="095292"/>
-          </a:solidFill>
-          <a:ln>
-            <a:noFill/>
-          </a:ln>
-        </p:spPr>
-        <p:style>
-          <a:lnRef idx="1">
-            <a:schemeClr val="accent1"/>
-          </a:lnRef>
-          <a:fillRef idx="3">
-            <a:schemeClr val="accent1"/>
-          </a:fillRef>
-          <a:effectRef idx="2">
-            <a:schemeClr val="accent1"/>
-          </a:effectRef>
-          <a:fontRef idx="minor">
-            <a:schemeClr val="lt1"/>
-          </a:fontRef>
-        </p:style>
-        <p:txBody>
-          <a:bodyPr rtlCol="0" anchor="ctr"/>
-          <a:lstStyle/>
-          <a:p>
-            <a:pPr algn="ctr"/>
-          </a:p>
-        </p:txBody>
-      </p:sp>
-      <p:sp>
-        <p:nvSpPr>
-          <p:cNvPr id="20" name="TextBox 19"/>
-          <p:cNvSpPr txBox="1"/>
-          <p:nvPr/>
-        </p:nvSpPr>
-        <p:spPr>
-          <a:xfrm>
-            <a:off x="594360" y="5394960"/>
-            <a:ext cx="438912" cy="438912"/>
-          </a:xfrm>
-          <a:prstGeom prst="rect">
-            <a:avLst/>
-          </a:prstGeom>
-          <a:noFill/>
-        </p:spPr>
-        <p:txBody>
-          <a:bodyPr wrap="square" anchor="ctr"/>
-          <a:lstStyle/>
-          <a:p>
-            <a:pPr algn="ctr"/>
-            <a:r>
-              <a:rPr sz="1600" b="1" i="0">
-                <a:solidFill>
-                  <a:srgbClr val="FFFFFF"/>
-                </a:solidFill>
-                <a:latin typeface="Calibri"/>
-              </a:rPr>
-              <a:t>4</a:t>
-            </a:r>
-          </a:p>
-        </p:txBody>
-      </p:sp>
-      <p:sp>
-        <p:nvSpPr>
-          <p:cNvPr id="21" name="TextBox 20"/>
-          <p:cNvSpPr txBox="1"/>
-          <p:nvPr/>
-        </p:nvSpPr>
-        <p:spPr>
-          <a:xfrm>
-            <a:off x="1188720" y="5180076"/>
-            <a:ext cx="10271455" cy="886968"/>
-          </a:xfrm>
-          <a:prstGeom prst="rect">
-            <a:avLst/>
-          </a:prstGeom>
-          <a:noFill/>
-        </p:spPr>
-        <p:txBody>
-          <a:bodyPr wrap="square" anchor="ctr"/>
-          <a:lstStyle/>
-          <a:p>
-            <a:r>
-              <a:rPr sz="1500" b="1" i="0">
-                <a:solidFill>
-                  <a:srgbClr val="095292"/>
-                </a:solidFill>
-                <a:latin typeface="Calibri"/>
-              </a:rPr>
-              <a:t>Guarda el PNG para tu PI</a:t>
+              <a:t>–   Todo lo que construyan hoy entra al </a:t>
+            </a:r>
+            <a:r>
+              <a:rPr sz="2000" b="1" i="0">
+                <a:solidFill>
+                  <a:srgbClr val="333333"/>
+                </a:solidFill>
+                <a:latin typeface="Calibri"/>
+              </a:rPr>
+              <a:t>informe/repo del PI</a:t>
+            </a:r>
+            <a:r>
+              <a:rPr sz="2000" b="0" i="0">
+                <a:solidFill>
+                  <a:srgbClr val="333333"/>
+                </a:solidFill>
+                <a:latin typeface="Calibri"/>
+              </a:rPr>
+              <a:t> (no es lab suelto).</a:t>
             </a:r>
           </a:p>
           <a:p>
             <a:pPr>
-              <a:spcBef>
-                <a:spcPts val="200"/>
-              </a:spcBef>
+              <a:spcAft>
+                <a:spcPts val="800"/>
+              </a:spcAft>
             </a:pPr>
             <a:r>
-              <a:rPr sz="1300" b="0" i="0">
+              <a:rPr sz="2000" b="0" i="0">
                 <a:solidFill>
                   <a:srgbClr val="333333"/>
                 </a:solidFill>
                 <a:latin typeface="Calibri"/>
               </a:rPr>
-              <a:t>Exporta tambien la imagen a la carpeta de tu Proyecto Integrador. Esa copia es para tu informe; no reemplaza la respuesta en la plataforma.</a:t>
-            </a:r>
-          </a:p>
-        </p:txBody>
-      </p:sp>
-      <p:sp>
-        <p:nvSpPr>
-          <p:cNvPr id="22" name="TextBox 21"/>
+              <a:t>–   Individual por defecto · el docente puede autorizar equipos de 2–3; la entrega en la plataforma del curso siempre es individual.</a:t>
+            </a:r>
+          </a:p>
+        </p:txBody>
+      </p:sp>
+      <p:sp>
+        <p:nvSpPr>
+          <p:cNvPr id="6" name="TextBox 5"/>
           <p:cNvSpPr txBox="1"/>
           <p:nvPr/>
         </p:nvSpPr>
@@ -6705,7 +6421,7 @@
                 </a:solidFill>
                 <a:latin typeface="Calibri"/>
               </a:rPr>
-              <a:t>Taller PI (paso a paso)</a:t>
+              <a:t>Manos a la obra (paso a paso)</a:t>
             </a:r>
           </a:p>
         </p:txBody>
@@ -7979,7 +7695,7 @@
                 </a:solidFill>
                 <a:latin typeface="Calibri"/>
               </a:rPr>
-              <a:t> Taller guiado PI (demo en vivo + avance individual).</a:t>
+              <a:t> Trabajo guiado del PI (demo en vivo + avance individual).</a:t>
             </a:r>
           </a:p>
           <a:p>
@@ -8516,7 +8232,7 @@
                 </a:solidFill>
                 <a:latin typeface="Calibri"/>
               </a:rPr>
-              <a:t>PI CloudLite — entregable de hoy</a:t>
+              <a:t>Monolito vs microservicios (para el PI)</a:t>
             </a:r>
           </a:p>
         </p:txBody>
@@ -8555,25 +8271,7 @@
                 </a:solidFill>
                 <a:latin typeface="Calibri"/>
               </a:rPr>
-              <a:t>–   </a:t>
-            </a:r>
-            <a:r>
-              <a:rPr sz="2000" b="1" i="0">
-                <a:solidFill>
-                  <a:srgbClr val="333333"/>
-                </a:solidFill>
-                <a:latin typeface="Calibri"/>
-              </a:rPr>
-              <a:t>Entregable:</a:t>
-            </a:r>
-            <a:r>
-              <a:rPr sz="2000" b="0" i="0">
-                <a:solidFill>
-                  <a:srgbClr val="333333"/>
-                </a:solidFill>
-                <a:latin typeface="Calibri"/>
-              </a:rPr>
-              <a:t> Diagrama C4 Container en Mermaid + tabla de 3 contratos + 3 riesgos de distribución</a:t>
+              <a:t>–   Monolito modular ≠ malo: a menudo mejor para equipos pequeños.</a:t>
             </a:r>
           </a:p>
           <a:p>
@@ -8589,7 +8287,7 @@
                 </a:solidFill>
                 <a:latin typeface="Calibri"/>
               </a:rPr>
-              <a:t>–   Herramienta: </a:t>
+              <a:t>–   Microservicio: frontera de </a:t>
             </a:r>
             <a:r>
               <a:rPr sz="2000" b="1" i="0">
@@ -8598,7 +8296,16 @@
                 </a:solidFill>
                 <a:latin typeface="Calibri"/>
               </a:rPr>
-              <a:t>draw.io o Excalidraw para bocetar · Mermaid dentro de la plataforma del curso para entregar</a:t>
+              <a:t>despliegue</a:t>
+            </a:r>
+            <a:r>
+              <a:rPr sz="2000" b="0" i="0">
+                <a:solidFill>
+                  <a:srgbClr val="333333"/>
+                </a:solidFill>
+                <a:latin typeface="Calibri"/>
+              </a:rPr>
+              <a:t> e independencia de datos (ideal).</a:t>
             </a:r>
           </a:p>
           <a:p>
@@ -8614,25 +8321,7 @@
                 </a:solidFill>
                 <a:latin typeface="Calibri"/>
               </a:rPr>
-              <a:t>–   Todo lo que construyan hoy entra al </a:t>
-            </a:r>
-            <a:r>
-              <a:rPr sz="2000" b="1" i="0">
-                <a:solidFill>
-                  <a:srgbClr val="333333"/>
-                </a:solidFill>
-                <a:latin typeface="Calibri"/>
-              </a:rPr>
-              <a:t>informe/repo del PI</a:t>
-            </a:r>
-            <a:r>
-              <a:rPr sz="2000" b="0" i="0">
-                <a:solidFill>
-                  <a:srgbClr val="333333"/>
-                </a:solidFill>
-                <a:latin typeface="Calibri"/>
-              </a:rPr>
-              <a:t> (no es lab suelto).</a:t>
+              <a:t>–   Anti-patrón: 12 microservicios para 3 estudiantes = diagrama teatro.</a:t>
             </a:r>
           </a:p>
           <a:p>
@@ -8648,7 +8337,93 @@
                 </a:solidFill>
                 <a:latin typeface="Calibri"/>
               </a:rPr>
-              <a:t>–   Individual por defecto · el docente puede autorizar equipos de 2–3; la entrega en la plataforma del curso siempre es individual.</a:t>
+              <a:t>–   La decisión se escribe en </a:t>
+            </a:r>
+            <a:r>
+              <a:rPr sz="2000" b="1" i="0">
+                <a:solidFill>
+                  <a:srgbClr val="333333"/>
+                </a:solidFill>
+                <a:latin typeface="Calibri"/>
+              </a:rPr>
+              <a:t>una sola frase</a:t>
+            </a:r>
+            <a:r>
+              <a:rPr sz="2000" b="0" i="0">
+                <a:solidFill>
+                  <a:srgbClr val="333333"/>
+                </a:solidFill>
+                <a:latin typeface="Calibri"/>
+              </a:rPr>
+              <a:t> y se elige UNA: «un poco de los dos» no es una decisión.</a:t>
+            </a:r>
+          </a:p>
+          <a:p>
+            <a:pPr>
+              <a:spcAft>
+                <a:spcPts val="800"/>
+              </a:spcAft>
+            </a:pPr>
+            <a:r>
+              <a:rPr sz="2000" b="0" i="0">
+                <a:solidFill>
+                  <a:srgbClr val="333333"/>
+                </a:solidFill>
+                <a:latin typeface="Calibri"/>
+              </a:rPr>
+              <a:t>–   Se sostiene con </a:t>
+            </a:r>
+            <a:r>
+              <a:rPr sz="2000" b="1" i="0">
+                <a:solidFill>
+                  <a:srgbClr val="333333"/>
+                </a:solidFill>
+                <a:latin typeface="Calibri"/>
+              </a:rPr>
+              <a:t>dos</a:t>
+            </a:r>
+            <a:r>
+              <a:rPr sz="2000" b="0" i="0">
+                <a:solidFill>
+                  <a:srgbClr val="333333"/>
+                </a:solidFill>
+                <a:latin typeface="Calibri"/>
+              </a:rPr>
+              <a:t> criterios: tamaño del equipo (con número y plazo) y acoplamiento (qué partes cambian juntas).</a:t>
+            </a:r>
+          </a:p>
+          <a:p>
+            <a:pPr>
+              <a:spcAft>
+                <a:spcPts val="800"/>
+              </a:spcAft>
+            </a:pPr>
+            <a:r>
+              <a:rPr sz="2000" b="0" i="0">
+                <a:solidFill>
+                  <a:srgbClr val="333333"/>
+                </a:solidFill>
+                <a:latin typeface="Calibri"/>
+              </a:rPr>
+              <a:t>–   Y con lo que se gana </a:t>
+            </a:r>
+            <a:r>
+              <a:rPr sz="2000" b="1" i="0">
+                <a:solidFill>
+                  <a:srgbClr val="333333"/>
+                </a:solidFill>
+                <a:latin typeface="Calibri"/>
+              </a:rPr>
+              <a:t>y</a:t>
+            </a:r>
+            <a:r>
+              <a:rPr sz="2000" b="0" i="0">
+                <a:solidFill>
+                  <a:srgbClr val="333333"/>
+                </a:solidFill>
+                <a:latin typeface="Calibri"/>
+              </a:rPr>
+              <a:t> lo que se pierde: sin la segunda mitad, no hubo decisión.</a:t>
             </a:r>
           </a:p>
         </p:txBody>
@@ -8829,7 +8604,7 @@
                 </a:solidFill>
                 <a:latin typeface="Calibri"/>
               </a:rPr>
-              <a:t>Monolito vs microservicios (para el PI)</a:t>
+              <a:t>C4-lite: del Context a los Containers</a:t>
             </a:r>
           </a:p>
         </p:txBody>
@@ -8868,7 +8643,25 @@
                 </a:solidFill>
                 <a:latin typeface="Calibri"/>
               </a:rPr>
-              <a:t>–   Monolito modular ≠ malo: a menudo mejor para equipos pequeños.</a:t>
+              <a:t>–   Se abre la ÚNICA caja del Context de la Clase 1: los actores y los externos siguen ahí, </a:t>
+            </a:r>
+            <a:r>
+              <a:rPr sz="2000" b="1" i="0">
+                <a:solidFill>
+                  <a:srgbClr val="333333"/>
+                </a:solidFill>
+                <a:latin typeface="Calibri"/>
+              </a:rPr>
+              <a:t>fuera</a:t>
+            </a:r>
+            <a:r>
+              <a:rPr sz="2000" b="0" i="0">
+                <a:solidFill>
+                  <a:srgbClr val="333333"/>
+                </a:solidFill>
+                <a:latin typeface="Calibri"/>
+              </a:rPr>
+              <a:t> del sistema.</a:t>
             </a:r>
           </a:p>
           <a:p>
@@ -8884,7 +8677,7 @@
                 </a:solidFill>
                 <a:latin typeface="Calibri"/>
               </a:rPr>
-              <a:t>–   Microservicio: frontera de </a:t>
+              <a:t>–   </a:t>
             </a:r>
             <a:r>
               <a:rPr sz="2000" b="1" i="0">
@@ -8893,7 +8686,7 @@
                 </a:solidFill>
                 <a:latin typeface="Calibri"/>
               </a:rPr>
-              <a:t>despliegue</a:t>
+              <a:t>Tres datos por caja, obligatorios:</a:t>
             </a:r>
             <a:r>
               <a:rPr sz="2000" b="0" i="0">
@@ -8902,7 +8695,7 @@
                 </a:solidFill>
                 <a:latin typeface="Calibri"/>
               </a:rPr>
-              <a:t> e independencia de datos (ideal).</a:t>
+              <a:t> nombre · tecnología · responsabilidad en una frase.</a:t>
             </a:r>
           </a:p>
           <a:p>
@@ -8918,7 +8711,25 @@
                 </a:solidFill>
                 <a:latin typeface="Calibri"/>
               </a:rPr>
-              <a:t>–   Anti-patrón: 12 microservicios para 3 estudiantes = diagrama teatro.</a:t>
+              <a:t>–   Lo que guarda datos se marca como </a:t>
+            </a:r>
+            <a:r>
+              <a:rPr sz="2000" b="1" i="0">
+                <a:solidFill>
+                  <a:srgbClr val="333333"/>
+                </a:solidFill>
+                <a:latin typeface="Calibri"/>
+              </a:rPr>
+              <a:t>almacén</a:t>
+            </a:r>
+            <a:r>
+              <a:rPr sz="2000" b="0" i="0">
+                <a:solidFill>
+                  <a:srgbClr val="333333"/>
+                </a:solidFill>
+                <a:latin typeface="Calibri"/>
+              </a:rPr>
+              <a:t> («ContainerDb»), no como una caja más.</a:t>
             </a:r>
           </a:p>
           <a:p>
@@ -8934,7 +8745,7 @@
                 </a:solidFill>
                 <a:latin typeface="Calibri"/>
               </a:rPr>
-              <a:t>–   La decisión se escribe en </a:t>
+              <a:t>–   Los nombres son </a:t>
             </a:r>
             <a:r>
               <a:rPr sz="2000" b="1" i="0">
@@ -8943,7 +8754,7 @@
                 </a:solidFill>
                 <a:latin typeface="Calibri"/>
               </a:rPr>
-              <a:t>una sola frase</a:t>
+              <a:t>idénticos</a:t>
             </a:r>
             <a:r>
               <a:rPr sz="2000" b="0" i="0">
@@ -8952,7 +8763,7 @@
                 </a:solidFill>
                 <a:latin typeface="Calibri"/>
               </a:rPr>
-              <a:t> y se elige UNA: «un poco de los dos» no es una decisión.</a:t>
+              <a:t> a los del C4 Context: si allí decía «Pasarela de pagos», aquí no puede decir «Pagos».</a:t>
             </a:r>
           </a:p>
           <a:p>
@@ -8968,7 +8779,7 @@
                 </a:solidFill>
                 <a:latin typeface="Calibri"/>
               </a:rPr>
-              <a:t>–   Se sostiene con </a:t>
+              <a:t>–   Cada flecha lleva </a:t>
             </a:r>
             <a:r>
               <a:rPr sz="2000" b="1" i="0">
@@ -8977,7 +8788,7 @@
                 </a:solidFill>
                 <a:latin typeface="Calibri"/>
               </a:rPr>
-              <a:t>dos</a:t>
+              <a:t>protocolo Y formato</a:t>
             </a:r>
             <a:r>
               <a:rPr sz="2000" b="0" i="0">
@@ -8986,7 +8797,7 @@
                 </a:solidFill>
                 <a:latin typeface="Calibri"/>
               </a:rPr>
-              <a:t> criterios: tamaño del equipo (con número y plazo) y acoplamiento (qué partes cambian juntas).</a:t>
+              <a:t> («HTTPS/JSON», «TCP/SQL»): una línea muda no cuenta.</a:t>
             </a:r>
           </a:p>
           <a:p>
@@ -9002,25 +8813,7 @@
                 </a:solidFill>
                 <a:latin typeface="Calibri"/>
               </a:rPr>
-              <a:t>–   Y con lo que se gana </a:t>
-            </a:r>
-            <a:r>
-              <a:rPr sz="2000" b="1" i="0">
-                <a:solidFill>
-                  <a:srgbClr val="333333"/>
-                </a:solidFill>
-                <a:latin typeface="Calibri"/>
-              </a:rPr>
-              <a:t>y</a:t>
-            </a:r>
-            <a:r>
-              <a:rPr sz="2000" b="0" i="0">
-                <a:solidFill>
-                  <a:srgbClr val="333333"/>
-                </a:solidFill>
-                <a:latin typeface="Calibri"/>
-              </a:rPr>
-              <a:t> lo que se pierde: sin la segunda mitad, no hubo decisión.</a:t>
+              <a:t>–   Entre 2 y 5 cajas. El número tiene que ser coherente con la decisión de la diapositiva anterior.</a:t>
             </a:r>
           </a:p>
         </p:txBody>
@@ -9069,396 +8862,6 @@
 </file>
 
 <file path=ppt/slides/slide6.xml><?xml version="1.0" encoding="utf-8"?>
-<p:sld xmlns:a="http://schemas.openxmlformats.org/drawingml/2006/main" xmlns:p="http://schemas.openxmlformats.org/presentationml/2006/main" xmlns:r="http://schemas.openxmlformats.org/officeDocument/2006/relationships">
-  <p:cSld>
-    <p:bg>
-      <p:bgPr>
-        <a:solidFill>
-          <a:srgbClr val="FFFFFF"/>
-        </a:solidFill>
-        <a:effectLst/>
-      </p:bgPr>
-    </p:bg>
-    <p:spTree>
-      <p:nvGrpSpPr>
-        <p:cNvPr id="1" name=""/>
-        <p:cNvGrpSpPr/>
-        <p:nvPr/>
-      </p:nvGrpSpPr>
-      <p:grpSpPr/>
-      <p:sp>
-        <p:nvSpPr>
-          <p:cNvPr id="2" name="Rectangle 1"/>
-          <p:cNvSpPr/>
-          <p:nvPr/>
-        </p:nvSpPr>
-        <p:spPr>
-          <a:xfrm>
-            <a:off x="0" y="0"/>
-            <a:ext cx="12191695" cy="960120"/>
-          </a:xfrm>
-          <a:prstGeom prst="rect">
-            <a:avLst/>
-          </a:prstGeom>
-          <a:solidFill>
-            <a:srgbClr val="095292"/>
-          </a:solidFill>
-          <a:ln>
-            <a:noFill/>
-          </a:ln>
-        </p:spPr>
-        <p:style>
-          <a:lnRef idx="1">
-            <a:schemeClr val="accent1"/>
-          </a:lnRef>
-          <a:fillRef idx="3">
-            <a:schemeClr val="accent1"/>
-          </a:fillRef>
-          <a:effectRef idx="2">
-            <a:schemeClr val="accent1"/>
-          </a:effectRef>
-          <a:fontRef idx="minor">
-            <a:schemeClr val="lt1"/>
-          </a:fontRef>
-        </p:style>
-        <p:txBody>
-          <a:bodyPr rtlCol="0" anchor="ctr"/>
-          <a:lstStyle/>
-          <a:p>
-            <a:pPr algn="ctr"/>
-          </a:p>
-        </p:txBody>
-      </p:sp>
-      <p:sp>
-        <p:nvSpPr>
-          <p:cNvPr id="3" name="Rectangle 2"/>
-          <p:cNvSpPr/>
-          <p:nvPr/>
-        </p:nvSpPr>
-        <p:spPr>
-          <a:xfrm>
-            <a:off x="0" y="960120"/>
-            <a:ext cx="12191695" cy="41148"/>
-          </a:xfrm>
-          <a:prstGeom prst="rect">
-            <a:avLst/>
-          </a:prstGeom>
-          <a:solidFill>
-            <a:srgbClr val="FFD000"/>
-          </a:solidFill>
-          <a:ln>
-            <a:noFill/>
-          </a:ln>
-        </p:spPr>
-        <p:style>
-          <a:lnRef idx="1">
-            <a:schemeClr val="accent1"/>
-          </a:lnRef>
-          <a:fillRef idx="3">
-            <a:schemeClr val="accent1"/>
-          </a:fillRef>
-          <a:effectRef idx="2">
-            <a:schemeClr val="accent1"/>
-          </a:effectRef>
-          <a:fontRef idx="minor">
-            <a:schemeClr val="lt1"/>
-          </a:fontRef>
-        </p:style>
-        <p:txBody>
-          <a:bodyPr rtlCol="0" anchor="ctr"/>
-          <a:lstStyle/>
-          <a:p>
-            <a:pPr algn="ctr"/>
-          </a:p>
-        </p:txBody>
-      </p:sp>
-      <p:sp>
-        <p:nvSpPr>
-          <p:cNvPr id="4" name="TextBox 3"/>
-          <p:cNvSpPr txBox="1"/>
-          <p:nvPr/>
-        </p:nvSpPr>
-        <p:spPr>
-          <a:xfrm>
-            <a:off x="457200" y="164592"/>
-            <a:ext cx="11277295" cy="502920"/>
-          </a:xfrm>
-          <a:prstGeom prst="rect">
-            <a:avLst/>
-          </a:prstGeom>
-          <a:noFill/>
-        </p:spPr>
-        <p:txBody>
-          <a:bodyPr wrap="square">
-            <a:spAutoFit/>
-          </a:bodyPr>
-          <a:lstStyle/>
-          <a:p>
-            <a:r>
-              <a:rPr sz="2600" b="1" i="0">
-                <a:solidFill>
-                  <a:srgbClr val="FFFFFF"/>
-                </a:solidFill>
-                <a:latin typeface="Calibri"/>
-              </a:rPr>
-              <a:t>C4-lite: del Context a los Containers</a:t>
-            </a:r>
-          </a:p>
-        </p:txBody>
-      </p:sp>
-      <p:sp>
-        <p:nvSpPr>
-          <p:cNvPr id="5" name="TextBox 4"/>
-          <p:cNvSpPr txBox="1"/>
-          <p:nvPr/>
-        </p:nvSpPr>
-        <p:spPr>
-          <a:xfrm>
-            <a:off x="457200" y="1170432"/>
-            <a:ext cx="11277295" cy="5230368"/>
-          </a:xfrm>
-          <a:prstGeom prst="rect">
-            <a:avLst/>
-          </a:prstGeom>
-          <a:noFill/>
-        </p:spPr>
-        <p:txBody>
-          <a:bodyPr wrap="square">
-            <a:spAutoFit/>
-          </a:bodyPr>
-          <a:lstStyle/>
-          <a:p>
-            <a:pPr>
-              <a:spcAft>
-                <a:spcPts val="800"/>
-              </a:spcAft>
-            </a:pPr>
-            <a:r>
-              <a:rPr sz="2000" b="0" i="0">
-                <a:solidFill>
-                  <a:srgbClr val="333333"/>
-                </a:solidFill>
-                <a:latin typeface="Calibri"/>
-              </a:rPr>
-              <a:t>–   Se abre la ÚNICA caja del Context de la Clase 1: los actores y los externos siguen ahí, </a:t>
-            </a:r>
-            <a:r>
-              <a:rPr sz="2000" b="1" i="0">
-                <a:solidFill>
-                  <a:srgbClr val="333333"/>
-                </a:solidFill>
-                <a:latin typeface="Calibri"/>
-              </a:rPr>
-              <a:t>fuera</a:t>
-            </a:r>
-            <a:r>
-              <a:rPr sz="2000" b="0" i="0">
-                <a:solidFill>
-                  <a:srgbClr val="333333"/>
-                </a:solidFill>
-                <a:latin typeface="Calibri"/>
-              </a:rPr>
-              <a:t> del sistema.</a:t>
-            </a:r>
-          </a:p>
-          <a:p>
-            <a:pPr>
-              <a:spcAft>
-                <a:spcPts val="800"/>
-              </a:spcAft>
-            </a:pPr>
-            <a:r>
-              <a:rPr sz="2000" b="0" i="0">
-                <a:solidFill>
-                  <a:srgbClr val="333333"/>
-                </a:solidFill>
-                <a:latin typeface="Calibri"/>
-              </a:rPr>
-              <a:t>–   </a:t>
-            </a:r>
-            <a:r>
-              <a:rPr sz="2000" b="1" i="0">
-                <a:solidFill>
-                  <a:srgbClr val="333333"/>
-                </a:solidFill>
-                <a:latin typeface="Calibri"/>
-              </a:rPr>
-              <a:t>Tres datos por caja, obligatorios:</a:t>
-            </a:r>
-            <a:r>
-              <a:rPr sz="2000" b="0" i="0">
-                <a:solidFill>
-                  <a:srgbClr val="333333"/>
-                </a:solidFill>
-                <a:latin typeface="Calibri"/>
-              </a:rPr>
-              <a:t> nombre · tecnología · responsabilidad en una frase.</a:t>
-            </a:r>
-          </a:p>
-          <a:p>
-            <a:pPr>
-              <a:spcAft>
-                <a:spcPts val="800"/>
-              </a:spcAft>
-            </a:pPr>
-            <a:r>
-              <a:rPr sz="2000" b="0" i="0">
-                <a:solidFill>
-                  <a:srgbClr val="333333"/>
-                </a:solidFill>
-                <a:latin typeface="Calibri"/>
-              </a:rPr>
-              <a:t>–   Lo que guarda datos se marca como </a:t>
-            </a:r>
-            <a:r>
-              <a:rPr sz="2000" b="1" i="0">
-                <a:solidFill>
-                  <a:srgbClr val="333333"/>
-                </a:solidFill>
-                <a:latin typeface="Calibri"/>
-              </a:rPr>
-              <a:t>almacén</a:t>
-            </a:r>
-            <a:r>
-              <a:rPr sz="2000" b="0" i="0">
-                <a:solidFill>
-                  <a:srgbClr val="333333"/>
-                </a:solidFill>
-                <a:latin typeface="Calibri"/>
-              </a:rPr>
-              <a:t> («ContainerDb»), no como una caja más.</a:t>
-            </a:r>
-          </a:p>
-          <a:p>
-            <a:pPr>
-              <a:spcAft>
-                <a:spcPts val="800"/>
-              </a:spcAft>
-            </a:pPr>
-            <a:r>
-              <a:rPr sz="2000" b="0" i="0">
-                <a:solidFill>
-                  <a:srgbClr val="333333"/>
-                </a:solidFill>
-                <a:latin typeface="Calibri"/>
-              </a:rPr>
-              <a:t>–   Los nombres son </a:t>
-            </a:r>
-            <a:r>
-              <a:rPr sz="2000" b="1" i="0">
-                <a:solidFill>
-                  <a:srgbClr val="333333"/>
-                </a:solidFill>
-                <a:latin typeface="Calibri"/>
-              </a:rPr>
-              <a:t>idénticos</a:t>
-            </a:r>
-            <a:r>
-              <a:rPr sz="2000" b="0" i="0">
-                <a:solidFill>
-                  <a:srgbClr val="333333"/>
-                </a:solidFill>
-                <a:latin typeface="Calibri"/>
-              </a:rPr>
-              <a:t> a los del C4 Context: si allí decía «Pasarela de pagos», aquí no puede decir «Pagos».</a:t>
-            </a:r>
-          </a:p>
-          <a:p>
-            <a:pPr>
-              <a:spcAft>
-                <a:spcPts val="800"/>
-              </a:spcAft>
-            </a:pPr>
-            <a:r>
-              <a:rPr sz="2000" b="0" i="0">
-                <a:solidFill>
-                  <a:srgbClr val="333333"/>
-                </a:solidFill>
-                <a:latin typeface="Calibri"/>
-              </a:rPr>
-              <a:t>–   Cada flecha lleva </a:t>
-            </a:r>
-            <a:r>
-              <a:rPr sz="2000" b="1" i="0">
-                <a:solidFill>
-                  <a:srgbClr val="333333"/>
-                </a:solidFill>
-                <a:latin typeface="Calibri"/>
-              </a:rPr>
-              <a:t>protocolo Y formato</a:t>
-            </a:r>
-            <a:r>
-              <a:rPr sz="2000" b="0" i="0">
-                <a:solidFill>
-                  <a:srgbClr val="333333"/>
-                </a:solidFill>
-                <a:latin typeface="Calibri"/>
-              </a:rPr>
-              <a:t> («HTTPS/JSON», «TCP/SQL»): una línea muda no cuenta.</a:t>
-            </a:r>
-          </a:p>
-          <a:p>
-            <a:pPr>
-              <a:spcAft>
-                <a:spcPts val="800"/>
-              </a:spcAft>
-            </a:pPr>
-            <a:r>
-              <a:rPr sz="2000" b="0" i="0">
-                <a:solidFill>
-                  <a:srgbClr val="333333"/>
-                </a:solidFill>
-                <a:latin typeface="Calibri"/>
-              </a:rPr>
-              <a:t>–   Entre 2 y 5 cajas. El número tiene que ser coherente con la decisión de la diapositiva anterior.</a:t>
-            </a:r>
-          </a:p>
-        </p:txBody>
-      </p:sp>
-      <p:sp>
-        <p:nvSpPr>
-          <p:cNvPr id="6" name="TextBox 5"/>
-          <p:cNvSpPr txBox="1"/>
-          <p:nvPr/>
-        </p:nvSpPr>
-        <p:spPr>
-          <a:xfrm>
-            <a:off x="11185855" y="6473952"/>
-            <a:ext cx="640080" cy="274320"/>
-          </a:xfrm>
-          <a:prstGeom prst="rect">
-            <a:avLst/>
-          </a:prstGeom>
-          <a:noFill/>
-        </p:spPr>
-        <p:txBody>
-          <a:bodyPr wrap="square">
-            <a:spAutoFit/>
-          </a:bodyPr>
-          <a:lstStyle/>
-          <a:p>
-            <a:pPr algn="r"/>
-            <a:r>
-              <a:rPr sz="1100" b="0" i="0">
-                <a:solidFill>
-                  <a:srgbClr val="666666"/>
-                </a:solidFill>
-                <a:latin typeface="Calibri"/>
-              </a:rPr>
-              <a:t>6</a:t>
-            </a:r>
-          </a:p>
-        </p:txBody>
-      </p:sp>
-    </p:spTree>
-  </p:cSld>
-  <p:clrMapOvr>
-    <a:masterClrMapping/>
-  </p:clrMapOvr>
-</p:sld>
-</file>
-
-<file path=ppt/slides/slide7.xml><?xml version="1.0" encoding="utf-8"?>
 <p:sld xmlns:a="http://schemas.openxmlformats.org/drawingml/2006/main" xmlns:p="http://schemas.openxmlformats.org/presentationml/2006/main" xmlns:r="http://schemas.openxmlformats.org/officeDocument/2006/relationships">
   <p:cSld>
     <p:bg>
@@ -10048,6 +9451,414 @@
                 </a:solidFill>
                 <a:latin typeface="Calibri"/>
               </a:rPr>
+              <a:t>6</a:t>
+            </a:r>
+          </a:p>
+        </p:txBody>
+      </p:sp>
+    </p:spTree>
+  </p:cSld>
+  <p:clrMapOvr>
+    <a:masterClrMapping/>
+  </p:clrMapOvr>
+</p:sld>
+</file>
+
+<file path=ppt/slides/slide7.xml><?xml version="1.0" encoding="utf-8"?>
+<p:sld xmlns:a="http://schemas.openxmlformats.org/drawingml/2006/main" xmlns:p="http://schemas.openxmlformats.org/presentationml/2006/main" xmlns:r="http://schemas.openxmlformats.org/officeDocument/2006/relationships">
+  <p:cSld>
+    <p:bg>
+      <p:bgPr>
+        <a:solidFill>
+          <a:srgbClr val="FFFFFF"/>
+        </a:solidFill>
+        <a:effectLst/>
+      </p:bgPr>
+    </p:bg>
+    <p:spTree>
+      <p:nvGrpSpPr>
+        <p:cNvPr id="1" name=""/>
+        <p:cNvGrpSpPr/>
+        <p:nvPr/>
+      </p:nvGrpSpPr>
+      <p:grpSpPr/>
+      <p:sp>
+        <p:nvSpPr>
+          <p:cNvPr id="2" name="Rectangle 1"/>
+          <p:cNvSpPr/>
+          <p:nvPr/>
+        </p:nvSpPr>
+        <p:spPr>
+          <a:xfrm>
+            <a:off x="0" y="0"/>
+            <a:ext cx="12191695" cy="960120"/>
+          </a:xfrm>
+          <a:prstGeom prst="rect">
+            <a:avLst/>
+          </a:prstGeom>
+          <a:solidFill>
+            <a:srgbClr val="095292"/>
+          </a:solidFill>
+          <a:ln>
+            <a:noFill/>
+          </a:ln>
+        </p:spPr>
+        <p:style>
+          <a:lnRef idx="1">
+            <a:schemeClr val="accent1"/>
+          </a:lnRef>
+          <a:fillRef idx="3">
+            <a:schemeClr val="accent1"/>
+          </a:fillRef>
+          <a:effectRef idx="2">
+            <a:schemeClr val="accent1"/>
+          </a:effectRef>
+          <a:fontRef idx="minor">
+            <a:schemeClr val="lt1"/>
+          </a:fontRef>
+        </p:style>
+        <p:txBody>
+          <a:bodyPr rtlCol="0" anchor="ctr"/>
+          <a:lstStyle/>
+          <a:p>
+            <a:pPr algn="ctr"/>
+          </a:p>
+        </p:txBody>
+      </p:sp>
+      <p:sp>
+        <p:nvSpPr>
+          <p:cNvPr id="3" name="Rectangle 2"/>
+          <p:cNvSpPr/>
+          <p:nvPr/>
+        </p:nvSpPr>
+        <p:spPr>
+          <a:xfrm>
+            <a:off x="0" y="960120"/>
+            <a:ext cx="12191695" cy="41148"/>
+          </a:xfrm>
+          <a:prstGeom prst="rect">
+            <a:avLst/>
+          </a:prstGeom>
+          <a:solidFill>
+            <a:srgbClr val="FFD000"/>
+          </a:solidFill>
+          <a:ln>
+            <a:noFill/>
+          </a:ln>
+        </p:spPr>
+        <p:style>
+          <a:lnRef idx="1">
+            <a:schemeClr val="accent1"/>
+          </a:lnRef>
+          <a:fillRef idx="3">
+            <a:schemeClr val="accent1"/>
+          </a:fillRef>
+          <a:effectRef idx="2">
+            <a:schemeClr val="accent1"/>
+          </a:effectRef>
+          <a:fontRef idx="minor">
+            <a:schemeClr val="lt1"/>
+          </a:fontRef>
+        </p:style>
+        <p:txBody>
+          <a:bodyPr rtlCol="0" anchor="ctr"/>
+          <a:lstStyle/>
+          <a:p>
+            <a:pPr algn="ctr"/>
+          </a:p>
+        </p:txBody>
+      </p:sp>
+      <p:sp>
+        <p:nvSpPr>
+          <p:cNvPr id="4" name="TextBox 3"/>
+          <p:cNvSpPr txBox="1"/>
+          <p:nvPr/>
+        </p:nvSpPr>
+        <p:spPr>
+          <a:xfrm>
+            <a:off x="457200" y="164592"/>
+            <a:ext cx="11277295" cy="502920"/>
+          </a:xfrm>
+          <a:prstGeom prst="rect">
+            <a:avLst/>
+          </a:prstGeom>
+          <a:noFill/>
+        </p:spPr>
+        <p:txBody>
+          <a:bodyPr wrap="square">
+            <a:spAutoFit/>
+          </a:bodyPr>
+          <a:lstStyle/>
+          <a:p>
+            <a:r>
+              <a:rPr sz="2600" b="1" i="0">
+                <a:solidFill>
+                  <a:srgbClr val="FFFFFF"/>
+                </a:solidFill>
+                <a:latin typeface="Calibri"/>
+              </a:rPr>
+              <a:t>Distribuido implica fallos</a:t>
+            </a:r>
+          </a:p>
+        </p:txBody>
+      </p:sp>
+      <p:sp>
+        <p:nvSpPr>
+          <p:cNvPr id="5" name="TextBox 4"/>
+          <p:cNvSpPr txBox="1"/>
+          <p:nvPr/>
+        </p:nvSpPr>
+        <p:spPr>
+          <a:xfrm>
+            <a:off x="457200" y="1170432"/>
+            <a:ext cx="11277295" cy="5230368"/>
+          </a:xfrm>
+          <a:prstGeom prst="rect">
+            <a:avLst/>
+          </a:prstGeom>
+          <a:noFill/>
+        </p:spPr>
+        <p:txBody>
+          <a:bodyPr wrap="square">
+            <a:spAutoFit/>
+          </a:bodyPr>
+          <a:lstStyle/>
+          <a:p>
+            <a:pPr>
+              <a:spcAft>
+                <a:spcPts val="800"/>
+              </a:spcAft>
+            </a:pPr>
+            <a:r>
+              <a:rPr sz="2000" b="0" i="0">
+                <a:solidFill>
+                  <a:srgbClr val="333333"/>
+                </a:solidFill>
+                <a:latin typeface="Calibri"/>
+              </a:rPr>
+              <a:t>–   Cada flecha del diagrama es una llamada de red: puede tardar, perderse o llegar dos veces.</a:t>
+            </a:r>
+          </a:p>
+          <a:p>
+            <a:pPr>
+              <a:spcAft>
+                <a:spcPts val="800"/>
+              </a:spcAft>
+            </a:pPr>
+            <a:r>
+              <a:rPr sz="2000" b="0" i="0">
+                <a:solidFill>
+                  <a:srgbClr val="333333"/>
+                </a:solidFill>
+                <a:latin typeface="Calibri"/>
+              </a:rPr>
+              <a:t>–   </a:t>
+            </a:r>
+            <a:r>
+              <a:rPr sz="2000" b="1" i="0">
+                <a:solidFill>
+                  <a:srgbClr val="333333"/>
+                </a:solidFill>
+                <a:latin typeface="Calibri"/>
+              </a:rPr>
+              <a:t>Riesgo 1 · qué se cae:</a:t>
+            </a:r>
+            <a:r>
+              <a:rPr sz="2000" b="0" i="0">
+                <a:solidFill>
+                  <a:srgbClr val="333333"/>
+                </a:solidFill>
+                <a:latin typeface="Calibri"/>
+              </a:rPr>
+              <a:t> nombra </a:t>
+            </a:r>
+            <a:r>
+              <a:rPr sz="2000" b="1" i="0">
+                <a:solidFill>
+                  <a:srgbClr val="333333"/>
+                </a:solidFill>
+                <a:latin typeface="Calibri"/>
+              </a:rPr>
+              <a:t>una</a:t>
+            </a:r>
+            <a:r>
+              <a:rPr sz="2000" b="0" i="0">
+                <a:solidFill>
+                  <a:srgbClr val="333333"/>
+                </a:solidFill>
+                <a:latin typeface="Calibri"/>
+              </a:rPr>
+              <a:t> caja, y di qué deja de funcionar </a:t>
+            </a:r>
+            <a:r>
+              <a:rPr sz="2000" b="1" i="0">
+                <a:solidFill>
+                  <a:srgbClr val="333333"/>
+                </a:solidFill>
+                <a:latin typeface="Calibri"/>
+              </a:rPr>
+              <a:t>y qué sigue funcionando</a:t>
+            </a:r>
+            <a:r>
+              <a:rPr sz="2000" b="0" i="0">
+                <a:solidFill>
+                  <a:srgbClr val="333333"/>
+                </a:solidFill>
+                <a:latin typeface="Calibri"/>
+              </a:rPr>
+              <a:t>. «Se cae todo» vale la mitad.</a:t>
+            </a:r>
+          </a:p>
+          <a:p>
+            <a:pPr>
+              <a:spcAft>
+                <a:spcPts val="800"/>
+              </a:spcAft>
+            </a:pPr>
+            <a:r>
+              <a:rPr sz="2000" b="0" i="0">
+                <a:solidFill>
+                  <a:srgbClr val="333333"/>
+                </a:solidFill>
+                <a:latin typeface="Calibri"/>
+              </a:rPr>
+              <a:t>–   </a:t>
+            </a:r>
+            <a:r>
+              <a:rPr sz="2000" b="1" i="0">
+                <a:solidFill>
+                  <a:srgbClr val="333333"/>
+                </a:solidFill>
+                <a:latin typeface="Calibri"/>
+              </a:rPr>
+              <a:t>Riesgo 2 · cuántos saltos de red</a:t>
+            </a:r>
+            <a:r>
+              <a:rPr sz="2000" b="0" i="0">
+                <a:solidFill>
+                  <a:srgbClr val="333333"/>
+                </a:solidFill>
+                <a:latin typeface="Calibri"/>
+              </a:rPr>
+              <a:t> tiene una operación de punta a punta: cuéntalos sobre tu propio diagrama.</a:t>
+            </a:r>
+          </a:p>
+          <a:p>
+            <a:pPr>
+              <a:spcAft>
+                <a:spcPts val="800"/>
+              </a:spcAft>
+            </a:pPr>
+            <a:r>
+              <a:rPr sz="2000" b="0" i="0">
+                <a:solidFill>
+                  <a:srgbClr val="333333"/>
+                </a:solidFill>
+                <a:latin typeface="Calibri"/>
+              </a:rPr>
+              <a:t>–   </a:t>
+            </a:r>
+            <a:r>
+              <a:rPr sz="2000" b="1" i="0">
+                <a:solidFill>
+                  <a:srgbClr val="333333"/>
+                </a:solidFill>
+                <a:latin typeface="Calibri"/>
+              </a:rPr>
+              <a:t>Riesgo 3 · un dato escrito en dos pasos:</a:t>
+            </a:r>
+            <a:r>
+              <a:rPr sz="2000" b="0" i="0">
+                <a:solidFill>
+                  <a:srgbClr val="333333"/>
+                </a:solidFill>
+                <a:latin typeface="Calibri"/>
+              </a:rPr>
+              <a:t> nómbralo y di qué pasa si el segundo falla.</a:t>
+            </a:r>
+          </a:p>
+          <a:p>
+            <a:pPr>
+              <a:spcAft>
+                <a:spcPts val="800"/>
+              </a:spcAft>
+            </a:pPr>
+            <a:r>
+              <a:rPr sz="2000" b="0" i="0">
+                <a:solidFill>
+                  <a:srgbClr val="333333"/>
+                </a:solidFill>
+                <a:latin typeface="Calibri"/>
+              </a:rPr>
+              <a:t>–   Caja de herramientas para mitigarlos: </a:t>
+            </a:r>
+            <a:r>
+              <a:rPr sz="2000" b="1" i="0">
+                <a:solidFill>
+                  <a:srgbClr val="333333"/>
+                </a:solidFill>
+                <a:latin typeface="Calibri"/>
+              </a:rPr>
+              <a:t>timeout · reintento con espera creciente · idempotencia · circuit breaker</a:t>
+            </a:r>
+            <a:r>
+              <a:rPr sz="2000" b="0" i="0">
+                <a:solidFill>
+                  <a:srgbClr val="333333"/>
+                </a:solidFill>
+                <a:latin typeface="Calibri"/>
+              </a:rPr>
+              <a:t>.</a:t>
+            </a:r>
+          </a:p>
+          <a:p>
+            <a:pPr>
+              <a:spcAft>
+                <a:spcPts val="800"/>
+              </a:spcAft>
+            </a:pPr>
+            <a:r>
+              <a:rPr sz="2000" b="0" i="0">
+                <a:solidFill>
+                  <a:srgbClr val="333333"/>
+                </a:solidFill>
+                <a:latin typeface="Calibri"/>
+              </a:rPr>
+              <a:t>–   «Los microservicios son más complejos» no es un riesgo: no nombra caja, ni salto, ni dato.</a:t>
+            </a:r>
+          </a:p>
+        </p:txBody>
+      </p:sp>
+      <p:sp>
+        <p:nvSpPr>
+          <p:cNvPr id="6" name="TextBox 5"/>
+          <p:cNvSpPr txBox="1"/>
+          <p:nvPr/>
+        </p:nvSpPr>
+        <p:spPr>
+          <a:xfrm>
+            <a:off x="11185855" y="6473952"/>
+            <a:ext cx="640080" cy="274320"/>
+          </a:xfrm>
+          <a:prstGeom prst="rect">
+            <a:avLst/>
+          </a:prstGeom>
+          <a:noFill/>
+        </p:spPr>
+        <p:txBody>
+          <a:bodyPr wrap="square">
+            <a:spAutoFit/>
+          </a:bodyPr>
+          <a:lstStyle/>
+          <a:p>
+            <a:pPr algn="r"/>
+            <a:r>
+              <a:rPr sz="1100" b="0" i="0">
+                <a:solidFill>
+                  <a:srgbClr val="666666"/>
+                </a:solidFill>
+                <a:latin typeface="Calibri"/>
+              </a:rPr>
               <a:t>7</a:t>
             </a:r>
           </a:p>
@@ -10088,7 +9899,7 @@
         <p:spPr>
           <a:xfrm>
             <a:off x="0" y="0"/>
-            <a:ext cx="12191695" cy="960120"/>
+            <a:ext cx="12191695" cy="1170432"/>
           </a:xfrm>
           <a:prstGeom prst="rect">
             <a:avLst/>
@@ -10130,7 +9941,7 @@
         </p:nvSpPr>
         <p:spPr>
           <a:xfrm>
-            <a:off x="0" y="960120"/>
+            <a:off x="0" y="1170432"/>
             <a:ext cx="12191695" cy="41148"/>
           </a:xfrm>
           <a:prstGeom prst="rect">
@@ -10174,7 +9985,7 @@
         <p:spPr>
           <a:xfrm>
             <a:off x="457200" y="164592"/>
-            <a:ext cx="11277295" cy="502920"/>
+            <a:ext cx="11277295" cy="384048"/>
           </a:xfrm>
           <a:prstGeom prst="rect">
             <a:avLst/>
@@ -10194,7 +10005,7 @@
                 </a:solidFill>
                 <a:latin typeface="Calibri"/>
               </a:rPr>
-              <a:t>Distribuido implica fallos</a:t>
+              <a:t>Ejemplo de diagrama C4 — nivel Containers</a:t>
             </a:r>
           </a:p>
         </p:txBody>
@@ -10207,8 +10018,8 @@
         </p:nvSpPr>
         <p:spPr>
           <a:xfrm>
-            <a:off x="457200" y="1170432"/>
-            <a:ext cx="11277295" cy="5230368"/>
+            <a:off x="457200" y="566928"/>
+            <a:ext cx="11277295" cy="411480"/>
           </a:xfrm>
           <a:prstGeom prst="rect">
             <a:avLst/>
@@ -10221,214 +10032,614 @@
           </a:bodyPr>
           <a:lstStyle/>
           <a:p>
-            <a:pPr>
-              <a:spcAft>
-                <a:spcPts val="800"/>
-              </a:spcAft>
-            </a:pPr>
-            <a:r>
-              <a:rPr sz="2000" b="0" i="0">
-                <a:solidFill>
-                  <a:srgbClr val="333333"/>
-                </a:solidFill>
-                <a:latin typeface="Calibri"/>
-              </a:rPr>
-              <a:t>–   Cada flecha del diagrama es una llamada de red: puede tardar, perderse o llegar dos veces.</a:t>
-            </a:r>
-          </a:p>
-          <a:p>
-            <a:pPr>
-              <a:spcAft>
-                <a:spcPts val="800"/>
-              </a:spcAft>
-            </a:pPr>
-            <a:r>
-              <a:rPr sz="2000" b="0" i="0">
-                <a:solidFill>
-                  <a:srgbClr val="333333"/>
-                </a:solidFill>
-                <a:latin typeface="Calibri"/>
-              </a:rPr>
-              <a:t>–   </a:t>
-            </a:r>
-            <a:r>
-              <a:rPr sz="2000" b="1" i="0">
-                <a:solidFill>
-                  <a:srgbClr val="333333"/>
-                </a:solidFill>
-                <a:latin typeface="Calibri"/>
-              </a:rPr>
-              <a:t>Riesgo 1 · qué se cae:</a:t>
-            </a:r>
-            <a:r>
-              <a:rPr sz="2000" b="0" i="0">
-                <a:solidFill>
-                  <a:srgbClr val="333333"/>
-                </a:solidFill>
-                <a:latin typeface="Calibri"/>
-              </a:rPr>
-              <a:t> nombra </a:t>
-            </a:r>
-            <a:r>
-              <a:rPr sz="2000" b="1" i="0">
-                <a:solidFill>
-                  <a:srgbClr val="333333"/>
-                </a:solidFill>
-                <a:latin typeface="Calibri"/>
-              </a:rPr>
-              <a:t>una</a:t>
-            </a:r>
-            <a:r>
-              <a:rPr sz="2000" b="0" i="0">
-                <a:solidFill>
-                  <a:srgbClr val="333333"/>
-                </a:solidFill>
-                <a:latin typeface="Calibri"/>
-              </a:rPr>
-              <a:t> caja, y di qué deja de funcionar </a:t>
-            </a:r>
-            <a:r>
-              <a:rPr sz="2000" b="1" i="0">
-                <a:solidFill>
-                  <a:srgbClr val="333333"/>
-                </a:solidFill>
-                <a:latin typeface="Calibri"/>
-              </a:rPr>
-              <a:t>y qué sigue funcionando</a:t>
-            </a:r>
-            <a:r>
-              <a:rPr sz="2000" b="0" i="0">
-                <a:solidFill>
-                  <a:srgbClr val="333333"/>
-                </a:solidFill>
-                <a:latin typeface="Calibri"/>
-              </a:rPr>
-              <a:t>. «Se cae todo» vale la mitad.</a:t>
-            </a:r>
-          </a:p>
-          <a:p>
-            <a:pPr>
-              <a:spcAft>
-                <a:spcPts val="800"/>
-              </a:spcAft>
-            </a:pPr>
-            <a:r>
-              <a:rPr sz="2000" b="0" i="0">
-                <a:solidFill>
-                  <a:srgbClr val="333333"/>
-                </a:solidFill>
-                <a:latin typeface="Calibri"/>
-              </a:rPr>
-              <a:t>–   </a:t>
-            </a:r>
-            <a:r>
-              <a:rPr sz="2000" b="1" i="0">
-                <a:solidFill>
-                  <a:srgbClr val="333333"/>
-                </a:solidFill>
-                <a:latin typeface="Calibri"/>
-              </a:rPr>
-              <a:t>Riesgo 2 · cuántos saltos de red</a:t>
-            </a:r>
-            <a:r>
-              <a:rPr sz="2000" b="0" i="0">
-                <a:solidFill>
-                  <a:srgbClr val="333333"/>
-                </a:solidFill>
-                <a:latin typeface="Calibri"/>
-              </a:rPr>
-              <a:t> tiene una operación de punta a punta: cuéntalos sobre tu propio diagrama.</a:t>
-            </a:r>
-          </a:p>
-          <a:p>
-            <a:pPr>
-              <a:spcAft>
-                <a:spcPts val="800"/>
-              </a:spcAft>
-            </a:pPr>
-            <a:r>
-              <a:rPr sz="2000" b="0" i="0">
-                <a:solidFill>
-                  <a:srgbClr val="333333"/>
-                </a:solidFill>
-                <a:latin typeface="Calibri"/>
-              </a:rPr>
-              <a:t>–   </a:t>
-            </a:r>
-            <a:r>
-              <a:rPr sz="2000" b="1" i="0">
-                <a:solidFill>
-                  <a:srgbClr val="333333"/>
-                </a:solidFill>
-                <a:latin typeface="Calibri"/>
-              </a:rPr>
-              <a:t>Riesgo 3 · un dato escrito en dos pasos:</a:t>
-            </a:r>
-            <a:r>
-              <a:rPr sz="2000" b="0" i="0">
-                <a:solidFill>
-                  <a:srgbClr val="333333"/>
-                </a:solidFill>
-                <a:latin typeface="Calibri"/>
-              </a:rPr>
-              <a:t> nómbralo y di qué pasa si el segundo falla.</a:t>
-            </a:r>
-          </a:p>
-          <a:p>
-            <a:pPr>
-              <a:spcAft>
-                <a:spcPts val="800"/>
-              </a:spcAft>
-            </a:pPr>
-            <a:r>
-              <a:rPr sz="2000" b="0" i="0">
-                <a:solidFill>
-                  <a:srgbClr val="333333"/>
-                </a:solidFill>
-                <a:latin typeface="Calibri"/>
-              </a:rPr>
-              <a:t>–   Caja de herramientas para mitigarlos: </a:t>
-            </a:r>
-            <a:r>
-              <a:rPr sz="2000" b="1" i="0">
-                <a:solidFill>
-                  <a:srgbClr val="333333"/>
-                </a:solidFill>
-                <a:latin typeface="Calibri"/>
-              </a:rPr>
-              <a:t>timeout · reintento con espera creciente · idempotencia · circuit breaker</a:t>
-            </a:r>
-            <a:r>
-              <a:rPr sz="2000" b="0" i="0">
-                <a:solidFill>
-                  <a:srgbClr val="333333"/>
-                </a:solidFill>
-                <a:latin typeface="Calibri"/>
-              </a:rPr>
-              <a:t>.</a:t>
-            </a:r>
-          </a:p>
-          <a:p>
-            <a:pPr>
-              <a:spcAft>
-                <a:spcPts val="800"/>
-              </a:spcAft>
-            </a:pPr>
-            <a:r>
-              <a:rPr sz="2000" b="0" i="0">
-                <a:solidFill>
-                  <a:srgbClr val="333333"/>
-                </a:solidFill>
-                <a:latin typeface="Calibri"/>
-              </a:rPr>
-              <a:t>–   «Los microservicios son más complejos» no es un riesgo: no nombra caja, ni salto, ni dato.</a:t>
-            </a:r>
-          </a:p>
-        </p:txBody>
-      </p:sp>
-      <p:sp>
-        <p:nvSpPr>
-          <p:cNvPr id="6" name="TextBox 5"/>
+            <a:r>
+              <a:rPr sz="1400" b="0" i="0">
+                <a:solidFill>
+                  <a:srgbClr val="B8D8EE"/>
+                </a:solidFill>
+                <a:latin typeface="Calibri"/>
+              </a:rPr>
+              <a:t>2–5 cajas justificadas, cada flecha con protocolo Y formato</a:t>
+            </a:r>
+          </a:p>
+        </p:txBody>
+      </p:sp>
+      <p:sp>
+        <p:nvSpPr>
+          <p:cNvPr id="6" name="Rounded Rectangle 5"/>
+          <p:cNvSpPr/>
+          <p:nvPr/>
+        </p:nvSpPr>
+        <p:spPr>
+          <a:xfrm>
+            <a:off x="822960" y="2011680"/>
+            <a:ext cx="2377440" cy="1097280"/>
+          </a:xfrm>
+          <a:prstGeom prst="roundRect">
+            <a:avLst>
+              <a:gd name="adj" fmla="val 12000"/>
+            </a:avLst>
+          </a:prstGeom>
+          <a:solidFill>
+            <a:srgbClr val="095292"/>
+          </a:solidFill>
+          <a:ln>
+            <a:noFill/>
+          </a:ln>
+        </p:spPr>
+        <p:style>
+          <a:lnRef idx="1">
+            <a:schemeClr val="accent1"/>
+          </a:lnRef>
+          <a:fillRef idx="3">
+            <a:schemeClr val="accent1"/>
+          </a:fillRef>
+          <a:effectRef idx="2">
+            <a:schemeClr val="accent1"/>
+          </a:effectRef>
+          <a:fontRef idx="minor">
+            <a:schemeClr val="lt1"/>
+          </a:fontRef>
+        </p:style>
+        <p:txBody>
+          <a:bodyPr rtlCol="0" anchor="ctr" wrap="square"/>
+          <a:lstStyle/>
+          <a:p>
+            <a:pPr algn="ctr"/>
+            <a:r>
+              <a:rPr sz="1100" b="1" i="0">
+                <a:solidFill>
+                  <a:srgbClr val="FFFFFF"/>
+                </a:solidFill>
+                <a:latin typeface="Calibri"/>
+              </a:rPr>
+              <a:t>App web
+(Container · React)</a:t>
+            </a:r>
+          </a:p>
+        </p:txBody>
+      </p:sp>
+      <p:sp>
+        <p:nvSpPr>
+          <p:cNvPr id="7" name="Rounded Rectangle 6"/>
+          <p:cNvSpPr/>
+          <p:nvPr/>
+        </p:nvSpPr>
+        <p:spPr>
+          <a:xfrm>
+            <a:off x="4754880" y="2011680"/>
+            <a:ext cx="2377440" cy="1097280"/>
+          </a:xfrm>
+          <a:prstGeom prst="roundRect">
+            <a:avLst>
+              <a:gd name="adj" fmla="val 12000"/>
+            </a:avLst>
+          </a:prstGeom>
+          <a:solidFill>
+            <a:srgbClr val="095292"/>
+          </a:solidFill>
+          <a:ln>
+            <a:noFill/>
+          </a:ln>
+        </p:spPr>
+        <p:style>
+          <a:lnRef idx="1">
+            <a:schemeClr val="accent1"/>
+          </a:lnRef>
+          <a:fillRef idx="3">
+            <a:schemeClr val="accent1"/>
+          </a:fillRef>
+          <a:effectRef idx="2">
+            <a:schemeClr val="accent1"/>
+          </a:effectRef>
+          <a:fontRef idx="minor">
+            <a:schemeClr val="lt1"/>
+          </a:fontRef>
+        </p:style>
+        <p:txBody>
+          <a:bodyPr rtlCol="0" anchor="ctr" wrap="square"/>
+          <a:lstStyle/>
+          <a:p>
+            <a:pPr algn="ctr"/>
+            <a:r>
+              <a:rPr sz="1100" b="1" i="0">
+                <a:solidFill>
+                  <a:srgbClr val="FFFFFF"/>
+                </a:solidFill>
+                <a:latin typeface="Calibri"/>
+              </a:rPr>
+              <a:t>API de turnos
+(Container · Node.js)</a:t>
+            </a:r>
+          </a:p>
+        </p:txBody>
+      </p:sp>
+      <p:sp>
+        <p:nvSpPr>
+          <p:cNvPr id="8" name="Rounded Rectangle 7"/>
+          <p:cNvSpPr/>
+          <p:nvPr/>
+        </p:nvSpPr>
+        <p:spPr>
+          <a:xfrm>
+            <a:off x="8595360" y="2011680"/>
+            <a:ext cx="2377440" cy="1097280"/>
+          </a:xfrm>
+          <a:prstGeom prst="roundRect">
+            <a:avLst>
+              <a:gd name="adj" fmla="val 12000"/>
+            </a:avLst>
+          </a:prstGeom>
+          <a:solidFill>
+            <a:srgbClr val="269CCB"/>
+          </a:solidFill>
+          <a:ln>
+            <a:noFill/>
+          </a:ln>
+        </p:spPr>
+        <p:style>
+          <a:lnRef idx="1">
+            <a:schemeClr val="accent1"/>
+          </a:lnRef>
+          <a:fillRef idx="3">
+            <a:schemeClr val="accent1"/>
+          </a:fillRef>
+          <a:effectRef idx="2">
+            <a:schemeClr val="accent1"/>
+          </a:effectRef>
+          <a:fontRef idx="minor">
+            <a:schemeClr val="lt1"/>
+          </a:fontRef>
+        </p:style>
+        <p:txBody>
+          <a:bodyPr rtlCol="0" anchor="ctr" wrap="square"/>
+          <a:lstStyle/>
+          <a:p>
+            <a:pPr algn="ctr"/>
+            <a:r>
+              <a:rPr sz="1100" b="1" i="0">
+                <a:solidFill>
+                  <a:srgbClr val="FFFFFF"/>
+                </a:solidFill>
+                <a:latin typeface="Calibri"/>
+              </a:rPr>
+              <a:t>Base de turnos
+(ContainerDb · PostgreSQL)</a:t>
+            </a:r>
+          </a:p>
+        </p:txBody>
+      </p:sp>
+      <p:sp>
+        <p:nvSpPr>
+          <p:cNvPr id="9" name="Rounded Rectangle 8"/>
+          <p:cNvSpPr/>
+          <p:nvPr/>
+        </p:nvSpPr>
+        <p:spPr>
+          <a:xfrm>
+            <a:off x="822960" y="3931920"/>
+            <a:ext cx="2377440" cy="914400"/>
+          </a:xfrm>
+          <a:prstGeom prst="roundRect">
+            <a:avLst>
+              <a:gd name="adj" fmla="val 12000"/>
+            </a:avLst>
+          </a:prstGeom>
+          <a:solidFill>
+            <a:srgbClr val="FFD000"/>
+          </a:solidFill>
+          <a:ln>
+            <a:noFill/>
+          </a:ln>
+        </p:spPr>
+        <p:style>
+          <a:lnRef idx="1">
+            <a:schemeClr val="accent1"/>
+          </a:lnRef>
+          <a:fillRef idx="3">
+            <a:schemeClr val="accent1"/>
+          </a:fillRef>
+          <a:effectRef idx="2">
+            <a:schemeClr val="accent1"/>
+          </a:effectRef>
+          <a:fontRef idx="minor">
+            <a:schemeClr val="lt1"/>
+          </a:fontRef>
+        </p:style>
+        <p:txBody>
+          <a:bodyPr rtlCol="0" anchor="ctr" wrap="square"/>
+          <a:lstStyle/>
+          <a:p>
+            <a:pPr algn="ctr"/>
+            <a:r>
+              <a:rPr sz="1300" b="1" i="0">
+                <a:solidFill>
+                  <a:srgbClr val="095292"/>
+                </a:solidFill>
+                <a:latin typeface="Calibri"/>
+              </a:rPr>
+              <a:t>Cliente
+(Person)</a:t>
+            </a:r>
+          </a:p>
+        </p:txBody>
+      </p:sp>
+      <p:sp>
+        <p:nvSpPr>
+          <p:cNvPr id="10" name="Rounded Rectangle 9"/>
+          <p:cNvSpPr/>
+          <p:nvPr/>
+        </p:nvSpPr>
+        <p:spPr>
+          <a:xfrm>
+            <a:off x="4754880" y="3931920"/>
+            <a:ext cx="2377440" cy="914400"/>
+          </a:xfrm>
+          <a:prstGeom prst="roundRect">
+            <a:avLst>
+              <a:gd name="adj" fmla="val 12000"/>
+            </a:avLst>
+          </a:prstGeom>
+          <a:solidFill>
+            <a:srgbClr val="095292"/>
+          </a:solidFill>
+          <a:ln>
+            <a:noFill/>
+          </a:ln>
+        </p:spPr>
+        <p:style>
+          <a:lnRef idx="1">
+            <a:schemeClr val="accent1"/>
+          </a:lnRef>
+          <a:fillRef idx="3">
+            <a:schemeClr val="accent1"/>
+          </a:fillRef>
+          <a:effectRef idx="2">
+            <a:schemeClr val="accent1"/>
+          </a:effectRef>
+          <a:fontRef idx="minor">
+            <a:schemeClr val="lt1"/>
+          </a:fontRef>
+        </p:style>
+        <p:txBody>
+          <a:bodyPr rtlCol="0" anchor="ctr" wrap="square"/>
+          <a:lstStyle/>
+          <a:p>
+            <a:pPr algn="ctr"/>
+            <a:r>
+              <a:rPr sz="1100" b="1" i="0">
+                <a:solidFill>
+                  <a:srgbClr val="FFFFFF"/>
+                </a:solidFill>
+                <a:latin typeface="Calibri"/>
+              </a:rPr>
+              <a:t>Worker de avisos
+(Container · cola)</a:t>
+            </a:r>
+          </a:p>
+        </p:txBody>
+      </p:sp>
+      <p:cxnSp>
+        <p:nvCxnSpPr>
+          <p:cNvPr id="11" name="Connector 10"/>
+          <p:cNvCxnSpPr/>
+          <p:nvPr/>
+        </p:nvCxnSpPr>
+        <p:spPr>
+          <a:xfrm flipV="1">
+            <a:off x="2011680" y="3108960"/>
+            <a:ext cx="0" cy="822960"/>
+          </a:xfrm>
+          <a:prstGeom prst="line">
+            <a:avLst/>
+          </a:prstGeom>
+          <a:ln w="22225">
+            <a:solidFill>
+              <a:srgbClr val="666666"/>
+            </a:solidFill>
+            <a:tailEnd type="triangle" w="med" len="med"/>
+          </a:ln>
+        </p:spPr>
+        <p:style>
+          <a:lnRef idx="2">
+            <a:schemeClr val="accent1"/>
+          </a:lnRef>
+          <a:fillRef idx="0">
+            <a:schemeClr val="accent1"/>
+          </a:fillRef>
+          <a:effectRef idx="1">
+            <a:schemeClr val="accent1"/>
+          </a:effectRef>
+          <a:fontRef idx="minor">
+            <a:schemeClr val="tx1"/>
+          </a:fontRef>
+        </p:style>
+      </p:cxnSp>
+      <p:sp>
+        <p:nvSpPr>
+          <p:cNvPr id="12" name="TextBox 11"/>
+          <p:cNvSpPr txBox="1"/>
+          <p:nvPr/>
+        </p:nvSpPr>
+        <p:spPr>
+          <a:xfrm>
+            <a:off x="2121408" y="3319272"/>
+            <a:ext cx="1645920" cy="320040"/>
+          </a:xfrm>
+          <a:prstGeom prst="rect">
+            <a:avLst/>
+          </a:prstGeom>
+          <a:noFill/>
+        </p:spPr>
+        <p:txBody>
+          <a:bodyPr wrap="square">
+            <a:spAutoFit/>
+          </a:bodyPr>
+          <a:lstStyle/>
+          <a:p>
+            <a:pPr algn="l"/>
+            <a:r>
+              <a:rPr sz="1000" b="0" i="1">
+                <a:solidFill>
+                  <a:srgbClr val="666666"/>
+                </a:solidFill>
+                <a:latin typeface="Calibri"/>
+              </a:rPr>
+              <a:t>usa · HTTPS</a:t>
+            </a:r>
+          </a:p>
+        </p:txBody>
+      </p:sp>
+      <p:cxnSp>
+        <p:nvCxnSpPr>
+          <p:cNvPr id="13" name="Connector 12"/>
+          <p:cNvCxnSpPr/>
+          <p:nvPr/>
+        </p:nvCxnSpPr>
+        <p:spPr>
+          <a:xfrm>
+            <a:off x="3200400" y="2560320"/>
+            <a:ext cx="1554480" cy="0"/>
+          </a:xfrm>
+          <a:prstGeom prst="line">
+            <a:avLst/>
+          </a:prstGeom>
+          <a:ln w="22225">
+            <a:solidFill>
+              <a:srgbClr val="666666"/>
+            </a:solidFill>
+            <a:tailEnd type="triangle" w="med" len="med"/>
+          </a:ln>
+        </p:spPr>
+        <p:style>
+          <a:lnRef idx="2">
+            <a:schemeClr val="accent1"/>
+          </a:lnRef>
+          <a:fillRef idx="0">
+            <a:schemeClr val="accent1"/>
+          </a:fillRef>
+          <a:effectRef idx="1">
+            <a:schemeClr val="accent1"/>
+          </a:effectRef>
+          <a:fontRef idx="minor">
+            <a:schemeClr val="tx1"/>
+          </a:fontRef>
+        </p:style>
+      </p:cxnSp>
+      <p:sp>
+        <p:nvSpPr>
+          <p:cNvPr id="14" name="TextBox 13"/>
+          <p:cNvSpPr txBox="1"/>
+          <p:nvPr/>
+        </p:nvSpPr>
+        <p:spPr>
+          <a:xfrm>
+            <a:off x="3154679" y="2359152"/>
+            <a:ext cx="1645920" cy="320040"/>
+          </a:xfrm>
+          <a:prstGeom prst="rect">
+            <a:avLst/>
+          </a:prstGeom>
+          <a:noFill/>
+        </p:spPr>
+        <p:txBody>
+          <a:bodyPr wrap="square">
+            <a:spAutoFit/>
+          </a:bodyPr>
+          <a:lstStyle/>
+          <a:p>
+            <a:pPr algn="ctr"/>
+            <a:r>
+              <a:rPr sz="1000" b="0" i="1">
+                <a:solidFill>
+                  <a:srgbClr val="666666"/>
+                </a:solidFill>
+                <a:latin typeface="Calibri"/>
+              </a:rPr>
+              <a:t>HTTPS/JSON</a:t>
+            </a:r>
+          </a:p>
+        </p:txBody>
+      </p:sp>
+      <p:cxnSp>
+        <p:nvCxnSpPr>
+          <p:cNvPr id="15" name="Connector 14"/>
+          <p:cNvCxnSpPr/>
+          <p:nvPr/>
+        </p:nvCxnSpPr>
+        <p:spPr>
+          <a:xfrm>
+            <a:off x="7132320" y="2560320"/>
+            <a:ext cx="1463040" cy="0"/>
+          </a:xfrm>
+          <a:prstGeom prst="line">
+            <a:avLst/>
+          </a:prstGeom>
+          <a:ln w="22225">
+            <a:solidFill>
+              <a:srgbClr val="666666"/>
+            </a:solidFill>
+            <a:tailEnd type="triangle" w="med" len="med"/>
+          </a:ln>
+        </p:spPr>
+        <p:style>
+          <a:lnRef idx="2">
+            <a:schemeClr val="accent1"/>
+          </a:lnRef>
+          <a:fillRef idx="0">
+            <a:schemeClr val="accent1"/>
+          </a:fillRef>
+          <a:effectRef idx="1">
+            <a:schemeClr val="accent1"/>
+          </a:effectRef>
+          <a:fontRef idx="minor">
+            <a:schemeClr val="tx1"/>
+          </a:fontRef>
+        </p:style>
+      </p:cxnSp>
+      <p:sp>
+        <p:nvSpPr>
+          <p:cNvPr id="16" name="TextBox 15"/>
+          <p:cNvSpPr txBox="1"/>
+          <p:nvPr/>
+        </p:nvSpPr>
+        <p:spPr>
+          <a:xfrm>
+            <a:off x="7040880" y="2359152"/>
+            <a:ext cx="1645920" cy="320040"/>
+          </a:xfrm>
+          <a:prstGeom prst="rect">
+            <a:avLst/>
+          </a:prstGeom>
+          <a:noFill/>
+        </p:spPr>
+        <p:txBody>
+          <a:bodyPr wrap="square">
+            <a:spAutoFit/>
+          </a:bodyPr>
+          <a:lstStyle/>
+          <a:p>
+            <a:pPr algn="ctr"/>
+            <a:r>
+              <a:rPr sz="1000" b="0" i="1">
+                <a:solidFill>
+                  <a:srgbClr val="666666"/>
+                </a:solidFill>
+                <a:latin typeface="Calibri"/>
+              </a:rPr>
+              <a:t>TCP/SQL</a:t>
+            </a:r>
+          </a:p>
+        </p:txBody>
+      </p:sp>
+      <p:cxnSp>
+        <p:nvCxnSpPr>
+          <p:cNvPr id="17" name="Connector 16"/>
+          <p:cNvCxnSpPr/>
+          <p:nvPr/>
+        </p:nvCxnSpPr>
+        <p:spPr>
+          <a:xfrm>
+            <a:off x="5943600" y="3108960"/>
+            <a:ext cx="0" cy="822960"/>
+          </a:xfrm>
+          <a:prstGeom prst="line">
+            <a:avLst/>
+          </a:prstGeom>
+          <a:ln w="22225">
+            <a:solidFill>
+              <a:srgbClr val="666666"/>
+            </a:solidFill>
+            <a:tailEnd type="triangle" w="med" len="med"/>
+          </a:ln>
+        </p:spPr>
+        <p:style>
+          <a:lnRef idx="2">
+            <a:schemeClr val="accent1"/>
+          </a:lnRef>
+          <a:fillRef idx="0">
+            <a:schemeClr val="accent1"/>
+          </a:fillRef>
+          <a:effectRef idx="1">
+            <a:schemeClr val="accent1"/>
+          </a:effectRef>
+          <a:fontRef idx="minor">
+            <a:schemeClr val="tx1"/>
+          </a:fontRef>
+        </p:style>
+      </p:cxnSp>
+      <p:sp>
+        <p:nvSpPr>
+          <p:cNvPr id="18" name="TextBox 17"/>
+          <p:cNvSpPr txBox="1"/>
+          <p:nvPr/>
+        </p:nvSpPr>
+        <p:spPr>
+          <a:xfrm>
+            <a:off x="6053328" y="3319272"/>
+            <a:ext cx="1645920" cy="320040"/>
+          </a:xfrm>
+          <a:prstGeom prst="rect">
+            <a:avLst/>
+          </a:prstGeom>
+          <a:noFill/>
+        </p:spPr>
+        <p:txBody>
+          <a:bodyPr wrap="square">
+            <a:spAutoFit/>
+          </a:bodyPr>
+          <a:lstStyle/>
+          <a:p>
+            <a:pPr algn="l"/>
+            <a:r>
+              <a:rPr sz="1000" b="0" i="1">
+                <a:solidFill>
+                  <a:srgbClr val="666666"/>
+                </a:solidFill>
+                <a:latin typeface="Calibri"/>
+              </a:rPr>
+              <a:t>evento/cola (AMQP)</a:t>
+            </a:r>
+          </a:p>
+        </p:txBody>
+      </p:sp>
+      <p:sp>
+        <p:nvSpPr>
+          <p:cNvPr id="19" name="TextBox 18"/>
+          <p:cNvSpPr txBox="1"/>
+          <p:nvPr/>
+        </p:nvSpPr>
+        <p:spPr>
+          <a:xfrm>
+            <a:off x="457200" y="6263640"/>
+            <a:ext cx="11277295" cy="411480"/>
+          </a:xfrm>
+          <a:prstGeom prst="rect">
+            <a:avLst/>
+          </a:prstGeom>
+          <a:noFill/>
+        </p:spPr>
+        <p:txBody>
+          <a:bodyPr wrap="square">
+            <a:spAutoFit/>
+          </a:bodyPr>
+          <a:lstStyle/>
+          <a:p>
+            <a:r>
+              <a:rPr sz="1100" b="0" i="1">
+                <a:solidFill>
+                  <a:srgbClr val="666666"/>
+                </a:solidFill>
+                <a:latin typeface="Calibri"/>
+              </a:rPr>
+              <a:t>Lo que guarda datos va como ContainerDb, no como un Container más. La cuarta caja (el worker) existe porque el correo tarda: sin esa razón, no va. Y estos nombres deben reaparecer igual en el Deployment (Clase 7).</a:t>
+            </a:r>
+          </a:p>
+        </p:txBody>
+      </p:sp>
+      <p:sp>
+        <p:nvSpPr>
+          <p:cNvPr id="20" name="TextBox 19"/>
           <p:cNvSpPr txBox="1"/>
           <p:nvPr/>
         </p:nvSpPr>
@@ -10496,7 +10707,7 @@
         <p:spPr>
           <a:xfrm>
             <a:off x="0" y="0"/>
-            <a:ext cx="12191695" cy="1170432"/>
+            <a:ext cx="12191695" cy="960120"/>
           </a:xfrm>
           <a:prstGeom prst="rect">
             <a:avLst/>
@@ -10538,7 +10749,7 @@
         </p:nvSpPr>
         <p:spPr>
           <a:xfrm>
-            <a:off x="0" y="1170432"/>
+            <a:off x="0" y="960120"/>
             <a:ext cx="12191695" cy="41148"/>
           </a:xfrm>
           <a:prstGeom prst="rect">
@@ -10582,7 +10793,7 @@
         <p:spPr>
           <a:xfrm>
             <a:off x="457200" y="164592"/>
-            <a:ext cx="11277295" cy="384048"/>
+            <a:ext cx="11277295" cy="502920"/>
           </a:xfrm>
           <a:prstGeom prst="rect">
             <a:avLst/>
@@ -10602,60 +10813,277 @@
                 </a:solidFill>
                 <a:latin typeface="Calibri"/>
               </a:rPr>
-              <a:t>Ejemplo de diagrama C4 — nivel Containers</a:t>
-            </a:r>
-          </a:p>
-        </p:txBody>
-      </p:sp>
-      <p:sp>
-        <p:nvSpPr>
-          <p:cNvPr id="5" name="TextBox 4"/>
-          <p:cNvSpPr txBox="1"/>
-          <p:nvPr/>
-        </p:nvSpPr>
-        <p:spPr>
-          <a:xfrm>
-            <a:off x="457200" y="566928"/>
-            <a:ext cx="11277295" cy="411480"/>
-          </a:xfrm>
-          <a:prstGeom prst="rect">
-            <a:avLst/>
-          </a:prstGeom>
-          <a:noFill/>
-        </p:spPr>
-        <p:txBody>
-          <a:bodyPr wrap="square">
-            <a:spAutoFit/>
-          </a:bodyPr>
-          <a:lstStyle/>
-          <a:p>
-            <a:r>
-              <a:rPr sz="1400" b="0" i="0">
-                <a:solidFill>
-                  <a:srgbClr val="B8D8EE"/>
-                </a:solidFill>
-                <a:latin typeface="Calibri"/>
-              </a:rPr>
-              <a:t>2–5 cajas justificadas, cada flecha con protocolo Y formato</a:t>
-            </a:r>
-          </a:p>
-        </p:txBody>
-      </p:sp>
-      <p:sp>
-        <p:nvSpPr>
-          <p:cNvPr id="6" name="Rounded Rectangle 5"/>
+              <a:t>Microservicios de verdad vs microservicios teatro</a:t>
+            </a:r>
+          </a:p>
+        </p:txBody>
+      </p:sp>
+      <p:sp>
+        <p:nvSpPr>
+          <p:cNvPr id="5" name="Rounded Rectangle 4"/>
           <p:cNvSpPr/>
           <p:nvPr/>
         </p:nvSpPr>
         <p:spPr>
           <a:xfrm>
-            <a:off x="822960" y="2011680"/>
-            <a:ext cx="2377440" cy="1097280"/>
+            <a:off x="457200" y="1261872"/>
+            <a:ext cx="5478627" cy="5093208"/>
           </a:xfrm>
           <a:prstGeom prst="roundRect">
             <a:avLst>
               <a:gd name="adj" fmla="val 12000"/>
             </a:avLst>
+          </a:prstGeom>
+          <a:solidFill>
+            <a:srgbClr val="FBE4E4"/>
+          </a:solidFill>
+          <a:ln>
+            <a:noFill/>
+          </a:ln>
+        </p:spPr>
+        <p:style>
+          <a:lnRef idx="1">
+            <a:schemeClr val="accent1"/>
+          </a:lnRef>
+          <a:fillRef idx="3">
+            <a:schemeClr val="accent1"/>
+          </a:fillRef>
+          <a:effectRef idx="2">
+            <a:schemeClr val="accent1"/>
+          </a:effectRef>
+          <a:fontRef idx="minor">
+            <a:schemeClr val="lt1"/>
+          </a:fontRef>
+        </p:style>
+        <p:txBody>
+          <a:bodyPr rtlCol="0" anchor="ctr"/>
+          <a:lstStyle/>
+          <a:p>
+            <a:pPr algn="ctr"/>
+          </a:p>
+        </p:txBody>
+      </p:sp>
+      <p:sp>
+        <p:nvSpPr>
+          <p:cNvPr id="6" name="Rectangle 5"/>
+          <p:cNvSpPr/>
+          <p:nvPr/>
+        </p:nvSpPr>
+        <p:spPr>
+          <a:xfrm>
+            <a:off x="457200" y="1261872"/>
+            <a:ext cx="5478627" cy="502920"/>
+          </a:xfrm>
+          <a:prstGeom prst="rect">
+            <a:avLst/>
+          </a:prstGeom>
+          <a:solidFill>
+            <a:srgbClr val="A02030"/>
+          </a:solidFill>
+          <a:ln>
+            <a:noFill/>
+          </a:ln>
+        </p:spPr>
+        <p:style>
+          <a:lnRef idx="1">
+            <a:schemeClr val="accent1"/>
+          </a:lnRef>
+          <a:fillRef idx="3">
+            <a:schemeClr val="accent1"/>
+          </a:fillRef>
+          <a:effectRef idx="2">
+            <a:schemeClr val="accent1"/>
+          </a:effectRef>
+          <a:fontRef idx="minor">
+            <a:schemeClr val="lt1"/>
+          </a:fontRef>
+        </p:style>
+        <p:txBody>
+          <a:bodyPr rtlCol="0" anchor="ctr"/>
+          <a:lstStyle/>
+          <a:p>
+            <a:pPr algn="ctr"/>
+          </a:p>
+        </p:txBody>
+      </p:sp>
+      <p:sp>
+        <p:nvSpPr>
+          <p:cNvPr id="7" name="TextBox 6"/>
+          <p:cNvSpPr txBox="1"/>
+          <p:nvPr/>
+        </p:nvSpPr>
+        <p:spPr>
+          <a:xfrm>
+            <a:off x="594360" y="1353312"/>
+            <a:ext cx="5204307" cy="365760"/>
+          </a:xfrm>
+          <a:prstGeom prst="rect">
+            <a:avLst/>
+          </a:prstGeom>
+          <a:noFill/>
+        </p:spPr>
+        <p:txBody>
+          <a:bodyPr wrap="square" anchor="ctr"/>
+          <a:lstStyle/>
+          <a:p>
+            <a:pPr algn="ctr"/>
+            <a:r>
+              <a:rPr sz="1600" b="1" i="0">
+                <a:solidFill>
+                  <a:srgbClr val="FFFFFF"/>
+                </a:solidFill>
+                <a:latin typeface="Calibri"/>
+              </a:rPr>
+              <a:t>Teatro (lo que NO queremos)</a:t>
+            </a:r>
+          </a:p>
+        </p:txBody>
+      </p:sp>
+      <p:sp>
+        <p:nvSpPr>
+          <p:cNvPr id="8" name="TextBox 7"/>
+          <p:cNvSpPr txBox="1"/>
+          <p:nvPr/>
+        </p:nvSpPr>
+        <p:spPr>
+          <a:xfrm>
+            <a:off x="621792" y="1901952"/>
+            <a:ext cx="5158587" cy="4498848"/>
+          </a:xfrm>
+          <a:prstGeom prst="rect">
+            <a:avLst/>
+          </a:prstGeom>
+          <a:noFill/>
+        </p:spPr>
+        <p:txBody>
+          <a:bodyPr wrap="square">
+            <a:spAutoFit/>
+          </a:bodyPr>
+          <a:lstStyle/>
+          <a:p>
+            <a:pPr>
+              <a:spcAft>
+                <a:spcPts val="800"/>
+              </a:spcAft>
+            </a:pPr>
+            <a:r>
+              <a:rPr sz="1500" b="0" i="0">
+                <a:solidFill>
+                  <a:srgbClr val="333333"/>
+                </a:solidFill>
+                <a:latin typeface="Calibri"/>
+              </a:rPr>
+              <a:t>–   12 servicios para un equipo de 3</a:t>
+            </a:r>
+          </a:p>
+          <a:p>
+            <a:pPr>
+              <a:spcAft>
+                <a:spcPts val="800"/>
+              </a:spcAft>
+            </a:pPr>
+            <a:r>
+              <a:rPr sz="1500" b="0" i="0">
+                <a:solidFill>
+                  <a:srgbClr val="333333"/>
+                </a:solidFill>
+                <a:latin typeface="Calibri"/>
+              </a:rPr>
+              <a:t>–   Se separan por capricho tecnico, no por negocio</a:t>
+            </a:r>
+          </a:p>
+          <a:p>
+            <a:pPr>
+              <a:spcAft>
+                <a:spcPts val="800"/>
+              </a:spcAft>
+            </a:pPr>
+            <a:r>
+              <a:rPr sz="1500" b="0" i="0">
+                <a:solidFill>
+                  <a:srgbClr val="333333"/>
+                </a:solidFill>
+                <a:latin typeface="Calibri"/>
+              </a:rPr>
+              <a:t>–   Flechas sin protocolo ni verbo</a:t>
+            </a:r>
+          </a:p>
+          <a:p>
+            <a:pPr>
+              <a:spcAft>
+                <a:spcPts val="800"/>
+              </a:spcAft>
+            </a:pPr>
+            <a:r>
+              <a:rPr sz="1500" b="0" i="0">
+                <a:solidFill>
+                  <a:srgbClr val="333333"/>
+                </a:solidFill>
+                <a:latin typeface="Calibri"/>
+              </a:rPr>
+              <a:t>–   Nadie sabe explicar por que ese corte</a:t>
+            </a:r>
+          </a:p>
+        </p:txBody>
+      </p:sp>
+      <p:sp>
+        <p:nvSpPr>
+          <p:cNvPr id="9" name="Rounded Rectangle 8"/>
+          <p:cNvSpPr/>
+          <p:nvPr/>
+        </p:nvSpPr>
+        <p:spPr>
+          <a:xfrm>
+            <a:off x="6255867" y="1261872"/>
+            <a:ext cx="5478627" cy="5093208"/>
+          </a:xfrm>
+          <a:prstGeom prst="roundRect">
+            <a:avLst>
+              <a:gd name="adj" fmla="val 12000"/>
+            </a:avLst>
+          </a:prstGeom>
+          <a:solidFill>
+            <a:srgbClr val="E8F4FA"/>
+          </a:solidFill>
+          <a:ln>
+            <a:noFill/>
+          </a:ln>
+        </p:spPr>
+        <p:style>
+          <a:lnRef idx="1">
+            <a:schemeClr val="accent1"/>
+          </a:lnRef>
+          <a:fillRef idx="3">
+            <a:schemeClr val="accent1"/>
+          </a:fillRef>
+          <a:effectRef idx="2">
+            <a:schemeClr val="accent1"/>
+          </a:effectRef>
+          <a:fontRef idx="minor">
+            <a:schemeClr val="lt1"/>
+          </a:fontRef>
+        </p:style>
+        <p:txBody>
+          <a:bodyPr rtlCol="0" anchor="ctr"/>
+          <a:lstStyle/>
+          <a:p>
+            <a:pPr algn="ctr"/>
+          </a:p>
+        </p:txBody>
+      </p:sp>
+      <p:sp>
+        <p:nvSpPr>
+          <p:cNvPr id="10" name="Rectangle 9"/>
+          <p:cNvSpPr/>
+          <p:nvPr/>
+        </p:nvSpPr>
+        <p:spPr>
+          <a:xfrm>
+            <a:off x="6255867" y="1261872"/>
+            <a:ext cx="5478627" cy="502920"/>
+          </a:xfrm>
+          <a:prstGeom prst="rect">
+            <a:avLst/>
           </a:prstGeom>
           <a:solidFill>
             <a:srgbClr val="095292"/>
@@ -10679,279 +11107,46 @@
           </a:fontRef>
         </p:style>
         <p:txBody>
-          <a:bodyPr rtlCol="0" anchor="ctr" wrap="square"/>
+          <a:bodyPr rtlCol="0" anchor="ctr"/>
           <a:lstStyle/>
           <a:p>
             <a:pPr algn="ctr"/>
-            <a:r>
-              <a:rPr sz="1100" b="1" i="0">
+          </a:p>
+        </p:txBody>
+      </p:sp>
+      <p:sp>
+        <p:nvSpPr>
+          <p:cNvPr id="11" name="TextBox 10"/>
+          <p:cNvSpPr txBox="1"/>
+          <p:nvPr/>
+        </p:nvSpPr>
+        <p:spPr>
+          <a:xfrm>
+            <a:off x="6393027" y="1353312"/>
+            <a:ext cx="5204307" cy="365760"/>
+          </a:xfrm>
+          <a:prstGeom prst="rect">
+            <a:avLst/>
+          </a:prstGeom>
+          <a:noFill/>
+        </p:spPr>
+        <p:txBody>
+          <a:bodyPr wrap="square" anchor="ctr"/>
+          <a:lstStyle/>
+          <a:p>
+            <a:pPr algn="ctr"/>
+            <a:r>
+              <a:rPr sz="1600" b="1" i="0">
                 <a:solidFill>
                   <a:srgbClr val="FFFFFF"/>
                 </a:solidFill>
                 <a:latin typeface="Calibri"/>
               </a:rPr>
-              <a:t>App web
-(Container · React)</a:t>
-            </a:r>
-          </a:p>
-        </p:txBody>
-      </p:sp>
-      <p:sp>
-        <p:nvSpPr>
-          <p:cNvPr id="7" name="Rounded Rectangle 6"/>
-          <p:cNvSpPr/>
-          <p:nvPr/>
-        </p:nvSpPr>
-        <p:spPr>
-          <a:xfrm>
-            <a:off x="4754880" y="2011680"/>
-            <a:ext cx="2377440" cy="1097280"/>
-          </a:xfrm>
-          <a:prstGeom prst="roundRect">
-            <a:avLst>
-              <a:gd name="adj" fmla="val 12000"/>
-            </a:avLst>
-          </a:prstGeom>
-          <a:solidFill>
-            <a:srgbClr val="095292"/>
-          </a:solidFill>
-          <a:ln>
-            <a:noFill/>
-          </a:ln>
-        </p:spPr>
-        <p:style>
-          <a:lnRef idx="1">
-            <a:schemeClr val="accent1"/>
-          </a:lnRef>
-          <a:fillRef idx="3">
-            <a:schemeClr val="accent1"/>
-          </a:fillRef>
-          <a:effectRef idx="2">
-            <a:schemeClr val="accent1"/>
-          </a:effectRef>
-          <a:fontRef idx="minor">
-            <a:schemeClr val="lt1"/>
-          </a:fontRef>
-        </p:style>
-        <p:txBody>
-          <a:bodyPr rtlCol="0" anchor="ctr" wrap="square"/>
-          <a:lstStyle/>
-          <a:p>
-            <a:pPr algn="ctr"/>
-            <a:r>
-              <a:rPr sz="1100" b="1" i="0">
-                <a:solidFill>
-                  <a:srgbClr val="FFFFFF"/>
-                </a:solidFill>
-                <a:latin typeface="Calibri"/>
-              </a:rPr>
-              <a:t>API de turnos
-(Container · Node.js)</a:t>
-            </a:r>
-          </a:p>
-        </p:txBody>
-      </p:sp>
-      <p:sp>
-        <p:nvSpPr>
-          <p:cNvPr id="8" name="Rounded Rectangle 7"/>
-          <p:cNvSpPr/>
-          <p:nvPr/>
-        </p:nvSpPr>
-        <p:spPr>
-          <a:xfrm>
-            <a:off x="8595360" y="2011680"/>
-            <a:ext cx="2377440" cy="1097280"/>
-          </a:xfrm>
-          <a:prstGeom prst="roundRect">
-            <a:avLst>
-              <a:gd name="adj" fmla="val 12000"/>
-            </a:avLst>
-          </a:prstGeom>
-          <a:solidFill>
-            <a:srgbClr val="269CCB"/>
-          </a:solidFill>
-          <a:ln>
-            <a:noFill/>
-          </a:ln>
-        </p:spPr>
-        <p:style>
-          <a:lnRef idx="1">
-            <a:schemeClr val="accent1"/>
-          </a:lnRef>
-          <a:fillRef idx="3">
-            <a:schemeClr val="accent1"/>
-          </a:fillRef>
-          <a:effectRef idx="2">
-            <a:schemeClr val="accent1"/>
-          </a:effectRef>
-          <a:fontRef idx="minor">
-            <a:schemeClr val="lt1"/>
-          </a:fontRef>
-        </p:style>
-        <p:txBody>
-          <a:bodyPr rtlCol="0" anchor="ctr" wrap="square"/>
-          <a:lstStyle/>
-          <a:p>
-            <a:pPr algn="ctr"/>
-            <a:r>
-              <a:rPr sz="1100" b="1" i="0">
-                <a:solidFill>
-                  <a:srgbClr val="FFFFFF"/>
-                </a:solidFill>
-                <a:latin typeface="Calibri"/>
-              </a:rPr>
-              <a:t>Base de turnos
-(ContainerDb · PostgreSQL)</a:t>
-            </a:r>
-          </a:p>
-        </p:txBody>
-      </p:sp>
-      <p:sp>
-        <p:nvSpPr>
-          <p:cNvPr id="9" name="Rounded Rectangle 8"/>
-          <p:cNvSpPr/>
-          <p:nvPr/>
-        </p:nvSpPr>
-        <p:spPr>
-          <a:xfrm>
-            <a:off x="822960" y="3931920"/>
-            <a:ext cx="2377440" cy="914400"/>
-          </a:xfrm>
-          <a:prstGeom prst="roundRect">
-            <a:avLst>
-              <a:gd name="adj" fmla="val 12000"/>
-            </a:avLst>
-          </a:prstGeom>
-          <a:solidFill>
-            <a:srgbClr val="FFD000"/>
-          </a:solidFill>
-          <a:ln>
-            <a:noFill/>
-          </a:ln>
-        </p:spPr>
-        <p:style>
-          <a:lnRef idx="1">
-            <a:schemeClr val="accent1"/>
-          </a:lnRef>
-          <a:fillRef idx="3">
-            <a:schemeClr val="accent1"/>
-          </a:fillRef>
-          <a:effectRef idx="2">
-            <a:schemeClr val="accent1"/>
-          </a:effectRef>
-          <a:fontRef idx="minor">
-            <a:schemeClr val="lt1"/>
-          </a:fontRef>
-        </p:style>
-        <p:txBody>
-          <a:bodyPr rtlCol="0" anchor="ctr" wrap="square"/>
-          <a:lstStyle/>
-          <a:p>
-            <a:pPr algn="ctr"/>
-            <a:r>
-              <a:rPr sz="1300" b="1" i="0">
-                <a:solidFill>
-                  <a:srgbClr val="095292"/>
-                </a:solidFill>
-                <a:latin typeface="Calibri"/>
-              </a:rPr>
-              <a:t>Cliente
-(Person)</a:t>
-            </a:r>
-          </a:p>
-        </p:txBody>
-      </p:sp>
-      <p:sp>
-        <p:nvSpPr>
-          <p:cNvPr id="10" name="Rounded Rectangle 9"/>
-          <p:cNvSpPr/>
-          <p:nvPr/>
-        </p:nvSpPr>
-        <p:spPr>
-          <a:xfrm>
-            <a:off x="4754880" y="3931920"/>
-            <a:ext cx="2377440" cy="914400"/>
-          </a:xfrm>
-          <a:prstGeom prst="roundRect">
-            <a:avLst>
-              <a:gd name="adj" fmla="val 12000"/>
-            </a:avLst>
-          </a:prstGeom>
-          <a:solidFill>
-            <a:srgbClr val="095292"/>
-          </a:solidFill>
-          <a:ln>
-            <a:noFill/>
-          </a:ln>
-        </p:spPr>
-        <p:style>
-          <a:lnRef idx="1">
-            <a:schemeClr val="accent1"/>
-          </a:lnRef>
-          <a:fillRef idx="3">
-            <a:schemeClr val="accent1"/>
-          </a:fillRef>
-          <a:effectRef idx="2">
-            <a:schemeClr val="accent1"/>
-          </a:effectRef>
-          <a:fontRef idx="minor">
-            <a:schemeClr val="lt1"/>
-          </a:fontRef>
-        </p:style>
-        <p:txBody>
-          <a:bodyPr rtlCol="0" anchor="ctr" wrap="square"/>
-          <a:lstStyle/>
-          <a:p>
-            <a:pPr algn="ctr"/>
-            <a:r>
-              <a:rPr sz="1100" b="1" i="0">
-                <a:solidFill>
-                  <a:srgbClr val="FFFFFF"/>
-                </a:solidFill>
-                <a:latin typeface="Calibri"/>
-              </a:rPr>
-              <a:t>Worker de avisos
-(Container · cola)</a:t>
-            </a:r>
-          </a:p>
-        </p:txBody>
-      </p:sp>
-      <p:cxnSp>
-        <p:nvCxnSpPr>
-          <p:cNvPr id="11" name="Connector 10"/>
-          <p:cNvCxnSpPr/>
-          <p:nvPr/>
-        </p:nvCxnSpPr>
-        <p:spPr>
-          <a:xfrm flipV="1">
-            <a:off x="2011680" y="3108960"/>
-            <a:ext cx="0" cy="822960"/>
-          </a:xfrm>
-          <a:prstGeom prst="line">
-            <a:avLst/>
-          </a:prstGeom>
-          <a:ln w="22225">
-            <a:solidFill>
-              <a:srgbClr val="666666"/>
-            </a:solidFill>
-            <a:tailEnd type="triangle" w="med" len="med"/>
-          </a:ln>
-        </p:spPr>
-        <p:style>
-          <a:lnRef idx="2">
-            <a:schemeClr val="accent1"/>
-          </a:lnRef>
-          <a:fillRef idx="0">
-            <a:schemeClr val="accent1"/>
-          </a:fillRef>
-          <a:effectRef idx="1">
-            <a:schemeClr val="accent1"/>
-          </a:effectRef>
-          <a:fontRef idx="minor">
-            <a:schemeClr val="tx1"/>
-          </a:fontRef>
-        </p:style>
-      </p:cxnSp>
+              <a:t>Frontera justificada</a:t>
+            </a:r>
+          </a:p>
+        </p:txBody>
+      </p:sp>
       <p:sp>
         <p:nvSpPr>
           <p:cNvPr id="12" name="TextBox 11"/>
@@ -10960,8 +11155,8 @@
         </p:nvSpPr>
         <p:spPr>
           <a:xfrm>
-            <a:off x="2121408" y="3319272"/>
-            <a:ext cx="1645920" cy="320040"/>
+            <a:off x="6420459" y="1901952"/>
+            <a:ext cx="5158587" cy="4498848"/>
           </a:xfrm>
           <a:prstGeom prst="rect">
             <a:avLst/>
@@ -10974,269 +11169,74 @@
           </a:bodyPr>
           <a:lstStyle/>
           <a:p>
-            <a:pPr algn="l"/>
-            <a:r>
-              <a:rPr sz="1000" b="0" i="1">
-                <a:solidFill>
-                  <a:srgbClr val="666666"/>
-                </a:solidFill>
-                <a:latin typeface="Calibri"/>
-              </a:rPr>
-              <a:t>usa · HTTPS</a:t>
-            </a:r>
-          </a:p>
-        </p:txBody>
-      </p:sp>
-      <p:cxnSp>
-        <p:nvCxnSpPr>
-          <p:cNvPr id="13" name="Connector 12"/>
-          <p:cNvCxnSpPr/>
-          <p:nvPr/>
-        </p:nvCxnSpPr>
-        <p:spPr>
-          <a:xfrm>
-            <a:off x="3200400" y="2560320"/>
-            <a:ext cx="1554480" cy="0"/>
-          </a:xfrm>
-          <a:prstGeom prst="line">
-            <a:avLst/>
-          </a:prstGeom>
-          <a:ln w="22225">
-            <a:solidFill>
-              <a:srgbClr val="666666"/>
-            </a:solidFill>
-            <a:tailEnd type="triangle" w="med" len="med"/>
-          </a:ln>
-        </p:spPr>
-        <p:style>
-          <a:lnRef idx="2">
-            <a:schemeClr val="accent1"/>
-          </a:lnRef>
-          <a:fillRef idx="0">
-            <a:schemeClr val="accent1"/>
-          </a:fillRef>
-          <a:effectRef idx="1">
-            <a:schemeClr val="accent1"/>
-          </a:effectRef>
-          <a:fontRef idx="minor">
-            <a:schemeClr val="tx1"/>
-          </a:fontRef>
-        </p:style>
-      </p:cxnSp>
-      <p:sp>
-        <p:nvSpPr>
-          <p:cNvPr id="14" name="TextBox 13"/>
-          <p:cNvSpPr txBox="1"/>
-          <p:nvPr/>
-        </p:nvSpPr>
-        <p:spPr>
-          <a:xfrm>
-            <a:off x="3154679" y="2359152"/>
-            <a:ext cx="1645920" cy="320040"/>
-          </a:xfrm>
-          <a:prstGeom prst="rect">
-            <a:avLst/>
-          </a:prstGeom>
-          <a:noFill/>
-        </p:spPr>
-        <p:txBody>
-          <a:bodyPr wrap="square">
-            <a:spAutoFit/>
-          </a:bodyPr>
-          <a:lstStyle/>
-          <a:p>
-            <a:pPr algn="ctr"/>
-            <a:r>
-              <a:rPr sz="1000" b="0" i="1">
-                <a:solidFill>
-                  <a:srgbClr val="666666"/>
-                </a:solidFill>
-                <a:latin typeface="Calibri"/>
-              </a:rPr>
-              <a:t>HTTPS/JSON</a:t>
-            </a:r>
-          </a:p>
-        </p:txBody>
-      </p:sp>
-      <p:cxnSp>
-        <p:nvCxnSpPr>
-          <p:cNvPr id="15" name="Connector 14"/>
-          <p:cNvCxnSpPr/>
-          <p:nvPr/>
-        </p:nvCxnSpPr>
-        <p:spPr>
-          <a:xfrm>
-            <a:off x="7132320" y="2560320"/>
-            <a:ext cx="1463040" cy="0"/>
-          </a:xfrm>
-          <a:prstGeom prst="line">
-            <a:avLst/>
-          </a:prstGeom>
-          <a:ln w="22225">
-            <a:solidFill>
-              <a:srgbClr val="666666"/>
-            </a:solidFill>
-            <a:tailEnd type="triangle" w="med" len="med"/>
-          </a:ln>
-        </p:spPr>
-        <p:style>
-          <a:lnRef idx="2">
-            <a:schemeClr val="accent1"/>
-          </a:lnRef>
-          <a:fillRef idx="0">
-            <a:schemeClr val="accent1"/>
-          </a:fillRef>
-          <a:effectRef idx="1">
-            <a:schemeClr val="accent1"/>
-          </a:effectRef>
-          <a:fontRef idx="minor">
-            <a:schemeClr val="tx1"/>
-          </a:fontRef>
-        </p:style>
-      </p:cxnSp>
-      <p:sp>
-        <p:nvSpPr>
-          <p:cNvPr id="16" name="TextBox 15"/>
-          <p:cNvSpPr txBox="1"/>
-          <p:nvPr/>
-        </p:nvSpPr>
-        <p:spPr>
-          <a:xfrm>
-            <a:off x="7040880" y="2359152"/>
-            <a:ext cx="1645920" cy="320040"/>
-          </a:xfrm>
-          <a:prstGeom prst="rect">
-            <a:avLst/>
-          </a:prstGeom>
-          <a:noFill/>
-        </p:spPr>
-        <p:txBody>
-          <a:bodyPr wrap="square">
-            <a:spAutoFit/>
-          </a:bodyPr>
-          <a:lstStyle/>
-          <a:p>
-            <a:pPr algn="ctr"/>
-            <a:r>
-              <a:rPr sz="1000" b="0" i="1">
-                <a:solidFill>
-                  <a:srgbClr val="666666"/>
-                </a:solidFill>
-                <a:latin typeface="Calibri"/>
-              </a:rPr>
-              <a:t>TCP/SQL</a:t>
-            </a:r>
-          </a:p>
-        </p:txBody>
-      </p:sp>
-      <p:cxnSp>
-        <p:nvCxnSpPr>
-          <p:cNvPr id="17" name="Connector 16"/>
-          <p:cNvCxnSpPr/>
-          <p:nvPr/>
-        </p:nvCxnSpPr>
-        <p:spPr>
-          <a:xfrm>
-            <a:off x="5943600" y="3108960"/>
-            <a:ext cx="0" cy="822960"/>
-          </a:xfrm>
-          <a:prstGeom prst="line">
-            <a:avLst/>
-          </a:prstGeom>
-          <a:ln w="22225">
-            <a:solidFill>
-              <a:srgbClr val="666666"/>
-            </a:solidFill>
-            <a:tailEnd type="triangle" w="med" len="med"/>
-          </a:ln>
-        </p:spPr>
-        <p:style>
-          <a:lnRef idx="2">
-            <a:schemeClr val="accent1"/>
-          </a:lnRef>
-          <a:fillRef idx="0">
-            <a:schemeClr val="accent1"/>
-          </a:fillRef>
-          <a:effectRef idx="1">
-            <a:schemeClr val="accent1"/>
-          </a:effectRef>
-          <a:fontRef idx="minor">
-            <a:schemeClr val="tx1"/>
-          </a:fontRef>
-        </p:style>
-      </p:cxnSp>
-      <p:sp>
-        <p:nvSpPr>
-          <p:cNvPr id="18" name="TextBox 17"/>
-          <p:cNvSpPr txBox="1"/>
-          <p:nvPr/>
-        </p:nvSpPr>
-        <p:spPr>
-          <a:xfrm>
-            <a:off x="6053328" y="3319272"/>
-            <a:ext cx="1645920" cy="320040"/>
-          </a:xfrm>
-          <a:prstGeom prst="rect">
-            <a:avLst/>
-          </a:prstGeom>
-          <a:noFill/>
-        </p:spPr>
-        <p:txBody>
-          <a:bodyPr wrap="square">
-            <a:spAutoFit/>
-          </a:bodyPr>
-          <a:lstStyle/>
-          <a:p>
-            <a:pPr algn="l"/>
-            <a:r>
-              <a:rPr sz="1000" b="0" i="1">
-                <a:solidFill>
-                  <a:srgbClr val="666666"/>
-                </a:solidFill>
-                <a:latin typeface="Calibri"/>
-              </a:rPr>
-              <a:t>evento/cola (AMQP)</a:t>
-            </a:r>
-          </a:p>
-        </p:txBody>
-      </p:sp>
-      <p:sp>
-        <p:nvSpPr>
-          <p:cNvPr id="19" name="TextBox 18"/>
-          <p:cNvSpPr txBox="1"/>
-          <p:nvPr/>
-        </p:nvSpPr>
-        <p:spPr>
-          <a:xfrm>
-            <a:off x="457200" y="6263640"/>
-            <a:ext cx="11277295" cy="411480"/>
-          </a:xfrm>
-          <a:prstGeom prst="rect">
-            <a:avLst/>
-          </a:prstGeom>
-          <a:noFill/>
-        </p:spPr>
-        <p:txBody>
-          <a:bodyPr wrap="square">
-            <a:spAutoFit/>
-          </a:bodyPr>
-          <a:lstStyle/>
-          <a:p>
-            <a:r>
-              <a:rPr sz="1100" b="0" i="1">
-                <a:solidFill>
-                  <a:srgbClr val="666666"/>
-                </a:solidFill>
-                <a:latin typeface="Calibri"/>
-              </a:rPr>
-              <a:t>Lo que guarda datos va como ContainerDb, no como un Container más. La cuarta caja (el worker) existe porque el correo tarda: sin esa razón, no va. Y estos nombres deben reaparecer igual en el Deployment (Clase 7).</a:t>
-            </a:r>
-          </a:p>
-        </p:txBody>
-      </p:sp>
-      <p:sp>
-        <p:nvSpPr>
-          <p:cNvPr id="20" name="TextBox 19"/>
+            <a:pPr>
+              <a:spcAft>
+                <a:spcPts val="800"/>
+              </a:spcAft>
+            </a:pPr>
+            <a:r>
+              <a:rPr sz="1500" b="0" i="0">
+                <a:solidFill>
+                  <a:srgbClr val="333333"/>
+                </a:solidFill>
+                <a:latin typeface="Calibri"/>
+              </a:rPr>
+              <a:t>–   2-5 contenedores logicos, cada uno con su razon</a:t>
+            </a:r>
+          </a:p>
+          <a:p>
+            <a:pPr>
+              <a:spcAft>
+                <a:spcPts val="800"/>
+              </a:spcAft>
+            </a:pPr>
+            <a:r>
+              <a:rPr sz="1500" b="0" i="0">
+                <a:solidFill>
+                  <a:srgbClr val="333333"/>
+                </a:solidFill>
+                <a:latin typeface="Calibri"/>
+              </a:rPr>
+              <a:t>–   Frontera = responsabilidad de negocio</a:t>
+            </a:r>
+          </a:p>
+          <a:p>
+            <a:pPr>
+              <a:spcAft>
+                <a:spcPts val="800"/>
+              </a:spcAft>
+            </a:pPr>
+            <a:r>
+              <a:rPr sz="1500" b="0" i="0">
+                <a:solidFill>
+                  <a:srgbClr val="333333"/>
+                </a:solidFill>
+                <a:latin typeface="Calibri"/>
+              </a:rPr>
+              <a:t>–   Cada flecha: protocolo + verbo (HTTP/JSON, 'reserva')</a:t>
+            </a:r>
+          </a:p>
+          <a:p>
+            <a:pPr>
+              <a:spcAft>
+                <a:spcPts val="800"/>
+              </a:spcAft>
+            </a:pPr>
+            <a:r>
+              <a:rPr sz="1500" b="0" i="0">
+                <a:solidFill>
+                  <a:srgbClr val="333333"/>
+                </a:solidFill>
+                <a:latin typeface="Calibri"/>
+              </a:rPr>
+              <a:t>–   Se explica en 60 s sin leer notas</a:t>
+            </a:r>
+          </a:p>
+        </p:txBody>
+      </p:sp>
+      <p:sp>
+        <p:nvSpPr>
+          <p:cNvPr id="13" name="TextBox 12"/>
           <p:cNvSpPr txBox="1"/>
           <p:nvPr/>
         </p:nvSpPr>
